--- a/.copilot-tracking/ppt/2026-09-26/ama-mentor-progress-review/slide-deck/ama-mentor-progress-review.pptx
+++ b/.copilot-tracking/ppt/2026-09-26/ama-mentor-progress-review/slide-deck/ama-mentor-progress-review.pptx
@@ -18,6 +18,7 @@
     <p:sldId id="266" r:id="rId18"/>
     <p:sldId id="267" r:id="rId19"/>
     <p:sldId id="268" r:id="rId20"/>
+    <p:sldId id="269" r:id="rId21"/>
   </p:sldIdLst>
   <p:sldSz cx="12191695" cy="6858000" type="screen4x3"/>
   <p:notesSz cx="6858000" cy="9144000"/>
@@ -514,62 +515,15 @@
           <a:lstStyle/>
           <a:p>
             <a:r>
-              <a:t>I have the story so far to show you, and four decisions I want your challenge</a:t>
-            </a:r>
-          </a:p>
-          <a:p>
-            <a:r>
-              <a:t>on. The short version: the brief asks for five agents; two weeks of evidence</a:t>
-            </a:r>
-          </a:p>
-          <a:p>
-            <a:r>
-              <a:t>says the value is real, but end-to-end agents are not the way to get it. One of</a:t>
-            </a:r>
-          </a:p>
-          <a:p>
-            <a:r>
-              <a:t>the four decisions is whether that reframing will read as refusing the brief.</a:t>
+              <a:t>I have the story so far to show you, and four decisions I want your challenge on. The short version: the brief asks for five agents. Two weeks of evidence says the value is credible, but end-to-end agents are not the way to get it. Where I have landed is an agent-led modernisation of the existing retrofit model, with agents only where they beat the same workflow without them. One of my four questions is whether the panel will read that as answering the brief.</a:t>
             </a:r>
           </a:p>
           <a:p/>
           <a:p>
             <a:r>
-              <a:t>The title is the story in one line. The brief asks me to build five agents. The</a:t>
-            </a:r>
-          </a:p>
-          <a:p>
-            <a:r>
-              <a:t>work so far turned that into a different question: what business value do the</a:t>
-            </a:r>
-          </a:p>
-          <a:p>
-            <a:r>
-              <a:t>people behind those agents actually expect, and what is the smallest thing that</a:t>
-            </a:r>
-          </a:p>
-          <a:p>
-            <a:r>
-              <a:t>delivers it safely?</a:t>
-            </a:r>
-          </a:p>
-          <a:p/>
-          <a:p>
-            <a:r>
-              <a:t>I will cover five strands in order: research, role agents, BRD iterations, a</a:t>
-            </a:r>
-          </a:p>
-          <a:p>
-            <a:r>
-              <a:t>design thinking challenge of the five agents, and a BRD quality review. Then</a:t>
-            </a:r>
-          </a:p>
-          <a:p>
-            <a:r>
-              <a:t>the challenges, how the repository holds the evidence, and my questions for you.</a:t>
-            </a:r>
-          </a:p>
-          <a:p/>
+              <a:t>I will cover five strands: research, role agents, BRD iterations, a design thinking challenge of the five agents and a BRD quality review, plus two later challenges on how to prove and explain the value. Then lessons, one traceability chain, and my questions for you.</a:t>
+            </a:r>
+          </a:p>
         </p:txBody>
       </p:sp>
       <p:sp>
@@ -637,93 +591,21 @@
           <a:lstStyle/>
           <a:p>
             <a:r>
-              <a:t>The writing was not the hard part. Keeping the evidence honest was.</a:t>
+              <a:t>Alongside all of this ran a formal BRD quality review, re-run after every change. The first run failed hard: the BRD used legacy BR and OBJ identifiers, so the reviewer measured zero percent coverage from functional requirements to acceptance criteria and business goals.</a:t>
             </a:r>
           </a:p>
           <a:p/>
           <a:p>
             <a:r>
-              <a:t>The company is fictional, so every number about it is modelled and labelled as an</a:t>
-            </a:r>
-          </a:p>
-          <a:p>
-            <a:r>
-              <a:t>estimate. The role agents are persuasive, which is a risk, and they read my own</a:t>
-            </a:r>
-          </a:p>
-          <a:p>
-            <a:r>
-              <a:t>addendum, so they share my framing. Where they disagree, such as on L4 autonomy</a:t>
-            </a:r>
-          </a:p>
-          <a:p>
-            <a:r>
-              <a:t>for quality flags, I keep the divergence open instead of smoothing it over.</a:t>
-            </a:r>
-          </a:p>
-          <a:p>
-            <a:r>
-              <a:t>Sources disagree too, for example on interest cover, and I found and corrected a</a:t>
-            </a:r>
-          </a:p>
-          <a:p>
-            <a:r>
-              <a:t>superseded fuel poverty measure. Regulation moves: Awaab's Law Phase 2 is planned</a:t>
-            </a:r>
-          </a:p>
-          <a:p>
-            <a:r>
-              <a:t>from 30 November 2026, and EPC C is final policy but not commenced law. I flag</a:t>
-            </a:r>
-          </a:p>
-          <a:p>
-            <a:r>
-              <a:t>those rather than silently choose.</a:t>
+              <a:t>I relabelled the document to a canonical taxonomy, with a legacy map so every old reference stays valid. Coverage went from zero to one hundred percent. That was an identifier-format problem, not missing requirements. Relabelling fixed traceability; it did not fix measurability.</a:t>
             </a:r>
           </a:p>
           <a:p/>
           <a:p>
             <a:r>
-              <a:t>There is also sheer volume: some legal texts are over a megabyte, so I search by</a:t>
-            </a:r>
-          </a:p>
-          <a:p>
-            <a:r>
-              <a:t>provision rather than reading end to end.</a:t>
-            </a:r>
-          </a:p>
-          <a:p/>
-          <a:p>
-            <a:r>
-              <a:t>If I started again tomorrow, I would change three things. I would start the log</a:t>
-            </a:r>
-          </a:p>
-          <a:p>
-            <a:r>
-              <a:t>on day one; earlier entries had to be rebuilt from Git. I would use canonical</a:t>
-            </a:r>
-          </a:p>
-          <a:p>
-            <a:r>
-              <a:t>requirement identifiers from the first draft; the first quality run scored zero</a:t>
-            </a:r>
-          </a:p>
-          <a:p>
-            <a:r>
-              <a:t>only because of legacy identifiers. And I would run the value challenge earlier,</a:t>
-            </a:r>
-          </a:p>
-          <a:p>
-            <a:r>
-              <a:t>and once without the addendum, to test whether the roles were primed by my own</a:t>
-            </a:r>
-          </a:p>
-          <a:p>
-            <a:r>
-              <a:t>framing.</a:t>
-            </a:r>
-          </a:p>
-          <a:p/>
+              <a:t>There have been six runs so far. The later edits raised four new findings on version 0.3.0, all fixed, and none since. It still fails, because seven business goals have no numeric target until company data or board decisions exist. I chose to leave the gate failing rather than invent numbers, and I would like your view on that.</a:t>
+            </a:r>
+          </a:p>
         </p:txBody>
       </p:sp>
       <p:sp>
@@ -791,78 +673,21 @@
           <a:lstStyle/>
           <a:p>
             <a:r>
-              <a:t>This is how I kept a two-week research effort from turning into a pile of</a:t>
-            </a:r>
-          </a:p>
-          <a:p>
-            <a:r>
-              <a:t>documents.</a:t>
+              <a:t>The writing was not the hard part. Keeping the evidence honest was.</a:t>
             </a:r>
           </a:p>
           <a:p/>
           <a:p>
             <a:r>
-              <a:t>On the left are the problem documents. The original case study is never edited,</a:t>
-            </a:r>
-          </a:p>
-          <a:p>
-            <a:r>
-              <a:t>so the request is always visible. The addendum evolves with every finding, and</a:t>
-            </a:r>
-          </a:p>
-          <a:p>
-            <a:r>
-              <a:t>the BRD carries the requirements with stable identifiers.</a:t>
+              <a:t>The company is fictional, so every number about it is modelled and labelled as an estimate. The role agents are persuasive, and they read my own addendum, so they share my framing. Where they disagree, such as L4 autonomy for quality flags, I keep the divergence open. Sources disagree too, for example on interest cover, and I corrected a superseded fuel poverty measure. Regulation moves: EPC C is final policy but not commenced law, and Awaab's Law Phase 2 is planned from 30 November 2026. I flag those rather than silently choose.</a:t>
             </a:r>
           </a:p>
           <a:p/>
           <a:p>
             <a:r>
-              <a:t>In the middle is the knowledge base, organised on Andrej Karpathy's LLM Wiki</a:t>
-            </a:r>
-          </a:p>
-          <a:p>
-            <a:r>
-              <a:t>pattern. An index routes any task to the right files. Regulatory sources are</a:t>
-            </a:r>
-          </a:p>
-          <a:p>
-            <a:r>
-              <a:t>dated and immutable. Syntheses carry citations. Memory holds my own context and is</a:t>
-            </a:r>
-          </a:p>
-          <a:p>
-            <a:r>
-              <a:t>explicitly not evidence. The log is append-only and records every ingest,</a:t>
-            </a:r>
-          </a:p>
-          <a:p>
-            <a:r>
-              <a:t>correction and contradiction. The schema, the repository instructions, tells every</a:t>
-            </a:r>
-          </a:p>
-          <a:p>
-            <a:r>
-              <a:t>agent how to use all of this.</a:t>
-            </a:r>
-          </a:p>
-          <a:p/>
-          <a:p>
-            <a:r>
-              <a:t>On the right is the working evidence: the tracking folders for each workflow, and</a:t>
-            </a:r>
-          </a:p>
-          <a:p>
-            <a:r>
-              <a:t>Git history. Together they mean the next session, human or agent, starts from</a:t>
-            </a:r>
-          </a:p>
-          <a:p>
-            <a:r>
-              <a:t>what we already know instead of rediscovering it.</a:t>
-            </a:r>
-          </a:p>
-          <a:p/>
+              <a:t>If I started again, I would change three things. Start the log on day one; earlier entries had to be rebuilt from Git. Use canonical requirement identifiers from the first draft. And run the value challenge earlier, and once without the addendum, to test whether the roles were primed by my framing.</a:t>
+            </a:r>
+          </a:p>
         </p:txBody>
       </p:sp>
       <p:sp>
@@ -930,88 +755,21 @@
           <a:lstStyle/>
           <a:p>
             <a:r>
-              <a:t>This slide is the reason for all the structure. Any decision in the addendum can</a:t>
-            </a:r>
-          </a:p>
-          <a:p>
-            <a:r>
-              <a:t>be walked back to its evidence, and this is a real chain you can open.</a:t>
+              <a:t>This slide is the reason for all the structure: immutable dated sources, cited syntheses, an index and an append-only log, on Karpathy's LLM Wiki pattern. The organisation is in the appendix. Any decision in the addendum can be walked back to its evidence, and this is a real chain.</a:t>
             </a:r>
           </a:p>
           <a:p/>
           <a:p>
             <a:r>
-              <a:t>The decision: the addendum recommends a capped readiness and pilot stage, not a</a:t>
-            </a:r>
-          </a:p>
-          <a:p>
-            <a:r>
-              <a:t>five-agent rollout, and stock prioritisation is not built as an end-to-end agent.</a:t>
-            </a:r>
-          </a:p>
-          <a:p>
-            <a:r>
-              <a:t>The evidence: in the agent request challenge, the roles said eligibility is a</a:t>
-            </a:r>
-          </a:p>
-          <a:p>
-            <a:r>
-              <a:t>rules question, not a judgement for an agent. The requirement: FR-026, legacy</a:t>
-            </a:r>
-          </a:p>
-          <a:p>
-            <a:r>
-              <a:t>BR-059, requires a deterministic pass, fail or unknown eligibility result, tested</a:t>
-            </a:r>
-          </a:p>
-          <a:p>
-            <a:r>
-              <a:t>by AC-039 and constrained by CON-005. The source: the Warm Homes Social Housing</a:t>
-            </a:r>
-          </a:p>
-          <a:p>
-            <a:r>
-              <a:t>Fund Wave 3 technical annex, page 3, footnote 1, which says that being in scope</a:t>
-            </a:r>
-          </a:p>
-          <a:p>
-            <a:r>
-              <a:t>does not by itself mean eligible, retrieved on 19 September. The change record:</a:t>
-            </a:r>
-          </a:p>
-          <a:p>
-            <a:r>
-              <a:t>the 26 September log entries and the commits that added and relabelled the rows.</a:t>
+              <a:t>The decision: a capped readiness and pilot stage, not a five-agent rollout, with no end-to-end stock prioritisation agent. The evidence: the roles said eligibility is a rules question. The requirement: FR-026 requires a deterministic pass, fail or unknown eligibility result, tested by AC-039 and constrained by CON-005. The source: the Wave 3 technical annex, page 3, footnote 1, retrieved on 19 September. The change record: the 26 September log entries and commits.</a:t>
             </a:r>
           </a:p>
           <a:p/>
           <a:p>
             <a:r>
-              <a:t>To justify a decision, follow the chain. To challenge it, change one piece of</a:t>
-            </a:r>
-          </a:p>
-          <a:p>
-            <a:r>
-              <a:t>evidence, for example a real throughput figure from the company, and the chain</a:t>
-            </a:r>
-          </a:p>
-          <a:p>
-            <a:r>
-              <a:t>shows which requirements, rules and decisions have to move.</a:t>
-            </a:r>
-          </a:p>
-          <a:p/>
-          <a:p>
-            <a:r>
-              <a:t>Every claim also carries an evidence class, so nobody mistakes a sector</a:t>
-            </a:r>
-          </a:p>
-          <a:p>
-            <a:r>
-              <a:t>hypothesis for a company fact.</a:t>
-            </a:r>
-          </a:p>
-          <a:p/>
+              <a:t>To challenge a decision, change one piece of evidence, such as a real throughput figure, and the chain shows what has to move.</a:t>
+            </a:r>
+          </a:p>
         </p:txBody>
       </p:sp>
       <p:sp>
@@ -1085,88 +843,175 @@
           <a:p/>
           <a:p>
             <a:r>
-              <a:t>First, will the panel read a control plane plus bounded AI as a stronger answer,</a:t>
-            </a:r>
-          </a:p>
-          <a:p>
-            <a:r>
-              <a:t>or as refusing the brief?</a:t>
+              <a:t>First, will the panel read agent-led modernisation, not five end-to-end agents, as answering the brief, or as stepping back from the five agents it asked for?</a:t>
             </a:r>
           </a:p>
           <a:p/>
           <a:p>
             <a:r>
-              <a:t>Second, how much business depth versus architecture depth should the capstone</a:t>
-            </a:r>
-          </a:p>
-          <a:p>
-            <a:r>
-              <a:t>show?</a:t>
+              <a:t>Second, how much business depth versus architecture depth should the capstone show?</a:t>
             </a:r>
           </a:p>
           <a:p/>
           <a:p>
             <a:r>
-              <a:t>Third, should the BRD keep failing where targets need company data, or should I</a:t>
-            </a:r>
-          </a:p>
-          <a:p>
-            <a:r>
-              <a:t>propose clearly labelled illustrative targets?</a:t>
+              <a:t>Third, should the BRD keep failing where targets need company data, or should I propose clearly labelled illustrative targets?</a:t>
             </a:r>
           </a:p>
           <a:p/>
           <a:p>
             <a:r>
-              <a:t>Fourth, of the open divergences between the role agents, which should I resolve</a:t>
-            </a:r>
-          </a:p>
-          <a:p>
-            <a:r>
-              <a:t>first?</a:t>
+              <a:t>Fourth, which open divergence between the role agents should I resolve first?</a:t>
             </a:r>
           </a:p>
           <a:p/>
           <a:p>
             <a:r>
-              <a:t>On the right is what comes next on the 85-day plan, which finishes the committed</a:t>
-            </a:r>
-          </a:p>
-          <a:p>
-            <a:r>
-              <a:t>work on 5 December with a week of margin: the high- and medium-level</a:t>
-            </a:r>
-          </a:p>
-          <a:p>
-            <a:r>
-              <a:t>architecture, a shadow comparison of typed decision models, an optional bounded</a:t>
-            </a:r>
-          </a:p>
-          <a:p>
-            <a:r>
-              <a:t>demo with a static fallback, and CEO, CIO and CFO versions of the pitch. There is</a:t>
-            </a:r>
-          </a:p>
-          <a:p>
-            <a:r>
-              <a:t>still no real resident or staff evidence; the role agents' questions are the</a:t>
-            </a:r>
-          </a:p>
-          <a:p>
-            <a:r>
-              <a:t>discovery agenda.</a:t>
+              <a:t>On the right is what comes next on the 85-day plan, which finishes on 5 December: the architecture, a shadow comparison of typed decision models, an optional demo with a static fallback, and CEO, CIO and CFO versions of the pitch. There is still no real resident or staff evidence.</a:t>
             </a:r>
           </a:p>
           <a:p/>
           <a:p>
             <a:r>
-              <a:t>And one question on the story itself: where did it lose you?</a:t>
+              <a:t>And on the story itself: where did it lose you? Which question would you take first?</a:t>
+            </a:r>
+          </a:p>
+        </p:txBody>
+      </p:sp>
+      <p:sp>
+        <p:nvSpPr>
+          <p:cNvPr id="4" name="Slide Number Placeholder 3"/>
+          <p:cNvSpPr>
+            <a:spLocks noGrp="1"/>
+          </p:cNvSpPr>
+          <p:nvPr>
+            <p:ph type="sldNum" idx="5" sz="quarter"/>
+          </p:nvPr>
+        </p:nvSpPr>
+        <p:spPr/>
+      </p:sp>
+    </p:spTree>
+  </p:cSld>
+  <p:clrMapOvr>
+    <a:masterClrMapping/>
+  </p:clrMapOvr>
+</p:notes>
+</file>
+
+<file path=ppt/notesSlides/notesSlide14.xml><?xml version="1.0" encoding="utf-8"?>
+<p:notes xmlns:a="http://schemas.openxmlformats.org/drawingml/2006/main" xmlns:p="http://schemas.openxmlformats.org/presentationml/2006/main" xmlns:r="http://schemas.openxmlformats.org/officeDocument/2006/relationships">
+  <p:cSld>
+    <p:spTree>
+      <p:nvGrpSpPr>
+        <p:cNvPr id="1" name=""/>
+        <p:cNvGrpSpPr/>
+        <p:nvPr/>
+      </p:nvGrpSpPr>
+      <p:grpSpPr>
+        <a:xfrm>
+          <a:off x="0" y="0"/>
+          <a:ext cx="0" cy="0"/>
+          <a:chOff x="0" y="0"/>
+          <a:chExt cx="0" cy="0"/>
+        </a:xfrm>
+      </p:grpSpPr>
+      <p:sp>
+        <p:nvSpPr>
+          <p:cNvPr id="2" name="Slide Image Placeholder 1"/>
+          <p:cNvSpPr>
+            <a:spLocks noGrp="1"/>
+          </p:cNvSpPr>
+          <p:nvPr>
+            <p:ph type="sldImg" idx="2"/>
+          </p:nvPr>
+        </p:nvSpPr>
+        <p:spPr/>
+      </p:sp>
+      <p:sp>
+        <p:nvSpPr>
+          <p:cNvPr id="3" name="Notes Placeholder 2"/>
+          <p:cNvSpPr>
+            <a:spLocks noGrp="1"/>
+          </p:cNvSpPr>
+          <p:nvPr>
+            <p:ph type="body" idx="3" sz="quarter"/>
+          </p:nvPr>
+        </p:nvSpPr>
+        <p:spPr/>
+        <p:txBody>
+          <a:bodyPr/>
+          <a:lstStyle/>
+          <a:p>
+            <a:r>
+              <a:t>This is how I kept a two-week research effort from turning into a pile of</a:t>
+            </a:r>
+          </a:p>
+          <a:p>
+            <a:r>
+              <a:t>documents.</a:t>
             </a:r>
           </a:p>
           <a:p/>
           <a:p>
             <a:r>
-              <a:t>Those are my questions. Which one would you take first?</a:t>
+              <a:t>On the left are the problem documents. The original case study is never edited,</a:t>
+            </a:r>
+          </a:p>
+          <a:p>
+            <a:r>
+              <a:t>so the request is always visible. The addendum evolves with every finding, and</a:t>
+            </a:r>
+          </a:p>
+          <a:p>
+            <a:r>
+              <a:t>the BRD carries the requirements with stable identifiers.</a:t>
+            </a:r>
+          </a:p>
+          <a:p/>
+          <a:p>
+            <a:r>
+              <a:t>In the middle is the knowledge base, organised on Andrej Karpathy's LLM Wiki</a:t>
+            </a:r>
+          </a:p>
+          <a:p>
+            <a:r>
+              <a:t>pattern. An index routes any task to the right files. Regulatory sources are</a:t>
+            </a:r>
+          </a:p>
+          <a:p>
+            <a:r>
+              <a:t>dated and immutable. Syntheses carry citations. Memory holds my own context and is</a:t>
+            </a:r>
+          </a:p>
+          <a:p>
+            <a:r>
+              <a:t>explicitly not evidence. The log is append-only and records every ingest,</a:t>
+            </a:r>
+          </a:p>
+          <a:p>
+            <a:r>
+              <a:t>correction and contradiction. The schema, the repository instructions, tells every</a:t>
+            </a:r>
+          </a:p>
+          <a:p>
+            <a:r>
+              <a:t>agent how to use all of this.</a:t>
+            </a:r>
+          </a:p>
+          <a:p/>
+          <a:p>
+            <a:r>
+              <a:t>On the right is the working evidence: the tracking folders for each workflow, and</a:t>
+            </a:r>
+          </a:p>
+          <a:p>
+            <a:r>
+              <a:t>Git history. Together they mean the next session, human or agent, starts from</a:t>
+            </a:r>
+          </a:p>
+          <a:p>
+            <a:r>
+              <a:t>what we already know instead of rediscovering it.</a:t>
             </a:r>
           </a:p>
           <a:p/>
@@ -1360,68 +1205,21 @@
           <a:lstStyle/>
           <a:p>
             <a:r>
-              <a:t>This is the backbone of the story. The five strands were not a straight line;</a:t>
-            </a:r>
-          </a:p>
-          <a:p>
-            <a:r>
-              <a:t>each loop produced questions that sent me back into research.</a:t>
+              <a:t>This is the backbone of the story. The five strands were not a straight line; each loop produced questions that sent me back into research.</a:t>
             </a:r>
           </a:p>
           <a:p/>
           <a:p>
             <a:r>
-              <a:t>Research built the context. The role agents let me ask questions the brief could</a:t>
-            </a:r>
-          </a:p>
-          <a:p>
-            <a:r>
-              <a:t>not answer. The BRD was rewritten ten times as research and role answers came</a:t>
-            </a:r>
-          </a:p>
-          <a:p>
-            <a:r>
-              <a:t>in. The design thinking session on 26 September was the turning point: instead</a:t>
-            </a:r>
-          </a:p>
-          <a:p>
-            <a:r>
-              <a:t>of refining five agents, I asked what value each request implied, and tested an</a:t>
-            </a:r>
-          </a:p>
-          <a:p>
-            <a:r>
-              <a:t>early control plane hypothesis agent by agent. The quality review then made the</a:t>
-            </a:r>
-          </a:p>
-          <a:p>
-            <a:r>
-              <a:t>requirements traceable and showed where targets are still missing.</a:t>
+              <a:t>Research built the context. The role agents let me ask what the brief could not answer. The BRD has been rewritten twelve times and is now version 0.5.0. The design thinking session on 26 September was the turning point: I read each agent request as the value behind it and tested my early doubts agent by agent. The quality review made the requirements traceable, and it was re-run after every later change.</a:t>
             </a:r>
           </a:p>
           <a:p/>
           <a:p>
             <a:r>
-              <a:t>The important habit: nothing stayed in chat history. Every finding was filed back</a:t>
-            </a:r>
-          </a:p>
-          <a:p>
-            <a:r>
-              <a:t>into the addendum, the BRD or the knowledge base, and logged.</a:t>
-            </a:r>
-          </a:p>
-          <a:p/>
-          <a:p>
-            <a:r>
-              <a:t>Loop 4, on 26 September, is the turning point. Everything before it built the</a:t>
-            </a:r>
-          </a:p>
-          <a:p>
-            <a:r>
-              <a:t>case; everything after it made the case testable.</a:t>
-            </a:r>
-          </a:p>
-          <a:p/>
+              <a:t>The habit that matters: nothing stayed in chat history. Every finding was filed in the addendum, the BRD or the knowledge base, and logged.</a:t>
+            </a:r>
+          </a:p>
         </p:txBody>
       </p:sp>
       <p:sp>
@@ -1489,109 +1287,39 @@
           <a:lstStyle/>
           <a:p>
             <a:r>
-              <a:t>Three things came out of the research phase.</a:t>
+              <a:t>Three things came out of research.</a:t>
             </a:r>
           </a:p>
           <a:p/>
           <a:p>
             <a:r>
-              <a:t>First, the company. The brief does not say what kind of organisation this is. I</a:t>
-            </a:r>
-          </a:p>
-          <a:p>
-            <a:r>
-              <a:t>built a housing association primer and a modelled customer profile from sector</a:t>
-            </a:r>
-          </a:p>
-          <a:p>
-            <a:r>
-              <a:t>medians. On 26 September I confirmed it is a not-for-profit, which changes how</a:t>
-            </a:r>
-          </a:p>
-          <a:p>
-            <a:r>
-              <a:t>every role thinks about surplus, stewardship and value for money. Its exact legal</a:t>
-            </a:r>
-          </a:p>
-          <a:p>
-            <a:r>
-              <a:t>form is still unknown, and I have not assumed charitable status.</a:t>
+              <a:t>First, the company. The brief does not say what kind of organisation this is. I built a housing association primer and a modelled customer profile from sector medians. On 26 September I confirmed it is a not-for-profit. Its legal form is still unknown, and I have not assumed charitable status.</a:t>
             </a:r>
           </a:p>
           <a:p/>
           <a:p>
             <a:r>
-              <a:t>Second, the numbers. Sector benchmarks suggest about 26 percent of stock is below</a:t>
-            </a:r>
-          </a:p>
-          <a:p>
-            <a:r>
-              <a:t>EPC C, roughly 15,600 homes. That implies about 3,900 accepted completions a year</a:t>
-            </a:r>
-          </a:p>
-          <a:p>
-            <a:r>
-              <a:t>and a gross programme of about GBP 312 million. These are planning estimates,</a:t>
-            </a:r>
-          </a:p>
-          <a:p>
-            <a:r>
-              <a:t>not company facts.</a:t>
+              <a:t>Second, the numbers. Sector benchmarks suggest about 26 percent of stock is below EPC C, roughly 15,600 homes, about 3,900 accepted completions a year and a gross programme of about GBP 312 million. These are planning estimates, not company facts.</a:t>
             </a:r>
           </a:p>
           <a:p/>
           <a:p>
             <a:r>
-              <a:t>Third, regulation. I downloaded 16 official documents so every regulatory claim</a:t>
-            </a:r>
-          </a:p>
-          <a:p>
-            <a:r>
-              <a:t>has a dated local source.</a:t>
+              <a:t>Third, regulation: 16 official documents, so every regulatory claim has a dated local source.</a:t>
             </a:r>
           </a:p>
           <a:p/>
           <a:p>
             <a:r>
-              <a:t>The research also corrected two claims in the brief. The GBP 40 million is an</a:t>
-            </a:r>
-          </a:p>
-          <a:p>
-            <a:r>
-              <a:t>opportunity, not an award, and would cover at most about 5,333 homes at the grant</a:t>
-            </a:r>
-          </a:p>
-          <a:p>
-            <a:r>
-              <a:t>cap. Grants are capped and need co-funding, so more grant means more of our own</a:t>
-            </a:r>
-          </a:p>
-          <a:p>
-            <a:r>
-              <a:t>spend: the addendum illustration is about GBP 66.7 million of provider funding</a:t>
-            </a:r>
-          </a:p>
-          <a:p>
-            <a:r>
-              <a:t>against the GBP 40 million, as an estimate. Grant capture cannot pay for the</a:t>
-            </a:r>
-          </a:p>
-          <a:p>
-            <a:r>
-              <a:t>technology on its own. And the brief calls EPC C by 2030 a consultation proposal;</a:t>
-            </a:r>
-          </a:p>
-          <a:p>
-            <a:r>
-              <a:t>the local snapshot shows a final policy position, which I could not yet evidence</a:t>
-            </a:r>
-          </a:p>
-          <a:p>
-            <a:r>
-              <a:t>as commenced law.</a:t>
+              <a:t>Research also corrected two claims in the brief. The GBP 40 million is an opportunity, not an award, and would cover at most about 5,333 homes at the grant cap. And EPC C by 2030 is final policy, not a consultation, though I could not yet evidence it as commenced law.</a:t>
             </a:r>
           </a:p>
           <a:p/>
+          <a:p>
+            <a:r>
+              <a:t>If asked: grants need co-funding, so more grant means more of our own spend. The addendum illustrates about GBP 66.7 million of provider funding, as an estimate.</a:t>
+            </a:r>
+          </a:p>
         </p:txBody>
       </p:sp>
       <p:sp>
@@ -1659,103 +1387,21 @@
           <a:lstStyle/>
           <a:p>
             <a:r>
-              <a:t>The case describes a company that does not exist, so there is nobody to</a:t>
-            </a:r>
-          </a:p>
-          <a:p>
-            <a:r>
-              <a:t>interview. I created eight role agents, one per perspective that owns part of a</a:t>
-            </a:r>
-          </a:p>
-          <a:p>
-            <a:r>
-              <a:t>retrofit programme: the asset executive, finance, the programme manager, building</a:t>
-            </a:r>
-          </a:p>
-          <a:p>
-            <a:r>
-              <a:t>safety, resident engagement, procurement, data and performance, and a frontline</a:t>
-            </a:r>
-          </a:p>
-          <a:p>
-            <a:r>
-              <a:t>housing officer.</a:t>
+              <a:t>The company is fictional, so there is nobody to interview. I created eight role agents, one for each perspective that owns part of a retrofit programme, from the asset executive to a frontline housing officer.</a:t>
             </a:r>
           </a:p>
           <a:p/>
           <a:p>
             <a:r>
-              <a:t>The key design choice was to treat them as research instruments, not as</a:t>
-            </a:r>
-          </a:p>
-          <a:p>
-            <a:r>
-              <a:t>simulated employees. They are anchored to the case, the addendum and the company</a:t>
-            </a:r>
-          </a:p>
-          <a:p>
-            <a:r>
-              <a:t>research, and they must label every answer as a case fact, a sector hypothesis or</a:t>
-            </a:r>
-          </a:p>
-          <a:p>
-            <a:r>
-              <a:t>an unknown. That stops an articulate answer from becoming a fake company fact.</a:t>
+              <a:t>They are research instruments, not simulated employees. They are anchored to the case, the addendum and the company research, and they label every answer as a case fact, a sector hypothesis or an unknown. That stops an articulate answer from becoming a fake company fact. Their most useful output is the one question per role that would change its answer most; those questions are now the discovery agenda.</a:t>
             </a:r>
           </a:p>
           <a:p/>
           <a:p>
             <a:r>
-              <a:t>Their most useful output was not an answer but a question: each role named the</a:t>
-            </a:r>
-          </a:p>
-          <a:p>
-            <a:r>
-              <a:t>one question that would change its answer most. Those questions are now the</a:t>
-            </a:r>
-          </a:p>
-          <a:p>
-            <a:r>
-              <a:t>discovery agenda for the real company.</a:t>
-            </a:r>
-          </a:p>
-          <a:p/>
-          <a:p>
-            <a:r>
-              <a:t>Here is one exchange. I asked, in effect, whether a grant-drafting agent would add</a:t>
-            </a:r>
-          </a:p>
-          <a:p>
-            <a:r>
-              <a:t>value. The finance role answered with a regulatory fact from the local snapshot:</a:t>
-            </a:r>
-          </a:p>
-          <a:p>
-            <a:r>
-              <a:t>in Greater Manchester and the West Midlands, Wave 3 money is allocated by formula</a:t>
-            </a:r>
-          </a:p>
-          <a:p>
-            <a:r>
-              <a:t>through integrated settlements, not by competitive bid. Whether Proper North Homes</a:t>
-            </a:r>
-          </a:p>
-          <a:p>
-            <a:r>
-              <a:t>operates there is unknown. So the value of drafting depends on the funding route,</a:t>
-            </a:r>
-          </a:p>
-          <a:p>
-            <a:r>
-              <a:t>and the BRD now requires every scheme to record an evidenced funding route before</a:t>
-            </a:r>
-          </a:p>
-          <a:p>
-            <a:r>
-              <a:t>any bid work starts.</a:t>
-            </a:r>
-          </a:p>
-          <a:p/>
+              <a:t>One exchange: would a grant-drafting agent add value? The finance role answered with a fact from the local snapshot: in Greater Manchester and the West Midlands, Wave 3 money is allocated by formula, not by bid. Whether Proper North Homes operates there is unknown. So the BRD now requires an evidenced funding route before any bid work starts.</a:t>
+            </a:r>
+          </a:p>
         </p:txBody>
       </p:sp>
       <p:sp>
@@ -1823,83 +1469,21 @@
           <a:lstStyle/>
           <a:p>
             <a:r>
-              <a:t>This slide is the honest origin of the turning point. The doubt about five agents</a:t>
-            </a:r>
-          </a:p>
-          <a:p>
-            <a:r>
-              <a:t>did not appear on 26 September. It built up across two weeks.</a:t>
+              <a:t>This slide is the honest origin of the turning point. The doubt about five agents built up over two weeks.</a:t>
             </a:r>
           </a:p>
           <a:p/>
           <a:p>
             <a:r>
-              <a:t>On 11 September, my first addendum already said that "agentic" is an</a:t>
-            </a:r>
-          </a:p>
-          <a:p>
-            <a:r>
-              <a:t>implementation option, not the business outcome, and proposed a portfolio control</a:t>
-            </a:r>
-          </a:p>
-          <a:p>
-            <a:r>
-              <a:t>plane. On 19 September the BRD gained a cross-functional challenge to the</a:t>
-            </a:r>
-          </a:p>
-          <a:p>
-            <a:r>
-              <a:t>five-agent request, and the Warm Homes Social Housing Fund annex added real grant</a:t>
-            </a:r>
-          </a:p>
-          <a:p>
-            <a:r>
-              <a:t>conditions. On 20 September I added regulatory context and reviewed the open</a:t>
-            </a:r>
-          </a:p>
-          <a:p>
-            <a:r>
-              <a:t>decisions. On 25 September the modelled customer profile arrived and the</a:t>
-            </a:r>
-          </a:p>
-          <a:p>
-            <a:r>
-              <a:t>knowledge base was restructured.</a:t>
+              <a:t>On 11 September my first addendum already said that "agentic" is an implementation option and proposed a portfolio control plane, now called the digital foundation. On 19 September the BRD gained a cross-functional challenge to the five-agent request. Then came the regulatory context, the open-decision review and the modelled customer profile.</a:t>
             </a:r>
           </a:p>
           <a:p/>
           <a:p>
             <a:r>
-              <a:t>What I did not have was evidence for each agent. On 26 September I challenged</a:t>
-            </a:r>
-          </a:p>
-          <a:p>
-            <a:r>
-              <a:t>each request with all eight role agents, which added ten new requirements, BR-059</a:t>
-            </a:r>
-          </a:p>
-          <a:p>
-            <a:r>
-              <a:t>to BR-068, and eight open decisions.</a:t>
-            </a:r>
-          </a:p>
-          <a:p/>
-          <a:p>
-            <a:r>
-              <a:t>Across all of this the BRD went through ten revisions, each the same pass:</a:t>
-            </a:r>
-          </a:p>
-          <a:p>
-            <a:r>
-              <a:t>research, ask the role agents, rewrite the requirements, and log what changed and</a:t>
-            </a:r>
-          </a:p>
-          <a:p>
-            <a:r>
-              <a:t>why.</a:t>
-            </a:r>
-          </a:p>
-          <a:p/>
+              <a:t>What I lacked was evidence for each agent. On 26 September all eight role agents challenged each request, which added ten requirements and eight open decisions. Each BRD revision was the same pass: research, ask the roles, rewrite, log what changed and why.</a:t>
+            </a:r>
+          </a:p>
         </p:txBody>
       </p:sp>
       <p:sp>
@@ -1967,119 +1551,27 @@
           <a:lstStyle/>
           <a:p>
             <a:r>
-              <a:t>This is the turning point. I had suspected since 11 September that a control</a:t>
-            </a:r>
-          </a:p>
-          <a:p>
-            <a:r>
-              <a:t>plane mattered more than agents; it was in the first addendum. What I did not</a:t>
-            </a:r>
-          </a:p>
-          <a:p>
-            <a:r>
-              <a:t>have was evidence for each agent.</a:t>
+              <a:t>This is the turning point. I stopped treating the five agents as a specification and read each "owns end-to-end" line as the business telling us what value it expects. Stock prioritisation means defensible capital allocation. Grant and funding means grant cash without clawback. Quality verification means never paying for defective work.</a:t>
             </a:r>
           </a:p>
           <a:p/>
           <a:p>
             <a:r>
-              <a:t>So in the design thinking session on 26 September I stopped treating the five</a:t>
-            </a:r>
-          </a:p>
-          <a:p>
-            <a:r>
-              <a:t>agents as a specification and treated each "owns end-to-end" line as the business</a:t>
-            </a:r>
-          </a:p>
-          <a:p>
-            <a:r>
-              <a:t>telling us what value it expects. Stock prioritisation really means defensible</a:t>
-            </a:r>
-          </a:p>
-          <a:p>
-            <a:r>
-              <a:t>capital allocation. Grant and funding really means turning delivered homes into</a:t>
-            </a:r>
-          </a:p>
-          <a:p>
-            <a:r>
-              <a:t>grant cash without clawback. Quality verification really means never paying for</a:t>
-            </a:r>
-          </a:p>
-          <a:p>
-            <a:r>
-              <a:t>defective work. The "after" question at the top paraphrases the addendum's</a:t>
-            </a:r>
-          </a:p>
-          <a:p>
-            <a:r>
-              <a:t>strategic proposition.</a:t>
+              <a:t>I asked all eight role agents, in parallel, what the real problem was, what cheaper alternatives existed and where an agent would fit. The answer was unanimous: build none of the five as an end-to-end agent. Each request bundles deterministic control work, accountable human decisions and a smaller set of tasks where bounded AI helps. The most memorable row is quality: every role said the real risk is that a pack with no flags gets read as proof of quality.</a:t>
             </a:r>
           </a:p>
           <a:p/>
           <a:p>
             <a:r>
-              <a:t>I then asked all eight role agents, in parallel, what the real problem was, what</a:t>
-            </a:r>
-          </a:p>
-          <a:p>
-            <a:r>
-              <a:t>cheaper alternatives existed, and where an agent would fit. The answer was</a:t>
-            </a:r>
-          </a:p>
-          <a:p>
-            <a:r>
-              <a:t>unanimous: none of the five should be built as an end-to-end agent. Each request</a:t>
-            </a:r>
-          </a:p>
-          <a:p>
-            <a:r>
-              <a:t>bundles deterministic control work, accountable human decisions, and a small</a:t>
-            </a:r>
-          </a:p>
-          <a:p>
-            <a:r>
-              <a:t>amount of work where bounded AI genuinely helps. The most memorable row is</a:t>
-            </a:r>
-          </a:p>
-          <a:p>
-            <a:r>
-              <a:t>quality verification: every role said the real risk is the reverse, that a pack</a:t>
-            </a:r>
-          </a:p>
-          <a:p>
-            <a:r>
-              <a:t>with no flags gets read as proof of quality.</a:t>
+              <a:t>The "after" question is how I phrase it now. On 26 September the addendum still called agents "an implementation option"; later that day it became agent-led modernisation, which is the next slide.</a:t>
             </a:r>
           </a:p>
           <a:p/>
           <a:p>
             <a:r>
-              <a:t>One caveat before you ask: the role agents read my addendum, so their agreement</a:t>
-            </a:r>
-          </a:p>
-          <a:p>
-            <a:r>
-              <a:t>is a sector-informed hypothesis, not validation. The questions they raised are</a:t>
-            </a:r>
-          </a:p>
-          <a:p>
-            <a:r>
-              <a:t>how we validate it with the real company.</a:t>
-            </a:r>
-          </a:p>
-          <a:p/>
-          <a:p>
-            <a:r>
-              <a:t>The underlying problem is missing shared records and undefined lifecycle states.</a:t>
-            </a:r>
-          </a:p>
-          <a:p>
-            <a:r>
-              <a:t>A lack of intelligence is not the problem.</a:t>
-            </a:r>
-          </a:p>
-          <a:p/>
+              <a:t>One caveat: the roles read my addendum, so their agreement is a sector-informed hypothesis, not validation.</a:t>
+            </a:r>
+          </a:p>
         </p:txBody>
       </p:sp>
       <p:sp>
@@ -2147,94 +1639,21 @@
           <a:lstStyle/>
           <a:p>
             <a:r>
-              <a:t>The challenge confirmed and sharpened the control plane I had proposed on 11</a:t>
-            </a:r>
-          </a:p>
-          <a:p>
-            <a:r>
-              <a:t>September. What changed on 26 September is that every layer now traces to a role</a:t>
-            </a:r>
-          </a:p>
-          <a:p>
-            <a:r>
-              <a:t>verdict, ten new BRD rows (BR-059 to BR-068) and five bounded AI candidates, each</a:t>
-            </a:r>
-          </a:p>
-          <a:p>
-            <a:r>
-              <a:t>with a comparator and a stop criterion.</a:t>
+              <a:t>So if the gap is shared records, not intelligence, why is this agent-led? Because the records do not fill themselves. What rests on a small team today is coordination, chasing, re-keying, reconciliation and evidence assembly, and that unstructured work is where agents help. Later on 26 September, a challenge to my own measurement plan showed the pilot bundled three changes: a new delivery cell, ring-fenced supplier capacity and agents, so it could never tell the Board which one worked. So I reframed it as agent-led modernisation of the existing retrofit model. Existing teams, suppliers and systems stay, and what I called the control plane is now the digital foundation. Whether coordination really is the binding constraint is still a Phase 0 question.</a:t>
             </a:r>
           </a:p>
           <a:p/>
           <a:p>
             <a:r>
-              <a:t>Read the stack from the bottom. The foundation is a portfolio control plane: a</a:t>
-            </a:r>
-          </a:p>
-          <a:p>
-            <a:r>
-              <a:t>deterministic layer with a property master keyed on UPRN, lifecycle gates and</a:t>
-            </a:r>
-          </a:p>
-          <a:p>
-            <a:r>
-              <a:t>statutory clocks, a hazard case record, a resident decision record, a capacity</a:t>
-            </a:r>
-          </a:p>
-          <a:p>
-            <a:r>
-              <a:t>register, a grant ledger and a defect register. Every one of the five requested</a:t>
-            </a:r>
-          </a:p>
-          <a:p>
-            <a:r>
-              <a:t>agents depended on these records, and they deliver value without any AI.</a:t>
+              <a:t>Read the stack from the bottom. The foundation is deterministic, because decisions that residents, the Regulator, funders or the Board must be able to follow should come from rules. Agents sit where the work is unstructured, and people keep every decision with legal, professional or resident authority.</a:t>
             </a:r>
           </a:p>
           <a:p/>
           <a:p>
             <a:r>
-              <a:t>On top sit five bounded AI capabilities that came up across several roles. All of</a:t>
-            </a:r>
-          </a:p>
-          <a:p>
-            <a:r>
-              <a:t>them recommend, draft or raise flags. None needs end-to-end ownership, and each</a:t>
-            </a:r>
-          </a:p>
-          <a:p>
-            <a:r>
-              <a:t>must beat a non-agent comparator in shadow testing before it goes live. They are</a:t>
-            </a:r>
-          </a:p>
-          <a:p>
-            <a:r>
-              <a:t>candidates for shadow testing, not tested yet.</a:t>
-            </a:r>
-          </a:p>
-          <a:p/>
-          <a:p>
-            <a:r>
-              <a:t>At the top, accountable people keep every decision that carries legal,</a:t>
-            </a:r>
-          </a:p>
-          <a:p>
-            <a:r>
-              <a:t>professional or resident authority.</a:t>
-            </a:r>
-          </a:p>
-          <a:p/>
-          <a:p>
-            <a:r>
-              <a:t>That changes the ask to the board: not a five-agent rollout, but a capped</a:t>
-            </a:r>
-          </a:p>
-          <a:p>
-            <a:r>
-              <a:t>readiness stage and gated pilots in one delivery cell.</a:t>
-            </a:r>
-          </a:p>
-          <a:p/>
+              <a:t>The ask changes: agents added to existing teams in one locality and, as a proposal, each capability scales only if it beats the same workflow without it.</a:t>
+            </a:r>
+          </a:p>
         </p:txBody>
       </p:sp>
       <p:sp>
@@ -2302,98 +1721,27 @@
           <a:lstStyle/>
           <a:p>
             <a:r>
-              <a:t>The last step so far was a formal BRD quality review. The first run failed hard:</a:t>
-            </a:r>
-          </a:p>
-          <a:p>
-            <a:r>
-              <a:t>the BRD used legacy BR and OBJ identifiers, so the reviewer measured zero percent</a:t>
-            </a:r>
-          </a:p>
-          <a:p>
-            <a:r>
-              <a:t>coverage from functional requirements to acceptance criteria and to business</a:t>
-            </a:r>
-          </a:p>
-          <a:p>
-            <a:r>
-              <a:t>goals.</a:t>
+              <a:t>Two challenges asked whether I could prove the value and whether I could explain it. The first came before the reframe and caused it; the second came after.</a:t>
             </a:r>
           </a:p>
           <a:p/>
           <a:p>
             <a:r>
-              <a:t>I relabelled the whole document to a canonical taxonomy: 12 business goals, 41</a:t>
-            </a:r>
-          </a:p>
-          <a:p>
-            <a:r>
-              <a:t>functional requirements, 73 acceptance criteria, 9 non-functional requirements</a:t>
-            </a:r>
-          </a:p>
-          <a:p>
-            <a:r>
-              <a:t>grouped by ISO 25010, 6 imposed constraints and 23 business rules. Four compound</a:t>
-            </a:r>
-          </a:p>
-          <a:p>
-            <a:r>
-              <a:t>rows were split, and a legacy map keeps every old reference valid. Coverage went</a:t>
-            </a:r>
-          </a:p>
-          <a:p>
-            <a:r>
-              <a:t>from zero to one hundred percent. The 0 percent was an identifier-format problem,</a:t>
-            </a:r>
-          </a:p>
-          <a:p>
-            <a:r>
-              <a:t>not missing requirements. Relabelling fixed traceability. It did not fix</a:t>
-            </a:r>
-          </a:p>
-          <a:p>
-            <a:r>
-              <a:t>measurability.</a:t>
+              <a:t>The first was my own idea: a dashboard showing the pilot accelerates delivery. All eight roles backed the intent and rejected the design. Speed is not the benefit; accepted handovers are. And, as you saw, it bundled three changes. About 50 handovers in six to nine months cannot prove a 20 percent gain. So there are now two comparisons: a pilot locality with agents against a matched locality without, and each agent capability against the same workflow without it. The dashboard steers; only a frozen benefits scorecard counts at the gate.</a:t>
             </a:r>
           </a:p>
           <a:p/>
           <a:p>
             <a:r>
-              <a:t>The review also extracted new structure: FR-022 was split into a functional</a:t>
-            </a:r>
-          </a:p>
-          <a:p>
-            <a:r>
-              <a:t>requirement and a business rule, and CON-004 was flagged for Legal because its</a:t>
-            </a:r>
-          </a:p>
-          <a:p>
-            <a:r>
-              <a:t>source sits outside the local corpus.</a:t>
+              <a:t>The second was a transparency review. It found an error of mine: CON-003 cited UK GDPR Article 22, but the local consolidated text omits it and uses Articles 22A to 22D. CON-003 now cites Articles 22A to 22C and maps human review to the four Article 22C(2) safeguards. Some sources are still missing locally, logged as OD-39.</a:t>
             </a:r>
           </a:p>
           <a:p/>
           <a:p>
             <a:r>
-              <a:t>The rerun still fails, and I think that is the right result. Seven business goals</a:t>
-            </a:r>
-          </a:p>
-          <a:p>
-            <a:r>
-              <a:t>have no numeric target because the targets depend on company data or board</a:t>
-            </a:r>
-          </a:p>
-          <a:p>
-            <a:r>
-              <a:t>decisions. I chose to leave the gate failing rather than invent numbers. I would</a:t>
-            </a:r>
-          </a:p>
-          <a:p>
-            <a:r>
-              <a:t>like your view on that choice.</a:t>
-            </a:r>
-          </a:p>
-          <a:p/>
+              <a:t>Still a proposal: the pilot decides which agent capabilities scale.</a:t>
+            </a:r>
+          </a:p>
         </p:txBody>
       </p:sp>
       <p:sp>
@@ -5652,101 +5000,33 @@
                 </a:solidFill>
                 <a:latin typeface="Segoe UI"/>
               </a:rPr>
-              <a:t>Keeping evidence honest was hard; here is what I would change</a:t>
-            </a:r>
-          </a:p>
-        </p:txBody>
-      </p:sp>
-      <p:sp>
-        <p:nvSpPr>
-          <p:cNvPr id="3" name="Challenges head"/>
-          <p:cNvSpPr txBox="1"/>
-          <p:nvPr/>
-        </p:nvSpPr>
-        <p:spPr>
-          <a:xfrm>
-            <a:off x="548640" y="1417320"/>
-            <a:ext cx="11094415" cy="274320"/>
-          </a:xfrm>
-          <a:prstGeom prst="rect">
-            <a:avLst/>
-          </a:prstGeom>
-          <a:noFill/>
-        </p:spPr>
-        <p:txBody>
-          <a:bodyPr wrap="square" tIns="0" bIns="0">
-            <a:spAutoFit/>
-          </a:bodyPr>
-          <a:lstStyle/>
-          <a:p>
-            <a:r>
-              <a:rPr sz="1200" b="1" i="0">
-                <a:solidFill>
-                  <a:srgbClr val="0B625B"/>
-                </a:solidFill>
-                <a:latin typeface="Segoe UI"/>
-              </a:rPr>
-              <a:t>CHALLENGES</a:t>
-            </a:r>
-          </a:p>
-        </p:txBody>
-      </p:sp>
-      <p:sp>
-        <p:nvSpPr>
-          <p:cNvPr id="4" name="Lessons head"/>
-          <p:cNvSpPr txBox="1"/>
-          <p:nvPr/>
-        </p:nvSpPr>
-        <p:spPr>
-          <a:xfrm>
-            <a:off x="548640" y="3840480"/>
-            <a:ext cx="11094415" cy="274320"/>
-          </a:xfrm>
-          <a:prstGeom prst="rect">
-            <a:avLst/>
-          </a:prstGeom>
-          <a:noFill/>
-        </p:spPr>
-        <p:txBody>
-          <a:bodyPr wrap="square" tIns="0" bIns="0">
-            <a:spAutoFit/>
-          </a:bodyPr>
-          <a:lstStyle/>
-          <a:p>
-            <a:r>
-              <a:rPr sz="1200" b="1" i="0">
-                <a:solidFill>
-                  <a:srgbClr val="1D5FB8"/>
-                </a:solidFill>
-                <a:latin typeface="Segoe UI"/>
-              </a:rPr>
-              <a:t>WHAT I WOULD DO DIFFERENTLY</a:t>
-            </a:r>
-          </a:p>
-        </p:txBody>
-      </p:sp>
-      <p:sp>
-        <p:nvSpPr>
-          <p:cNvPr id="5" name="Challenge 1"/>
+              <a:t>Relabelling fixed traceability; the gate still fails on targets</a:t>
+            </a:r>
+          </a:p>
+        </p:txBody>
+      </p:sp>
+      <p:sp>
+        <p:nvSpPr>
+          <p:cNvPr id="3" name="Stat 1"/>
           <p:cNvSpPr/>
           <p:nvPr/>
         </p:nvSpPr>
         <p:spPr>
           <a:xfrm>
-            <a:off x="548640" y="1965960"/>
-            <a:ext cx="3515258" cy="1600200"/>
+            <a:off x="548640" y="1554480"/>
+            <a:ext cx="1005840" cy="731520"/>
           </a:xfrm>
           <a:prstGeom prst="roundRect">
             <a:avLst>
-              <a:gd name="adj" fmla="val 6000"/>
+              <a:gd name="adj" fmla="val 12000"/>
             </a:avLst>
           </a:prstGeom>
           <a:solidFill>
-            <a:srgbClr val="F0F4F8"/>
+            <a:srgbClr val="0B625B"/>
           </a:solidFill>
           <a:ln w="12700">
             <a:solidFill>
-              <a:srgbClr val="D9E2EC"/>
+              <a:srgbClr val="0B625B"/>
             </a:solidFill>
           </a:ln>
         </p:spPr>
@@ -5765,30 +5045,44 @@
           </a:fontRef>
         </p:style>
         <p:txBody>
-          <a:bodyPr rtlCol="0" anchor="t" wrap="square" lIns="164592" rIns="164592" tIns="128016" bIns="91440"/>
-          <a:lstStyle/>
-          <a:p>
-            <a:pPr algn="l">
-              <a:spcAft>
-                <a:spcPts val="600"/>
-              </a:spcAft>
-            </a:pPr>
-            <a:r>
-              <a:rPr sz="1600" b="1" i="0">
-                <a:solidFill>
-                  <a:srgbClr val="0B625B"/>
-                </a:solidFill>
-                <a:latin typeface="Segoe UI"/>
-              </a:rPr>
-              <a:t>No company data</a:t>
-            </a:r>
-          </a:p>
-          <a:p>
-            <a:pPr algn="l">
-              <a:spcAft>
-                <a:spcPts val="0"/>
-              </a:spcAft>
-            </a:pPr>
+          <a:bodyPr rtlCol="0" anchor="ctr" wrap="square" lIns="109728" rIns="109728" tIns="36576" bIns="36576"/>
+          <a:lstStyle/>
+          <a:p>
+            <a:pPr algn="ctr"/>
+            <a:r>
+              <a:rPr sz="2600" b="1" i="0">
+                <a:solidFill>
+                  <a:srgbClr val="FFFFFF"/>
+                </a:solidFill>
+                <a:latin typeface="Segoe UI"/>
+              </a:rPr>
+              <a:t>12</a:t>
+            </a:r>
+          </a:p>
+        </p:txBody>
+      </p:sp>
+      <p:sp>
+        <p:nvSpPr>
+          <p:cNvPr id="4" name="Stat 1 label"/>
+          <p:cNvSpPr txBox="1"/>
+          <p:nvPr/>
+        </p:nvSpPr>
+        <p:spPr>
+          <a:xfrm>
+            <a:off x="1645919" y="1554480"/>
+            <a:ext cx="1645920" cy="731520"/>
+          </a:xfrm>
+          <a:prstGeom prst="rect">
+            <a:avLst/>
+          </a:prstGeom>
+          <a:noFill/>
+        </p:spPr>
+        <p:txBody>
+          <a:bodyPr wrap="square" anchor="ctr">
+            <a:spAutoFit/>
+          </a:bodyPr>
+          <a:lstStyle/>
+          <a:p>
             <a:r>
               <a:rPr sz="1300" b="0" i="0">
                 <a:solidFill>
@@ -5796,33 +5090,33 @@
                 </a:solidFill>
                 <a:latin typeface="Segoe UI"/>
               </a:rPr>
-              <a:t>The company is fictional. I modelled tenure, residents and finances from sector medians and labelled every value as an estimate.</a:t>
-            </a:r>
-          </a:p>
-        </p:txBody>
-      </p:sp>
-      <p:sp>
-        <p:nvSpPr>
-          <p:cNvPr id="6" name="Challenge 2"/>
+              <a:t>Business goals (BG)</a:t>
+            </a:r>
+          </a:p>
+        </p:txBody>
+      </p:sp>
+      <p:sp>
+        <p:nvSpPr>
+          <p:cNvPr id="5" name="Stat 2"/>
           <p:cNvSpPr/>
           <p:nvPr/>
         </p:nvSpPr>
         <p:spPr>
           <a:xfrm>
-            <a:off x="4338218" y="1965960"/>
-            <a:ext cx="3515258" cy="1600200"/>
+            <a:off x="3429000" y="1554480"/>
+            <a:ext cx="1005840" cy="731520"/>
           </a:xfrm>
           <a:prstGeom prst="roundRect">
             <a:avLst>
-              <a:gd name="adj" fmla="val 6000"/>
+              <a:gd name="adj" fmla="val 12000"/>
             </a:avLst>
           </a:prstGeom>
           <a:solidFill>
-            <a:srgbClr val="F0F4F8"/>
+            <a:srgbClr val="1D5FB8"/>
           </a:solidFill>
           <a:ln w="12700">
             <a:solidFill>
-              <a:srgbClr val="D9E2EC"/>
+              <a:srgbClr val="1D5FB8"/>
             </a:solidFill>
           </a:ln>
         </p:spPr>
@@ -5841,30 +5135,44 @@
           </a:fontRef>
         </p:style>
         <p:txBody>
-          <a:bodyPr rtlCol="0" anchor="t" wrap="square" lIns="164592" rIns="164592" tIns="128016" bIns="91440"/>
-          <a:lstStyle/>
-          <a:p>
-            <a:pPr algn="l">
-              <a:spcAft>
-                <a:spcPts val="600"/>
-              </a:spcAft>
-            </a:pPr>
-            <a:r>
-              <a:rPr sz="1600" b="1" i="0">
-                <a:solidFill>
-                  <a:srgbClr val="0B625B"/>
-                </a:solidFill>
-                <a:latin typeface="Segoe UI"/>
-              </a:rPr>
-              <a:t>Agents that sound certain</a:t>
-            </a:r>
-          </a:p>
-          <a:p>
-            <a:pPr algn="l">
-              <a:spcAft>
-                <a:spcPts val="0"/>
-              </a:spcAft>
-            </a:pPr>
+          <a:bodyPr rtlCol="0" anchor="ctr" wrap="square" lIns="109728" rIns="109728" tIns="36576" bIns="36576"/>
+          <a:lstStyle/>
+          <a:p>
+            <a:pPr algn="ctr"/>
+            <a:r>
+              <a:rPr sz="2600" b="1" i="0">
+                <a:solidFill>
+                  <a:srgbClr val="FFFFFF"/>
+                </a:solidFill>
+                <a:latin typeface="Segoe UI"/>
+              </a:rPr>
+              <a:t>44</a:t>
+            </a:r>
+          </a:p>
+        </p:txBody>
+      </p:sp>
+      <p:sp>
+        <p:nvSpPr>
+          <p:cNvPr id="6" name="Stat 2 label"/>
+          <p:cNvSpPr txBox="1"/>
+          <p:nvPr/>
+        </p:nvSpPr>
+        <p:spPr>
+          <a:xfrm>
+            <a:off x="4526280" y="1554480"/>
+            <a:ext cx="1645920" cy="731520"/>
+          </a:xfrm>
+          <a:prstGeom prst="rect">
+            <a:avLst/>
+          </a:prstGeom>
+          <a:noFill/>
+        </p:spPr>
+        <p:txBody>
+          <a:bodyPr wrap="square" anchor="ctr">
+            <a:spAutoFit/>
+          </a:bodyPr>
+          <a:lstStyle/>
+          <a:p>
             <a:r>
               <a:rPr sz="1300" b="0" i="0">
                 <a:solidFill>
@@ -5872,33 +5180,33 @@
                 </a:solidFill>
                 <a:latin typeface="Segoe UI"/>
               </a:rPr>
-              <a:t>Role answers are hypotheses, and the roles share my framing. Divergences stay open: L4 quality flags, L3 digital booking.</a:t>
-            </a:r>
-          </a:p>
-        </p:txBody>
-      </p:sp>
-      <p:sp>
-        <p:nvSpPr>
-          <p:cNvPr id="7" name="Challenge 3"/>
+              <a:t>Functional requirements (FR)</a:t>
+            </a:r>
+          </a:p>
+        </p:txBody>
+      </p:sp>
+      <p:sp>
+        <p:nvSpPr>
+          <p:cNvPr id="7" name="Stat 3"/>
           <p:cNvSpPr/>
           <p:nvPr/>
         </p:nvSpPr>
         <p:spPr>
           <a:xfrm>
-            <a:off x="8127796" y="1965960"/>
-            <a:ext cx="3515258" cy="1600200"/>
+            <a:off x="548640" y="2560320"/>
+            <a:ext cx="1005840" cy="731520"/>
           </a:xfrm>
           <a:prstGeom prst="roundRect">
             <a:avLst>
-              <a:gd name="adj" fmla="val 6000"/>
+              <a:gd name="adj" fmla="val 12000"/>
             </a:avLst>
           </a:prstGeom>
           <a:solidFill>
-            <a:srgbClr val="F0F4F8"/>
+            <a:srgbClr val="0B625B"/>
           </a:solidFill>
           <a:ln w="12700">
             <a:solidFill>
-              <a:srgbClr val="D9E2EC"/>
+              <a:srgbClr val="0B625B"/>
             </a:solidFill>
           </a:ln>
         </p:spPr>
@@ -5917,30 +5225,44 @@
           </a:fontRef>
         </p:style>
         <p:txBody>
-          <a:bodyPr rtlCol="0" anchor="t" wrap="square" lIns="164592" rIns="164592" tIns="128016" bIns="91440"/>
-          <a:lstStyle/>
-          <a:p>
-            <a:pPr algn="l">
-              <a:spcAft>
-                <a:spcPts val="600"/>
-              </a:spcAft>
-            </a:pPr>
-            <a:r>
-              <a:rPr sz="1600" b="1" i="0">
-                <a:solidFill>
-                  <a:srgbClr val="0B625B"/>
-                </a:solidFill>
-                <a:latin typeface="Segoe UI"/>
-              </a:rPr>
-              <a:t>Sources that disagree</a:t>
-            </a:r>
-          </a:p>
-          <a:p>
-            <a:pPr algn="l">
-              <a:spcAft>
-                <a:spcPts val="0"/>
-              </a:spcAft>
-            </a:pPr>
+          <a:bodyPr rtlCol="0" anchor="ctr" wrap="square" lIns="109728" rIns="109728" tIns="36576" bIns="36576"/>
+          <a:lstStyle/>
+          <a:p>
+            <a:pPr algn="ctr"/>
+            <a:r>
+              <a:rPr sz="2600" b="1" i="0">
+                <a:solidFill>
+                  <a:srgbClr val="FFFFFF"/>
+                </a:solidFill>
+                <a:latin typeface="Segoe UI"/>
+              </a:rPr>
+              <a:t>85</a:t>
+            </a:r>
+          </a:p>
+        </p:txBody>
+      </p:sp>
+      <p:sp>
+        <p:nvSpPr>
+          <p:cNvPr id="8" name="Stat 3 label"/>
+          <p:cNvSpPr txBox="1"/>
+          <p:nvPr/>
+        </p:nvSpPr>
+        <p:spPr>
+          <a:xfrm>
+            <a:off x="1645919" y="2560320"/>
+            <a:ext cx="1645920" cy="731520"/>
+          </a:xfrm>
+          <a:prstGeom prst="rect">
+            <a:avLst/>
+          </a:prstGeom>
+          <a:noFill/>
+        </p:spPr>
+        <p:txBody>
+          <a:bodyPr wrap="square" anchor="ctr">
+            <a:spAutoFit/>
+          </a:bodyPr>
+          <a:lstStyle/>
+          <a:p>
             <a:r>
               <a:rPr sz="1300" b="0" i="0">
                 <a:solidFill>
@@ -5948,33 +5270,33 @@
                 </a:solidFill>
                 <a:latin typeface="Segoe UI"/>
               </a:rPr>
-              <a:t>Interest cover 91% or 87%; fuel poverty corrected from 10.0% to 11.6%; EPC C final policy, not commenced law. Flagged, not resolved.</a:t>
-            </a:r>
-          </a:p>
-        </p:txBody>
-      </p:sp>
-      <p:sp>
-        <p:nvSpPr>
-          <p:cNvPr id="8" name="Challenge 4"/>
+              <a:t>Acceptance criteria (AC)</a:t>
+            </a:r>
+          </a:p>
+        </p:txBody>
+      </p:sp>
+      <p:sp>
+        <p:nvSpPr>
+          <p:cNvPr id="9" name="Stat 4"/>
           <p:cNvSpPr/>
           <p:nvPr/>
         </p:nvSpPr>
         <p:spPr>
           <a:xfrm>
-            <a:off x="548640" y="4389120"/>
-            <a:ext cx="3515258" cy="1463040"/>
+            <a:off x="3429000" y="2560320"/>
+            <a:ext cx="1005840" cy="731520"/>
           </a:xfrm>
           <a:prstGeom prst="roundRect">
             <a:avLst>
-              <a:gd name="adj" fmla="val 6000"/>
+              <a:gd name="adj" fmla="val 12000"/>
             </a:avLst>
           </a:prstGeom>
           <a:solidFill>
-            <a:srgbClr val="E6EFFB"/>
+            <a:srgbClr val="1D5FB8"/>
           </a:solidFill>
           <a:ln w="12700">
             <a:solidFill>
-              <a:srgbClr val="C7D9F3"/>
+              <a:srgbClr val="1D5FB8"/>
             </a:solidFill>
           </a:ln>
         </p:spPr>
@@ -5993,30 +5315,44 @@
           </a:fontRef>
         </p:style>
         <p:txBody>
-          <a:bodyPr rtlCol="0" anchor="t" wrap="square" lIns="164592" rIns="164592" tIns="128016" bIns="91440"/>
-          <a:lstStyle/>
-          <a:p>
-            <a:pPr algn="l">
-              <a:spcAft>
-                <a:spcPts val="600"/>
-              </a:spcAft>
-            </a:pPr>
-            <a:r>
-              <a:rPr sz="1600" b="1" i="0">
-                <a:solidFill>
-                  <a:srgbClr val="1D5FB8"/>
-                </a:solidFill>
-                <a:latin typeface="Segoe UI"/>
-              </a:rPr>
-              <a:t>Start the log on day one</a:t>
-            </a:r>
-          </a:p>
-          <a:p>
-            <a:pPr algn="l">
-              <a:spcAft>
-                <a:spcPts val="0"/>
-              </a:spcAft>
-            </a:pPr>
+          <a:bodyPr rtlCol="0" anchor="ctr" wrap="square" lIns="109728" rIns="109728" tIns="36576" bIns="36576"/>
+          <a:lstStyle/>
+          <a:p>
+            <a:pPr algn="ctr"/>
+            <a:r>
+              <a:rPr sz="2600" b="1" i="0">
+                <a:solidFill>
+                  <a:srgbClr val="FFFFFF"/>
+                </a:solidFill>
+                <a:latin typeface="Segoe UI"/>
+              </a:rPr>
+              <a:t>9</a:t>
+            </a:r>
+          </a:p>
+        </p:txBody>
+      </p:sp>
+      <p:sp>
+        <p:nvSpPr>
+          <p:cNvPr id="10" name="Stat 4 label"/>
+          <p:cNvSpPr txBox="1"/>
+          <p:nvPr/>
+        </p:nvSpPr>
+        <p:spPr>
+          <a:xfrm>
+            <a:off x="4526280" y="2560320"/>
+            <a:ext cx="1645920" cy="731520"/>
+          </a:xfrm>
+          <a:prstGeom prst="rect">
+            <a:avLst/>
+          </a:prstGeom>
+          <a:noFill/>
+        </p:spPr>
+        <p:txBody>
+          <a:bodyPr wrap="square" anchor="ctr">
+            <a:spAutoFit/>
+          </a:bodyPr>
+          <a:lstStyle/>
+          <a:p>
             <a:r>
               <a:rPr sz="1300" b="0" i="0">
                 <a:solidFill>
@@ -6024,33 +5360,33 @@
                 </a:solidFill>
                 <a:latin typeface="Segoe UI"/>
               </a:rPr>
-              <a:t>Log entries before 25 Sep had to be reconstructed from Git history.</a:t>
-            </a:r>
-          </a:p>
-        </p:txBody>
-      </p:sp>
-      <p:sp>
-        <p:nvSpPr>
-          <p:cNvPr id="9" name="Challenge 5"/>
+              <a:t>Non-functional (NFR, ISO/IEC 25010)</a:t>
+            </a:r>
+          </a:p>
+        </p:txBody>
+      </p:sp>
+      <p:sp>
+        <p:nvSpPr>
+          <p:cNvPr id="11" name="Stat 5"/>
           <p:cNvSpPr/>
           <p:nvPr/>
         </p:nvSpPr>
         <p:spPr>
           <a:xfrm>
-            <a:off x="4338218" y="4389120"/>
-            <a:ext cx="3515258" cy="1463040"/>
+            <a:off x="548640" y="3566160"/>
+            <a:ext cx="1005840" cy="731520"/>
           </a:xfrm>
           <a:prstGeom prst="roundRect">
             <a:avLst>
-              <a:gd name="adj" fmla="val 6000"/>
+              <a:gd name="adj" fmla="val 12000"/>
             </a:avLst>
           </a:prstGeom>
           <a:solidFill>
-            <a:srgbClr val="E6EFFB"/>
+            <a:srgbClr val="0B625B"/>
           </a:solidFill>
           <a:ln w="12700">
             <a:solidFill>
-              <a:srgbClr val="C7D9F3"/>
+              <a:srgbClr val="0B625B"/>
             </a:solidFill>
           </a:ln>
         </p:spPr>
@@ -6069,30 +5405,44 @@
           </a:fontRef>
         </p:style>
         <p:txBody>
-          <a:bodyPr rtlCol="0" anchor="t" wrap="square" lIns="164592" rIns="164592" tIns="128016" bIns="91440"/>
-          <a:lstStyle/>
-          <a:p>
-            <a:pPr algn="l">
-              <a:spcAft>
-                <a:spcPts val="600"/>
-              </a:spcAft>
-            </a:pPr>
-            <a:r>
-              <a:rPr sz="1600" b="1" i="0">
-                <a:solidFill>
-                  <a:srgbClr val="1D5FB8"/>
-                </a:solidFill>
-                <a:latin typeface="Segoe UI"/>
-              </a:rPr>
-              <a:t>Canonical IDs from the first draft</a:t>
-            </a:r>
-          </a:p>
-          <a:p>
-            <a:pPr algn="l">
-              <a:spcAft>
-                <a:spcPts val="0"/>
-              </a:spcAft>
-            </a:pPr>
+          <a:bodyPr rtlCol="0" anchor="ctr" wrap="square" lIns="109728" rIns="109728" tIns="36576" bIns="36576"/>
+          <a:lstStyle/>
+          <a:p>
+            <a:pPr algn="ctr"/>
+            <a:r>
+              <a:rPr sz="2600" b="1" i="0">
+                <a:solidFill>
+                  <a:srgbClr val="FFFFFF"/>
+                </a:solidFill>
+                <a:latin typeface="Segoe UI"/>
+              </a:rPr>
+              <a:t>6</a:t>
+            </a:r>
+          </a:p>
+        </p:txBody>
+      </p:sp>
+      <p:sp>
+        <p:nvSpPr>
+          <p:cNvPr id="12" name="Stat 5 label"/>
+          <p:cNvSpPr txBox="1"/>
+          <p:nvPr/>
+        </p:nvSpPr>
+        <p:spPr>
+          <a:xfrm>
+            <a:off x="1645919" y="3566160"/>
+            <a:ext cx="1645920" cy="731520"/>
+          </a:xfrm>
+          <a:prstGeom prst="rect">
+            <a:avLst/>
+          </a:prstGeom>
+          <a:noFill/>
+        </p:spPr>
+        <p:txBody>
+          <a:bodyPr wrap="square" anchor="ctr">
+            <a:spAutoFit/>
+          </a:bodyPr>
+          <a:lstStyle/>
+          <a:p>
             <a:r>
               <a:rPr sz="1300" b="0" i="0">
                 <a:solidFill>
@@ -6100,33 +5450,33 @@
                 </a:solidFill>
                 <a:latin typeface="Segoe UI"/>
               </a:rPr>
-              <a:t>The first quality run scored 0% only because of legacy IDs; relabelling cost a full pass.</a:t>
-            </a:r>
-          </a:p>
-        </p:txBody>
-      </p:sp>
-      <p:sp>
-        <p:nvSpPr>
-          <p:cNvPr id="10" name="Challenge 6"/>
+              <a:t>Imposed constraints (CON)</a:t>
+            </a:r>
+          </a:p>
+        </p:txBody>
+      </p:sp>
+      <p:sp>
+        <p:nvSpPr>
+          <p:cNvPr id="13" name="Stat 6"/>
           <p:cNvSpPr/>
           <p:nvPr/>
         </p:nvSpPr>
         <p:spPr>
           <a:xfrm>
-            <a:off x="8127796" y="4389120"/>
-            <a:ext cx="3515258" cy="1463040"/>
+            <a:off x="3429000" y="3566160"/>
+            <a:ext cx="1005840" cy="731520"/>
           </a:xfrm>
           <a:prstGeom prst="roundRect">
             <a:avLst>
-              <a:gd name="adj" fmla="val 6000"/>
+              <a:gd name="adj" fmla="val 12000"/>
             </a:avLst>
           </a:prstGeom>
           <a:solidFill>
-            <a:srgbClr val="E6EFFB"/>
+            <a:srgbClr val="1D5FB8"/>
           </a:solidFill>
           <a:ln w="12700">
             <a:solidFill>
-              <a:srgbClr val="C7D9F3"/>
+              <a:srgbClr val="1D5FB8"/>
             </a:solidFill>
           </a:ln>
         </p:spPr>
@@ -6145,45 +5495,412 @@
           </a:fontRef>
         </p:style>
         <p:txBody>
+          <a:bodyPr rtlCol="0" anchor="ctr" wrap="square" lIns="109728" rIns="109728" tIns="36576" bIns="36576"/>
+          <a:lstStyle/>
+          <a:p>
+            <a:pPr algn="ctr"/>
+            <a:r>
+              <a:rPr sz="2600" b="1" i="0">
+                <a:solidFill>
+                  <a:srgbClr val="FFFFFF"/>
+                </a:solidFill>
+                <a:latin typeface="Segoe UI"/>
+              </a:rPr>
+              <a:t>24</a:t>
+            </a:r>
+          </a:p>
+        </p:txBody>
+      </p:sp>
+      <p:sp>
+        <p:nvSpPr>
+          <p:cNvPr id="14" name="Stat 6 label"/>
+          <p:cNvSpPr txBox="1"/>
+          <p:nvPr/>
+        </p:nvSpPr>
+        <p:spPr>
+          <a:xfrm>
+            <a:off x="4526280" y="3566160"/>
+            <a:ext cx="1645920" cy="731520"/>
+          </a:xfrm>
+          <a:prstGeom prst="rect">
+            <a:avLst/>
+          </a:prstGeom>
+          <a:noFill/>
+        </p:spPr>
+        <p:txBody>
+          <a:bodyPr wrap="square" anchor="ctr">
+            <a:spAutoFit/>
+          </a:bodyPr>
+          <a:lstStyle/>
+          <a:p>
+            <a:r>
+              <a:rPr sz="1300" b="0" i="0">
+                <a:solidFill>
+                  <a:srgbClr val="243B53"/>
+                </a:solidFill>
+                <a:latin typeface="Segoe UI"/>
+              </a:rPr>
+              <a:t>Business rules (RULE)</a:t>
+            </a:r>
+          </a:p>
+        </p:txBody>
+      </p:sp>
+      <p:sp>
+        <p:nvSpPr>
+          <p:cNvPr id="15" name="Before"/>
+          <p:cNvSpPr/>
+          <p:nvPr/>
+        </p:nvSpPr>
+        <p:spPr>
+          <a:xfrm>
+            <a:off x="548640" y="4754880"/>
+            <a:ext cx="1188720" cy="731520"/>
+          </a:xfrm>
+          <a:prstGeom prst="roundRect">
+            <a:avLst>
+              <a:gd name="adj" fmla="val 12000"/>
+            </a:avLst>
+          </a:prstGeom>
+          <a:solidFill>
+            <a:srgbClr val="B83A2E"/>
+          </a:solidFill>
+          <a:ln w="12700">
+            <a:solidFill>
+              <a:srgbClr val="B83A2E"/>
+            </a:solidFill>
+          </a:ln>
+        </p:spPr>
+        <p:style>
+          <a:lnRef idx="1">
+            <a:schemeClr val="accent1"/>
+          </a:lnRef>
+          <a:fillRef idx="3">
+            <a:schemeClr val="accent1"/>
+          </a:fillRef>
+          <a:effectRef idx="0">
+            <a:schemeClr val="accent1"/>
+          </a:effectRef>
+          <a:fontRef idx="minor">
+            <a:schemeClr val="lt1"/>
+          </a:fontRef>
+        </p:style>
+        <p:txBody>
+          <a:bodyPr rtlCol="0" anchor="ctr" wrap="square" lIns="109728" rIns="109728" tIns="36576" bIns="36576"/>
+          <a:lstStyle/>
+          <a:p>
+            <a:pPr algn="ctr"/>
+            <a:r>
+              <a:rPr sz="2400" b="1" i="0">
+                <a:solidFill>
+                  <a:srgbClr val="FFFFFF"/>
+                </a:solidFill>
+                <a:latin typeface="Segoe UI"/>
+              </a:rPr>
+              <a:t>0%</a:t>
+            </a:r>
+          </a:p>
+        </p:txBody>
+      </p:sp>
+      <p:sp>
+        <p:nvSpPr>
+          <p:cNvPr id="16" name="Arrow"/>
+          <p:cNvSpPr/>
+          <p:nvPr/>
+        </p:nvSpPr>
+        <p:spPr>
+          <a:xfrm>
+            <a:off x="1920240" y="4937760"/>
+            <a:ext cx="640080" cy="365760"/>
+          </a:xfrm>
+          <a:prstGeom prst="rightArrow">
+            <a:avLst/>
+          </a:prstGeom>
+          <a:solidFill>
+            <a:srgbClr val="9FB3C8"/>
+          </a:solidFill>
+          <a:ln w="12700">
+            <a:solidFill>
+              <a:srgbClr val="9FB3C8"/>
+            </a:solidFill>
+          </a:ln>
+        </p:spPr>
+        <p:style>
+          <a:lnRef idx="1">
+            <a:schemeClr val="accent1"/>
+          </a:lnRef>
+          <a:fillRef idx="3">
+            <a:schemeClr val="accent1"/>
+          </a:fillRef>
+          <a:effectRef idx="0">
+            <a:schemeClr val="accent1"/>
+          </a:effectRef>
+          <a:fontRef idx="minor">
+            <a:schemeClr val="lt1"/>
+          </a:fontRef>
+        </p:style>
+        <p:txBody>
+          <a:bodyPr rtlCol="0" anchor="ctr"/>
+          <a:lstStyle/>
+          <a:p>
+            <a:pPr algn="ctr"/>
+          </a:p>
+        </p:txBody>
+      </p:sp>
+      <p:sp>
+        <p:nvSpPr>
+          <p:cNvPr id="17" name="After"/>
+          <p:cNvSpPr/>
+          <p:nvPr/>
+        </p:nvSpPr>
+        <p:spPr>
+          <a:xfrm>
+            <a:off x="2743200" y="4754880"/>
+            <a:ext cx="1188720" cy="731520"/>
+          </a:xfrm>
+          <a:prstGeom prst="roundRect">
+            <a:avLst>
+              <a:gd name="adj" fmla="val 12000"/>
+            </a:avLst>
+          </a:prstGeom>
+          <a:solidFill>
+            <a:srgbClr val="0B625B"/>
+          </a:solidFill>
+          <a:ln w="12700">
+            <a:solidFill>
+              <a:srgbClr val="0B625B"/>
+            </a:solidFill>
+          </a:ln>
+        </p:spPr>
+        <p:style>
+          <a:lnRef idx="1">
+            <a:schemeClr val="accent1"/>
+          </a:lnRef>
+          <a:fillRef idx="3">
+            <a:schemeClr val="accent1"/>
+          </a:fillRef>
+          <a:effectRef idx="0">
+            <a:schemeClr val="accent1"/>
+          </a:effectRef>
+          <a:fontRef idx="minor">
+            <a:schemeClr val="lt1"/>
+          </a:fontRef>
+        </p:style>
+        <p:txBody>
+          <a:bodyPr rtlCol="0" anchor="ctr" wrap="square" lIns="109728" rIns="109728" tIns="36576" bIns="36576"/>
+          <a:lstStyle/>
+          <a:p>
+            <a:pPr algn="ctr"/>
+            <a:r>
+              <a:rPr sz="2400" b="1" i="0">
+                <a:solidFill>
+                  <a:srgbClr val="FFFFFF"/>
+                </a:solidFill>
+                <a:latin typeface="Segoe UI"/>
+              </a:rPr>
+              <a:t>100%</a:t>
+            </a:r>
+          </a:p>
+        </p:txBody>
+      </p:sp>
+      <p:sp>
+        <p:nvSpPr>
+          <p:cNvPr id="18" name="Coverage label"/>
+          <p:cNvSpPr txBox="1"/>
+          <p:nvPr/>
+        </p:nvSpPr>
+        <p:spPr>
+          <a:xfrm>
+            <a:off x="4069080" y="4754880"/>
+            <a:ext cx="2011680" cy="731520"/>
+          </a:xfrm>
+          <a:prstGeom prst="rect">
+            <a:avLst/>
+          </a:prstGeom>
+          <a:noFill/>
+        </p:spPr>
+        <p:txBody>
+          <a:bodyPr wrap="square" anchor="ctr">
+            <a:spAutoFit/>
+          </a:bodyPr>
+          <a:lstStyle/>
+          <a:p>
+            <a:r>
+              <a:rPr sz="1300" b="1" i="0">
+                <a:solidFill>
+                  <a:srgbClr val="243B53"/>
+                </a:solidFill>
+                <a:latin typeface="Segoe UI"/>
+              </a:rPr>
+              <a:t>ID traceability: FR-to-AC and FR-to-BG</a:t>
+            </a:r>
+          </a:p>
+        </p:txBody>
+      </p:sp>
+      <p:sp>
+        <p:nvSpPr>
+          <p:cNvPr id="19" name="Still fail"/>
+          <p:cNvSpPr/>
+          <p:nvPr/>
+        </p:nvSpPr>
+        <p:spPr>
+          <a:xfrm>
+            <a:off x="6400800" y="1508760"/>
+            <a:ext cx="5242255" cy="3977639"/>
+          </a:xfrm>
+          <a:prstGeom prst="roundRect">
+            <a:avLst>
+              <a:gd name="adj" fmla="val 6000"/>
+            </a:avLst>
+          </a:prstGeom>
+          <a:solidFill>
+            <a:srgbClr val="FDF4DC"/>
+          </a:solidFill>
+          <a:ln w="12700">
+            <a:solidFill>
+              <a:srgbClr val="F0DCA5"/>
+            </a:solidFill>
+          </a:ln>
+        </p:spPr>
+        <p:style>
+          <a:lnRef idx="1">
+            <a:schemeClr val="accent1"/>
+          </a:lnRef>
+          <a:fillRef idx="3">
+            <a:schemeClr val="accent1"/>
+          </a:fillRef>
+          <a:effectRef idx="0">
+            <a:schemeClr val="accent1"/>
+          </a:effectRef>
+          <a:fontRef idx="minor">
+            <a:schemeClr val="lt1"/>
+          </a:fontRef>
+        </p:style>
+        <p:txBody>
           <a:bodyPr rtlCol="0" anchor="t" wrap="square" lIns="164592" rIns="164592" tIns="128016" bIns="91440"/>
           <a:lstStyle/>
           <a:p>
             <a:pPr algn="l">
               <a:spcAft>
-                <a:spcPts val="600"/>
+                <a:spcPts val="800"/>
               </a:spcAft>
             </a:pPr>
             <a:r>
-              <a:rPr sz="1600" b="1" i="0">
-                <a:solidFill>
-                  <a:srgbClr val="1D5FB8"/>
-                </a:solidFill>
-                <a:latin typeface="Segoe UI"/>
-              </a:rPr>
-              <a:t>Run the value challenge earlier, and blind</a:t>
-            </a:r>
-          </a:p>
-          <a:p>
-            <a:pPr algn="l">
+              <a:rPr sz="1300" b="1" i="0">
+                <a:solidFill>
+                  <a:srgbClr val="B83A2E"/>
+                </a:solidFill>
+                <a:latin typeface="Segoe UI"/>
+              </a:rPr>
+              <a:t>STILL FAIL, ON PURPOSE</a:t>
+            </a:r>
+          </a:p>
+          <a:p>
+            <a:pPr algn="l" marL="228600" indent="-228600">
+              <a:spcAft>
+                <a:spcPts val="800"/>
+              </a:spcAft>
+              <a:buChar char="•"/>
+            </a:pPr>
+            <a:r>
+              <a:rPr sz="1400" b="0" i="0">
+                <a:solidFill>
+                  <a:srgbClr val="243B53"/>
+                </a:solidFill>
+                <a:latin typeface="Segoe UI"/>
+              </a:rPr>
+              <a:t>Relabel: 68 BR and 12 OBJ rows mapped, four compound rows split, no meaning changed</a:t>
+            </a:r>
+          </a:p>
+          <a:p>
+            <a:pPr algn="l" marL="228600" indent="-228600">
+              <a:spcAft>
+                <a:spcPts val="800"/>
+              </a:spcAft>
+              <a:buChar char="•"/>
+            </a:pPr>
+            <a:r>
+              <a:rPr sz="1400" b="0" i="0">
+                <a:solidFill>
+                  <a:srgbClr val="243B53"/>
+                </a:solidFill>
+                <a:latin typeface="Segoe UI"/>
+              </a:rPr>
+              <a:t>Extracted: FR-022 split into FR-022 and RULE-023; CON-004 sent to Legal to validate its source</a:t>
+            </a:r>
+          </a:p>
+          <a:p>
+            <a:pPr algn="l" marL="228600" indent="-228600">
+              <a:spcAft>
+                <a:spcPts val="800"/>
+              </a:spcAft>
+              <a:buChar char="•"/>
+            </a:pPr>
+            <a:r>
+              <a:rPr sz="1400" b="0" i="0">
+                <a:solidFill>
+                  <a:srgbClr val="243B53"/>
+                </a:solidFill>
+                <a:latin typeface="Segoe UI"/>
+              </a:rPr>
+              <a:t>Seven business goals still lack a numeric target; NFR-009 thresholds need owner decisions</a:t>
+            </a:r>
+          </a:p>
+          <a:p>
+            <a:pPr algn="l" marL="228600" indent="-228600">
+              <a:spcAft>
+                <a:spcPts val="800"/>
+              </a:spcAft>
+              <a:buChar char="•"/>
+            </a:pPr>
+            <a:r>
+              <a:rPr sz="1400" b="0" i="0">
+                <a:solidFill>
+                  <a:srgbClr val="243B53"/>
+                </a:solidFill>
+                <a:latin typeface="Segoe UI"/>
+              </a:rPr>
+              <a:t>Six runs to v0.5.0: four new findings on v0.3.0, all fixed; none since</a:t>
+            </a:r>
+          </a:p>
+          <a:p>
+            <a:pPr algn="l" marL="228600" indent="-228600">
+              <a:spcAft>
+                <a:spcPts val="800"/>
+              </a:spcAft>
+              <a:buChar char="•"/>
+            </a:pPr>
+            <a:r>
+              <a:rPr sz="1400" b="0" i="0">
+                <a:solidFill>
+                  <a:srgbClr val="243B53"/>
+                </a:solidFill>
+                <a:latin typeface="Segoe UI"/>
+              </a:rPr>
+              <a:t>Advisory: rewrite AC as Given/When/Then before PRD handoff</a:t>
+            </a:r>
+          </a:p>
+          <a:p>
+            <a:pPr algn="l" marL="228600" indent="-228600">
               <a:spcAft>
                 <a:spcPts val="0"/>
               </a:spcAft>
+              <a:buChar char="•"/>
             </a:pPr>
             <a:r>
-              <a:rPr sz="1300" b="0" i="0">
-                <a:solidFill>
-                  <a:srgbClr val="243B53"/>
-                </a:solidFill>
-                <a:latin typeface="Segoe UI"/>
-              </a:rPr>
-              <a:t>It came after eight BRD revisions, and the roles could read my addendum. One pass without it would test for priming.</a:t>
-            </a:r>
-          </a:p>
-        </p:txBody>
-      </p:sp>
-      <p:sp>
-        <p:nvSpPr>
-          <p:cNvPr id="11" name="Source"/>
+              <a:rPr sz="1400" b="1" i="0">
+                <a:solidFill>
+                  <a:srgbClr val="102A43"/>
+                </a:solidFill>
+                <a:latin typeface="Segoe UI"/>
+              </a:rPr>
+              <a:t>I did not invent targets to pass the gate</a:t>
+            </a:r>
+          </a:p>
+        </p:txBody>
+      </p:sp>
+      <p:sp>
+        <p:nvSpPr>
+          <p:cNvPr id="20" name="Source"/>
           <p:cNvSpPr txBox="1"/>
           <p:nvPr/>
         </p:nvSpPr>
@@ -6210,7 +5927,7 @@
                 </a:solidFill>
                 <a:latin typeface="Segoe UI"/>
               </a:rPr>
-              <a:t>Sources: docs/reference/log.md (Conventions; corrections, 25 to 26 Sep 2026); agent-request-challenge.md (Divergences, Limitations); git log.</a:t>
+              <a:t>Sources: BRD v0.5.0 frontmatter and Requirements Traceability; .copilot-tracking/brd-sessions/agentic-retrofit-programme.quality-report.yml (Runs 1 to 6); log.md (26 Sep 2026).</a:t>
             </a:r>
           </a:p>
         </p:txBody>
@@ -6270,21 +5987,21 @@
                 </a:solidFill>
                 <a:latin typeface="Segoe UI"/>
               </a:rPr>
-              <a:t>The repo works as a second brain, so knowledge compounds</a:t>
-            </a:r>
-          </a:p>
-        </p:txBody>
-      </p:sp>
-      <p:sp>
-        <p:nvSpPr>
-          <p:cNvPr id="3" name="Col A head"/>
+              <a:t>Keeping evidence honest was hard; here is what I would change</a:t>
+            </a:r>
+          </a:p>
+        </p:txBody>
+      </p:sp>
+      <p:sp>
+        <p:nvSpPr>
+          <p:cNvPr id="3" name="Challenges head"/>
           <p:cNvSpPr txBox="1"/>
           <p:nvPr/>
         </p:nvSpPr>
         <p:spPr>
           <a:xfrm>
             <a:off x="548640" y="1417320"/>
-            <a:ext cx="2743200" cy="320040"/>
+            <a:ext cx="11094415" cy="274320"/>
           </a:xfrm>
           <a:prstGeom prst="rect">
             <a:avLst/>
@@ -6292,7 +6009,7 @@
           <a:noFill/>
         </p:spPr>
         <p:txBody>
-          <a:bodyPr wrap="square">
+          <a:bodyPr wrap="square" tIns="0" bIns="0">
             <a:spAutoFit/>
           </a:bodyPr>
           <a:lstStyle/>
@@ -6300,25 +6017,59 @@
             <a:r>
               <a:rPr sz="1200" b="1" i="0">
                 <a:solidFill>
-                  <a:srgbClr val="B83A2E"/>
-                </a:solidFill>
-                <a:latin typeface="Segoe UI"/>
-              </a:rPr>
-              <a:t>PROBLEM DOCUMENTS</a:t>
-            </a:r>
-          </a:p>
-        </p:txBody>
-      </p:sp>
-      <p:sp>
-        <p:nvSpPr>
-          <p:cNvPr id="4" name="Problem 1"/>
+                  <a:srgbClr val="0B625B"/>
+                </a:solidFill>
+                <a:latin typeface="Segoe UI"/>
+              </a:rPr>
+              <a:t>CHALLENGES</a:t>
+            </a:r>
+          </a:p>
+        </p:txBody>
+      </p:sp>
+      <p:sp>
+        <p:nvSpPr>
+          <p:cNvPr id="4" name="Lessons head"/>
+          <p:cNvSpPr txBox="1"/>
+          <p:nvPr/>
+        </p:nvSpPr>
+        <p:spPr>
+          <a:xfrm>
+            <a:off x="548640" y="3840480"/>
+            <a:ext cx="11094415" cy="274320"/>
+          </a:xfrm>
+          <a:prstGeom prst="rect">
+            <a:avLst/>
+          </a:prstGeom>
+          <a:noFill/>
+        </p:spPr>
+        <p:txBody>
+          <a:bodyPr wrap="square" tIns="0" bIns="0">
+            <a:spAutoFit/>
+          </a:bodyPr>
+          <a:lstStyle/>
+          <a:p>
+            <a:r>
+              <a:rPr sz="1200" b="1" i="0">
+                <a:solidFill>
+                  <a:srgbClr val="1D5FB8"/>
+                </a:solidFill>
+                <a:latin typeface="Segoe UI"/>
+              </a:rPr>
+              <a:t>WHAT I WOULD DO DIFFERENTLY</a:t>
+            </a:r>
+          </a:p>
+        </p:txBody>
+      </p:sp>
+      <p:sp>
+        <p:nvSpPr>
+          <p:cNvPr id="5" name="Challenge 1"/>
           <p:cNvSpPr/>
           <p:nvPr/>
         </p:nvSpPr>
         <p:spPr>
           <a:xfrm>
-            <a:off x="548640" y="2011680"/>
-            <a:ext cx="2743200" cy="868680"/>
+            <a:off x="548640" y="1965960"/>
+            <a:ext cx="3515258" cy="1600200"/>
           </a:xfrm>
           <a:prstGeom prst="roundRect">
             <a:avLst>
@@ -6326,11 +6077,11 @@
             </a:avLst>
           </a:prstGeom>
           <a:solidFill>
-            <a:srgbClr val="FBEAE8"/>
+            <a:srgbClr val="F0F4F8"/>
           </a:solidFill>
           <a:ln w="12700">
             <a:solidFill>
-              <a:srgbClr val="F3C7C1"/>
+              <a:srgbClr val="D9E2EC"/>
             </a:solidFill>
           </a:ln>
         </p:spPr>
@@ -6349,22 +6100,22 @@
           </a:fontRef>
         </p:style>
         <p:txBody>
-          <a:bodyPr rtlCol="0" anchor="ctr" wrap="square" lIns="164592" rIns="164592" tIns="128016" bIns="91440"/>
+          <a:bodyPr rtlCol="0" anchor="t" wrap="square" lIns="164592" rIns="164592" tIns="128016" bIns="91440"/>
           <a:lstStyle/>
           <a:p>
             <a:pPr algn="l">
               <a:spcAft>
-                <a:spcPts val="200"/>
+                <a:spcPts val="600"/>
               </a:spcAft>
             </a:pPr>
             <a:r>
-              <a:rPr sz="1400" b="1" i="0">
-                <a:solidFill>
-                  <a:srgbClr val="102A43"/>
-                </a:solidFill>
-                <a:latin typeface="Segoe UI"/>
-              </a:rPr>
-              <a:t>Original case study</a:t>
+              <a:rPr sz="1600" b="1" i="0">
+                <a:solidFill>
+                  <a:srgbClr val="0B625B"/>
+                </a:solidFill>
+                <a:latin typeface="Segoe UI"/>
+              </a:rPr>
+              <a:t>No company data</a:t>
             </a:r>
           </a:p>
           <a:p>
@@ -6374,27 +6125,27 @@
               </a:spcAft>
             </a:pPr>
             <a:r>
-              <a:rPr sz="1200" b="0" i="0">
+              <a:rPr sz="1300" b="0" i="0">
                 <a:solidFill>
                   <a:srgbClr val="243B53"/>
                 </a:solidFill>
                 <a:latin typeface="Segoe UI"/>
               </a:rPr>
-              <a:t>Immutable record of the request</a:t>
-            </a:r>
-          </a:p>
-        </p:txBody>
-      </p:sp>
-      <p:sp>
-        <p:nvSpPr>
-          <p:cNvPr id="5" name="Problem 2"/>
+              <a:t>The company is fictional. I modelled tenure, residents and finances from sector medians and labelled every value as an estimate.</a:t>
+            </a:r>
+          </a:p>
+        </p:txBody>
+      </p:sp>
+      <p:sp>
+        <p:nvSpPr>
+          <p:cNvPr id="6" name="Challenge 2"/>
           <p:cNvSpPr/>
           <p:nvPr/>
         </p:nvSpPr>
         <p:spPr>
           <a:xfrm>
-            <a:off x="548640" y="3154680"/>
-            <a:ext cx="2743200" cy="868680"/>
+            <a:off x="4338218" y="1965960"/>
+            <a:ext cx="3515258" cy="1600200"/>
           </a:xfrm>
           <a:prstGeom prst="roundRect">
             <a:avLst>
@@ -6402,11 +6153,11 @@
             </a:avLst>
           </a:prstGeom>
           <a:solidFill>
-            <a:srgbClr val="FBEAE8"/>
+            <a:srgbClr val="F0F4F8"/>
           </a:solidFill>
           <a:ln w="12700">
             <a:solidFill>
-              <a:srgbClr val="F3C7C1"/>
+              <a:srgbClr val="D9E2EC"/>
             </a:solidFill>
           </a:ln>
         </p:spPr>
@@ -6425,22 +6176,22 @@
           </a:fontRef>
         </p:style>
         <p:txBody>
-          <a:bodyPr rtlCol="0" anchor="ctr" wrap="square" lIns="164592" rIns="164592" tIns="128016" bIns="91440"/>
+          <a:bodyPr rtlCol="0" anchor="t" wrap="square" lIns="164592" rIns="164592" tIns="128016" bIns="91440"/>
           <a:lstStyle/>
           <a:p>
             <a:pPr algn="l">
               <a:spcAft>
-                <a:spcPts val="200"/>
+                <a:spcPts val="600"/>
               </a:spcAft>
             </a:pPr>
             <a:r>
-              <a:rPr sz="1400" b="1" i="0">
-                <a:solidFill>
-                  <a:srgbClr val="102A43"/>
-                </a:solidFill>
-                <a:latin typeface="Segoe UI"/>
-              </a:rPr>
-              <a:t>Addendum</a:t>
+              <a:rPr sz="1600" b="1" i="0">
+                <a:solidFill>
+                  <a:srgbClr val="0B625B"/>
+                </a:solidFill>
+                <a:latin typeface="Segoe UI"/>
+              </a:rPr>
+              <a:t>Agents that sound certain</a:t>
             </a:r>
           </a:p>
           <a:p>
@@ -6450,27 +6201,27 @@
               </a:spcAft>
             </a:pPr>
             <a:r>
-              <a:rPr sz="1200" b="0" i="0">
+              <a:rPr sz="1300" b="0" i="0">
                 <a:solidFill>
                   <a:srgbClr val="243B53"/>
                 </a:solidFill>
                 <a:latin typeface="Segoe UI"/>
               </a:rPr>
-              <a:t>Evolving assessment and proposal</a:t>
-            </a:r>
-          </a:p>
-        </p:txBody>
-      </p:sp>
-      <p:sp>
-        <p:nvSpPr>
-          <p:cNvPr id="6" name="Problem 3"/>
+              <a:t>Role answers are hypotheses, and the roles share my framing. Divergences stay open: L4 quality flags, L3 digital booking.</a:t>
+            </a:r>
+          </a:p>
+        </p:txBody>
+      </p:sp>
+      <p:sp>
+        <p:nvSpPr>
+          <p:cNvPr id="7" name="Challenge 3"/>
           <p:cNvSpPr/>
           <p:nvPr/>
         </p:nvSpPr>
         <p:spPr>
           <a:xfrm>
-            <a:off x="548640" y="4297680"/>
-            <a:ext cx="2743200" cy="868680"/>
+            <a:off x="8127796" y="1965960"/>
+            <a:ext cx="3515258" cy="1600200"/>
           </a:xfrm>
           <a:prstGeom prst="roundRect">
             <a:avLst>
@@ -6478,11 +6229,11 @@
             </a:avLst>
           </a:prstGeom>
           <a:solidFill>
-            <a:srgbClr val="FBEAE8"/>
+            <a:srgbClr val="F0F4F8"/>
           </a:solidFill>
           <a:ln w="12700">
             <a:solidFill>
-              <a:srgbClr val="F3C7C1"/>
+              <a:srgbClr val="D9E2EC"/>
             </a:solidFill>
           </a:ln>
         </p:spPr>
@@ -6501,22 +6252,22 @@
           </a:fontRef>
         </p:style>
         <p:txBody>
-          <a:bodyPr rtlCol="0" anchor="ctr" wrap="square" lIns="164592" rIns="164592" tIns="128016" bIns="91440"/>
+          <a:bodyPr rtlCol="0" anchor="t" wrap="square" lIns="164592" rIns="164592" tIns="128016" bIns="91440"/>
           <a:lstStyle/>
           <a:p>
             <a:pPr algn="l">
               <a:spcAft>
-                <a:spcPts val="200"/>
+                <a:spcPts val="600"/>
               </a:spcAft>
             </a:pPr>
             <a:r>
-              <a:rPr sz="1400" b="1" i="0">
-                <a:solidFill>
-                  <a:srgbClr val="102A43"/>
-                </a:solidFill>
-                <a:latin typeface="Segoe UI"/>
-              </a:rPr>
-              <a:t>BRD</a:t>
+              <a:rPr sz="1600" b="1" i="0">
+                <a:solidFill>
+                  <a:srgbClr val="0B625B"/>
+                </a:solidFill>
+                <a:latin typeface="Segoe UI"/>
+              </a:rPr>
+              <a:t>Sources that disagree</a:t>
             </a:r>
           </a:p>
           <a:p>
@@ -6526,703 +6277,27 @@
               </a:spcAft>
             </a:pPr>
             <a:r>
-              <a:rPr sz="1200" b="0" i="0">
+              <a:rPr sz="1300" b="0" i="0">
                 <a:solidFill>
                   <a:srgbClr val="243B53"/>
                 </a:solidFill>
                 <a:latin typeface="Segoe UI"/>
               </a:rPr>
-              <a:t>Requirements with stable IDs</a:t>
-            </a:r>
-          </a:p>
-        </p:txBody>
-      </p:sp>
-      <p:sp>
-        <p:nvSpPr>
-          <p:cNvPr id="7" name="Col B head"/>
-          <p:cNvSpPr txBox="1"/>
-          <p:nvPr/>
-        </p:nvSpPr>
-        <p:spPr>
-          <a:xfrm>
-            <a:off x="3566160" y="1417320"/>
-            <a:ext cx="5120640" cy="320040"/>
-          </a:xfrm>
-          <a:prstGeom prst="rect">
-            <a:avLst/>
-          </a:prstGeom>
-          <a:noFill/>
-        </p:spPr>
-        <p:txBody>
-          <a:bodyPr wrap="square">
-            <a:spAutoFit/>
-          </a:bodyPr>
-          <a:lstStyle/>
-          <a:p>
-            <a:r>
-              <a:rPr sz="1200" b="1" i="0">
-                <a:solidFill>
-                  <a:srgbClr val="0B625B"/>
-                </a:solidFill>
-                <a:latin typeface="Segoe UI"/>
-              </a:rPr>
-              <a:t>DOCS/REFERENCE: THE KNOWLEDGE BASE</a:t>
-            </a:r>
-          </a:p>
-        </p:txBody>
-      </p:sp>
-      <p:sp>
-        <p:nvSpPr>
-          <p:cNvPr id="8" name="KB 1"/>
+              <a:t>Interest cover 91% or 87%; fuel poverty corrected from 10.0% to 11.6%; EPC C final policy, not commenced law. Flagged, not resolved.</a:t>
+            </a:r>
+          </a:p>
+        </p:txBody>
+      </p:sp>
+      <p:sp>
+        <p:nvSpPr>
+          <p:cNvPr id="8" name="Challenge 4"/>
           <p:cNvSpPr/>
           <p:nvPr/>
         </p:nvSpPr>
         <p:spPr>
           <a:xfrm>
-            <a:off x="3566160" y="2011680"/>
-            <a:ext cx="2423160" cy="594360"/>
-          </a:xfrm>
-          <a:prstGeom prst="roundRect">
-            <a:avLst>
-              <a:gd name="adj" fmla="val 6000"/>
-            </a:avLst>
-          </a:prstGeom>
-          <a:solidFill>
-            <a:srgbClr val="E3F4F1"/>
-          </a:solidFill>
-          <a:ln w="12700">
-            <a:solidFill>
-              <a:srgbClr val="B7E2DA"/>
-            </a:solidFill>
-          </a:ln>
-        </p:spPr>
-        <p:style>
-          <a:lnRef idx="1">
-            <a:schemeClr val="accent1"/>
-          </a:lnRef>
-          <a:fillRef idx="3">
-            <a:schemeClr val="accent1"/>
-          </a:fillRef>
-          <a:effectRef idx="0">
-            <a:schemeClr val="accent1"/>
-          </a:effectRef>
-          <a:fontRef idx="minor">
-            <a:schemeClr val="lt1"/>
-          </a:fontRef>
-        </p:style>
-        <p:txBody>
-          <a:bodyPr rtlCol="0" anchor="ctr" wrap="square" lIns="109728" rIns="109728" tIns="128016" bIns="91440"/>
-          <a:lstStyle/>
-          <a:p>
-            <a:pPr algn="l">
-              <a:spcAft>
-                <a:spcPts val="0"/>
-              </a:spcAft>
-            </a:pPr>
-            <a:r>
-              <a:rPr sz="1300" b="1" i="0">
-                <a:solidFill>
-                  <a:srgbClr val="0B625B"/>
-                </a:solidFill>
-                <a:latin typeface="Segoe UI"/>
-              </a:rPr>
-              <a:t>Index</a:t>
-            </a:r>
-          </a:p>
-          <a:p>
-            <a:pPr algn="l">
-              <a:spcAft>
-                <a:spcPts val="0"/>
-              </a:spcAft>
-            </a:pPr>
-            <a:r>
-              <a:rPr sz="1100" b="0" i="0">
-                <a:solidFill>
-                  <a:srgbClr val="243B53"/>
-                </a:solidFill>
-                <a:latin typeface="Segoe UI"/>
-              </a:rPr>
-              <a:t>README task routing</a:t>
-            </a:r>
-          </a:p>
-        </p:txBody>
-      </p:sp>
-      <p:sp>
-        <p:nvSpPr>
-          <p:cNvPr id="9" name="KB 2"/>
-          <p:cNvSpPr/>
-          <p:nvPr/>
-        </p:nvSpPr>
-        <p:spPr>
-          <a:xfrm>
-            <a:off x="6263640" y="2011680"/>
-            <a:ext cx="2423160" cy="594360"/>
-          </a:xfrm>
-          <a:prstGeom prst="roundRect">
-            <a:avLst>
-              <a:gd name="adj" fmla="val 6000"/>
-            </a:avLst>
-          </a:prstGeom>
-          <a:solidFill>
-            <a:srgbClr val="E3F4F1"/>
-          </a:solidFill>
-          <a:ln w="12700">
-            <a:solidFill>
-              <a:srgbClr val="B7E2DA"/>
-            </a:solidFill>
-          </a:ln>
-        </p:spPr>
-        <p:style>
-          <a:lnRef idx="1">
-            <a:schemeClr val="accent1"/>
-          </a:lnRef>
-          <a:fillRef idx="3">
-            <a:schemeClr val="accent1"/>
-          </a:fillRef>
-          <a:effectRef idx="0">
-            <a:schemeClr val="accent1"/>
-          </a:effectRef>
-          <a:fontRef idx="minor">
-            <a:schemeClr val="lt1"/>
-          </a:fontRef>
-        </p:style>
-        <p:txBody>
-          <a:bodyPr rtlCol="0" anchor="ctr" wrap="square" lIns="109728" rIns="109728" tIns="128016" bIns="91440"/>
-          <a:lstStyle/>
-          <a:p>
-            <a:pPr algn="l">
-              <a:spcAft>
-                <a:spcPts val="0"/>
-              </a:spcAft>
-            </a:pPr>
-            <a:r>
-              <a:rPr sz="1300" b="1" i="0">
-                <a:solidFill>
-                  <a:srgbClr val="0B625B"/>
-                </a:solidFill>
-                <a:latin typeface="Segoe UI"/>
-              </a:rPr>
-              <a:t>Sources</a:t>
-            </a:r>
-          </a:p>
-          <a:p>
-            <a:pPr algn="l">
-              <a:spcAft>
-                <a:spcPts val="0"/>
-              </a:spcAft>
-            </a:pPr>
-            <a:r>
-              <a:rPr sz="1100" b="0" i="0">
-                <a:solidFill>
-                  <a:srgbClr val="243B53"/>
-                </a:solidFill>
-                <a:latin typeface="Segoe UI"/>
-              </a:rPr>
-              <a:t>Immutable dated snapshots</a:t>
-            </a:r>
-          </a:p>
-        </p:txBody>
-      </p:sp>
-      <p:sp>
-        <p:nvSpPr>
-          <p:cNvPr id="10" name="KB 3"/>
-          <p:cNvSpPr/>
-          <p:nvPr/>
-        </p:nvSpPr>
-        <p:spPr>
-          <a:xfrm>
-            <a:off x="3566160" y="2880360"/>
-            <a:ext cx="2423160" cy="594360"/>
-          </a:xfrm>
-          <a:prstGeom prst="roundRect">
-            <a:avLst>
-              <a:gd name="adj" fmla="val 6000"/>
-            </a:avLst>
-          </a:prstGeom>
-          <a:solidFill>
-            <a:srgbClr val="E3F4F1"/>
-          </a:solidFill>
-          <a:ln w="12700">
-            <a:solidFill>
-              <a:srgbClr val="B7E2DA"/>
-            </a:solidFill>
-          </a:ln>
-        </p:spPr>
-        <p:style>
-          <a:lnRef idx="1">
-            <a:schemeClr val="accent1"/>
-          </a:lnRef>
-          <a:fillRef idx="3">
-            <a:schemeClr val="accent1"/>
-          </a:fillRef>
-          <a:effectRef idx="0">
-            <a:schemeClr val="accent1"/>
-          </a:effectRef>
-          <a:fontRef idx="minor">
-            <a:schemeClr val="lt1"/>
-          </a:fontRef>
-        </p:style>
-        <p:txBody>
-          <a:bodyPr rtlCol="0" anchor="ctr" wrap="square" lIns="109728" rIns="109728" tIns="128016" bIns="91440"/>
-          <a:lstStyle/>
-          <a:p>
-            <a:pPr algn="l">
-              <a:spcAft>
-                <a:spcPts val="0"/>
-              </a:spcAft>
-            </a:pPr>
-            <a:r>
-              <a:rPr sz="1300" b="1" i="0">
-                <a:solidFill>
-                  <a:srgbClr val="0B625B"/>
-                </a:solidFill>
-                <a:latin typeface="Segoe UI"/>
-              </a:rPr>
-              <a:t>Syntheses</a:t>
-            </a:r>
-          </a:p>
-          <a:p>
-            <a:pPr algn="l">
-              <a:spcAft>
-                <a:spcPts val="0"/>
-              </a:spcAft>
-            </a:pPr>
-            <a:r>
-              <a:rPr sz="1100" b="0" i="0">
-                <a:solidFill>
-                  <a:srgbClr val="243B53"/>
-                </a:solidFill>
-                <a:latin typeface="Segoe UI"/>
-              </a:rPr>
-              <a:t>Cited sector and company research</a:t>
-            </a:r>
-          </a:p>
-        </p:txBody>
-      </p:sp>
-      <p:sp>
-        <p:nvSpPr>
-          <p:cNvPr id="11" name="KB 4"/>
-          <p:cNvSpPr/>
-          <p:nvPr/>
-        </p:nvSpPr>
-        <p:spPr>
-          <a:xfrm>
-            <a:off x="6263640" y="2880360"/>
-            <a:ext cx="2423160" cy="594360"/>
-          </a:xfrm>
-          <a:prstGeom prst="roundRect">
-            <a:avLst>
-              <a:gd name="adj" fmla="val 6000"/>
-            </a:avLst>
-          </a:prstGeom>
-          <a:solidFill>
-            <a:srgbClr val="E3F4F1"/>
-          </a:solidFill>
-          <a:ln w="12700">
-            <a:solidFill>
-              <a:srgbClr val="B7E2DA"/>
-            </a:solidFill>
-          </a:ln>
-        </p:spPr>
-        <p:style>
-          <a:lnRef idx="1">
-            <a:schemeClr val="accent1"/>
-          </a:lnRef>
-          <a:fillRef idx="3">
-            <a:schemeClr val="accent1"/>
-          </a:fillRef>
-          <a:effectRef idx="0">
-            <a:schemeClr val="accent1"/>
-          </a:effectRef>
-          <a:fontRef idx="minor">
-            <a:schemeClr val="lt1"/>
-          </a:fontRef>
-        </p:style>
-        <p:txBody>
-          <a:bodyPr rtlCol="0" anchor="ctr" wrap="square" lIns="109728" rIns="109728" tIns="128016" bIns="91440"/>
-          <a:lstStyle/>
-          <a:p>
-            <a:pPr algn="l">
-              <a:spcAft>
-                <a:spcPts val="0"/>
-              </a:spcAft>
-            </a:pPr>
-            <a:r>
-              <a:rPr sz="1300" b="1" i="0">
-                <a:solidFill>
-                  <a:srgbClr val="0B625B"/>
-                </a:solidFill>
-                <a:latin typeface="Segoe UI"/>
-              </a:rPr>
-              <a:t>Method</a:t>
-            </a:r>
-          </a:p>
-          <a:p>
-            <a:pPr algn="l">
-              <a:spcAft>
-                <a:spcPts val="0"/>
-              </a:spcAft>
-            </a:pPr>
-            <a:r>
-              <a:rPr sz="1100" b="0" i="0">
-                <a:solidFill>
-                  <a:srgbClr val="243B53"/>
-                </a:solidFill>
-                <a:latin typeface="Segoe UI"/>
-              </a:rPr>
-              <a:t>AMA training and prompts</a:t>
-            </a:r>
-          </a:p>
-        </p:txBody>
-      </p:sp>
-      <p:sp>
-        <p:nvSpPr>
-          <p:cNvPr id="12" name="KB 5"/>
-          <p:cNvSpPr/>
-          <p:nvPr/>
-        </p:nvSpPr>
-        <p:spPr>
-          <a:xfrm>
-            <a:off x="3566160" y="3749039"/>
-            <a:ext cx="2423160" cy="594360"/>
-          </a:xfrm>
-          <a:prstGeom prst="roundRect">
-            <a:avLst>
-              <a:gd name="adj" fmla="val 6000"/>
-            </a:avLst>
-          </a:prstGeom>
-          <a:solidFill>
-            <a:srgbClr val="E3F4F1"/>
-          </a:solidFill>
-          <a:ln w="12700">
-            <a:solidFill>
-              <a:srgbClr val="B7E2DA"/>
-            </a:solidFill>
-          </a:ln>
-        </p:spPr>
-        <p:style>
-          <a:lnRef idx="1">
-            <a:schemeClr val="accent1"/>
-          </a:lnRef>
-          <a:fillRef idx="3">
-            <a:schemeClr val="accent1"/>
-          </a:fillRef>
-          <a:effectRef idx="0">
-            <a:schemeClr val="accent1"/>
-          </a:effectRef>
-          <a:fontRef idx="minor">
-            <a:schemeClr val="lt1"/>
-          </a:fontRef>
-        </p:style>
-        <p:txBody>
-          <a:bodyPr rtlCol="0" anchor="ctr" wrap="square" lIns="109728" rIns="109728" tIns="128016" bIns="91440"/>
-          <a:lstStyle/>
-          <a:p>
-            <a:pPr algn="l">
-              <a:spcAft>
-                <a:spcPts val="0"/>
-              </a:spcAft>
-            </a:pPr>
-            <a:r>
-              <a:rPr sz="1300" b="1" i="0">
-                <a:solidFill>
-                  <a:srgbClr val="0B625B"/>
-                </a:solidFill>
-                <a:latin typeface="Segoe UI"/>
-              </a:rPr>
-              <a:t>Resources</a:t>
-            </a:r>
-          </a:p>
-          <a:p>
-            <a:pPr algn="l">
-              <a:spcAft>
-                <a:spcPts val="0"/>
-              </a:spcAft>
-            </a:pPr>
-            <a:r>
-              <a:rPr sz="1100" b="0" i="0">
-                <a:solidFill>
-                  <a:srgbClr val="243B53"/>
-                </a:solidFill>
-                <a:latin typeface="Segoe UI"/>
-              </a:rPr>
-              <a:t>Industry Hub findings</a:t>
-            </a:r>
-          </a:p>
-        </p:txBody>
-      </p:sp>
-      <p:sp>
-        <p:nvSpPr>
-          <p:cNvPr id="13" name="KB 6"/>
-          <p:cNvSpPr/>
-          <p:nvPr/>
-        </p:nvSpPr>
-        <p:spPr>
-          <a:xfrm>
-            <a:off x="6263640" y="3749039"/>
-            <a:ext cx="2423160" cy="594360"/>
-          </a:xfrm>
-          <a:prstGeom prst="roundRect">
-            <a:avLst>
-              <a:gd name="adj" fmla="val 6000"/>
-            </a:avLst>
-          </a:prstGeom>
-          <a:solidFill>
-            <a:srgbClr val="E3F4F1"/>
-          </a:solidFill>
-          <a:ln w="12700">
-            <a:solidFill>
-              <a:srgbClr val="B7E2DA"/>
-            </a:solidFill>
-          </a:ln>
-        </p:spPr>
-        <p:style>
-          <a:lnRef idx="1">
-            <a:schemeClr val="accent1"/>
-          </a:lnRef>
-          <a:fillRef idx="3">
-            <a:schemeClr val="accent1"/>
-          </a:fillRef>
-          <a:effectRef idx="0">
-            <a:schemeClr val="accent1"/>
-          </a:effectRef>
-          <a:fontRef idx="minor">
-            <a:schemeClr val="lt1"/>
-          </a:fontRef>
-        </p:style>
-        <p:txBody>
-          <a:bodyPr rtlCol="0" anchor="ctr" wrap="square" lIns="109728" rIns="109728" tIns="128016" bIns="91440"/>
-          <a:lstStyle/>
-          <a:p>
-            <a:pPr algn="l">
-              <a:spcAft>
-                <a:spcPts val="0"/>
-              </a:spcAft>
-            </a:pPr>
-            <a:r>
-              <a:rPr sz="1300" b="1" i="0">
-                <a:solidFill>
-                  <a:srgbClr val="0B625B"/>
-                </a:solidFill>
-                <a:latin typeface="Segoe UI"/>
-              </a:rPr>
-              <a:t>Memory</a:t>
-            </a:r>
-          </a:p>
-          <a:p>
-            <a:pPr algn="l">
-              <a:spcAft>
-                <a:spcPts val="0"/>
-              </a:spcAft>
-            </a:pPr>
-            <a:r>
-              <a:rPr sz="1100" b="0" i="0">
-                <a:solidFill>
-                  <a:srgbClr val="243B53"/>
-                </a:solidFill>
-                <a:latin typeface="Segoe UI"/>
-              </a:rPr>
-              <a:t>Owner context, not evidence</a:t>
-            </a:r>
-          </a:p>
-        </p:txBody>
-      </p:sp>
-      <p:sp>
-        <p:nvSpPr>
-          <p:cNvPr id="14" name="KB 7"/>
-          <p:cNvSpPr/>
-          <p:nvPr/>
-        </p:nvSpPr>
-        <p:spPr>
-          <a:xfrm>
-            <a:off x="3566160" y="4617720"/>
-            <a:ext cx="2423160" cy="594360"/>
-          </a:xfrm>
-          <a:prstGeom prst="roundRect">
-            <a:avLst>
-              <a:gd name="adj" fmla="val 6000"/>
-            </a:avLst>
-          </a:prstGeom>
-          <a:solidFill>
-            <a:srgbClr val="E3F4F1"/>
-          </a:solidFill>
-          <a:ln w="12700">
-            <a:solidFill>
-              <a:srgbClr val="B7E2DA"/>
-            </a:solidFill>
-          </a:ln>
-        </p:spPr>
-        <p:style>
-          <a:lnRef idx="1">
-            <a:schemeClr val="accent1"/>
-          </a:lnRef>
-          <a:fillRef idx="3">
-            <a:schemeClr val="accent1"/>
-          </a:fillRef>
-          <a:effectRef idx="0">
-            <a:schemeClr val="accent1"/>
-          </a:effectRef>
-          <a:fontRef idx="minor">
-            <a:schemeClr val="lt1"/>
-          </a:fontRef>
-        </p:style>
-        <p:txBody>
-          <a:bodyPr rtlCol="0" anchor="ctr" wrap="square" lIns="109728" rIns="109728" tIns="128016" bIns="91440"/>
-          <a:lstStyle/>
-          <a:p>
-            <a:pPr algn="l">
-              <a:spcAft>
-                <a:spcPts val="0"/>
-              </a:spcAft>
-            </a:pPr>
-            <a:r>
-              <a:rPr sz="1300" b="1" i="0">
-                <a:solidFill>
-                  <a:srgbClr val="0B625B"/>
-                </a:solidFill>
-                <a:latin typeface="Segoe UI"/>
-              </a:rPr>
-              <a:t>Log</a:t>
-            </a:r>
-          </a:p>
-          <a:p>
-            <a:pPr algn="l">
-              <a:spcAft>
-                <a:spcPts val="0"/>
-              </a:spcAft>
-            </a:pPr>
-            <a:r>
-              <a:rPr sz="1100" b="0" i="0">
-                <a:solidFill>
-                  <a:srgbClr val="243B53"/>
-                </a:solidFill>
-                <a:latin typeface="Segoe UI"/>
-              </a:rPr>
-              <a:t>Append-only changes and contradictions</a:t>
-            </a:r>
-          </a:p>
-        </p:txBody>
-      </p:sp>
-      <p:sp>
-        <p:nvSpPr>
-          <p:cNvPr id="15" name="KB 8"/>
-          <p:cNvSpPr/>
-          <p:nvPr/>
-        </p:nvSpPr>
-        <p:spPr>
-          <a:xfrm>
-            <a:off x="6263640" y="4617720"/>
-            <a:ext cx="2423160" cy="594360"/>
-          </a:xfrm>
-          <a:prstGeom prst="roundRect">
-            <a:avLst>
-              <a:gd name="adj" fmla="val 6000"/>
-            </a:avLst>
-          </a:prstGeom>
-          <a:solidFill>
-            <a:srgbClr val="E3F4F1"/>
-          </a:solidFill>
-          <a:ln w="12700">
-            <a:solidFill>
-              <a:srgbClr val="B7E2DA"/>
-            </a:solidFill>
-          </a:ln>
-        </p:spPr>
-        <p:style>
-          <a:lnRef idx="1">
-            <a:schemeClr val="accent1"/>
-          </a:lnRef>
-          <a:fillRef idx="3">
-            <a:schemeClr val="accent1"/>
-          </a:fillRef>
-          <a:effectRef idx="0">
-            <a:schemeClr val="accent1"/>
-          </a:effectRef>
-          <a:fontRef idx="minor">
-            <a:schemeClr val="lt1"/>
-          </a:fontRef>
-        </p:style>
-        <p:txBody>
-          <a:bodyPr rtlCol="0" anchor="ctr" wrap="square" lIns="109728" rIns="109728" tIns="128016" bIns="91440"/>
-          <a:lstStyle/>
-          <a:p>
-            <a:pPr algn="l">
-              <a:spcAft>
-                <a:spcPts val="0"/>
-              </a:spcAft>
-            </a:pPr>
-            <a:r>
-              <a:rPr sz="1300" b="1" i="0">
-                <a:solidFill>
-                  <a:srgbClr val="0B625B"/>
-                </a:solidFill>
-                <a:latin typeface="Segoe UI"/>
-              </a:rPr>
-              <a:t>Schema</a:t>
-            </a:r>
-          </a:p>
-          <a:p>
-            <a:pPr algn="l">
-              <a:spcAft>
-                <a:spcPts val="0"/>
-              </a:spcAft>
-            </a:pPr>
-            <a:r>
-              <a:rPr sz="1100" b="0" i="0">
-                <a:solidFill>
-                  <a:srgbClr val="243B53"/>
-                </a:solidFill>
-                <a:latin typeface="Segoe UI"/>
-              </a:rPr>
-              <a:t>copilot-instructions rules</a:t>
-            </a:r>
-          </a:p>
-        </p:txBody>
-      </p:sp>
-      <p:sp>
-        <p:nvSpPr>
-          <p:cNvPr id="16" name="Col C head"/>
-          <p:cNvSpPr txBox="1"/>
-          <p:nvPr/>
-        </p:nvSpPr>
-        <p:spPr>
-          <a:xfrm>
-            <a:off x="8961120" y="1417320"/>
-            <a:ext cx="2681935" cy="320040"/>
-          </a:xfrm>
-          <a:prstGeom prst="rect">
-            <a:avLst/>
-          </a:prstGeom>
-          <a:noFill/>
-        </p:spPr>
-        <p:txBody>
-          <a:bodyPr wrap="square">
-            <a:spAutoFit/>
-          </a:bodyPr>
-          <a:lstStyle/>
-          <a:p>
-            <a:r>
-              <a:rPr sz="1200" b="1" i="0">
-                <a:solidFill>
-                  <a:srgbClr val="1D5FB8"/>
-                </a:solidFill>
-                <a:latin typeface="Segoe UI"/>
-              </a:rPr>
-              <a:t>WORKING EVIDENCE</a:t>
-            </a:r>
-          </a:p>
-        </p:txBody>
-      </p:sp>
-      <p:sp>
-        <p:nvSpPr>
-          <p:cNvPr id="17" name="Tracking"/>
-          <p:cNvSpPr/>
-          <p:nvPr/>
-        </p:nvSpPr>
-        <p:spPr>
-          <a:xfrm>
-            <a:off x="8961120" y="2011680"/>
-            <a:ext cx="2681935" cy="1463040"/>
+            <a:off x="548640" y="4389120"/>
+            <a:ext cx="3515258" cy="1463040"/>
           </a:xfrm>
           <a:prstGeom prst="roundRect">
             <a:avLst>
@@ -7258,17 +6333,17 @@
           <a:p>
             <a:pPr algn="l">
               <a:spcAft>
-                <a:spcPts val="200"/>
+                <a:spcPts val="600"/>
               </a:spcAft>
             </a:pPr>
             <a:r>
-              <a:rPr sz="1400" b="1" i="0">
-                <a:solidFill>
-                  <a:srgbClr val="102A43"/>
-                </a:solidFill>
-                <a:latin typeface="Segoe UI"/>
-              </a:rPr>
-              <a:t>.copilot-tracking</a:t>
+              <a:rPr sz="1600" b="1" i="0">
+                <a:solidFill>
+                  <a:srgbClr val="1D5FB8"/>
+                </a:solidFill>
+                <a:latin typeface="Segoe UI"/>
+              </a:rPr>
+              <a:t>Start the log on day one</a:t>
             </a:r>
           </a:p>
           <a:p>
@@ -7278,27 +6353,27 @@
               </a:spcAft>
             </a:pPr>
             <a:r>
-              <a:rPr sz="1200" b="0" i="0">
+              <a:rPr sz="1300" b="0" i="0">
                 <a:solidFill>
                   <a:srgbClr val="243B53"/>
                 </a:solidFill>
                 <a:latin typeface="Segoe UI"/>
               </a:rPr>
-              <a:t>Plans, research, changes, reviews and BRD session state for every workflow</a:t>
-            </a:r>
-          </a:p>
-        </p:txBody>
-      </p:sp>
-      <p:sp>
-        <p:nvSpPr>
-          <p:cNvPr id="18" name="Git"/>
+              <a:t>Log entries before 25 Sep had to be reconstructed from Git history.</a:t>
+            </a:r>
+          </a:p>
+        </p:txBody>
+      </p:sp>
+      <p:sp>
+        <p:nvSpPr>
+          <p:cNvPr id="9" name="Challenge 5"/>
           <p:cNvSpPr/>
           <p:nvPr/>
         </p:nvSpPr>
         <p:spPr>
           <a:xfrm>
-            <a:off x="8961120" y="3749039"/>
-            <a:ext cx="2681935" cy="1463040"/>
+            <a:off x="4338218" y="4389120"/>
+            <a:ext cx="3515258" cy="1463040"/>
           </a:xfrm>
           <a:prstGeom prst="roundRect">
             <a:avLst>
@@ -7334,17 +6409,17 @@
           <a:p>
             <a:pPr algn="l">
               <a:spcAft>
-                <a:spcPts val="200"/>
+                <a:spcPts val="600"/>
               </a:spcAft>
             </a:pPr>
             <a:r>
-              <a:rPr sz="1400" b="1" i="0">
-                <a:solidFill>
-                  <a:srgbClr val="102A43"/>
-                </a:solidFill>
-                <a:latin typeface="Segoe UI"/>
-              </a:rPr>
-              <a:t>Git history</a:t>
+              <a:rPr sz="1600" b="1" i="0">
+                <a:solidFill>
+                  <a:srgbClr val="1D5FB8"/>
+                </a:solidFill>
+                <a:latin typeface="Segoe UI"/>
+              </a:rPr>
+              <a:t>Canonical IDs from the first draft</a:t>
             </a:r>
           </a:p>
           <a:p>
@@ -7354,39 +6429,39 @@
               </a:spcAft>
             </a:pPr>
             <a:r>
-              <a:rPr sz="1200" b="0" i="0">
+              <a:rPr sz="1300" b="0" i="0">
                 <a:solidFill>
                   <a:srgbClr val="243B53"/>
                 </a:solidFill>
                 <a:latin typeface="Segoe UI"/>
               </a:rPr>
-              <a:t>32 commits and PR #1; most messages say what changed and why</a:t>
-            </a:r>
-          </a:p>
-        </p:txBody>
-      </p:sp>
-      <p:sp>
-        <p:nvSpPr>
-          <p:cNvPr id="19" name="Takeaway"/>
+              <a:t>The first quality run scored 0% only because of legacy IDs; relabelling cost a full pass.</a:t>
+            </a:r>
+          </a:p>
+        </p:txBody>
+      </p:sp>
+      <p:sp>
+        <p:nvSpPr>
+          <p:cNvPr id="10" name="Challenge 6"/>
           <p:cNvSpPr/>
           <p:nvPr/>
         </p:nvSpPr>
         <p:spPr>
           <a:xfrm>
-            <a:off x="548640" y="5486400"/>
-            <a:ext cx="11094415" cy="365760"/>
+            <a:off x="8127796" y="4389120"/>
+            <a:ext cx="3515258" cy="1463040"/>
           </a:xfrm>
           <a:prstGeom prst="roundRect">
             <a:avLst>
-              <a:gd name="adj" fmla="val 12000"/>
+              <a:gd name="adj" fmla="val 6000"/>
             </a:avLst>
           </a:prstGeom>
           <a:solidFill>
-            <a:srgbClr val="102A43"/>
+            <a:srgbClr val="E6EFFB"/>
           </a:solidFill>
           <a:ln w="12700">
             <a:solidFill>
-              <a:srgbClr val="102A43"/>
+              <a:srgbClr val="C7D9F3"/>
             </a:solidFill>
           </a:ln>
         </p:spPr>
@@ -7405,25 +6480,45 @@
           </a:fontRef>
         </p:style>
         <p:txBody>
-          <a:bodyPr rtlCol="0" anchor="ctr" wrap="square" lIns="109728" rIns="109728" tIns="36576" bIns="36576"/>
-          <a:lstStyle/>
-          <a:p>
-            <a:pPr algn="ctr"/>
-            <a:r>
-              <a:rPr sz="1300" b="1" i="0">
-                <a:solidFill>
-                  <a:srgbClr val="FFFFFF"/>
-                </a:solidFill>
-                <a:latin typeface="Segoe UI"/>
-              </a:rPr>
-              <a:t>Pattern: Karpathy's LLM Wiki. Immutable sources, maintained syntheses, read the index first, log every change</a:t>
-            </a:r>
-          </a:p>
-        </p:txBody>
-      </p:sp>
-      <p:sp>
-        <p:nvSpPr>
-          <p:cNvPr id="20" name="Source"/>
+          <a:bodyPr rtlCol="0" anchor="t" wrap="square" lIns="164592" rIns="164592" tIns="128016" bIns="91440"/>
+          <a:lstStyle/>
+          <a:p>
+            <a:pPr algn="l">
+              <a:spcAft>
+                <a:spcPts val="600"/>
+              </a:spcAft>
+            </a:pPr>
+            <a:r>
+              <a:rPr sz="1600" b="1" i="0">
+                <a:solidFill>
+                  <a:srgbClr val="1D5FB8"/>
+                </a:solidFill>
+                <a:latin typeface="Segoe UI"/>
+              </a:rPr>
+              <a:t>Run the value challenge earlier, and blind</a:t>
+            </a:r>
+          </a:p>
+          <a:p>
+            <a:pPr algn="l">
+              <a:spcAft>
+                <a:spcPts val="0"/>
+              </a:spcAft>
+            </a:pPr>
+            <a:r>
+              <a:rPr sz="1300" b="0" i="0">
+                <a:solidFill>
+                  <a:srgbClr val="243B53"/>
+                </a:solidFill>
+                <a:latin typeface="Segoe UI"/>
+              </a:rPr>
+              <a:t>It came after eight BRD revisions, and the roles could read my addendum. One pass without it would test for priming.</a:t>
+            </a:r>
+          </a:p>
+        </p:txBody>
+      </p:sp>
+      <p:sp>
+        <p:nvSpPr>
+          <p:cNvPr id="11" name="Source"/>
           <p:cNvSpPr txBox="1"/>
           <p:nvPr/>
         </p:nvSpPr>
@@ -7450,7 +6545,7 @@
                 </a:solidFill>
                 <a:latin typeface="Segoe UI"/>
               </a:rPr>
-              <a:t>Sources: docs/reference/README.md (Layers, Task Routing); .github/copilot-instructions.md; docs/reference/log.md.</a:t>
+              <a:t>Sources: docs/reference/log.md (Conventions; corrections, 25 to 26 Sep 2026); agent-request-challenge.md (Divergences, Limitations); git log.</a:t>
             </a:r>
           </a:p>
         </p:txBody>
@@ -8851,7 +7946,7 @@
                 </a:solidFill>
                 <a:latin typeface="Segoe UI"/>
               </a:rPr>
-              <a:t>Will the panel read control plane plus bounded AI as a stronger answer, or as refusing the brief?</a:t>
+              <a:t>Will the panel read agent-led modernisation, not five end-to-end agents, as answering the brief?</a:t>
             </a:r>
           </a:p>
           <a:p>
@@ -9154,6 +8249,1246 @@
                 <a:latin typeface="Segoe UI"/>
               </a:rPr>
               <a:t>Sources: .copilot-tracking/plans/2026-09-19/case-study-85-day-delivery-plan.instructions.md; docs/reference/memory.md; docs/ideas/idea-register.md.</a:t>
+            </a:r>
+          </a:p>
+        </p:txBody>
+      </p:sp>
+    </p:spTree>
+  </p:cSld>
+  <p:clrMapOvr>
+    <a:masterClrMapping/>
+  </p:clrMapOvr>
+</p:sld>
+</file>
+
+<file path=ppt/slides/slide14.xml><?xml version="1.0" encoding="utf-8"?>
+<p:sld xmlns:a="http://schemas.openxmlformats.org/drawingml/2006/main" xmlns:p="http://schemas.openxmlformats.org/presentationml/2006/main" xmlns:r="http://schemas.openxmlformats.org/officeDocument/2006/relationships">
+  <p:cSld>
+    <p:bg>
+      <p:bgPr>
+        <a:solidFill>
+          <a:srgbClr val="FFFFFF"/>
+        </a:solidFill>
+        <a:effectLst/>
+      </p:bgPr>
+    </p:bg>
+    <p:spTree>
+      <p:nvGrpSpPr>
+        <p:cNvPr id="1" name=""/>
+        <p:cNvGrpSpPr/>
+        <p:nvPr/>
+      </p:nvGrpSpPr>
+      <p:grpSpPr/>
+      <p:sp>
+        <p:nvSpPr>
+          <p:cNvPr id="2" name="Title"/>
+          <p:cNvSpPr txBox="1"/>
+          <p:nvPr/>
+        </p:nvSpPr>
+        <p:spPr>
+          <a:xfrm>
+            <a:off x="548640" y="457200"/>
+            <a:ext cx="11094415" cy="685800"/>
+          </a:xfrm>
+          <a:prstGeom prst="rect">
+            <a:avLst/>
+          </a:prstGeom>
+          <a:noFill/>
+        </p:spPr>
+        <p:txBody>
+          <a:bodyPr wrap="square" anchor="ctr">
+            <a:spAutoFit/>
+          </a:bodyPr>
+          <a:lstStyle/>
+          <a:p>
+            <a:r>
+              <a:rPr sz="2600" b="1" i="0">
+                <a:solidFill>
+                  <a:srgbClr val="102A43"/>
+                </a:solidFill>
+                <a:latin typeface="Segoe UI"/>
+              </a:rPr>
+              <a:t>Appendix: the repo works as a second brain</a:t>
+            </a:r>
+          </a:p>
+        </p:txBody>
+      </p:sp>
+      <p:sp>
+        <p:nvSpPr>
+          <p:cNvPr id="3" name="Col A head"/>
+          <p:cNvSpPr txBox="1"/>
+          <p:nvPr/>
+        </p:nvSpPr>
+        <p:spPr>
+          <a:xfrm>
+            <a:off x="548640" y="1417320"/>
+            <a:ext cx="2743200" cy="320040"/>
+          </a:xfrm>
+          <a:prstGeom prst="rect">
+            <a:avLst/>
+          </a:prstGeom>
+          <a:noFill/>
+        </p:spPr>
+        <p:txBody>
+          <a:bodyPr wrap="square">
+            <a:spAutoFit/>
+          </a:bodyPr>
+          <a:lstStyle/>
+          <a:p>
+            <a:r>
+              <a:rPr sz="1200" b="1" i="0">
+                <a:solidFill>
+                  <a:srgbClr val="B83A2E"/>
+                </a:solidFill>
+                <a:latin typeface="Segoe UI"/>
+              </a:rPr>
+              <a:t>PROBLEM DOCUMENTS</a:t>
+            </a:r>
+          </a:p>
+        </p:txBody>
+      </p:sp>
+      <p:sp>
+        <p:nvSpPr>
+          <p:cNvPr id="4" name="Problem 1"/>
+          <p:cNvSpPr/>
+          <p:nvPr/>
+        </p:nvSpPr>
+        <p:spPr>
+          <a:xfrm>
+            <a:off x="548640" y="2011680"/>
+            <a:ext cx="2743200" cy="868680"/>
+          </a:xfrm>
+          <a:prstGeom prst="roundRect">
+            <a:avLst>
+              <a:gd name="adj" fmla="val 6000"/>
+            </a:avLst>
+          </a:prstGeom>
+          <a:solidFill>
+            <a:srgbClr val="FBEAE8"/>
+          </a:solidFill>
+          <a:ln w="12700">
+            <a:solidFill>
+              <a:srgbClr val="F3C7C1"/>
+            </a:solidFill>
+          </a:ln>
+        </p:spPr>
+        <p:style>
+          <a:lnRef idx="1">
+            <a:schemeClr val="accent1"/>
+          </a:lnRef>
+          <a:fillRef idx="3">
+            <a:schemeClr val="accent1"/>
+          </a:fillRef>
+          <a:effectRef idx="0">
+            <a:schemeClr val="accent1"/>
+          </a:effectRef>
+          <a:fontRef idx="minor">
+            <a:schemeClr val="lt1"/>
+          </a:fontRef>
+        </p:style>
+        <p:txBody>
+          <a:bodyPr rtlCol="0" anchor="ctr" wrap="square" lIns="164592" rIns="164592" tIns="128016" bIns="91440"/>
+          <a:lstStyle/>
+          <a:p>
+            <a:pPr algn="l">
+              <a:spcAft>
+                <a:spcPts val="200"/>
+              </a:spcAft>
+            </a:pPr>
+            <a:r>
+              <a:rPr sz="1400" b="1" i="0">
+                <a:solidFill>
+                  <a:srgbClr val="102A43"/>
+                </a:solidFill>
+                <a:latin typeface="Segoe UI"/>
+              </a:rPr>
+              <a:t>Original case study</a:t>
+            </a:r>
+          </a:p>
+          <a:p>
+            <a:pPr algn="l">
+              <a:spcAft>
+                <a:spcPts val="0"/>
+              </a:spcAft>
+            </a:pPr>
+            <a:r>
+              <a:rPr sz="1200" b="0" i="0">
+                <a:solidFill>
+                  <a:srgbClr val="243B53"/>
+                </a:solidFill>
+                <a:latin typeface="Segoe UI"/>
+              </a:rPr>
+              <a:t>Immutable record of the request</a:t>
+            </a:r>
+          </a:p>
+        </p:txBody>
+      </p:sp>
+      <p:sp>
+        <p:nvSpPr>
+          <p:cNvPr id="5" name="Problem 2"/>
+          <p:cNvSpPr/>
+          <p:nvPr/>
+        </p:nvSpPr>
+        <p:spPr>
+          <a:xfrm>
+            <a:off x="548640" y="3154680"/>
+            <a:ext cx="2743200" cy="868680"/>
+          </a:xfrm>
+          <a:prstGeom prst="roundRect">
+            <a:avLst>
+              <a:gd name="adj" fmla="val 6000"/>
+            </a:avLst>
+          </a:prstGeom>
+          <a:solidFill>
+            <a:srgbClr val="FBEAE8"/>
+          </a:solidFill>
+          <a:ln w="12700">
+            <a:solidFill>
+              <a:srgbClr val="F3C7C1"/>
+            </a:solidFill>
+          </a:ln>
+        </p:spPr>
+        <p:style>
+          <a:lnRef idx="1">
+            <a:schemeClr val="accent1"/>
+          </a:lnRef>
+          <a:fillRef idx="3">
+            <a:schemeClr val="accent1"/>
+          </a:fillRef>
+          <a:effectRef idx="0">
+            <a:schemeClr val="accent1"/>
+          </a:effectRef>
+          <a:fontRef idx="minor">
+            <a:schemeClr val="lt1"/>
+          </a:fontRef>
+        </p:style>
+        <p:txBody>
+          <a:bodyPr rtlCol="0" anchor="ctr" wrap="square" lIns="164592" rIns="164592" tIns="128016" bIns="91440"/>
+          <a:lstStyle/>
+          <a:p>
+            <a:pPr algn="l">
+              <a:spcAft>
+                <a:spcPts val="200"/>
+              </a:spcAft>
+            </a:pPr>
+            <a:r>
+              <a:rPr sz="1400" b="1" i="0">
+                <a:solidFill>
+                  <a:srgbClr val="102A43"/>
+                </a:solidFill>
+                <a:latin typeface="Segoe UI"/>
+              </a:rPr>
+              <a:t>Addendum</a:t>
+            </a:r>
+          </a:p>
+          <a:p>
+            <a:pPr algn="l">
+              <a:spcAft>
+                <a:spcPts val="0"/>
+              </a:spcAft>
+            </a:pPr>
+            <a:r>
+              <a:rPr sz="1200" b="0" i="0">
+                <a:solidFill>
+                  <a:srgbClr val="243B53"/>
+                </a:solidFill>
+                <a:latin typeface="Segoe UI"/>
+              </a:rPr>
+              <a:t>Evolving assessment and proposal</a:t>
+            </a:r>
+          </a:p>
+        </p:txBody>
+      </p:sp>
+      <p:sp>
+        <p:nvSpPr>
+          <p:cNvPr id="6" name="Problem 3"/>
+          <p:cNvSpPr/>
+          <p:nvPr/>
+        </p:nvSpPr>
+        <p:spPr>
+          <a:xfrm>
+            <a:off x="548640" y="4297680"/>
+            <a:ext cx="2743200" cy="868680"/>
+          </a:xfrm>
+          <a:prstGeom prst="roundRect">
+            <a:avLst>
+              <a:gd name="adj" fmla="val 6000"/>
+            </a:avLst>
+          </a:prstGeom>
+          <a:solidFill>
+            <a:srgbClr val="FBEAE8"/>
+          </a:solidFill>
+          <a:ln w="12700">
+            <a:solidFill>
+              <a:srgbClr val="F3C7C1"/>
+            </a:solidFill>
+          </a:ln>
+        </p:spPr>
+        <p:style>
+          <a:lnRef idx="1">
+            <a:schemeClr val="accent1"/>
+          </a:lnRef>
+          <a:fillRef idx="3">
+            <a:schemeClr val="accent1"/>
+          </a:fillRef>
+          <a:effectRef idx="0">
+            <a:schemeClr val="accent1"/>
+          </a:effectRef>
+          <a:fontRef idx="minor">
+            <a:schemeClr val="lt1"/>
+          </a:fontRef>
+        </p:style>
+        <p:txBody>
+          <a:bodyPr rtlCol="0" anchor="ctr" wrap="square" lIns="164592" rIns="164592" tIns="128016" bIns="91440"/>
+          <a:lstStyle/>
+          <a:p>
+            <a:pPr algn="l">
+              <a:spcAft>
+                <a:spcPts val="200"/>
+              </a:spcAft>
+            </a:pPr>
+            <a:r>
+              <a:rPr sz="1400" b="1" i="0">
+                <a:solidFill>
+                  <a:srgbClr val="102A43"/>
+                </a:solidFill>
+                <a:latin typeface="Segoe UI"/>
+              </a:rPr>
+              <a:t>BRD</a:t>
+            </a:r>
+          </a:p>
+          <a:p>
+            <a:pPr algn="l">
+              <a:spcAft>
+                <a:spcPts val="0"/>
+              </a:spcAft>
+            </a:pPr>
+            <a:r>
+              <a:rPr sz="1200" b="0" i="0">
+                <a:solidFill>
+                  <a:srgbClr val="243B53"/>
+                </a:solidFill>
+                <a:latin typeface="Segoe UI"/>
+              </a:rPr>
+              <a:t>Requirements with stable IDs</a:t>
+            </a:r>
+          </a:p>
+        </p:txBody>
+      </p:sp>
+      <p:sp>
+        <p:nvSpPr>
+          <p:cNvPr id="7" name="Col B head"/>
+          <p:cNvSpPr txBox="1"/>
+          <p:nvPr/>
+        </p:nvSpPr>
+        <p:spPr>
+          <a:xfrm>
+            <a:off x="3566160" y="1417320"/>
+            <a:ext cx="5120640" cy="320040"/>
+          </a:xfrm>
+          <a:prstGeom prst="rect">
+            <a:avLst/>
+          </a:prstGeom>
+          <a:noFill/>
+        </p:spPr>
+        <p:txBody>
+          <a:bodyPr wrap="square">
+            <a:spAutoFit/>
+          </a:bodyPr>
+          <a:lstStyle/>
+          <a:p>
+            <a:r>
+              <a:rPr sz="1200" b="1" i="0">
+                <a:solidFill>
+                  <a:srgbClr val="0B625B"/>
+                </a:solidFill>
+                <a:latin typeface="Segoe UI"/>
+              </a:rPr>
+              <a:t>DOCS/REFERENCE: THE KNOWLEDGE BASE</a:t>
+            </a:r>
+          </a:p>
+        </p:txBody>
+      </p:sp>
+      <p:sp>
+        <p:nvSpPr>
+          <p:cNvPr id="8" name="KB 1"/>
+          <p:cNvSpPr/>
+          <p:nvPr/>
+        </p:nvSpPr>
+        <p:spPr>
+          <a:xfrm>
+            <a:off x="3566160" y="2011680"/>
+            <a:ext cx="2423160" cy="594360"/>
+          </a:xfrm>
+          <a:prstGeom prst="roundRect">
+            <a:avLst>
+              <a:gd name="adj" fmla="val 6000"/>
+            </a:avLst>
+          </a:prstGeom>
+          <a:solidFill>
+            <a:srgbClr val="E3F4F1"/>
+          </a:solidFill>
+          <a:ln w="12700">
+            <a:solidFill>
+              <a:srgbClr val="B7E2DA"/>
+            </a:solidFill>
+          </a:ln>
+        </p:spPr>
+        <p:style>
+          <a:lnRef idx="1">
+            <a:schemeClr val="accent1"/>
+          </a:lnRef>
+          <a:fillRef idx="3">
+            <a:schemeClr val="accent1"/>
+          </a:fillRef>
+          <a:effectRef idx="0">
+            <a:schemeClr val="accent1"/>
+          </a:effectRef>
+          <a:fontRef idx="minor">
+            <a:schemeClr val="lt1"/>
+          </a:fontRef>
+        </p:style>
+        <p:txBody>
+          <a:bodyPr rtlCol="0" anchor="ctr" wrap="square" lIns="109728" rIns="109728" tIns="128016" bIns="91440"/>
+          <a:lstStyle/>
+          <a:p>
+            <a:pPr algn="l">
+              <a:spcAft>
+                <a:spcPts val="0"/>
+              </a:spcAft>
+            </a:pPr>
+            <a:r>
+              <a:rPr sz="1300" b="1" i="0">
+                <a:solidFill>
+                  <a:srgbClr val="0B625B"/>
+                </a:solidFill>
+                <a:latin typeface="Segoe UI"/>
+              </a:rPr>
+              <a:t>Index</a:t>
+            </a:r>
+          </a:p>
+          <a:p>
+            <a:pPr algn="l">
+              <a:spcAft>
+                <a:spcPts val="0"/>
+              </a:spcAft>
+            </a:pPr>
+            <a:r>
+              <a:rPr sz="1100" b="0" i="0">
+                <a:solidFill>
+                  <a:srgbClr val="243B53"/>
+                </a:solidFill>
+                <a:latin typeface="Segoe UI"/>
+              </a:rPr>
+              <a:t>README task routing</a:t>
+            </a:r>
+          </a:p>
+        </p:txBody>
+      </p:sp>
+      <p:sp>
+        <p:nvSpPr>
+          <p:cNvPr id="9" name="KB 2"/>
+          <p:cNvSpPr/>
+          <p:nvPr/>
+        </p:nvSpPr>
+        <p:spPr>
+          <a:xfrm>
+            <a:off x="6263640" y="2011680"/>
+            <a:ext cx="2423160" cy="594360"/>
+          </a:xfrm>
+          <a:prstGeom prst="roundRect">
+            <a:avLst>
+              <a:gd name="adj" fmla="val 6000"/>
+            </a:avLst>
+          </a:prstGeom>
+          <a:solidFill>
+            <a:srgbClr val="E3F4F1"/>
+          </a:solidFill>
+          <a:ln w="12700">
+            <a:solidFill>
+              <a:srgbClr val="B7E2DA"/>
+            </a:solidFill>
+          </a:ln>
+        </p:spPr>
+        <p:style>
+          <a:lnRef idx="1">
+            <a:schemeClr val="accent1"/>
+          </a:lnRef>
+          <a:fillRef idx="3">
+            <a:schemeClr val="accent1"/>
+          </a:fillRef>
+          <a:effectRef idx="0">
+            <a:schemeClr val="accent1"/>
+          </a:effectRef>
+          <a:fontRef idx="minor">
+            <a:schemeClr val="lt1"/>
+          </a:fontRef>
+        </p:style>
+        <p:txBody>
+          <a:bodyPr rtlCol="0" anchor="ctr" wrap="square" lIns="109728" rIns="109728" tIns="128016" bIns="91440"/>
+          <a:lstStyle/>
+          <a:p>
+            <a:pPr algn="l">
+              <a:spcAft>
+                <a:spcPts val="0"/>
+              </a:spcAft>
+            </a:pPr>
+            <a:r>
+              <a:rPr sz="1300" b="1" i="0">
+                <a:solidFill>
+                  <a:srgbClr val="0B625B"/>
+                </a:solidFill>
+                <a:latin typeface="Segoe UI"/>
+              </a:rPr>
+              <a:t>Sources</a:t>
+            </a:r>
+          </a:p>
+          <a:p>
+            <a:pPr algn="l">
+              <a:spcAft>
+                <a:spcPts val="0"/>
+              </a:spcAft>
+            </a:pPr>
+            <a:r>
+              <a:rPr sz="1100" b="0" i="0">
+                <a:solidFill>
+                  <a:srgbClr val="243B53"/>
+                </a:solidFill>
+                <a:latin typeface="Segoe UI"/>
+              </a:rPr>
+              <a:t>Immutable dated snapshots</a:t>
+            </a:r>
+          </a:p>
+        </p:txBody>
+      </p:sp>
+      <p:sp>
+        <p:nvSpPr>
+          <p:cNvPr id="10" name="KB 3"/>
+          <p:cNvSpPr/>
+          <p:nvPr/>
+        </p:nvSpPr>
+        <p:spPr>
+          <a:xfrm>
+            <a:off x="3566160" y="2880360"/>
+            <a:ext cx="2423160" cy="594360"/>
+          </a:xfrm>
+          <a:prstGeom prst="roundRect">
+            <a:avLst>
+              <a:gd name="adj" fmla="val 6000"/>
+            </a:avLst>
+          </a:prstGeom>
+          <a:solidFill>
+            <a:srgbClr val="E3F4F1"/>
+          </a:solidFill>
+          <a:ln w="12700">
+            <a:solidFill>
+              <a:srgbClr val="B7E2DA"/>
+            </a:solidFill>
+          </a:ln>
+        </p:spPr>
+        <p:style>
+          <a:lnRef idx="1">
+            <a:schemeClr val="accent1"/>
+          </a:lnRef>
+          <a:fillRef idx="3">
+            <a:schemeClr val="accent1"/>
+          </a:fillRef>
+          <a:effectRef idx="0">
+            <a:schemeClr val="accent1"/>
+          </a:effectRef>
+          <a:fontRef idx="minor">
+            <a:schemeClr val="lt1"/>
+          </a:fontRef>
+        </p:style>
+        <p:txBody>
+          <a:bodyPr rtlCol="0" anchor="ctr" wrap="square" lIns="109728" rIns="109728" tIns="128016" bIns="91440"/>
+          <a:lstStyle/>
+          <a:p>
+            <a:pPr algn="l">
+              <a:spcAft>
+                <a:spcPts val="0"/>
+              </a:spcAft>
+            </a:pPr>
+            <a:r>
+              <a:rPr sz="1300" b="1" i="0">
+                <a:solidFill>
+                  <a:srgbClr val="0B625B"/>
+                </a:solidFill>
+                <a:latin typeface="Segoe UI"/>
+              </a:rPr>
+              <a:t>Syntheses</a:t>
+            </a:r>
+          </a:p>
+          <a:p>
+            <a:pPr algn="l">
+              <a:spcAft>
+                <a:spcPts val="0"/>
+              </a:spcAft>
+            </a:pPr>
+            <a:r>
+              <a:rPr sz="1100" b="0" i="0">
+                <a:solidFill>
+                  <a:srgbClr val="243B53"/>
+                </a:solidFill>
+                <a:latin typeface="Segoe UI"/>
+              </a:rPr>
+              <a:t>Cited sector and company research</a:t>
+            </a:r>
+          </a:p>
+        </p:txBody>
+      </p:sp>
+      <p:sp>
+        <p:nvSpPr>
+          <p:cNvPr id="11" name="KB 4"/>
+          <p:cNvSpPr/>
+          <p:nvPr/>
+        </p:nvSpPr>
+        <p:spPr>
+          <a:xfrm>
+            <a:off x="6263640" y="2880360"/>
+            <a:ext cx="2423160" cy="594360"/>
+          </a:xfrm>
+          <a:prstGeom prst="roundRect">
+            <a:avLst>
+              <a:gd name="adj" fmla="val 6000"/>
+            </a:avLst>
+          </a:prstGeom>
+          <a:solidFill>
+            <a:srgbClr val="E3F4F1"/>
+          </a:solidFill>
+          <a:ln w="12700">
+            <a:solidFill>
+              <a:srgbClr val="B7E2DA"/>
+            </a:solidFill>
+          </a:ln>
+        </p:spPr>
+        <p:style>
+          <a:lnRef idx="1">
+            <a:schemeClr val="accent1"/>
+          </a:lnRef>
+          <a:fillRef idx="3">
+            <a:schemeClr val="accent1"/>
+          </a:fillRef>
+          <a:effectRef idx="0">
+            <a:schemeClr val="accent1"/>
+          </a:effectRef>
+          <a:fontRef idx="minor">
+            <a:schemeClr val="lt1"/>
+          </a:fontRef>
+        </p:style>
+        <p:txBody>
+          <a:bodyPr rtlCol="0" anchor="ctr" wrap="square" lIns="109728" rIns="109728" tIns="128016" bIns="91440"/>
+          <a:lstStyle/>
+          <a:p>
+            <a:pPr algn="l">
+              <a:spcAft>
+                <a:spcPts val="0"/>
+              </a:spcAft>
+            </a:pPr>
+            <a:r>
+              <a:rPr sz="1300" b="1" i="0">
+                <a:solidFill>
+                  <a:srgbClr val="0B625B"/>
+                </a:solidFill>
+                <a:latin typeface="Segoe UI"/>
+              </a:rPr>
+              <a:t>Method</a:t>
+            </a:r>
+          </a:p>
+          <a:p>
+            <a:pPr algn="l">
+              <a:spcAft>
+                <a:spcPts val="0"/>
+              </a:spcAft>
+            </a:pPr>
+            <a:r>
+              <a:rPr sz="1100" b="0" i="0">
+                <a:solidFill>
+                  <a:srgbClr val="243B53"/>
+                </a:solidFill>
+                <a:latin typeface="Segoe UI"/>
+              </a:rPr>
+              <a:t>AMA training and prompts</a:t>
+            </a:r>
+          </a:p>
+        </p:txBody>
+      </p:sp>
+      <p:sp>
+        <p:nvSpPr>
+          <p:cNvPr id="12" name="KB 5"/>
+          <p:cNvSpPr/>
+          <p:nvPr/>
+        </p:nvSpPr>
+        <p:spPr>
+          <a:xfrm>
+            <a:off x="3566160" y="3749039"/>
+            <a:ext cx="2423160" cy="594360"/>
+          </a:xfrm>
+          <a:prstGeom prst="roundRect">
+            <a:avLst>
+              <a:gd name="adj" fmla="val 6000"/>
+            </a:avLst>
+          </a:prstGeom>
+          <a:solidFill>
+            <a:srgbClr val="E3F4F1"/>
+          </a:solidFill>
+          <a:ln w="12700">
+            <a:solidFill>
+              <a:srgbClr val="B7E2DA"/>
+            </a:solidFill>
+          </a:ln>
+        </p:spPr>
+        <p:style>
+          <a:lnRef idx="1">
+            <a:schemeClr val="accent1"/>
+          </a:lnRef>
+          <a:fillRef idx="3">
+            <a:schemeClr val="accent1"/>
+          </a:fillRef>
+          <a:effectRef idx="0">
+            <a:schemeClr val="accent1"/>
+          </a:effectRef>
+          <a:fontRef idx="minor">
+            <a:schemeClr val="lt1"/>
+          </a:fontRef>
+        </p:style>
+        <p:txBody>
+          <a:bodyPr rtlCol="0" anchor="ctr" wrap="square" lIns="109728" rIns="109728" tIns="128016" bIns="91440"/>
+          <a:lstStyle/>
+          <a:p>
+            <a:pPr algn="l">
+              <a:spcAft>
+                <a:spcPts val="0"/>
+              </a:spcAft>
+            </a:pPr>
+            <a:r>
+              <a:rPr sz="1300" b="1" i="0">
+                <a:solidFill>
+                  <a:srgbClr val="0B625B"/>
+                </a:solidFill>
+                <a:latin typeface="Segoe UI"/>
+              </a:rPr>
+              <a:t>Resources</a:t>
+            </a:r>
+          </a:p>
+          <a:p>
+            <a:pPr algn="l">
+              <a:spcAft>
+                <a:spcPts val="0"/>
+              </a:spcAft>
+            </a:pPr>
+            <a:r>
+              <a:rPr sz="1100" b="0" i="0">
+                <a:solidFill>
+                  <a:srgbClr val="243B53"/>
+                </a:solidFill>
+                <a:latin typeface="Segoe UI"/>
+              </a:rPr>
+              <a:t>Industry Hub findings</a:t>
+            </a:r>
+          </a:p>
+        </p:txBody>
+      </p:sp>
+      <p:sp>
+        <p:nvSpPr>
+          <p:cNvPr id="13" name="KB 6"/>
+          <p:cNvSpPr/>
+          <p:nvPr/>
+        </p:nvSpPr>
+        <p:spPr>
+          <a:xfrm>
+            <a:off x="6263640" y="3749039"/>
+            <a:ext cx="2423160" cy="594360"/>
+          </a:xfrm>
+          <a:prstGeom prst="roundRect">
+            <a:avLst>
+              <a:gd name="adj" fmla="val 6000"/>
+            </a:avLst>
+          </a:prstGeom>
+          <a:solidFill>
+            <a:srgbClr val="E3F4F1"/>
+          </a:solidFill>
+          <a:ln w="12700">
+            <a:solidFill>
+              <a:srgbClr val="B7E2DA"/>
+            </a:solidFill>
+          </a:ln>
+        </p:spPr>
+        <p:style>
+          <a:lnRef idx="1">
+            <a:schemeClr val="accent1"/>
+          </a:lnRef>
+          <a:fillRef idx="3">
+            <a:schemeClr val="accent1"/>
+          </a:fillRef>
+          <a:effectRef idx="0">
+            <a:schemeClr val="accent1"/>
+          </a:effectRef>
+          <a:fontRef idx="minor">
+            <a:schemeClr val="lt1"/>
+          </a:fontRef>
+        </p:style>
+        <p:txBody>
+          <a:bodyPr rtlCol="0" anchor="ctr" wrap="square" lIns="109728" rIns="109728" tIns="128016" bIns="91440"/>
+          <a:lstStyle/>
+          <a:p>
+            <a:pPr algn="l">
+              <a:spcAft>
+                <a:spcPts val="0"/>
+              </a:spcAft>
+            </a:pPr>
+            <a:r>
+              <a:rPr sz="1300" b="1" i="0">
+                <a:solidFill>
+                  <a:srgbClr val="0B625B"/>
+                </a:solidFill>
+                <a:latin typeface="Segoe UI"/>
+              </a:rPr>
+              <a:t>Memory</a:t>
+            </a:r>
+          </a:p>
+          <a:p>
+            <a:pPr algn="l">
+              <a:spcAft>
+                <a:spcPts val="0"/>
+              </a:spcAft>
+            </a:pPr>
+            <a:r>
+              <a:rPr sz="1100" b="0" i="0">
+                <a:solidFill>
+                  <a:srgbClr val="243B53"/>
+                </a:solidFill>
+                <a:latin typeface="Segoe UI"/>
+              </a:rPr>
+              <a:t>Owner context, not evidence</a:t>
+            </a:r>
+          </a:p>
+        </p:txBody>
+      </p:sp>
+      <p:sp>
+        <p:nvSpPr>
+          <p:cNvPr id="14" name="KB 7"/>
+          <p:cNvSpPr/>
+          <p:nvPr/>
+        </p:nvSpPr>
+        <p:spPr>
+          <a:xfrm>
+            <a:off x="3566160" y="4617720"/>
+            <a:ext cx="2423160" cy="594360"/>
+          </a:xfrm>
+          <a:prstGeom prst="roundRect">
+            <a:avLst>
+              <a:gd name="adj" fmla="val 6000"/>
+            </a:avLst>
+          </a:prstGeom>
+          <a:solidFill>
+            <a:srgbClr val="E3F4F1"/>
+          </a:solidFill>
+          <a:ln w="12700">
+            <a:solidFill>
+              <a:srgbClr val="B7E2DA"/>
+            </a:solidFill>
+          </a:ln>
+        </p:spPr>
+        <p:style>
+          <a:lnRef idx="1">
+            <a:schemeClr val="accent1"/>
+          </a:lnRef>
+          <a:fillRef idx="3">
+            <a:schemeClr val="accent1"/>
+          </a:fillRef>
+          <a:effectRef idx="0">
+            <a:schemeClr val="accent1"/>
+          </a:effectRef>
+          <a:fontRef idx="minor">
+            <a:schemeClr val="lt1"/>
+          </a:fontRef>
+        </p:style>
+        <p:txBody>
+          <a:bodyPr rtlCol="0" anchor="ctr" wrap="square" lIns="109728" rIns="109728" tIns="128016" bIns="91440"/>
+          <a:lstStyle/>
+          <a:p>
+            <a:pPr algn="l">
+              <a:spcAft>
+                <a:spcPts val="0"/>
+              </a:spcAft>
+            </a:pPr>
+            <a:r>
+              <a:rPr sz="1300" b="1" i="0">
+                <a:solidFill>
+                  <a:srgbClr val="0B625B"/>
+                </a:solidFill>
+                <a:latin typeface="Segoe UI"/>
+              </a:rPr>
+              <a:t>Log</a:t>
+            </a:r>
+          </a:p>
+          <a:p>
+            <a:pPr algn="l">
+              <a:spcAft>
+                <a:spcPts val="0"/>
+              </a:spcAft>
+            </a:pPr>
+            <a:r>
+              <a:rPr sz="1100" b="0" i="0">
+                <a:solidFill>
+                  <a:srgbClr val="243B53"/>
+                </a:solidFill>
+                <a:latin typeface="Segoe UI"/>
+              </a:rPr>
+              <a:t>Append-only changes and contradictions</a:t>
+            </a:r>
+          </a:p>
+        </p:txBody>
+      </p:sp>
+      <p:sp>
+        <p:nvSpPr>
+          <p:cNvPr id="15" name="KB 8"/>
+          <p:cNvSpPr/>
+          <p:nvPr/>
+        </p:nvSpPr>
+        <p:spPr>
+          <a:xfrm>
+            <a:off x="6263640" y="4617720"/>
+            <a:ext cx="2423160" cy="594360"/>
+          </a:xfrm>
+          <a:prstGeom prst="roundRect">
+            <a:avLst>
+              <a:gd name="adj" fmla="val 6000"/>
+            </a:avLst>
+          </a:prstGeom>
+          <a:solidFill>
+            <a:srgbClr val="E3F4F1"/>
+          </a:solidFill>
+          <a:ln w="12700">
+            <a:solidFill>
+              <a:srgbClr val="B7E2DA"/>
+            </a:solidFill>
+          </a:ln>
+        </p:spPr>
+        <p:style>
+          <a:lnRef idx="1">
+            <a:schemeClr val="accent1"/>
+          </a:lnRef>
+          <a:fillRef idx="3">
+            <a:schemeClr val="accent1"/>
+          </a:fillRef>
+          <a:effectRef idx="0">
+            <a:schemeClr val="accent1"/>
+          </a:effectRef>
+          <a:fontRef idx="minor">
+            <a:schemeClr val="lt1"/>
+          </a:fontRef>
+        </p:style>
+        <p:txBody>
+          <a:bodyPr rtlCol="0" anchor="ctr" wrap="square" lIns="109728" rIns="109728" tIns="128016" bIns="91440"/>
+          <a:lstStyle/>
+          <a:p>
+            <a:pPr algn="l">
+              <a:spcAft>
+                <a:spcPts val="0"/>
+              </a:spcAft>
+            </a:pPr>
+            <a:r>
+              <a:rPr sz="1300" b="1" i="0">
+                <a:solidFill>
+                  <a:srgbClr val="0B625B"/>
+                </a:solidFill>
+                <a:latin typeface="Segoe UI"/>
+              </a:rPr>
+              <a:t>Schema</a:t>
+            </a:r>
+          </a:p>
+          <a:p>
+            <a:pPr algn="l">
+              <a:spcAft>
+                <a:spcPts val="0"/>
+              </a:spcAft>
+            </a:pPr>
+            <a:r>
+              <a:rPr sz="1100" b="0" i="0">
+                <a:solidFill>
+                  <a:srgbClr val="243B53"/>
+                </a:solidFill>
+                <a:latin typeface="Segoe UI"/>
+              </a:rPr>
+              <a:t>copilot-instructions rules</a:t>
+            </a:r>
+          </a:p>
+        </p:txBody>
+      </p:sp>
+      <p:sp>
+        <p:nvSpPr>
+          <p:cNvPr id="16" name="Col C head"/>
+          <p:cNvSpPr txBox="1"/>
+          <p:nvPr/>
+        </p:nvSpPr>
+        <p:spPr>
+          <a:xfrm>
+            <a:off x="8961120" y="1417320"/>
+            <a:ext cx="2681935" cy="320040"/>
+          </a:xfrm>
+          <a:prstGeom prst="rect">
+            <a:avLst/>
+          </a:prstGeom>
+          <a:noFill/>
+        </p:spPr>
+        <p:txBody>
+          <a:bodyPr wrap="square">
+            <a:spAutoFit/>
+          </a:bodyPr>
+          <a:lstStyle/>
+          <a:p>
+            <a:r>
+              <a:rPr sz="1200" b="1" i="0">
+                <a:solidFill>
+                  <a:srgbClr val="1D5FB8"/>
+                </a:solidFill>
+                <a:latin typeface="Segoe UI"/>
+              </a:rPr>
+              <a:t>WORKING EVIDENCE</a:t>
+            </a:r>
+          </a:p>
+        </p:txBody>
+      </p:sp>
+      <p:sp>
+        <p:nvSpPr>
+          <p:cNvPr id="17" name="Tracking"/>
+          <p:cNvSpPr/>
+          <p:nvPr/>
+        </p:nvSpPr>
+        <p:spPr>
+          <a:xfrm>
+            <a:off x="8961120" y="2011680"/>
+            <a:ext cx="2681935" cy="1463040"/>
+          </a:xfrm>
+          <a:prstGeom prst="roundRect">
+            <a:avLst>
+              <a:gd name="adj" fmla="val 6000"/>
+            </a:avLst>
+          </a:prstGeom>
+          <a:solidFill>
+            <a:srgbClr val="E6EFFB"/>
+          </a:solidFill>
+          <a:ln w="12700">
+            <a:solidFill>
+              <a:srgbClr val="C7D9F3"/>
+            </a:solidFill>
+          </a:ln>
+        </p:spPr>
+        <p:style>
+          <a:lnRef idx="1">
+            <a:schemeClr val="accent1"/>
+          </a:lnRef>
+          <a:fillRef idx="3">
+            <a:schemeClr val="accent1"/>
+          </a:fillRef>
+          <a:effectRef idx="0">
+            <a:schemeClr val="accent1"/>
+          </a:effectRef>
+          <a:fontRef idx="minor">
+            <a:schemeClr val="lt1"/>
+          </a:fontRef>
+        </p:style>
+        <p:txBody>
+          <a:bodyPr rtlCol="0" anchor="t" wrap="square" lIns="164592" rIns="164592" tIns="128016" bIns="91440"/>
+          <a:lstStyle/>
+          <a:p>
+            <a:pPr algn="l">
+              <a:spcAft>
+                <a:spcPts val="200"/>
+              </a:spcAft>
+            </a:pPr>
+            <a:r>
+              <a:rPr sz="1400" b="1" i="0">
+                <a:solidFill>
+                  <a:srgbClr val="102A43"/>
+                </a:solidFill>
+                <a:latin typeface="Segoe UI"/>
+              </a:rPr>
+              <a:t>.copilot-tracking</a:t>
+            </a:r>
+          </a:p>
+          <a:p>
+            <a:pPr algn="l">
+              <a:spcAft>
+                <a:spcPts val="0"/>
+              </a:spcAft>
+            </a:pPr>
+            <a:r>
+              <a:rPr sz="1200" b="0" i="0">
+                <a:solidFill>
+                  <a:srgbClr val="243B53"/>
+                </a:solidFill>
+                <a:latin typeface="Segoe UI"/>
+              </a:rPr>
+              <a:t>Plans, research, changes, reviews and BRD session state for every workflow</a:t>
+            </a:r>
+          </a:p>
+        </p:txBody>
+      </p:sp>
+      <p:sp>
+        <p:nvSpPr>
+          <p:cNvPr id="18" name="Git"/>
+          <p:cNvSpPr/>
+          <p:nvPr/>
+        </p:nvSpPr>
+        <p:spPr>
+          <a:xfrm>
+            <a:off x="8961120" y="3749039"/>
+            <a:ext cx="2681935" cy="1463040"/>
+          </a:xfrm>
+          <a:prstGeom prst="roundRect">
+            <a:avLst>
+              <a:gd name="adj" fmla="val 6000"/>
+            </a:avLst>
+          </a:prstGeom>
+          <a:solidFill>
+            <a:srgbClr val="E6EFFB"/>
+          </a:solidFill>
+          <a:ln w="12700">
+            <a:solidFill>
+              <a:srgbClr val="C7D9F3"/>
+            </a:solidFill>
+          </a:ln>
+        </p:spPr>
+        <p:style>
+          <a:lnRef idx="1">
+            <a:schemeClr val="accent1"/>
+          </a:lnRef>
+          <a:fillRef idx="3">
+            <a:schemeClr val="accent1"/>
+          </a:fillRef>
+          <a:effectRef idx="0">
+            <a:schemeClr val="accent1"/>
+          </a:effectRef>
+          <a:fontRef idx="minor">
+            <a:schemeClr val="lt1"/>
+          </a:fontRef>
+        </p:style>
+        <p:txBody>
+          <a:bodyPr rtlCol="0" anchor="t" wrap="square" lIns="164592" rIns="164592" tIns="128016" bIns="91440"/>
+          <a:lstStyle/>
+          <a:p>
+            <a:pPr algn="l">
+              <a:spcAft>
+                <a:spcPts val="200"/>
+              </a:spcAft>
+            </a:pPr>
+            <a:r>
+              <a:rPr sz="1400" b="1" i="0">
+                <a:solidFill>
+                  <a:srgbClr val="102A43"/>
+                </a:solidFill>
+                <a:latin typeface="Segoe UI"/>
+              </a:rPr>
+              <a:t>Git history</a:t>
+            </a:r>
+          </a:p>
+          <a:p>
+            <a:pPr algn="l">
+              <a:spcAft>
+                <a:spcPts val="0"/>
+              </a:spcAft>
+            </a:pPr>
+            <a:r>
+              <a:rPr sz="1200" b="0" i="0">
+                <a:solidFill>
+                  <a:srgbClr val="243B53"/>
+                </a:solidFill>
+                <a:latin typeface="Segoe UI"/>
+              </a:rPr>
+              <a:t>35 commits to 26 Sep and PR #1; most messages say what changed and why</a:t>
+            </a:r>
+          </a:p>
+        </p:txBody>
+      </p:sp>
+      <p:sp>
+        <p:nvSpPr>
+          <p:cNvPr id="19" name="Takeaway"/>
+          <p:cNvSpPr/>
+          <p:nvPr/>
+        </p:nvSpPr>
+        <p:spPr>
+          <a:xfrm>
+            <a:off x="548640" y="5486400"/>
+            <a:ext cx="11094415" cy="365760"/>
+          </a:xfrm>
+          <a:prstGeom prst="roundRect">
+            <a:avLst>
+              <a:gd name="adj" fmla="val 12000"/>
+            </a:avLst>
+          </a:prstGeom>
+          <a:solidFill>
+            <a:srgbClr val="102A43"/>
+          </a:solidFill>
+          <a:ln w="12700">
+            <a:solidFill>
+              <a:srgbClr val="102A43"/>
+            </a:solidFill>
+          </a:ln>
+        </p:spPr>
+        <p:style>
+          <a:lnRef idx="1">
+            <a:schemeClr val="accent1"/>
+          </a:lnRef>
+          <a:fillRef idx="3">
+            <a:schemeClr val="accent1"/>
+          </a:fillRef>
+          <a:effectRef idx="0">
+            <a:schemeClr val="accent1"/>
+          </a:effectRef>
+          <a:fontRef idx="minor">
+            <a:schemeClr val="lt1"/>
+          </a:fontRef>
+        </p:style>
+        <p:txBody>
+          <a:bodyPr rtlCol="0" anchor="ctr" wrap="square" lIns="109728" rIns="109728" tIns="36576" bIns="36576"/>
+          <a:lstStyle/>
+          <a:p>
+            <a:pPr algn="ctr"/>
+            <a:r>
+              <a:rPr sz="1300" b="1" i="0">
+                <a:solidFill>
+                  <a:srgbClr val="FFFFFF"/>
+                </a:solidFill>
+                <a:latin typeface="Segoe UI"/>
+              </a:rPr>
+              <a:t>Pattern: Karpathy's LLM Wiki. Immutable sources, maintained syntheses, read the index first, log every change</a:t>
+            </a:r>
+          </a:p>
+        </p:txBody>
+      </p:sp>
+      <p:sp>
+        <p:nvSpPr>
+          <p:cNvPr id="20" name="Source"/>
+          <p:cNvSpPr txBox="1"/>
+          <p:nvPr/>
+        </p:nvSpPr>
+        <p:spPr>
+          <a:xfrm>
+            <a:off x="548640" y="6126480"/>
+            <a:ext cx="11094415" cy="256032"/>
+          </a:xfrm>
+          <a:prstGeom prst="rect">
+            <a:avLst/>
+          </a:prstGeom>
+          <a:noFill/>
+        </p:spPr>
+        <p:txBody>
+          <a:bodyPr wrap="square" tIns="0" bIns="0">
+            <a:spAutoFit/>
+          </a:bodyPr>
+          <a:lstStyle/>
+          <a:p>
+            <a:r>
+              <a:rPr sz="900" b="0" i="0">
+                <a:solidFill>
+                  <a:srgbClr val="627D98"/>
+                </a:solidFill>
+                <a:latin typeface="Segoe UI"/>
+              </a:rPr>
+              <a:t>Sources: docs/reference/README.md (Layers, Task Routing); .github/copilot-instructions.md; docs/reference/log.md.</a:t>
             </a:r>
           </a:p>
         </p:txBody>
@@ -10107,7 +10442,7 @@
                 </a:solidFill>
                 <a:latin typeface="Segoe UI"/>
               </a:rPr>
-              <a:t>Ten revisions, with new research and role answers between each</a:t>
+              <a:t>Twelve revisions, with new research and role answers between each</a:t>
             </a:r>
           </a:p>
           <a:p>
@@ -10139,7 +10474,7 @@
                 </a:solidFill>
                 <a:latin typeface="Segoe UI"/>
               </a:rPr>
-              <a:t>BRD v0.2.0</a:t>
+              <a:t>BRD v0.5.0</a:t>
             </a:r>
           </a:p>
         </p:txBody>
@@ -10431,7 +10766,7 @@
                 </a:solidFill>
                 <a:latin typeface="Segoe UI"/>
               </a:rPr>
-              <a:t>Canonical goals, FR, AC, NFR, constraints and rules, with coverage checks</a:t>
+              <a:t>Canonical IDs and coverage checks, re-run after every later change</a:t>
             </a:r>
           </a:p>
           <a:p>
@@ -10463,7 +10798,7 @@
                 </a:solidFill>
                 <a:latin typeface="Segoe UI"/>
               </a:rPr>
-              <a:t>Quality report, canonical IDs</a:t>
+              <a:t>Six runs; FAIL only on data gaps</a:t>
             </a:r>
           </a:p>
         </p:txBody>
@@ -10553,7 +10888,7 @@
                 </a:solidFill>
                 <a:latin typeface="Segoe UI"/>
               </a:rPr>
-              <a:t>Sources: git log (32 commits, 10 to 26 Sep 2026); docs/reference/log.md; docs/brds/agentic-retrofit-programme-brd.md history.</a:t>
+              <a:t>Sources: git log (35 commits, 10 to 26 Sep 2026); docs/reference/log.md; docs/brds/agentic-retrofit-programme-brd.md history.</a:t>
             </a:r>
           </a:p>
         </p:txBody>
@@ -13085,7 +13420,7 @@
                 </a:solidFill>
                 <a:latin typeface="Segoe UI"/>
               </a:rPr>
-              <a:t>Ten BRD revisions, each the same pass: research, ask the role agents, rewrite, log what and why</a:t>
+              <a:t>Twelve BRD revisions, each the same pass: research, ask the role agents, rewrite, log what and why</a:t>
             </a:r>
           </a:p>
         </p:txBody>
@@ -13331,7 +13666,7 @@
                 </a:solidFill>
                 <a:latin typeface="Segoe UI"/>
               </a:rPr>
-              <a:t>What shared records and gates let a small team deliver more safe, accepted, grant-claimable homes, and where does bounded AI beat a checklist?</a:t>
+              <a:t>What shared records and gates let existing teams deliver more safe, accepted, grant-claimable homes, and where does an agent beat the same workflow?</a:t>
             </a:r>
           </a:p>
         </p:txBody>
@@ -14049,7 +14384,7 @@
                 </a:solidFill>
                 <a:latin typeface="Segoe UI"/>
               </a:rPr>
-              <a:t>What we really need: a control plane first, then bounded AI</a:t>
+              <a:t>Agents for the messy work, rules for decisions we must explain</a:t>
             </a:r>
           </a:p>
         </p:txBody>
@@ -14221,7 +14556,7 @@
                 </a:solidFill>
                 <a:latin typeface="Segoe UI"/>
               </a:rPr>
-              <a:t>Bounded AI</a:t>
+              <a:t>Bounded agents</a:t>
             </a:r>
           </a:p>
         </p:txBody>
@@ -14281,7 +14616,7 @@
                 </a:solidFill>
                 <a:latin typeface="Segoe UI"/>
               </a:rPr>
-              <a:t>Five candidates for shadow testing: reconcile records, read evidence against checklists, draft from controlled records, route messages, raise-only signal scans</a:t>
+              <a:t>Turn free text into sourced values, propose missing values for owners to confirm, reconcile, draft, route messages, raise hazard and quality signals</a:t>
             </a:r>
           </a:p>
         </p:txBody>
@@ -14337,7 +14672,7 @@
                 </a:solidFill>
                 <a:latin typeface="Segoe UI"/>
               </a:rPr>
-              <a:t>Control plane</a:t>
+              <a:t>Digital foundation</a:t>
             </a:r>
           </a:p>
         </p:txBody>
@@ -14397,7 +14732,7 @@
                 </a:solidFill>
                 <a:latin typeface="Segoe UI"/>
               </a:rPr>
-              <a:t>Property master (UPRN), lifecycle gates and clocks, hazard case record, resident decision record, capacity register, grant ledger, defect register</a:t>
+              <a:t>Deterministic: property master, published scoring weights, eligibility rules, gates and clocks, resident decisions, capacity, grant ledger, defects</a:t>
             </a:r>
           </a:p>
         </p:txBody>
@@ -14521,7 +14856,7 @@
                 </a:solidFill>
                 <a:latin typeface="Segoe UI"/>
               </a:rPr>
-              <a:t>A capped readiness stage, then gated shadow and live pilots in one delivery cell</a:t>
+              <a:t>Agent-led modernisation of the existing model: one locality, existing teams and suppliers</a:t>
             </a:r>
           </a:p>
           <a:p>
@@ -14538,7 +14873,7 @@
                 </a:solidFill>
                 <a:latin typeface="Segoe UI"/>
               </a:rPr>
-              <a:t>Every AI module needs a non-agent comparator and a stop criterion</a:t>
+              <a:t>Rules stay deterministic where a decision must be transparent and repeatable</a:t>
             </a:r>
           </a:p>
           <a:p>
@@ -14555,7 +14890,7 @@
                 </a:solidFill>
                 <a:latin typeface="Segoe UI"/>
               </a:rPr>
-              <a:t>Every layer traces to a role verdict and to BRD rows BR-059 to BR-068</a:t>
+              <a:t>Each agent capability scales only if it beats the same workflow without it (proposed)</a:t>
             </a:r>
           </a:p>
         </p:txBody>
@@ -14611,7 +14946,7 @@
                 </a:solidFill>
                 <a:latin typeface="Segoe UI"/>
               </a:rPr>
-              <a:t>"Agentic" is an implementation option, not the business outcome</a:t>
+              <a:t>Agents earn the right to scale only through safe, resident-accepted, evidence-complete handovers</a:t>
             </a:r>
           </a:p>
         </p:txBody>
@@ -14645,7 +14980,7 @@
                 </a:solidFill>
                 <a:latin typeface="Segoe UI"/>
               </a:rPr>
-              <a:t>Sources: case_study_48_addendum.md (Solution Proposal); agent-request-challenge.md (Cross-Cutting Findings); BRD Document Status (26 Sep 2026).</a:t>
+              <a:t>Sources: case_study_48_addendum.md (Where Agents Fit; Agentic Architecture Brief); agent-request-challenge.md; BRD v0.5.0 Document Status (owner decision, 26 Sep 2026).</a:t>
             </a:r>
           </a:p>
         </p:txBody>
@@ -14705,33 +15040,33 @@
                 </a:solidFill>
                 <a:latin typeface="Segoe UI"/>
               </a:rPr>
-              <a:t>Relabelling fixed traceability; the gate still fails on targets</a:t>
-            </a:r>
-          </a:p>
-        </p:txBody>
-      </p:sp>
-      <p:sp>
-        <p:nvSpPr>
-          <p:cNvPr id="3" name="Stat 1"/>
+              <a:t>Two more challenges: how to prove the value and how to explain it</a:t>
+            </a:r>
+          </a:p>
+        </p:txBody>
+      </p:sp>
+      <p:sp>
+        <p:nvSpPr>
+          <p:cNvPr id="3" name="Prove"/>
           <p:cNvSpPr/>
           <p:nvPr/>
         </p:nvSpPr>
         <p:spPr>
           <a:xfrm>
-            <a:off x="548640" y="1554480"/>
-            <a:ext cx="1005840" cy="731520"/>
+            <a:off x="548640" y="1508760"/>
+            <a:ext cx="5440680" cy="3520440"/>
           </a:xfrm>
           <a:prstGeom prst="roundRect">
             <a:avLst>
-              <a:gd name="adj" fmla="val 12000"/>
+              <a:gd name="adj" fmla="val 6000"/>
             </a:avLst>
           </a:prstGeom>
           <a:solidFill>
-            <a:srgbClr val="0B625B"/>
+            <a:srgbClr val="FFFFFF"/>
           </a:solidFill>
           <a:ln w="12700">
             <a:solidFill>
-              <a:srgbClr val="0B625B"/>
+              <a:srgbClr val="D9E2EC"/>
             </a:solidFill>
           </a:ln>
         </p:spPr>
@@ -14750,759 +15085,28 @@
           </a:fontRef>
         </p:style>
         <p:txBody>
-          <a:bodyPr rtlCol="0" anchor="ctr" wrap="square" lIns="109728" rIns="109728" tIns="36576" bIns="36576"/>
-          <a:lstStyle/>
-          <a:p>
-            <a:pPr algn="ctr"/>
-            <a:r>
-              <a:rPr sz="2600" b="1" i="0">
-                <a:solidFill>
-                  <a:srgbClr val="FFFFFF"/>
-                </a:solidFill>
-                <a:latin typeface="Segoe UI"/>
-              </a:rPr>
-              <a:t>12</a:t>
-            </a:r>
-          </a:p>
-        </p:txBody>
-      </p:sp>
-      <p:sp>
-        <p:nvSpPr>
-          <p:cNvPr id="4" name="Stat 1 label"/>
-          <p:cNvSpPr txBox="1"/>
-          <p:nvPr/>
-        </p:nvSpPr>
-        <p:spPr>
-          <a:xfrm>
-            <a:off x="1645919" y="1554480"/>
-            <a:ext cx="1645920" cy="731520"/>
-          </a:xfrm>
-          <a:prstGeom prst="rect">
-            <a:avLst/>
-          </a:prstGeom>
-          <a:noFill/>
-        </p:spPr>
-        <p:txBody>
-          <a:bodyPr wrap="square" anchor="ctr">
-            <a:spAutoFit/>
-          </a:bodyPr>
-          <a:lstStyle/>
-          <a:p>
-            <a:r>
-              <a:rPr sz="1300" b="0" i="0">
-                <a:solidFill>
-                  <a:srgbClr val="243B53"/>
-                </a:solidFill>
-                <a:latin typeface="Segoe UI"/>
-              </a:rPr>
-              <a:t>Business goals (BG)</a:t>
-            </a:r>
-          </a:p>
-        </p:txBody>
-      </p:sp>
-      <p:sp>
-        <p:nvSpPr>
-          <p:cNvPr id="5" name="Stat 2"/>
-          <p:cNvSpPr/>
-          <p:nvPr/>
-        </p:nvSpPr>
-        <p:spPr>
-          <a:xfrm>
-            <a:off x="3429000" y="1554480"/>
-            <a:ext cx="1005840" cy="731520"/>
-          </a:xfrm>
-          <a:prstGeom prst="roundRect">
-            <a:avLst>
-              <a:gd name="adj" fmla="val 12000"/>
-            </a:avLst>
-          </a:prstGeom>
-          <a:solidFill>
-            <a:srgbClr val="1D5FB8"/>
-          </a:solidFill>
-          <a:ln w="12700">
-            <a:solidFill>
-              <a:srgbClr val="1D5FB8"/>
-            </a:solidFill>
-          </a:ln>
-        </p:spPr>
-        <p:style>
-          <a:lnRef idx="1">
-            <a:schemeClr val="accent1"/>
-          </a:lnRef>
-          <a:fillRef idx="3">
-            <a:schemeClr val="accent1"/>
-          </a:fillRef>
-          <a:effectRef idx="0">
-            <a:schemeClr val="accent1"/>
-          </a:effectRef>
-          <a:fontRef idx="minor">
-            <a:schemeClr val="lt1"/>
-          </a:fontRef>
-        </p:style>
-        <p:txBody>
-          <a:bodyPr rtlCol="0" anchor="ctr" wrap="square" lIns="109728" rIns="109728" tIns="36576" bIns="36576"/>
-          <a:lstStyle/>
-          <a:p>
-            <a:pPr algn="ctr"/>
-            <a:r>
-              <a:rPr sz="2600" b="1" i="0">
-                <a:solidFill>
-                  <a:srgbClr val="FFFFFF"/>
-                </a:solidFill>
-                <a:latin typeface="Segoe UI"/>
-              </a:rPr>
-              <a:t>41</a:t>
-            </a:r>
-          </a:p>
-        </p:txBody>
-      </p:sp>
-      <p:sp>
-        <p:nvSpPr>
-          <p:cNvPr id="6" name="Stat 2 label"/>
-          <p:cNvSpPr txBox="1"/>
-          <p:nvPr/>
-        </p:nvSpPr>
-        <p:spPr>
-          <a:xfrm>
-            <a:off x="4526280" y="1554480"/>
-            <a:ext cx="1645920" cy="731520"/>
-          </a:xfrm>
-          <a:prstGeom prst="rect">
-            <a:avLst/>
-          </a:prstGeom>
-          <a:noFill/>
-        </p:spPr>
-        <p:txBody>
-          <a:bodyPr wrap="square" anchor="ctr">
-            <a:spAutoFit/>
-          </a:bodyPr>
-          <a:lstStyle/>
-          <a:p>
-            <a:r>
-              <a:rPr sz="1300" b="0" i="0">
-                <a:solidFill>
-                  <a:srgbClr val="243B53"/>
-                </a:solidFill>
-                <a:latin typeface="Segoe UI"/>
-              </a:rPr>
-              <a:t>Functional requirements (FR)</a:t>
-            </a:r>
-          </a:p>
-        </p:txBody>
-      </p:sp>
-      <p:sp>
-        <p:nvSpPr>
-          <p:cNvPr id="7" name="Stat 3"/>
-          <p:cNvSpPr/>
-          <p:nvPr/>
-        </p:nvSpPr>
-        <p:spPr>
-          <a:xfrm>
-            <a:off x="548640" y="2560320"/>
-            <a:ext cx="1005840" cy="731520"/>
-          </a:xfrm>
-          <a:prstGeom prst="roundRect">
-            <a:avLst>
-              <a:gd name="adj" fmla="val 12000"/>
-            </a:avLst>
-          </a:prstGeom>
-          <a:solidFill>
-            <a:srgbClr val="0B625B"/>
-          </a:solidFill>
-          <a:ln w="12700">
-            <a:solidFill>
-              <a:srgbClr val="0B625B"/>
-            </a:solidFill>
-          </a:ln>
-        </p:spPr>
-        <p:style>
-          <a:lnRef idx="1">
-            <a:schemeClr val="accent1"/>
-          </a:lnRef>
-          <a:fillRef idx="3">
-            <a:schemeClr val="accent1"/>
-          </a:fillRef>
-          <a:effectRef idx="0">
-            <a:schemeClr val="accent1"/>
-          </a:effectRef>
-          <a:fontRef idx="minor">
-            <a:schemeClr val="lt1"/>
-          </a:fontRef>
-        </p:style>
-        <p:txBody>
-          <a:bodyPr rtlCol="0" anchor="ctr" wrap="square" lIns="109728" rIns="109728" tIns="36576" bIns="36576"/>
-          <a:lstStyle/>
-          <a:p>
-            <a:pPr algn="ctr"/>
-            <a:r>
-              <a:rPr sz="2600" b="1" i="0">
-                <a:solidFill>
-                  <a:srgbClr val="FFFFFF"/>
-                </a:solidFill>
-                <a:latin typeface="Segoe UI"/>
-              </a:rPr>
-              <a:t>73</a:t>
-            </a:r>
-          </a:p>
-        </p:txBody>
-      </p:sp>
-      <p:sp>
-        <p:nvSpPr>
-          <p:cNvPr id="8" name="Stat 3 label"/>
-          <p:cNvSpPr txBox="1"/>
-          <p:nvPr/>
-        </p:nvSpPr>
-        <p:spPr>
-          <a:xfrm>
-            <a:off x="1645919" y="2560320"/>
-            <a:ext cx="1645920" cy="731520"/>
-          </a:xfrm>
-          <a:prstGeom prst="rect">
-            <a:avLst/>
-          </a:prstGeom>
-          <a:noFill/>
-        </p:spPr>
-        <p:txBody>
-          <a:bodyPr wrap="square" anchor="ctr">
-            <a:spAutoFit/>
-          </a:bodyPr>
-          <a:lstStyle/>
-          <a:p>
-            <a:r>
-              <a:rPr sz="1300" b="0" i="0">
-                <a:solidFill>
-                  <a:srgbClr val="243B53"/>
-                </a:solidFill>
-                <a:latin typeface="Segoe UI"/>
-              </a:rPr>
-              <a:t>Acceptance criteria (AC)</a:t>
-            </a:r>
-          </a:p>
-        </p:txBody>
-      </p:sp>
-      <p:sp>
-        <p:nvSpPr>
-          <p:cNvPr id="9" name="Stat 4"/>
-          <p:cNvSpPr/>
-          <p:nvPr/>
-        </p:nvSpPr>
-        <p:spPr>
-          <a:xfrm>
-            <a:off x="3429000" y="2560320"/>
-            <a:ext cx="1005840" cy="731520"/>
-          </a:xfrm>
-          <a:prstGeom prst="roundRect">
-            <a:avLst>
-              <a:gd name="adj" fmla="val 12000"/>
-            </a:avLst>
-          </a:prstGeom>
-          <a:solidFill>
-            <a:srgbClr val="1D5FB8"/>
-          </a:solidFill>
-          <a:ln w="12700">
-            <a:solidFill>
-              <a:srgbClr val="1D5FB8"/>
-            </a:solidFill>
-          </a:ln>
-        </p:spPr>
-        <p:style>
-          <a:lnRef idx="1">
-            <a:schemeClr val="accent1"/>
-          </a:lnRef>
-          <a:fillRef idx="3">
-            <a:schemeClr val="accent1"/>
-          </a:fillRef>
-          <a:effectRef idx="0">
-            <a:schemeClr val="accent1"/>
-          </a:effectRef>
-          <a:fontRef idx="minor">
-            <a:schemeClr val="lt1"/>
-          </a:fontRef>
-        </p:style>
-        <p:txBody>
-          <a:bodyPr rtlCol="0" anchor="ctr" wrap="square" lIns="109728" rIns="109728" tIns="36576" bIns="36576"/>
-          <a:lstStyle/>
-          <a:p>
-            <a:pPr algn="ctr"/>
-            <a:r>
-              <a:rPr sz="2600" b="1" i="0">
-                <a:solidFill>
-                  <a:srgbClr val="FFFFFF"/>
-                </a:solidFill>
-                <a:latin typeface="Segoe UI"/>
-              </a:rPr>
-              <a:t>9</a:t>
-            </a:r>
-          </a:p>
-        </p:txBody>
-      </p:sp>
-      <p:sp>
-        <p:nvSpPr>
-          <p:cNvPr id="10" name="Stat 4 label"/>
-          <p:cNvSpPr txBox="1"/>
-          <p:nvPr/>
-        </p:nvSpPr>
-        <p:spPr>
-          <a:xfrm>
-            <a:off x="4526280" y="2560320"/>
-            <a:ext cx="1645920" cy="731520"/>
-          </a:xfrm>
-          <a:prstGeom prst="rect">
-            <a:avLst/>
-          </a:prstGeom>
-          <a:noFill/>
-        </p:spPr>
-        <p:txBody>
-          <a:bodyPr wrap="square" anchor="ctr">
-            <a:spAutoFit/>
-          </a:bodyPr>
-          <a:lstStyle/>
-          <a:p>
-            <a:r>
-              <a:rPr sz="1300" b="0" i="0">
-                <a:solidFill>
-                  <a:srgbClr val="243B53"/>
-                </a:solidFill>
-                <a:latin typeface="Segoe UI"/>
-              </a:rPr>
-              <a:t>Non-functional (NFR, ISO/IEC 25010)</a:t>
-            </a:r>
-          </a:p>
-        </p:txBody>
-      </p:sp>
-      <p:sp>
-        <p:nvSpPr>
-          <p:cNvPr id="11" name="Stat 5"/>
-          <p:cNvSpPr/>
-          <p:nvPr/>
-        </p:nvSpPr>
-        <p:spPr>
-          <a:xfrm>
-            <a:off x="548640" y="3566160"/>
-            <a:ext cx="1005840" cy="731520"/>
-          </a:xfrm>
-          <a:prstGeom prst="roundRect">
-            <a:avLst>
-              <a:gd name="adj" fmla="val 12000"/>
-            </a:avLst>
-          </a:prstGeom>
-          <a:solidFill>
-            <a:srgbClr val="0B625B"/>
-          </a:solidFill>
-          <a:ln w="12700">
-            <a:solidFill>
-              <a:srgbClr val="0B625B"/>
-            </a:solidFill>
-          </a:ln>
-        </p:spPr>
-        <p:style>
-          <a:lnRef idx="1">
-            <a:schemeClr val="accent1"/>
-          </a:lnRef>
-          <a:fillRef idx="3">
-            <a:schemeClr val="accent1"/>
-          </a:fillRef>
-          <a:effectRef idx="0">
-            <a:schemeClr val="accent1"/>
-          </a:effectRef>
-          <a:fontRef idx="minor">
-            <a:schemeClr val="lt1"/>
-          </a:fontRef>
-        </p:style>
-        <p:txBody>
-          <a:bodyPr rtlCol="0" anchor="ctr" wrap="square" lIns="109728" rIns="109728" tIns="36576" bIns="36576"/>
-          <a:lstStyle/>
-          <a:p>
-            <a:pPr algn="ctr"/>
-            <a:r>
-              <a:rPr sz="2600" b="1" i="0">
-                <a:solidFill>
-                  <a:srgbClr val="FFFFFF"/>
-                </a:solidFill>
-                <a:latin typeface="Segoe UI"/>
-              </a:rPr>
-              <a:t>6</a:t>
-            </a:r>
-          </a:p>
-        </p:txBody>
-      </p:sp>
-      <p:sp>
-        <p:nvSpPr>
-          <p:cNvPr id="12" name="Stat 5 label"/>
-          <p:cNvSpPr txBox="1"/>
-          <p:nvPr/>
-        </p:nvSpPr>
-        <p:spPr>
-          <a:xfrm>
-            <a:off x="1645919" y="3566160"/>
-            <a:ext cx="1645920" cy="731520"/>
-          </a:xfrm>
-          <a:prstGeom prst="rect">
-            <a:avLst/>
-          </a:prstGeom>
-          <a:noFill/>
-        </p:spPr>
-        <p:txBody>
-          <a:bodyPr wrap="square" anchor="ctr">
-            <a:spAutoFit/>
-          </a:bodyPr>
-          <a:lstStyle/>
-          <a:p>
-            <a:r>
-              <a:rPr sz="1300" b="0" i="0">
-                <a:solidFill>
-                  <a:srgbClr val="243B53"/>
-                </a:solidFill>
-                <a:latin typeface="Segoe UI"/>
-              </a:rPr>
-              <a:t>Imposed constraints (CON)</a:t>
-            </a:r>
-          </a:p>
-        </p:txBody>
-      </p:sp>
-      <p:sp>
-        <p:nvSpPr>
-          <p:cNvPr id="13" name="Stat 6"/>
-          <p:cNvSpPr/>
-          <p:nvPr/>
-        </p:nvSpPr>
-        <p:spPr>
-          <a:xfrm>
-            <a:off x="3429000" y="3566160"/>
-            <a:ext cx="1005840" cy="731520"/>
-          </a:xfrm>
-          <a:prstGeom prst="roundRect">
-            <a:avLst>
-              <a:gd name="adj" fmla="val 12000"/>
-            </a:avLst>
-          </a:prstGeom>
-          <a:solidFill>
-            <a:srgbClr val="1D5FB8"/>
-          </a:solidFill>
-          <a:ln w="12700">
-            <a:solidFill>
-              <a:srgbClr val="1D5FB8"/>
-            </a:solidFill>
-          </a:ln>
-        </p:spPr>
-        <p:style>
-          <a:lnRef idx="1">
-            <a:schemeClr val="accent1"/>
-          </a:lnRef>
-          <a:fillRef idx="3">
-            <a:schemeClr val="accent1"/>
-          </a:fillRef>
-          <a:effectRef idx="0">
-            <a:schemeClr val="accent1"/>
-          </a:effectRef>
-          <a:fontRef idx="minor">
-            <a:schemeClr val="lt1"/>
-          </a:fontRef>
-        </p:style>
-        <p:txBody>
-          <a:bodyPr rtlCol="0" anchor="ctr" wrap="square" lIns="109728" rIns="109728" tIns="36576" bIns="36576"/>
-          <a:lstStyle/>
-          <a:p>
-            <a:pPr algn="ctr"/>
-            <a:r>
-              <a:rPr sz="2600" b="1" i="0">
-                <a:solidFill>
-                  <a:srgbClr val="FFFFFF"/>
-                </a:solidFill>
-                <a:latin typeface="Segoe UI"/>
-              </a:rPr>
-              <a:t>23</a:t>
-            </a:r>
-          </a:p>
-        </p:txBody>
-      </p:sp>
-      <p:sp>
-        <p:nvSpPr>
-          <p:cNvPr id="14" name="Stat 6 label"/>
-          <p:cNvSpPr txBox="1"/>
-          <p:nvPr/>
-        </p:nvSpPr>
-        <p:spPr>
-          <a:xfrm>
-            <a:off x="4526280" y="3566160"/>
-            <a:ext cx="1645920" cy="731520"/>
-          </a:xfrm>
-          <a:prstGeom prst="rect">
-            <a:avLst/>
-          </a:prstGeom>
-          <a:noFill/>
-        </p:spPr>
-        <p:txBody>
-          <a:bodyPr wrap="square" anchor="ctr">
-            <a:spAutoFit/>
-          </a:bodyPr>
-          <a:lstStyle/>
-          <a:p>
-            <a:r>
-              <a:rPr sz="1300" b="0" i="0">
-                <a:solidFill>
-                  <a:srgbClr val="243B53"/>
-                </a:solidFill>
-                <a:latin typeface="Segoe UI"/>
-              </a:rPr>
-              <a:t>Business rules (RULE)</a:t>
-            </a:r>
-          </a:p>
-        </p:txBody>
-      </p:sp>
-      <p:sp>
-        <p:nvSpPr>
-          <p:cNvPr id="15" name="Before"/>
-          <p:cNvSpPr/>
-          <p:nvPr/>
-        </p:nvSpPr>
-        <p:spPr>
-          <a:xfrm>
-            <a:off x="548640" y="4754880"/>
-            <a:ext cx="1188720" cy="731520"/>
-          </a:xfrm>
-          <a:prstGeom prst="roundRect">
-            <a:avLst>
-              <a:gd name="adj" fmla="val 12000"/>
-            </a:avLst>
-          </a:prstGeom>
-          <a:solidFill>
-            <a:srgbClr val="B83A2E"/>
-          </a:solidFill>
-          <a:ln w="12700">
-            <a:solidFill>
-              <a:srgbClr val="B83A2E"/>
-            </a:solidFill>
-          </a:ln>
-        </p:spPr>
-        <p:style>
-          <a:lnRef idx="1">
-            <a:schemeClr val="accent1"/>
-          </a:lnRef>
-          <a:fillRef idx="3">
-            <a:schemeClr val="accent1"/>
-          </a:fillRef>
-          <a:effectRef idx="0">
-            <a:schemeClr val="accent1"/>
-          </a:effectRef>
-          <a:fontRef idx="minor">
-            <a:schemeClr val="lt1"/>
-          </a:fontRef>
-        </p:style>
-        <p:txBody>
-          <a:bodyPr rtlCol="0" anchor="ctr" wrap="square" lIns="109728" rIns="109728" tIns="36576" bIns="36576"/>
-          <a:lstStyle/>
-          <a:p>
-            <a:pPr algn="ctr"/>
-            <a:r>
-              <a:rPr sz="2400" b="1" i="0">
-                <a:solidFill>
-                  <a:srgbClr val="FFFFFF"/>
-                </a:solidFill>
-                <a:latin typeface="Segoe UI"/>
-              </a:rPr>
-              <a:t>0%</a:t>
-            </a:r>
-          </a:p>
-        </p:txBody>
-      </p:sp>
-      <p:sp>
-        <p:nvSpPr>
-          <p:cNvPr id="16" name="Arrow"/>
-          <p:cNvSpPr/>
-          <p:nvPr/>
-        </p:nvSpPr>
-        <p:spPr>
-          <a:xfrm>
-            <a:off x="1920240" y="4937760"/>
-            <a:ext cx="640080" cy="365760"/>
-          </a:xfrm>
-          <a:prstGeom prst="rightArrow">
-            <a:avLst/>
-          </a:prstGeom>
-          <a:solidFill>
-            <a:srgbClr val="9FB3C8"/>
-          </a:solidFill>
-          <a:ln w="12700">
-            <a:solidFill>
-              <a:srgbClr val="9FB3C8"/>
-            </a:solidFill>
-          </a:ln>
-        </p:spPr>
-        <p:style>
-          <a:lnRef idx="1">
-            <a:schemeClr val="accent1"/>
-          </a:lnRef>
-          <a:fillRef idx="3">
-            <a:schemeClr val="accent1"/>
-          </a:fillRef>
-          <a:effectRef idx="0">
-            <a:schemeClr val="accent1"/>
-          </a:effectRef>
-          <a:fontRef idx="minor">
-            <a:schemeClr val="lt1"/>
-          </a:fontRef>
-        </p:style>
-        <p:txBody>
-          <a:bodyPr rtlCol="0" anchor="ctr"/>
-          <a:lstStyle/>
-          <a:p>
-            <a:pPr algn="ctr"/>
-          </a:p>
-        </p:txBody>
-      </p:sp>
-      <p:sp>
-        <p:nvSpPr>
-          <p:cNvPr id="17" name="After"/>
-          <p:cNvSpPr/>
-          <p:nvPr/>
-        </p:nvSpPr>
-        <p:spPr>
-          <a:xfrm>
-            <a:off x="2743200" y="4754880"/>
-            <a:ext cx="1188720" cy="731520"/>
-          </a:xfrm>
-          <a:prstGeom prst="roundRect">
-            <a:avLst>
-              <a:gd name="adj" fmla="val 12000"/>
-            </a:avLst>
-          </a:prstGeom>
-          <a:solidFill>
-            <a:srgbClr val="0B625B"/>
-          </a:solidFill>
-          <a:ln w="12700">
-            <a:solidFill>
-              <a:srgbClr val="0B625B"/>
-            </a:solidFill>
-          </a:ln>
-        </p:spPr>
-        <p:style>
-          <a:lnRef idx="1">
-            <a:schemeClr val="accent1"/>
-          </a:lnRef>
-          <a:fillRef idx="3">
-            <a:schemeClr val="accent1"/>
-          </a:fillRef>
-          <a:effectRef idx="0">
-            <a:schemeClr val="accent1"/>
-          </a:effectRef>
-          <a:fontRef idx="minor">
-            <a:schemeClr val="lt1"/>
-          </a:fontRef>
-        </p:style>
-        <p:txBody>
-          <a:bodyPr rtlCol="0" anchor="ctr" wrap="square" lIns="109728" rIns="109728" tIns="36576" bIns="36576"/>
-          <a:lstStyle/>
-          <a:p>
-            <a:pPr algn="ctr"/>
-            <a:r>
-              <a:rPr sz="2400" b="1" i="0">
-                <a:solidFill>
-                  <a:srgbClr val="FFFFFF"/>
-                </a:solidFill>
-                <a:latin typeface="Segoe UI"/>
-              </a:rPr>
-              <a:t>100%</a:t>
-            </a:r>
-          </a:p>
-        </p:txBody>
-      </p:sp>
-      <p:sp>
-        <p:nvSpPr>
-          <p:cNvPr id="18" name="Coverage label"/>
-          <p:cNvSpPr txBox="1"/>
-          <p:nvPr/>
-        </p:nvSpPr>
-        <p:spPr>
-          <a:xfrm>
-            <a:off x="4069080" y="4754880"/>
-            <a:ext cx="2011680" cy="731520"/>
-          </a:xfrm>
-          <a:prstGeom prst="rect">
-            <a:avLst/>
-          </a:prstGeom>
-          <a:noFill/>
-        </p:spPr>
-        <p:txBody>
-          <a:bodyPr wrap="square" anchor="ctr">
-            <a:spAutoFit/>
-          </a:bodyPr>
-          <a:lstStyle/>
-          <a:p>
-            <a:r>
-              <a:rPr sz="1300" b="1" i="0">
-                <a:solidFill>
-                  <a:srgbClr val="243B53"/>
-                </a:solidFill>
-                <a:latin typeface="Segoe UI"/>
-              </a:rPr>
-              <a:t>ID traceability: FR-to-AC and FR-to-BG</a:t>
-            </a:r>
-          </a:p>
-        </p:txBody>
-      </p:sp>
-      <p:sp>
-        <p:nvSpPr>
-          <p:cNvPr id="19" name="Still fail"/>
-          <p:cNvSpPr/>
-          <p:nvPr/>
-        </p:nvSpPr>
-        <p:spPr>
-          <a:xfrm>
-            <a:off x="6400800" y="1508760"/>
-            <a:ext cx="5242255" cy="3977639"/>
-          </a:xfrm>
-          <a:prstGeom prst="roundRect">
-            <a:avLst>
-              <a:gd name="adj" fmla="val 6000"/>
-            </a:avLst>
-          </a:prstGeom>
-          <a:solidFill>
-            <a:srgbClr val="FDF4DC"/>
-          </a:solidFill>
-          <a:ln w="12700">
-            <a:solidFill>
-              <a:srgbClr val="F0DCA5"/>
-            </a:solidFill>
-          </a:ln>
-        </p:spPr>
-        <p:style>
-          <a:lnRef idx="1">
-            <a:schemeClr val="accent1"/>
-          </a:lnRef>
-          <a:fillRef idx="3">
-            <a:schemeClr val="accent1"/>
-          </a:fillRef>
-          <a:effectRef idx="0">
-            <a:schemeClr val="accent1"/>
-          </a:effectRef>
-          <a:fontRef idx="minor">
-            <a:schemeClr val="lt1"/>
-          </a:fontRef>
-        </p:style>
-        <p:txBody>
           <a:bodyPr rtlCol="0" anchor="t" wrap="square" lIns="164592" rIns="164592" tIns="128016" bIns="91440"/>
           <a:lstStyle/>
           <a:p>
             <a:pPr algn="l">
               <a:spcAft>
-                <a:spcPts val="800"/>
+                <a:spcPts val="1200"/>
               </a:spcAft>
             </a:pPr>
             <a:r>
               <a:rPr sz="1300" b="1" i="0">
                 <a:solidFill>
-                  <a:srgbClr val="B83A2E"/>
-                </a:solidFill>
-                <a:latin typeface="Segoe UI"/>
-              </a:rPr>
-              <a:t>STILL FAIL, ON PURPOSE</a:t>
+                  <a:srgbClr val="0B625B"/>
+                </a:solidFill>
+                <a:latin typeface="Segoe UI"/>
+              </a:rPr>
+              <a:t>PROVE IT: PILOT MEASUREMENT CHALLENGE</a:t>
             </a:r>
           </a:p>
           <a:p>
             <a:pPr algn="l" marL="228600" indent="-228600">
               <a:spcAft>
-                <a:spcPts val="800"/>
+                <a:spcPts val="1200"/>
               </a:spcAft>
               <a:buChar char="•"/>
             </a:pPr>
@@ -15513,13 +15117,13 @@
                 </a:solidFill>
                 <a:latin typeface="Segoe UI"/>
               </a:rPr>
-              <a:t>Relabel: 68 BR and 12 OBJ rows mapped, four compound rows split, no meaning changed</a:t>
+              <a:t>All eight roles backed the intent but rejected my acceleration dashboard: speed is not the benefit, and about 50 handovers in 6 to 9 months cannot prove a 20% gain</a:t>
             </a:r>
           </a:p>
           <a:p>
             <a:pPr algn="l" marL="228600" indent="-228600">
               <a:spcAft>
-                <a:spcPts val="800"/>
+                <a:spcPts val="1200"/>
               </a:spcAft>
               <a:buChar char="•"/>
             </a:pPr>
@@ -15530,13 +15134,13 @@
                 </a:solidFill>
                 <a:latin typeface="Segoe UI"/>
               </a:rPr>
-              <a:t>Extracted: FR-022 split into FR-022 and RULE-023; CON-004 sent to Legal to validate its source</a:t>
+              <a:t>Comparison 1: pilot locality with agents against a matched locality without, same event capture from Phase 0</a:t>
             </a:r>
           </a:p>
           <a:p>
             <a:pPr algn="l" marL="228600" indent="-228600">
               <a:spcAft>
-                <a:spcPts val="800"/>
+                <a:spcPts val="1200"/>
               </a:spcAft>
               <a:buChar char="•"/>
             </a:pPr>
@@ -15547,41 +15151,7 @@
                 </a:solidFill>
                 <a:latin typeface="Segoe UI"/>
               </a:rPr>
-              <a:t>Seven business goals still have no numeric target; NFR-009 thresholds need owner decisions</a:t>
-            </a:r>
-          </a:p>
-          <a:p>
-            <a:pPr algn="l" marL="228600" indent="-228600">
-              <a:spcAft>
-                <a:spcPts val="800"/>
-              </a:spcAft>
-              <a:buChar char="•"/>
-            </a:pPr>
-            <a:r>
-              <a:rPr sz="1400" b="0" i="0">
-                <a:solidFill>
-                  <a:srgbClr val="243B53"/>
-                </a:solidFill>
-                <a:latin typeface="Segoe UI"/>
-              </a:rPr>
-              <a:t>Targets need company data or board decisions (OD-01, OD-08, OD-09 and others)</a:t>
-            </a:r>
-          </a:p>
-          <a:p>
-            <a:pPr algn="l" marL="228600" indent="-228600">
-              <a:spcAft>
-                <a:spcPts val="800"/>
-              </a:spcAft>
-              <a:buChar char="•"/>
-            </a:pPr>
-            <a:r>
-              <a:rPr sz="1400" b="0" i="0">
-                <a:solidFill>
-                  <a:srgbClr val="243B53"/>
-                </a:solidFill>
-                <a:latin typeface="Segoe UI"/>
-              </a:rPr>
-              <a:t>Advisory: rewrite AC as Given/When/Then before PRD handoff</a:t>
+              <a:t>Comparison 2: each agent capability against the same workflow without it, review effort counted</a:t>
             </a:r>
           </a:p>
           <a:p>
@@ -15592,20 +15162,204 @@
               <a:buChar char="•"/>
             </a:pPr>
             <a:r>
-              <a:rPr sz="1400" b="1" i="0">
-                <a:solidFill>
-                  <a:srgbClr val="102A43"/>
-                </a:solidFill>
-                <a:latin typeface="Segoe UI"/>
-              </a:rPr>
-              <a:t>I did not invent targets to pass the gate</a:t>
-            </a:r>
-          </a:p>
-        </p:txBody>
-      </p:sp>
-      <p:sp>
-        <p:nvSpPr>
-          <p:cNvPr id="20" name="Source"/>
+              <a:rPr sz="1400" b="0" i="0">
+                <a:solidFill>
+                  <a:srgbClr val="243B53"/>
+                </a:solidFill>
+                <a:latin typeface="Segoe UI"/>
+              </a:rPr>
+              <a:t>The dashboard steers; a frozen benefits scorecard decides; a guardrail breach pauses work (RULE-024)</a:t>
+            </a:r>
+          </a:p>
+        </p:txBody>
+      </p:sp>
+      <p:sp>
+        <p:nvSpPr>
+          <p:cNvPr id="4" name="Explain"/>
+          <p:cNvSpPr/>
+          <p:nvPr/>
+        </p:nvSpPr>
+        <p:spPr>
+          <a:xfrm>
+            <a:off x="6263640" y="1508760"/>
+            <a:ext cx="5379415" cy="3520440"/>
+          </a:xfrm>
+          <a:prstGeom prst="roundRect">
+            <a:avLst>
+              <a:gd name="adj" fmla="val 6000"/>
+            </a:avLst>
+          </a:prstGeom>
+          <a:solidFill>
+            <a:srgbClr val="F0F4F8"/>
+          </a:solidFill>
+          <a:ln w="12700">
+            <a:solidFill>
+              <a:srgbClr val="D9E2EC"/>
+            </a:solidFill>
+          </a:ln>
+        </p:spPr>
+        <p:style>
+          <a:lnRef idx="1">
+            <a:schemeClr val="accent1"/>
+          </a:lnRef>
+          <a:fillRef idx="3">
+            <a:schemeClr val="accent1"/>
+          </a:fillRef>
+          <a:effectRef idx="0">
+            <a:schemeClr val="accent1"/>
+          </a:effectRef>
+          <a:fontRef idx="minor">
+            <a:schemeClr val="lt1"/>
+          </a:fontRef>
+        </p:style>
+        <p:txBody>
+          <a:bodyPr rtlCol="0" anchor="t" wrap="square" lIns="164592" rIns="164592" tIns="128016" bIns="91440"/>
+          <a:lstStyle/>
+          <a:p>
+            <a:pPr algn="l">
+              <a:spcAft>
+                <a:spcPts val="1200"/>
+              </a:spcAft>
+            </a:pPr>
+            <a:r>
+              <a:rPr sz="1300" b="1" i="0">
+                <a:solidFill>
+                  <a:srgbClr val="1D5FB8"/>
+                </a:solidFill>
+                <a:latin typeface="Segoe UI"/>
+              </a:rPr>
+              <a:t>EXPLAIN IT: TRANSPARENCY REVIEW, BRD v0.5.0</a:t>
+            </a:r>
+          </a:p>
+          <a:p>
+            <a:pPr algn="l" marL="228600" indent="-228600">
+              <a:spcAft>
+                <a:spcPts val="1200"/>
+              </a:spcAft>
+              <a:buChar char="•"/>
+            </a:pPr>
+            <a:r>
+              <a:rPr sz="1400" b="0" i="0">
+                <a:solidFill>
+                  <a:srgbClr val="243B53"/>
+                </a:solidFill>
+                <a:latin typeface="Segoe UI"/>
+              </a:rPr>
+              <a:t>Fixed my own citation: CON-003 cited UK GDPR Article 22, which the local text omits; it now cites Articles 22A to 22C</a:t>
+            </a:r>
+          </a:p>
+          <a:p>
+            <a:pPr algn="l" marL="228600" indent="-228600">
+              <a:spcAft>
+                <a:spcPts val="1200"/>
+              </a:spcAft>
+              <a:buChar char="•"/>
+            </a:pPr>
+            <a:r>
+              <a:rPr sz="1400" b="0" i="0">
+                <a:solidFill>
+                  <a:srgbClr val="243B53"/>
+                </a:solidFill>
+                <a:latin typeface="Segoe UI"/>
+              </a:rPr>
+              <a:t>Transparency gate before live processing (AC-079); per-home reason codes (FR-042)</a:t>
+            </a:r>
+          </a:p>
+          <a:p>
+            <a:pPr algn="l" marL="228600" indent="-228600">
+              <a:spcAft>
+                <a:spcPts val="1200"/>
+              </a:spcAft>
+              <a:buChar char="•"/>
+            </a:pPr>
+            <a:r>
+              <a:rPr sz="1400" b="0" i="0">
+                <a:solidFill>
+                  <a:srgbClr val="243B53"/>
+                </a:solidFill>
+                <a:latin typeface="Segoe UI"/>
+              </a:rPr>
+              <a:t>AI capability register and Board assurance report (FR-043); provenance on every agent output (FR-044)</a:t>
+            </a:r>
+          </a:p>
+          <a:p>
+            <a:pPr algn="l" marL="228600" indent="-228600">
+              <a:spcAft>
+                <a:spcPts val="0"/>
+              </a:spcAft>
+              <a:buChar char="•"/>
+            </a:pPr>
+            <a:r>
+              <a:rPr sz="1400" b="0" i="0">
+                <a:solidFill>
+                  <a:srgbClr val="243B53"/>
+                </a:solidFill>
+                <a:latin typeface="Segoe UI"/>
+              </a:rPr>
+              <a:t>Gap: three standards or codes and ICO guidance are not held locally (OD-39)</a:t>
+            </a:r>
+          </a:p>
+        </p:txBody>
+      </p:sp>
+      <p:sp>
+        <p:nvSpPr>
+          <p:cNvPr id="5" name="Takeaway"/>
+          <p:cNvSpPr/>
+          <p:nvPr/>
+        </p:nvSpPr>
+        <p:spPr>
+          <a:xfrm>
+            <a:off x="548640" y="5303520"/>
+            <a:ext cx="11094415" cy="548640"/>
+          </a:xfrm>
+          <a:prstGeom prst="roundRect">
+            <a:avLst>
+              <a:gd name="adj" fmla="val 12000"/>
+            </a:avLst>
+          </a:prstGeom>
+          <a:solidFill>
+            <a:srgbClr val="102A43"/>
+          </a:solidFill>
+          <a:ln w="12700">
+            <a:solidFill>
+              <a:srgbClr val="102A43"/>
+            </a:solidFill>
+          </a:ln>
+        </p:spPr>
+        <p:style>
+          <a:lnRef idx="1">
+            <a:schemeClr val="accent1"/>
+          </a:lnRef>
+          <a:fillRef idx="3">
+            <a:schemeClr val="accent1"/>
+          </a:fillRef>
+          <a:effectRef idx="0">
+            <a:schemeClr val="accent1"/>
+          </a:effectRef>
+          <a:fontRef idx="minor">
+            <a:schemeClr val="lt1"/>
+          </a:fontRef>
+        </p:style>
+        <p:txBody>
+          <a:bodyPr rtlCol="0" anchor="ctr" wrap="square" lIns="109728" rIns="109728" tIns="36576" bIns="36576"/>
+          <a:lstStyle/>
+          <a:p>
+            <a:pPr algn="ctr"/>
+            <a:r>
+              <a:rPr sz="1600" b="1" i="0">
+                <a:solidFill>
+                  <a:srgbClr val="FFFFFF"/>
+                </a:solidFill>
+                <a:latin typeface="Segoe UI"/>
+              </a:rPr>
+              <a:t>Proposed (OD-34): the pilot decides which agent capabilities scale</a:t>
+            </a:r>
+          </a:p>
+        </p:txBody>
+      </p:sp>
+      <p:sp>
+        <p:nvSpPr>
+          <p:cNvPr id="6" name="Source"/>
           <p:cNvSpPr txBox="1"/>
           <p:nvPr/>
         </p:nvSpPr>
@@ -15632,7 +15386,7 @@
                 </a:solidFill>
                 <a:latin typeface="Segoe UI"/>
               </a:rPr>
-              <a:t>Sources: BRD v0.2.0 frontmatter and Requirements Traceability; .copilot-tracking/brd-sessions/agentic-retrofit-programme.quality-report.yml; log.md (26 Sep 2026).</a:t>
+              <a:t>Sources: pilot-measurement-challenge.md (Summary; Owner Decision); BRD v0.5.0 CON-003, RULE-019, RULE-024, AC-079, FR-042 to FR-044, OD-34, OD-39; log.md (26 Sep 2026). Role answers are hypotheses.</a:t>
             </a:r>
           </a:p>
         </p:txBody>

--- a/.copilot-tracking/ppt/2026-09-26/ama-mentor-progress-review/slide-deck/ama-mentor-progress-review.pptx
+++ b/.copilot-tracking/ppt/2026-09-26/ama-mentor-progress-review/slide-deck/ama-mentor-progress-review.pptx
@@ -19,6 +19,7 @@
     <p:sldId id="267" r:id="rId19"/>
     <p:sldId id="268" r:id="rId20"/>
     <p:sldId id="269" r:id="rId21"/>
+    <p:sldId id="270" r:id="rId22"/>
   </p:sldIdLst>
   <p:sldSz cx="12191695" cy="6858000" type="screen4x3"/>
   <p:notesSz cx="6858000" cy="9144000"/>
@@ -521,7 +522,7 @@
           <a:p/>
           <a:p>
             <a:r>
-              <a:t>I will cover five strands: research, role agents, BRD iterations, a design thinking challenge of the five agents and a BRD quality review, plus two later challenges on how to prove and explain the value. Then lessons, one traceability chain, and my questions for you.</a:t>
+              <a:t>I will walk through five strands of work, three later challenges, my lessons and one traceability chain, then my questions.</a:t>
             </a:r>
           </a:p>
         </p:txBody>
@@ -591,19 +592,25 @@
           <a:lstStyle/>
           <a:p>
             <a:r>
-              <a:t>Alongside all of this ran a formal BRD quality review, re-run after every change. The first run failed hard: the BRD used legacy BR and OBJ identifiers, so the reviewer measured zero percent coverage from functional requirements to acceptance criteria and business goals.</a:t>
+              <a:t>One more test, on 27 September. Would richer inputs change any verdict? Phone photos with location, structured invoices, sensors, drones, even a digital twin: twenty scenarios, with focused questions to the role agents.</a:t>
             </a:r>
           </a:p>
           <a:p/>
           <a:p>
             <a:r>
-              <a:t>I relabelled the document to a canonical taxonomy, with a legacy map so every old reference stays valid. Coverage went from zero to one hundred percent. That was an identifier-format problem, not missing requirements. Relabelling fixed traceability; it did not fix measurability.</a:t>
+              <a:t>None moved a request to an end-to-end agent. Richer inputs enrich the digital foundation and widen what bounded agents can check, but they add duties before autonomy: special category data, Awaab's Law awareness from the moment a photo arrives, and payment and procurement rules.</a:t>
             </a:r>
           </a:p>
           <a:p/>
           <a:p>
             <a:r>
-              <a:t>There have been six runs so far. The later edits raised four new findings on version 0.3.0, all fixed, and none since. It still fails, because seven business goals have no numeric target until company data or board decisions exist. I chose to leave the gate failing rather than invent numbers, and I would like your view on that.</a:t>
+              <a:t>The useful output is the grid: lifecycle events first, then evidence packs for assessment, quality and damp. It is my coarse judgement of what Comparison 2 should test first, not a scaling decision.</a:t>
+            </a:r>
+          </a:p>
+          <a:p/>
+          <a:p>
+            <a:r>
+              <a:t>A post-merge review caught two errors: the same Article 22 citation I had fixed in CON-003, and eleven answers from roles that have no agent. I re-ran nine with the nearest roles and labelled two as my own hypotheses.</a:t>
             </a:r>
           </a:p>
         </p:txBody>
@@ -673,19 +680,19 @@
           <a:lstStyle/>
           <a:p>
             <a:r>
-              <a:t>The writing was not the hard part. Keeping the evidence honest was.</a:t>
+              <a:t>Alongside all of this ran a formal BRD quality review, re-run after every change. The first run failed hard: the BRD used legacy BR and OBJ identifiers, so the reviewer measured zero percent coverage from functional requirements to acceptance criteria and business goals.</a:t>
             </a:r>
           </a:p>
           <a:p/>
           <a:p>
             <a:r>
-              <a:t>The company is fictional, so every number about it is modelled and labelled as an estimate. The role agents are persuasive, and they read my own addendum, so they share my framing. Where they disagree, such as L4 autonomy for quality flags, I keep the divergence open. Sources disagree too, for example on interest cover, and I corrected a superseded fuel poverty measure. Regulation moves: EPC C is final policy but not commenced law, and Awaab's Law Phase 2 is planned from 30 November 2026. I flag those rather than silently choose.</a:t>
+              <a:t>I relabelled the document to a canonical taxonomy, with a legacy map so every old reference stays valid. Coverage went from zero to one hundred percent. That was an identifier-format problem, not missing requirements. Relabelling fixed traceability; it did not fix measurability.</a:t>
             </a:r>
           </a:p>
           <a:p/>
           <a:p>
             <a:r>
-              <a:t>If I started again, I would change three things. Start the log on day one; earlier entries had to be rebuilt from Git. Use canonical requirement identifiers from the first draft. And run the value challenge earlier, and once without the addendum, to test whether the roles were primed by my framing.</a:t>
+              <a:t>There have been six runs so far. It still fails, because seven business goals have no numeric target until company data or board decisions exist. I chose to leave the gate failing rather than invent numbers, and I would like your view on that.</a:t>
             </a:r>
           </a:p>
         </p:txBody>
@@ -755,19 +762,19 @@
           <a:lstStyle/>
           <a:p>
             <a:r>
-              <a:t>This slide is the reason for all the structure: immutable dated sources, cited syntheses, an index and an append-only log, on Karpathy's LLM Wiki pattern. The organisation is in the appendix. Any decision in the addendum can be walked back to its evidence, and this is a real chain.</a:t>
+              <a:t>The writing was not the hard part. Keeping the evidence honest was.</a:t>
             </a:r>
           </a:p>
           <a:p/>
           <a:p>
             <a:r>
-              <a:t>The decision: a capped readiness and pilot stage, not a five-agent rollout, with no end-to-end stock prioritisation agent. The evidence: the roles said eligibility is a rules question. The requirement: FR-026 requires a deterministic pass, fail or unknown eligibility result, tested by AC-039 and constrained by CON-005. The source: the Wave 3 technical annex, page 3, footnote 1, retrieved on 19 September. The change record: the 26 September log entries and commits.</a:t>
+              <a:t>The company is fictional, so every number about it is modelled and labelled as an estimate. The role agents are persuasive, and they read my own addendum, so they share my framing. Where they disagree, such as L4 autonomy for quality flags, I keep the divergence open. Sources disagree too, for example on interest cover, and I corrected a superseded fuel poverty measure. I flag those rather than silently choose.</a:t>
             </a:r>
           </a:p>
           <a:p/>
           <a:p>
             <a:r>
-              <a:t>To challenge a decision, change one piece of evidence, such as a real throughput figure, and the chain shows what has to move.</a:t>
+              <a:t>If I started again, I would change four things. Start the log on day one; earlier entries had to be rebuilt from Git. Use canonical requirement identifiers from the first draft. When I fix an error, search every derived document for it; the what-if study repeated my Article 22 mistake. And run the value challenge earlier, and once without the addendum, to test whether the roles were primed by my framing.</a:t>
             </a:r>
           </a:p>
         </p:txBody>
@@ -837,43 +844,19 @@
           <a:lstStyle/>
           <a:p>
             <a:r>
-              <a:t>These are the four places I would most value your challenge.</a:t>
+              <a:t>This slide is the reason for all the structure: immutable dated sources, cited syntheses, an index and an append-only log, on Karpathy's LLM Wiki pattern. The organisation is in the appendix. Any decision in the addendum can be walked back to its evidence, and this is a real chain.</a:t>
             </a:r>
           </a:p>
           <a:p/>
           <a:p>
             <a:r>
-              <a:t>First, will the panel read agent-led modernisation, not five end-to-end agents, as answering the brief, or as stepping back from the five agents it asked for?</a:t>
+              <a:t>The decision: a capped readiness and pilot stage, not a five-agent rollout, with no end-to-end stock prioritisation agent. The evidence: the roles said eligibility is a rules question. The requirement: FR-026 requires a deterministic pass, fail or unknown eligibility result, tested by AC-039 and constrained by CON-005. The source: the Wave 3 technical annex, page 3, footnote 1, retrieved on 19 September.</a:t>
             </a:r>
           </a:p>
           <a:p/>
           <a:p>
             <a:r>
-              <a:t>Second, how much business depth versus architecture depth should the capstone show?</a:t>
-            </a:r>
-          </a:p>
-          <a:p/>
-          <a:p>
-            <a:r>
-              <a:t>Third, should the BRD keep failing where targets need company data, or should I propose clearly labelled illustrative targets?</a:t>
-            </a:r>
-          </a:p>
-          <a:p/>
-          <a:p>
-            <a:r>
-              <a:t>Fourth, which open divergence between the role agents should I resolve first?</a:t>
-            </a:r>
-          </a:p>
-          <a:p/>
-          <a:p>
-            <a:r>
-              <a:t>On the right is what comes next on the 85-day plan, which finishes on 5 December: the architecture, a shadow comparison of typed decision models, an optional demo with a static fallback, and CEO, CIO and CFO versions of the pitch. There is still no real resident or staff evidence.</a:t>
-            </a:r>
-          </a:p>
-          <a:p/>
-          <a:p>
-            <a:r>
-              <a:t>And on the story itself: where did it lose you? Which question would you take first?</a:t>
+              <a:t>To challenge a decision, change one piece of evidence, such as a real throughput figure, and the chain shows what has to move.</a:t>
             </a:r>
           </a:p>
         </p:txBody>
@@ -943,6 +926,112 @@
           <a:lstStyle/>
           <a:p>
             <a:r>
+              <a:t>These are the four places I would most value your challenge.</a:t>
+            </a:r>
+          </a:p>
+          <a:p/>
+          <a:p>
+            <a:r>
+              <a:t>First, will the panel read agent-led modernisation, not five end-to-end agents, as answering the brief, or as stepping back from the five agents it asked for?</a:t>
+            </a:r>
+          </a:p>
+          <a:p/>
+          <a:p>
+            <a:r>
+              <a:t>Second, how much business depth versus architecture depth should the capstone show?</a:t>
+            </a:r>
+          </a:p>
+          <a:p/>
+          <a:p>
+            <a:r>
+              <a:t>Third, should the BRD keep failing where targets need company data, or should I propose clearly labelled illustrative targets?</a:t>
+            </a:r>
+          </a:p>
+          <a:p/>
+          <a:p>
+            <a:r>
+              <a:t>Fourth, which open divergence between the role agents should I resolve first?</a:t>
+            </a:r>
+          </a:p>
+          <a:p/>
+          <a:p>
+            <a:r>
+              <a:t>On the right is what comes next on the 85-day plan, to 5 December. There is still no real resident or staff evidence.</a:t>
+            </a:r>
+          </a:p>
+          <a:p/>
+          <a:p>
+            <a:r>
+              <a:t>And on the story itself: where did it lose you? Which question would you take first?</a:t>
+            </a:r>
+          </a:p>
+        </p:txBody>
+      </p:sp>
+      <p:sp>
+        <p:nvSpPr>
+          <p:cNvPr id="4" name="Slide Number Placeholder 3"/>
+          <p:cNvSpPr>
+            <a:spLocks noGrp="1"/>
+          </p:cNvSpPr>
+          <p:nvPr>
+            <p:ph type="sldNum" idx="5" sz="quarter"/>
+          </p:nvPr>
+        </p:nvSpPr>
+        <p:spPr/>
+      </p:sp>
+    </p:spTree>
+  </p:cSld>
+  <p:clrMapOvr>
+    <a:masterClrMapping/>
+  </p:clrMapOvr>
+</p:notes>
+</file>
+
+<file path=ppt/notesSlides/notesSlide15.xml><?xml version="1.0" encoding="utf-8"?>
+<p:notes xmlns:a="http://schemas.openxmlformats.org/drawingml/2006/main" xmlns:p="http://schemas.openxmlformats.org/presentationml/2006/main" xmlns:r="http://schemas.openxmlformats.org/officeDocument/2006/relationships">
+  <p:cSld>
+    <p:spTree>
+      <p:nvGrpSpPr>
+        <p:cNvPr id="1" name=""/>
+        <p:cNvGrpSpPr/>
+        <p:nvPr/>
+      </p:nvGrpSpPr>
+      <p:grpSpPr>
+        <a:xfrm>
+          <a:off x="0" y="0"/>
+          <a:ext cx="0" cy="0"/>
+          <a:chOff x="0" y="0"/>
+          <a:chExt cx="0" cy="0"/>
+        </a:xfrm>
+      </p:grpSpPr>
+      <p:sp>
+        <p:nvSpPr>
+          <p:cNvPr id="2" name="Slide Image Placeholder 1"/>
+          <p:cNvSpPr>
+            <a:spLocks noGrp="1"/>
+          </p:cNvSpPr>
+          <p:nvPr>
+            <p:ph type="sldImg" idx="2"/>
+          </p:nvPr>
+        </p:nvSpPr>
+        <p:spPr/>
+      </p:sp>
+      <p:sp>
+        <p:nvSpPr>
+          <p:cNvPr id="3" name="Notes Placeholder 2"/>
+          <p:cNvSpPr>
+            <a:spLocks noGrp="1"/>
+          </p:cNvSpPr>
+          <p:nvPr>
+            <p:ph type="body" idx="3" sz="quarter"/>
+          </p:nvPr>
+        </p:nvSpPr>
+        <p:spPr/>
+        <p:txBody>
+          <a:bodyPr/>
+          <a:lstStyle/>
+          <a:p>
+            <a:r>
               <a:t>This is how I kept a two-week research effort from turning into a pile of</a:t>
             </a:r>
           </a:p>
@@ -1082,17 +1171,7 @@
           <a:lstStyle/>
           <a:p>
             <a:r>
-              <a:t>The brief is a one-page solution request. It names five agents with autonomy</a:t>
-            </a:r>
-          </a:p>
-          <a:p>
-            <a:r>
-              <a:t>levels, a business case, and outcomes such as doubling delivery and capturing</a:t>
-            </a:r>
-          </a:p>
-          <a:p>
-            <a:r>
-              <a:t>GBP 40 million of grants.</a:t>
+              <a:t>The brief is a one-page solution request: five agents with autonomy levels, and promises such as doubling delivery and GBP 40 million of grants.</a:t>
             </a:r>
           </a:p>
           <a:p/>
@@ -1137,7 +1216,6 @@
               <a:t>tried to answer it without inventing facts about the company.</a:t>
             </a:r>
           </a:p>
-          <a:p/>
         </p:txBody>
       </p:sp>
       <p:sp>
@@ -1211,7 +1289,7 @@
           <a:p/>
           <a:p>
             <a:r>
-              <a:t>Research built the context. The role agents let me ask what the brief could not answer. The BRD has been rewritten twelve times and is now version 0.5.0. The design thinking session on 26 September was the turning point: I read each agent request as the value behind it and tested my early doubts agent by agent. The quality review made the requirements traceable, and it was re-run after every later change.</a:t>
+              <a:t>Research built the context. The role agents let me ask what the brief could not answer. The BRD has been revised in thirteen commits and is now version 0.5.0. The design thinking session on 26 September was the turning point: I read each agent request as the value behind it and tested my early doubts agent by agent. The quality review made the requirements traceable, and it was re-run after every later change.</a:t>
             </a:r>
           </a:p>
           <a:p/>
@@ -1314,12 +1392,6 @@
               <a:t>Research also corrected two claims in the brief. The GBP 40 million is an opportunity, not an award, and would cover at most about 5,333 homes at the grant cap. And EPC C by 2030 is final policy, not a consultation, though I could not yet evidence it as commenced law.</a:t>
             </a:r>
           </a:p>
-          <a:p/>
-          <a:p>
-            <a:r>
-              <a:t>If asked: grants need co-funding, so more grant means more of our own spend. The addendum illustrates about GBP 66.7 million of provider funding, as an estimate.</a:t>
-            </a:r>
-          </a:p>
         </p:txBody>
       </p:sp>
       <p:sp>
@@ -1387,13 +1459,13 @@
           <a:lstStyle/>
           <a:p>
             <a:r>
-              <a:t>The company is fictional, so there is nobody to interview. I created eight role agents, one for each perspective that owns part of a retrofit programme, from the asset executive to a frontline housing officer.</a:t>
+              <a:t>The company is fictional, so there is nobody to interview. I created eight role agents, one for each perspective that owns part of a retrofit programme.</a:t>
             </a:r>
           </a:p>
           <a:p/>
           <a:p>
             <a:r>
-              <a:t>They are research instruments, not simulated employees. They are anchored to the case, the addendum and the company research, and they label every answer as a case fact, a sector hypothesis or an unknown. That stops an articulate answer from becoming a fake company fact. Their most useful output is the one question per role that would change its answer most; those questions are now the discovery agenda.</a:t>
+              <a:t>They are research instruments, not simulated employees. They label every answer as a case fact, a sector hypothesis or an unknown. That stops an articulate answer from becoming a fake company fact. Their most useful output is the one question per role that would change its answer most; those questions are now the discovery agenda.</a:t>
             </a:r>
           </a:p>
           <a:p/>
@@ -1475,7 +1547,7 @@
           <a:p/>
           <a:p>
             <a:r>
-              <a:t>On 11 September my first addendum already said that "agentic" is an implementation option and proposed a portfolio control plane, now called the digital foundation. On 19 September the BRD gained a cross-functional challenge to the five-agent request. Then came the regulatory context, the open-decision review and the modelled customer profile.</a:t>
+              <a:t>On 11 September my first addendum already said that "agentic" is an implementation option and proposed a portfolio control plane, now called the digital foundation. On 19 September the BRD gained a cross-functional challenge to the five-agent request.</a:t>
             </a:r>
           </a:p>
           <a:p/>
@@ -1551,7 +1623,7 @@
           <a:lstStyle/>
           <a:p>
             <a:r>
-              <a:t>This is the turning point. I stopped treating the five agents as a specification and read each "owns end-to-end" line as the business telling us what value it expects. Stock prioritisation means defensible capital allocation. Grant and funding means grant cash without clawback. Quality verification means never paying for defective work.</a:t>
+              <a:t>This is the turning point. I stopped treating the five agents as a specification and read each "owns end-to-end" line as the business telling us what value it expects. For example, quality verification means never paying for defective work.</a:t>
             </a:r>
           </a:p>
           <a:p/>
@@ -1563,7 +1635,7 @@
           <a:p/>
           <a:p>
             <a:r>
-              <a:t>The "after" question is how I phrase it now. On 26 September the addendum still called agents "an implementation option"; later that day it became agent-led modernisation, which is the next slide.</a:t>
+              <a:t>The "after" question is how I phrase it now.</a:t>
             </a:r>
           </a:p>
           <a:p/>
@@ -1639,7 +1711,7 @@
           <a:lstStyle/>
           <a:p>
             <a:r>
-              <a:t>So if the gap is shared records, not intelligence, why is this agent-led? Because the records do not fill themselves. What rests on a small team today is coordination, chasing, re-keying, reconciliation and evidence assembly, and that unstructured work is where agents help. Later on 26 September, a challenge to my own measurement plan showed the pilot bundled three changes: a new delivery cell, ring-fenced supplier capacity and agents, so it could never tell the Board which one worked. So I reframed it as agent-led modernisation of the existing retrofit model. Existing teams, suppliers and systems stay, and what I called the control plane is now the digital foundation. Whether coordination really is the binding constraint is still a Phase 0 question.</a:t>
+              <a:t>So if the gap is shared records, not intelligence, why is this agent-led? Because the records do not fill themselves. What rests on a small team today is coordination, chasing, re-keying, reconciliation and evidence assembly, and that unstructured work is where agents help. Later on 26 September, a challenge to my own measurement plan showed the pilot bundled three changes: a new delivery cell, ring-fenced supplier capacity and agents, so it could never tell the Board which one worked. So I reframed it as agent-led modernisation of the existing retrofit model. Whether coordination really is the binding constraint is still a Phase 0 question.</a:t>
             </a:r>
           </a:p>
           <a:p/>
@@ -1727,13 +1799,13 @@
           <a:p/>
           <a:p>
             <a:r>
-              <a:t>The first was my own idea: a dashboard showing the pilot accelerates delivery. All eight roles backed the intent and rejected the design. Speed is not the benefit; accepted handovers are. And, as you saw, it bundled three changes. About 50 handovers in six to nine months cannot prove a 20 percent gain. So there are now two comparisons: a pilot locality with agents against a matched locality without, and each agent capability against the same workflow without it. The dashboard steers; only a frozen benefits scorecard counts at the gate.</a:t>
+              <a:t>The first was my own idea: a dashboard showing the pilot accelerates delivery. All eight roles backed the intent and rejected the design. Speed is not the benefit; accepted handovers are. And, as you saw, it bundled three changes. About 50 handovers in six to nine months cannot prove a 20 percent gain. So there are now two comparisons: a pilot locality with agents against a matched locality without, and each agent capability against the same workflow without it.</a:t>
             </a:r>
           </a:p>
           <a:p/>
           <a:p>
             <a:r>
-              <a:t>The second was a transparency review. It found an error of mine: CON-003 cited UK GDPR Article 22, but the local consolidated text omits it and uses Articles 22A to 22D. CON-003 now cites Articles 22A to 22C and maps human review to the four Article 22C(2) safeguards. Some sources are still missing locally, logged as OD-39.</a:t>
+              <a:t>The second was a transparency review. It found an error of mine: CON-003 cited UK GDPR Article 22, but the local consolidated text omits it and uses Articles 22A to 22D. CON-003 now cites Articles 22A to 22C and maps human review to the four Article 22C(2) safeguards.</a:t>
             </a:r>
           </a:p>
           <a:p/>
@@ -4861,7 +4933,7 @@
                 </a:solidFill>
                 <a:latin typeface="Segoe UI"/>
               </a:rPr>
-              <a:t>How I filled the gaps in the Proper Warm case, 10 to 26 September 2026</a:t>
+              <a:t>How I filled the gaps in the Proper Warm case, 10 to 27 September 2026</a:t>
             </a:r>
           </a:p>
         </p:txBody>
@@ -5000,33 +5072,445 @@
                 </a:solidFill>
                 <a:latin typeface="Segoe UI"/>
               </a:rPr>
-              <a:t>Relabelling fixed traceability; the gate still fails on targets</a:t>
-            </a:r>
-          </a:p>
-        </p:txBody>
-      </p:sp>
-      <p:sp>
-        <p:nvSpPr>
-          <p:cNvPr id="3" name="Stat 1"/>
+              <a:t>Twenty what-ifs changed no verdict, but they show where to start</a:t>
+            </a:r>
+          </a:p>
+        </p:txBody>
+      </p:sp>
+      <p:graphicFrame>
+        <p:nvGraphicFramePr>
+          <p:cNvPr id="3" name="Value complexity grid"/>
+          <p:cNvGraphicFramePr>
+            <a:graphicFrameLocks noGrp="1"/>
+          </p:cNvGraphicFramePr>
+          <p:nvPr/>
+        </p:nvGraphicFramePr>
+        <p:xfrm>
+          <a:off x="548640" y="1508760"/>
+          <a:ext cx="6583680" cy="1463040"/>
+        </p:xfrm>
+        <a:graphic>
+          <a:graphicData uri="http://schemas.openxmlformats.org/drawingml/2006/table">
+            <a:tbl>
+              <a:tblPr firstRow="1" bandRow="1">
+                <a:tableStyleId>{5C22544A-7EE6-4342-B048-85BDC9FD1C3A}</a:tableStyleId>
+              </a:tblPr>
+              <a:tblGrid>
+                <a:gridCol w="1097280"/>
+                <a:gridCol w="1828800"/>
+                <a:gridCol w="1828800"/>
+                <a:gridCol w="1828800"/>
+              </a:tblGrid>
+              <a:tr h="365760">
+                <a:tc>
+                  <a:txBody>
+                    <a:bodyPr/>
+                    <a:lstStyle/>
+                    <a:p>
+                      <a:r>
+                        <a:rPr b="1" sz="1100">
+                          <a:solidFill>
+                            <a:srgbClr val="FFFFFF"/>
+                          </a:solidFill>
+                          <a:latin typeface="Segoe UI"/>
+                        </a:rPr>
+                        <a:t>Value</a:t>
+                      </a:r>
+                    </a:p>
+                  </a:txBody>
+                  <a:tcPr>
+                    <a:solidFill>
+                      <a:srgbClr val="102A43"/>
+                    </a:solidFill>
+                  </a:tcPr>
+                </a:tc>
+                <a:tc>
+                  <a:txBody>
+                    <a:bodyPr/>
+                    <a:lstStyle/>
+                    <a:p>
+                      <a:r>
+                        <a:rPr b="1" sz="1100">
+                          <a:solidFill>
+                            <a:srgbClr val="FFFFFF"/>
+                          </a:solidFill>
+                          <a:latin typeface="Segoe UI"/>
+                        </a:rPr>
+                        <a:t>Low complexity</a:t>
+                      </a:r>
+                    </a:p>
+                  </a:txBody>
+                  <a:tcPr>
+                    <a:solidFill>
+                      <a:srgbClr val="102A43"/>
+                    </a:solidFill>
+                  </a:tcPr>
+                </a:tc>
+                <a:tc>
+                  <a:txBody>
+                    <a:bodyPr/>
+                    <a:lstStyle/>
+                    <a:p>
+                      <a:r>
+                        <a:rPr b="1" sz="1100">
+                          <a:solidFill>
+                            <a:srgbClr val="FFFFFF"/>
+                          </a:solidFill>
+                          <a:latin typeface="Segoe UI"/>
+                        </a:rPr>
+                        <a:t>Medium complexity</a:t>
+                      </a:r>
+                    </a:p>
+                  </a:txBody>
+                  <a:tcPr>
+                    <a:solidFill>
+                      <a:srgbClr val="102A43"/>
+                    </a:solidFill>
+                  </a:tcPr>
+                </a:tc>
+                <a:tc>
+                  <a:txBody>
+                    <a:bodyPr/>
+                    <a:lstStyle/>
+                    <a:p>
+                      <a:r>
+                        <a:rPr b="1" sz="1100">
+                          <a:solidFill>
+                            <a:srgbClr val="FFFFFF"/>
+                          </a:solidFill>
+                          <a:latin typeface="Segoe UI"/>
+                        </a:rPr>
+                        <a:t>High complexity</a:t>
+                      </a:r>
+                    </a:p>
+                  </a:txBody>
+                  <a:tcPr>
+                    <a:solidFill>
+                      <a:srgbClr val="102A43"/>
+                    </a:solidFill>
+                  </a:tcPr>
+                </a:tc>
+              </a:tr>
+              <a:tr h="365760">
+                <a:tc>
+                  <a:txBody>
+                    <a:bodyPr/>
+                    <a:lstStyle/>
+                    <a:p>
+                      <a:r>
+                        <a:rPr b="1" sz="1100">
+                          <a:solidFill>
+                            <a:srgbClr val="102A43"/>
+                          </a:solidFill>
+                          <a:latin typeface="Segoe UI"/>
+                        </a:rPr>
+                        <a:t>High value</a:t>
+                      </a:r>
+                    </a:p>
+                  </a:txBody>
+                  <a:tcPr>
+                    <a:solidFill>
+                      <a:srgbClr val="F0F4F8"/>
+                    </a:solidFill>
+                  </a:tcPr>
+                </a:tc>
+                <a:tc>
+                  <a:txBody>
+                    <a:bodyPr/>
+                    <a:lstStyle/>
+                    <a:p>
+                      <a:r>
+                        <a:rPr b="1" sz="1100">
+                          <a:solidFill>
+                            <a:srgbClr val="102A43"/>
+                          </a:solidFill>
+                          <a:latin typeface="Segoe UI"/>
+                        </a:rPr>
+                        <a:t>Lifecycle events on a workflow engine</a:t>
+                      </a:r>
+                    </a:p>
+                  </a:txBody>
+                  <a:tcPr>
+                    <a:solidFill>
+                      <a:srgbClr val="E3F4F1"/>
+                    </a:solidFill>
+                  </a:tcPr>
+                </a:tc>
+                <a:tc>
+                  <a:txBody>
+                    <a:bodyPr/>
+                    <a:lstStyle/>
+                    <a:p>
+                      <a:r>
+                        <a:rPr b="1" sz="1100">
+                          <a:solidFill>
+                            <a:srgbClr val="102A43"/>
+                          </a:solidFill>
+                          <a:latin typeface="Segoe UI"/>
+                        </a:rPr>
+                        <a:t>Evidence packs for assessment, quality and damp</a:t>
+                      </a:r>
+                    </a:p>
+                  </a:txBody>
+                  <a:tcPr>
+                    <a:solidFill>
+                      <a:srgbClr val="E3F4F1"/>
+                    </a:solidFill>
+                  </a:tcPr>
+                </a:tc>
+                <a:tc>
+                  <a:txBody>
+                    <a:bodyPr/>
+                    <a:lstStyle/>
+                    <a:p>
+                      <a:r>
+                        <a:rPr sz="1100">
+                          <a:solidFill>
+                            <a:srgbClr val="243B53"/>
+                          </a:solidFill>
+                          <a:latin typeface="Segoe UI"/>
+                        </a:rPr>
+                        <a:t>Data fusion, drones, sensors, call transcripts</a:t>
+                      </a:r>
+                    </a:p>
+                  </a:txBody>
+                  <a:tcPr>
+                    <a:solidFill>
+                      <a:srgbClr val="FDF1DC"/>
+                    </a:solidFill>
+                  </a:tcPr>
+                </a:tc>
+              </a:tr>
+              <a:tr h="365760">
+                <a:tc>
+                  <a:txBody>
+                    <a:bodyPr/>
+                    <a:lstStyle/>
+                    <a:p>
+                      <a:r>
+                        <a:rPr b="1" sz="1100">
+                          <a:solidFill>
+                            <a:srgbClr val="102A43"/>
+                          </a:solidFill>
+                          <a:latin typeface="Segoe UI"/>
+                        </a:rPr>
+                        <a:t>Medium</a:t>
+                      </a:r>
+                    </a:p>
+                  </a:txBody>
+                  <a:tcPr>
+                    <a:solidFill>
+                      <a:srgbClr val="F0F4F8"/>
+                    </a:solidFill>
+                  </a:tcPr>
+                </a:tc>
+                <a:tc>
+                  <a:txBody>
+                    <a:bodyPr/>
+                    <a:lstStyle/>
+                    <a:p>
+                      <a:r>
+                        <a:rPr b="1" sz="1100">
+                          <a:solidFill>
+                            <a:srgbClr val="102A43"/>
+                          </a:solidFill>
+                          <a:latin typeface="Segoe UI"/>
+                        </a:rPr>
+                        <a:t>Structured invoices; capacity feeds and resident app</a:t>
+                      </a:r>
+                    </a:p>
+                  </a:txBody>
+                  <a:tcPr>
+                    <a:solidFill>
+                      <a:srgbClr val="E3F4F1"/>
+                    </a:solidFill>
+                  </a:tcPr>
+                </a:tc>
+                <a:tc>
+                  <a:txBody>
+                    <a:bodyPr/>
+                    <a:lstStyle/>
+                    <a:p>
+                      <a:r>
+                        <a:rPr sz="1100">
+                          <a:solidFill>
+                            <a:srgbClr val="243B53"/>
+                          </a:solidFill>
+                          <a:latin typeface="Segoe UI"/>
+                        </a:rPr>
+                        <a:t>Condition-photo app, live eligibility, concierge, board narratives</a:t>
+                      </a:r>
+                    </a:p>
+                  </a:txBody>
+                  <a:tcPr>
+                    <a:solidFill>
+                      <a:srgbClr val="FFFFFF"/>
+                    </a:solidFill>
+                  </a:tcPr>
+                </a:tc>
+                <a:tc>
+                  <a:txBody>
+                    <a:bodyPr/>
+                    <a:lstStyle/>
+                    <a:p>
+                      <a:r>
+                        <a:rPr sz="1100">
+                          <a:solidFill>
+                            <a:srgbClr val="243B53"/>
+                          </a:solidFill>
+                          <a:latin typeface="Segoe UI"/>
+                        </a:rPr>
+                        <a:t>Funder-portal integrations</a:t>
+                      </a:r>
+                    </a:p>
+                  </a:txBody>
+                  <a:tcPr>
+                    <a:solidFill>
+                      <a:srgbClr val="FFFFFF"/>
+                    </a:solidFill>
+                  </a:tcPr>
+                </a:tc>
+              </a:tr>
+              <a:tr h="365760">
+                <a:tc>
+                  <a:txBody>
+                    <a:bodyPr/>
+                    <a:lstStyle/>
+                    <a:p>
+                      <a:r>
+                        <a:rPr b="1" sz="1100">
+                          <a:solidFill>
+                            <a:srgbClr val="102A43"/>
+                          </a:solidFill>
+                          <a:latin typeface="Segoe UI"/>
+                        </a:rPr>
+                        <a:t>Low</a:t>
+                      </a:r>
+                    </a:p>
+                  </a:txBody>
+                  <a:tcPr>
+                    <a:solidFill>
+                      <a:srgbClr val="F0F4F8"/>
+                    </a:solidFill>
+                  </a:tcPr>
+                </a:tc>
+                <a:tc>
+                  <a:txBody>
+                    <a:bodyPr/>
+                    <a:lstStyle/>
+                    <a:p/>
+                  </a:txBody>
+                  <a:tcPr>
+                    <a:solidFill>
+                      <a:srgbClr val="FFFFFF"/>
+                    </a:solidFill>
+                  </a:tcPr>
+                </a:tc>
+                <a:tc>
+                  <a:txBody>
+                    <a:bodyPr/>
+                    <a:lstStyle/>
+                    <a:p>
+                      <a:r>
+                        <a:rPr sz="1100">
+                          <a:solidFill>
+                            <a:srgbClr val="52606D"/>
+                          </a:solidFill>
+                          <a:latin typeface="Segoe UI"/>
+                        </a:rPr>
+                        <a:t>Sector defect benchmarking</a:t>
+                      </a:r>
+                    </a:p>
+                  </a:txBody>
+                  <a:tcPr>
+                    <a:solidFill>
+                      <a:srgbClr val="EEF1F4"/>
+                    </a:solidFill>
+                  </a:tcPr>
+                </a:tc>
+                <a:tc>
+                  <a:txBody>
+                    <a:bodyPr/>
+                    <a:lstStyle/>
+                    <a:p>
+                      <a:r>
+                        <a:rPr sz="1100">
+                          <a:solidFill>
+                            <a:srgbClr val="52606D"/>
+                          </a:solidFill>
+                          <a:latin typeface="Segoe UI"/>
+                        </a:rPr>
+                        <a:t>Digital twin, supplier mesh, site scanning, AI triage</a:t>
+                      </a:r>
+                    </a:p>
+                  </a:txBody>
+                  <a:tcPr>
+                    <a:solidFill>
+                      <a:srgbClr val="EEF1F4"/>
+                    </a:solidFill>
+                  </a:tcPr>
+                </a:tc>
+              </a:tr>
+            </a:tbl>
+          </a:graphicData>
+        </a:graphic>
+      </p:graphicFrame>
+      <p:sp>
+        <p:nvSpPr>
+          <p:cNvPr id="4" name="Legend"/>
+          <p:cNvSpPr txBox="1"/>
+          <p:nvPr/>
+        </p:nvSpPr>
+        <p:spPr>
+          <a:xfrm>
+            <a:off x="548640" y="4617720"/>
+            <a:ext cx="6583680" cy="274320"/>
+          </a:xfrm>
+          <a:prstGeom prst="rect">
+            <a:avLst/>
+          </a:prstGeom>
+          <a:noFill/>
+        </p:spPr>
+        <p:txBody>
+          <a:bodyPr wrap="square" tIns="0" bIns="0">
+            <a:spAutoFit/>
+          </a:bodyPr>
+          <a:lstStyle/>
+          <a:p>
+            <a:r>
+              <a:rPr sz="1100" b="0" i="0">
+                <a:solidFill>
+                  <a:srgbClr val="627D98"/>
+                </a:solidFill>
+                <a:latin typeface="Segoe UI"/>
+              </a:rPr>
+              <a:t>Green: test first, after the foundation. White: opportunistic. Amber: big bets. Grey: defer.</a:t>
+            </a:r>
+          </a:p>
+        </p:txBody>
+      </p:sp>
+      <p:sp>
+        <p:nvSpPr>
+          <p:cNvPr id="5" name="Findings"/>
           <p:cNvSpPr/>
           <p:nvPr/>
         </p:nvSpPr>
         <p:spPr>
           <a:xfrm>
-            <a:off x="548640" y="1554480"/>
-            <a:ext cx="1005840" cy="731520"/>
+            <a:off x="7406640" y="1508760"/>
+            <a:ext cx="4236415" cy="3383280"/>
           </a:xfrm>
           <a:prstGeom prst="roundRect">
             <a:avLst>
-              <a:gd name="adj" fmla="val 12000"/>
+              <a:gd name="adj" fmla="val 6000"/>
             </a:avLst>
           </a:prstGeom>
           <a:solidFill>
-            <a:srgbClr val="0B625B"/>
+            <a:srgbClr val="F0F4F8"/>
           </a:solidFill>
           <a:ln w="12700">
             <a:solidFill>
-              <a:srgbClr val="0B625B"/>
+              <a:srgbClr val="D9E2EC"/>
             </a:solidFill>
           </a:ln>
         </p:spPr>
@@ -5045,66 +5529,104 @@
           </a:fontRef>
         </p:style>
         <p:txBody>
-          <a:bodyPr rtlCol="0" anchor="ctr" wrap="square" lIns="109728" rIns="109728" tIns="36576" bIns="36576"/>
-          <a:lstStyle/>
-          <a:p>
-            <a:pPr algn="ctr"/>
-            <a:r>
-              <a:rPr sz="2600" b="1" i="0">
-                <a:solidFill>
-                  <a:srgbClr val="FFFFFF"/>
-                </a:solidFill>
-                <a:latin typeface="Segoe UI"/>
-              </a:rPr>
-              <a:t>12</a:t>
-            </a:r>
-          </a:p>
-        </p:txBody>
-      </p:sp>
-      <p:sp>
-        <p:nvSpPr>
-          <p:cNvPr id="4" name="Stat 1 label"/>
-          <p:cNvSpPr txBox="1"/>
-          <p:nvPr/>
-        </p:nvSpPr>
-        <p:spPr>
-          <a:xfrm>
-            <a:off x="1645919" y="1554480"/>
-            <a:ext cx="1645920" cy="731520"/>
-          </a:xfrm>
-          <a:prstGeom prst="rect">
-            <a:avLst/>
-          </a:prstGeom>
-          <a:noFill/>
-        </p:spPr>
-        <p:txBody>
-          <a:bodyPr wrap="square" anchor="ctr">
-            <a:spAutoFit/>
-          </a:bodyPr>
-          <a:lstStyle/>
-          <a:p>
-            <a:r>
-              <a:rPr sz="1300" b="0" i="0">
+          <a:bodyPr rtlCol="0" anchor="t" wrap="square" lIns="164592" rIns="164592" tIns="128016" bIns="91440"/>
+          <a:lstStyle/>
+          <a:p>
+            <a:pPr algn="l">
+              <a:spcAft>
+                <a:spcPts val="1200"/>
+              </a:spcAft>
+            </a:pPr>
+            <a:r>
+              <a:rPr sz="1300" b="1" i="0">
+                <a:solidFill>
+                  <a:srgbClr val="1D5FB8"/>
+                </a:solidFill>
+                <a:latin typeface="Segoe UI"/>
+              </a:rPr>
+              <a:t>WHAT 20 SCENARIOS FOUND, 27 SEP</a:t>
+            </a:r>
+          </a:p>
+          <a:p>
+            <a:pPr algn="l" marL="228600" indent="-228600">
+              <a:spcAft>
+                <a:spcPts val="1200"/>
+              </a:spcAft>
+              <a:buChar char="•"/>
+            </a:pPr>
+            <a:r>
+              <a:rPr sz="1400" b="0" i="0">
                 <a:solidFill>
                   <a:srgbClr val="243B53"/>
                 </a:solidFill>
                 <a:latin typeface="Segoe UI"/>
               </a:rPr>
-              <a:t>Business goals (BG)</a:t>
-            </a:r>
-          </a:p>
-        </p:txBody>
-      </p:sp>
-      <p:sp>
-        <p:nvSpPr>
-          <p:cNvPr id="5" name="Stat 2"/>
+              <a:t>None moves a request to an end-to-end agent</a:t>
+            </a:r>
+          </a:p>
+          <a:p>
+            <a:pPr algn="l" marL="228600" indent="-228600">
+              <a:spcAft>
+                <a:spcPts val="1200"/>
+              </a:spcAft>
+              <a:buChar char="•"/>
+            </a:pPr>
+            <a:r>
+              <a:rPr sz="1400" b="0" i="0">
+                <a:solidFill>
+                  <a:srgbClr val="243B53"/>
+                </a:solidFill>
+                <a:latin typeface="Segoe UI"/>
+              </a:rPr>
+              <a:t>Richer inputs enrich the digital foundation first</a:t>
+            </a:r>
+          </a:p>
+          <a:p>
+            <a:pPr algn="l" marL="228600" indent="-228600">
+              <a:spcAft>
+                <a:spcPts val="1200"/>
+              </a:spcAft>
+              <a:buChar char="•"/>
+            </a:pPr>
+            <a:r>
+              <a:rPr sz="1400" b="0" i="0">
+                <a:solidFill>
+                  <a:srgbClr val="243B53"/>
+                </a:solidFill>
+                <a:latin typeface="Segoe UI"/>
+              </a:rPr>
+              <a:t>Duties grow before autonomy: special category data, Awaab's Law awareness, payment and procurement rules</a:t>
+            </a:r>
+          </a:p>
+          <a:p>
+            <a:pPr algn="l" marL="228600" indent="-228600">
+              <a:spcAft>
+                <a:spcPts val="1200"/>
+              </a:spcAft>
+              <a:buChar char="•"/>
+            </a:pPr>
+            <a:r>
+              <a:rPr sz="1400" b="0" i="0">
+                <a:solidFill>
+                  <a:srgbClr val="243B53"/>
+                </a:solidFill>
+                <a:latin typeface="Segoe UI"/>
+              </a:rPr>
+              <a:t>The grid orders what Comparison 2 tests first; under proposed OD-34, the pilot decides what scales</a:t>
+            </a:r>
+          </a:p>
+        </p:txBody>
+      </p:sp>
+      <p:sp>
+        <p:nvSpPr>
+          <p:cNvPr id="6" name="Takeaway"/>
           <p:cNvSpPr/>
           <p:nvPr/>
         </p:nvSpPr>
         <p:spPr>
           <a:xfrm>
-            <a:off x="3429000" y="1554480"/>
-            <a:ext cx="1005840" cy="731520"/>
+            <a:off x="548640" y="5303520"/>
+            <a:ext cx="11094415" cy="548640"/>
           </a:xfrm>
           <a:prstGeom prst="roundRect">
             <a:avLst>
@@ -5112,11 +5634,11 @@
             </a:avLst>
           </a:prstGeom>
           <a:solidFill>
-            <a:srgbClr val="1D5FB8"/>
+            <a:srgbClr val="102A43"/>
           </a:solidFill>
           <a:ln w="12700">
             <a:solidFill>
-              <a:srgbClr val="1D5FB8"/>
+              <a:srgbClr val="102A43"/>
             </a:solidFill>
           </a:ln>
         </p:spPr>
@@ -5140,767 +5662,20 @@
           <a:p>
             <a:pPr algn="ctr"/>
             <a:r>
-              <a:rPr sz="2600" b="1" i="0">
+              <a:rPr sz="1600" b="1" i="0">
                 <a:solidFill>
                   <a:srgbClr val="FFFFFF"/>
                 </a:solidFill>
                 <a:latin typeface="Segoe UI"/>
               </a:rPr>
-              <a:t>44</a:t>
-            </a:r>
-          </a:p>
-        </p:txBody>
-      </p:sp>
-      <p:sp>
-        <p:nvSpPr>
-          <p:cNvPr id="6" name="Stat 2 label"/>
-          <p:cNvSpPr txBox="1"/>
-          <p:nvPr/>
-        </p:nvSpPr>
-        <p:spPr>
-          <a:xfrm>
-            <a:off x="4526280" y="1554480"/>
-            <a:ext cx="1645920" cy="731520"/>
-          </a:xfrm>
-          <a:prstGeom prst="rect">
-            <a:avLst/>
-          </a:prstGeom>
-          <a:noFill/>
-        </p:spPr>
-        <p:txBody>
-          <a:bodyPr wrap="square" anchor="ctr">
-            <a:spAutoFit/>
-          </a:bodyPr>
-          <a:lstStyle/>
-          <a:p>
-            <a:r>
-              <a:rPr sz="1300" b="0" i="0">
-                <a:solidFill>
-                  <a:srgbClr val="243B53"/>
-                </a:solidFill>
-                <a:latin typeface="Segoe UI"/>
-              </a:rPr>
-              <a:t>Functional requirements (FR)</a:t>
-            </a:r>
-          </a:p>
-        </p:txBody>
-      </p:sp>
-      <p:sp>
-        <p:nvSpPr>
-          <p:cNvPr id="7" name="Stat 3"/>
-          <p:cNvSpPr/>
-          <p:nvPr/>
-        </p:nvSpPr>
-        <p:spPr>
-          <a:xfrm>
-            <a:off x="548640" y="2560320"/>
-            <a:ext cx="1005840" cy="731520"/>
-          </a:xfrm>
-          <a:prstGeom prst="roundRect">
-            <a:avLst>
-              <a:gd name="adj" fmla="val 12000"/>
-            </a:avLst>
-          </a:prstGeom>
-          <a:solidFill>
-            <a:srgbClr val="0B625B"/>
-          </a:solidFill>
-          <a:ln w="12700">
-            <a:solidFill>
-              <a:srgbClr val="0B625B"/>
-            </a:solidFill>
-          </a:ln>
-        </p:spPr>
-        <p:style>
-          <a:lnRef idx="1">
-            <a:schemeClr val="accent1"/>
-          </a:lnRef>
-          <a:fillRef idx="3">
-            <a:schemeClr val="accent1"/>
-          </a:fillRef>
-          <a:effectRef idx="0">
-            <a:schemeClr val="accent1"/>
-          </a:effectRef>
-          <a:fontRef idx="minor">
-            <a:schemeClr val="lt1"/>
-          </a:fontRef>
-        </p:style>
-        <p:txBody>
-          <a:bodyPr rtlCol="0" anchor="ctr" wrap="square" lIns="109728" rIns="109728" tIns="36576" bIns="36576"/>
-          <a:lstStyle/>
-          <a:p>
-            <a:pPr algn="ctr"/>
-            <a:r>
-              <a:rPr sz="2600" b="1" i="0">
-                <a:solidFill>
-                  <a:srgbClr val="FFFFFF"/>
-                </a:solidFill>
-                <a:latin typeface="Segoe UI"/>
-              </a:rPr>
-              <a:t>85</a:t>
-            </a:r>
-          </a:p>
-        </p:txBody>
-      </p:sp>
-      <p:sp>
-        <p:nvSpPr>
-          <p:cNvPr id="8" name="Stat 3 label"/>
-          <p:cNvSpPr txBox="1"/>
-          <p:nvPr/>
-        </p:nvSpPr>
-        <p:spPr>
-          <a:xfrm>
-            <a:off x="1645919" y="2560320"/>
-            <a:ext cx="1645920" cy="731520"/>
-          </a:xfrm>
-          <a:prstGeom prst="rect">
-            <a:avLst/>
-          </a:prstGeom>
-          <a:noFill/>
-        </p:spPr>
-        <p:txBody>
-          <a:bodyPr wrap="square" anchor="ctr">
-            <a:spAutoFit/>
-          </a:bodyPr>
-          <a:lstStyle/>
-          <a:p>
-            <a:r>
-              <a:rPr sz="1300" b="0" i="0">
-                <a:solidFill>
-                  <a:srgbClr val="243B53"/>
-                </a:solidFill>
-                <a:latin typeface="Segoe UI"/>
-              </a:rPr>
-              <a:t>Acceptance criteria (AC)</a:t>
-            </a:r>
-          </a:p>
-        </p:txBody>
-      </p:sp>
-      <p:sp>
-        <p:nvSpPr>
-          <p:cNvPr id="9" name="Stat 4"/>
-          <p:cNvSpPr/>
-          <p:nvPr/>
-        </p:nvSpPr>
-        <p:spPr>
-          <a:xfrm>
-            <a:off x="3429000" y="2560320"/>
-            <a:ext cx="1005840" cy="731520"/>
-          </a:xfrm>
-          <a:prstGeom prst="roundRect">
-            <a:avLst>
-              <a:gd name="adj" fmla="val 12000"/>
-            </a:avLst>
-          </a:prstGeom>
-          <a:solidFill>
-            <a:srgbClr val="1D5FB8"/>
-          </a:solidFill>
-          <a:ln w="12700">
-            <a:solidFill>
-              <a:srgbClr val="1D5FB8"/>
-            </a:solidFill>
-          </a:ln>
-        </p:spPr>
-        <p:style>
-          <a:lnRef idx="1">
-            <a:schemeClr val="accent1"/>
-          </a:lnRef>
-          <a:fillRef idx="3">
-            <a:schemeClr val="accent1"/>
-          </a:fillRef>
-          <a:effectRef idx="0">
-            <a:schemeClr val="accent1"/>
-          </a:effectRef>
-          <a:fontRef idx="minor">
-            <a:schemeClr val="lt1"/>
-          </a:fontRef>
-        </p:style>
-        <p:txBody>
-          <a:bodyPr rtlCol="0" anchor="ctr" wrap="square" lIns="109728" rIns="109728" tIns="36576" bIns="36576"/>
-          <a:lstStyle/>
-          <a:p>
-            <a:pPr algn="ctr"/>
-            <a:r>
-              <a:rPr sz="2600" b="1" i="0">
-                <a:solidFill>
-                  <a:srgbClr val="FFFFFF"/>
-                </a:solidFill>
-                <a:latin typeface="Segoe UI"/>
-              </a:rPr>
-              <a:t>9</a:t>
-            </a:r>
-          </a:p>
-        </p:txBody>
-      </p:sp>
-      <p:sp>
-        <p:nvSpPr>
-          <p:cNvPr id="10" name="Stat 4 label"/>
-          <p:cNvSpPr txBox="1"/>
-          <p:nvPr/>
-        </p:nvSpPr>
-        <p:spPr>
-          <a:xfrm>
-            <a:off x="4526280" y="2560320"/>
-            <a:ext cx="1645920" cy="731520"/>
-          </a:xfrm>
-          <a:prstGeom prst="rect">
-            <a:avLst/>
-          </a:prstGeom>
-          <a:noFill/>
-        </p:spPr>
-        <p:txBody>
-          <a:bodyPr wrap="square" anchor="ctr">
-            <a:spAutoFit/>
-          </a:bodyPr>
-          <a:lstStyle/>
-          <a:p>
-            <a:r>
-              <a:rPr sz="1300" b="0" i="0">
-                <a:solidFill>
-                  <a:srgbClr val="243B53"/>
-                </a:solidFill>
-                <a:latin typeface="Segoe UI"/>
-              </a:rPr>
-              <a:t>Non-functional (NFR, ISO/IEC 25010)</a:t>
-            </a:r>
-          </a:p>
-        </p:txBody>
-      </p:sp>
-      <p:sp>
-        <p:nvSpPr>
-          <p:cNvPr id="11" name="Stat 5"/>
-          <p:cNvSpPr/>
-          <p:nvPr/>
-        </p:nvSpPr>
-        <p:spPr>
-          <a:xfrm>
-            <a:off x="548640" y="3566160"/>
-            <a:ext cx="1005840" cy="731520"/>
-          </a:xfrm>
-          <a:prstGeom prst="roundRect">
-            <a:avLst>
-              <a:gd name="adj" fmla="val 12000"/>
-            </a:avLst>
-          </a:prstGeom>
-          <a:solidFill>
-            <a:srgbClr val="0B625B"/>
-          </a:solidFill>
-          <a:ln w="12700">
-            <a:solidFill>
-              <a:srgbClr val="0B625B"/>
-            </a:solidFill>
-          </a:ln>
-        </p:spPr>
-        <p:style>
-          <a:lnRef idx="1">
-            <a:schemeClr val="accent1"/>
-          </a:lnRef>
-          <a:fillRef idx="3">
-            <a:schemeClr val="accent1"/>
-          </a:fillRef>
-          <a:effectRef idx="0">
-            <a:schemeClr val="accent1"/>
-          </a:effectRef>
-          <a:fontRef idx="minor">
-            <a:schemeClr val="lt1"/>
-          </a:fontRef>
-        </p:style>
-        <p:txBody>
-          <a:bodyPr rtlCol="0" anchor="ctr" wrap="square" lIns="109728" rIns="109728" tIns="36576" bIns="36576"/>
-          <a:lstStyle/>
-          <a:p>
-            <a:pPr algn="ctr"/>
-            <a:r>
-              <a:rPr sz="2600" b="1" i="0">
-                <a:solidFill>
-                  <a:srgbClr val="FFFFFF"/>
-                </a:solidFill>
-                <a:latin typeface="Segoe UI"/>
-              </a:rPr>
-              <a:t>6</a:t>
-            </a:r>
-          </a:p>
-        </p:txBody>
-      </p:sp>
-      <p:sp>
-        <p:nvSpPr>
-          <p:cNvPr id="12" name="Stat 5 label"/>
-          <p:cNvSpPr txBox="1"/>
-          <p:nvPr/>
-        </p:nvSpPr>
-        <p:spPr>
-          <a:xfrm>
-            <a:off x="1645919" y="3566160"/>
-            <a:ext cx="1645920" cy="731520"/>
-          </a:xfrm>
-          <a:prstGeom prst="rect">
-            <a:avLst/>
-          </a:prstGeom>
-          <a:noFill/>
-        </p:spPr>
-        <p:txBody>
-          <a:bodyPr wrap="square" anchor="ctr">
-            <a:spAutoFit/>
-          </a:bodyPr>
-          <a:lstStyle/>
-          <a:p>
-            <a:r>
-              <a:rPr sz="1300" b="0" i="0">
-                <a:solidFill>
-                  <a:srgbClr val="243B53"/>
-                </a:solidFill>
-                <a:latin typeface="Segoe UI"/>
-              </a:rPr>
-              <a:t>Imposed constraints (CON)</a:t>
-            </a:r>
-          </a:p>
-        </p:txBody>
-      </p:sp>
-      <p:sp>
-        <p:nvSpPr>
-          <p:cNvPr id="13" name="Stat 6"/>
-          <p:cNvSpPr/>
-          <p:nvPr/>
-        </p:nvSpPr>
-        <p:spPr>
-          <a:xfrm>
-            <a:off x="3429000" y="3566160"/>
-            <a:ext cx="1005840" cy="731520"/>
-          </a:xfrm>
-          <a:prstGeom prst="roundRect">
-            <a:avLst>
-              <a:gd name="adj" fmla="val 12000"/>
-            </a:avLst>
-          </a:prstGeom>
-          <a:solidFill>
-            <a:srgbClr val="1D5FB8"/>
-          </a:solidFill>
-          <a:ln w="12700">
-            <a:solidFill>
-              <a:srgbClr val="1D5FB8"/>
-            </a:solidFill>
-          </a:ln>
-        </p:spPr>
-        <p:style>
-          <a:lnRef idx="1">
-            <a:schemeClr val="accent1"/>
-          </a:lnRef>
-          <a:fillRef idx="3">
-            <a:schemeClr val="accent1"/>
-          </a:fillRef>
-          <a:effectRef idx="0">
-            <a:schemeClr val="accent1"/>
-          </a:effectRef>
-          <a:fontRef idx="minor">
-            <a:schemeClr val="lt1"/>
-          </a:fontRef>
-        </p:style>
-        <p:txBody>
-          <a:bodyPr rtlCol="0" anchor="ctr" wrap="square" lIns="109728" rIns="109728" tIns="36576" bIns="36576"/>
-          <a:lstStyle/>
-          <a:p>
-            <a:pPr algn="ctr"/>
-            <a:r>
-              <a:rPr sz="2600" b="1" i="0">
-                <a:solidFill>
-                  <a:srgbClr val="FFFFFF"/>
-                </a:solidFill>
-                <a:latin typeface="Segoe UI"/>
-              </a:rPr>
-              <a:t>24</a:t>
-            </a:r>
-          </a:p>
-        </p:txBody>
-      </p:sp>
-      <p:sp>
-        <p:nvSpPr>
-          <p:cNvPr id="14" name="Stat 6 label"/>
-          <p:cNvSpPr txBox="1"/>
-          <p:nvPr/>
-        </p:nvSpPr>
-        <p:spPr>
-          <a:xfrm>
-            <a:off x="4526280" y="3566160"/>
-            <a:ext cx="1645920" cy="731520"/>
-          </a:xfrm>
-          <a:prstGeom prst="rect">
-            <a:avLst/>
-          </a:prstGeom>
-          <a:noFill/>
-        </p:spPr>
-        <p:txBody>
-          <a:bodyPr wrap="square" anchor="ctr">
-            <a:spAutoFit/>
-          </a:bodyPr>
-          <a:lstStyle/>
-          <a:p>
-            <a:r>
-              <a:rPr sz="1300" b="0" i="0">
-                <a:solidFill>
-                  <a:srgbClr val="243B53"/>
-                </a:solidFill>
-                <a:latin typeface="Segoe UI"/>
-              </a:rPr>
-              <a:t>Business rules (RULE)</a:t>
-            </a:r>
-          </a:p>
-        </p:txBody>
-      </p:sp>
-      <p:sp>
-        <p:nvSpPr>
-          <p:cNvPr id="15" name="Before"/>
-          <p:cNvSpPr/>
-          <p:nvPr/>
-        </p:nvSpPr>
-        <p:spPr>
-          <a:xfrm>
-            <a:off x="548640" y="4754880"/>
-            <a:ext cx="1188720" cy="731520"/>
-          </a:xfrm>
-          <a:prstGeom prst="roundRect">
-            <a:avLst>
-              <a:gd name="adj" fmla="val 12000"/>
-            </a:avLst>
-          </a:prstGeom>
-          <a:solidFill>
-            <a:srgbClr val="B83A2E"/>
-          </a:solidFill>
-          <a:ln w="12700">
-            <a:solidFill>
-              <a:srgbClr val="B83A2E"/>
-            </a:solidFill>
-          </a:ln>
-        </p:spPr>
-        <p:style>
-          <a:lnRef idx="1">
-            <a:schemeClr val="accent1"/>
-          </a:lnRef>
-          <a:fillRef idx="3">
-            <a:schemeClr val="accent1"/>
-          </a:fillRef>
-          <a:effectRef idx="0">
-            <a:schemeClr val="accent1"/>
-          </a:effectRef>
-          <a:fontRef idx="minor">
-            <a:schemeClr val="lt1"/>
-          </a:fontRef>
-        </p:style>
-        <p:txBody>
-          <a:bodyPr rtlCol="0" anchor="ctr" wrap="square" lIns="109728" rIns="109728" tIns="36576" bIns="36576"/>
-          <a:lstStyle/>
-          <a:p>
-            <a:pPr algn="ctr"/>
-            <a:r>
-              <a:rPr sz="2400" b="1" i="0">
-                <a:solidFill>
-                  <a:srgbClr val="FFFFFF"/>
-                </a:solidFill>
-                <a:latin typeface="Segoe UI"/>
-              </a:rPr>
-              <a:t>0%</a:t>
-            </a:r>
-          </a:p>
-        </p:txBody>
-      </p:sp>
-      <p:sp>
-        <p:nvSpPr>
-          <p:cNvPr id="16" name="Arrow"/>
-          <p:cNvSpPr/>
-          <p:nvPr/>
-        </p:nvSpPr>
-        <p:spPr>
-          <a:xfrm>
-            <a:off x="1920240" y="4937760"/>
-            <a:ext cx="640080" cy="365760"/>
-          </a:xfrm>
-          <a:prstGeom prst="rightArrow">
-            <a:avLst/>
-          </a:prstGeom>
-          <a:solidFill>
-            <a:srgbClr val="9FB3C8"/>
-          </a:solidFill>
-          <a:ln w="12700">
-            <a:solidFill>
-              <a:srgbClr val="9FB3C8"/>
-            </a:solidFill>
-          </a:ln>
-        </p:spPr>
-        <p:style>
-          <a:lnRef idx="1">
-            <a:schemeClr val="accent1"/>
-          </a:lnRef>
-          <a:fillRef idx="3">
-            <a:schemeClr val="accent1"/>
-          </a:fillRef>
-          <a:effectRef idx="0">
-            <a:schemeClr val="accent1"/>
-          </a:effectRef>
-          <a:fontRef idx="minor">
-            <a:schemeClr val="lt1"/>
-          </a:fontRef>
-        </p:style>
-        <p:txBody>
-          <a:bodyPr rtlCol="0" anchor="ctr"/>
-          <a:lstStyle/>
-          <a:p>
-            <a:pPr algn="ctr"/>
-          </a:p>
-        </p:txBody>
-      </p:sp>
-      <p:sp>
-        <p:nvSpPr>
-          <p:cNvPr id="17" name="After"/>
-          <p:cNvSpPr/>
-          <p:nvPr/>
-        </p:nvSpPr>
-        <p:spPr>
-          <a:xfrm>
-            <a:off x="2743200" y="4754880"/>
-            <a:ext cx="1188720" cy="731520"/>
-          </a:xfrm>
-          <a:prstGeom prst="roundRect">
-            <a:avLst>
-              <a:gd name="adj" fmla="val 12000"/>
-            </a:avLst>
-          </a:prstGeom>
-          <a:solidFill>
-            <a:srgbClr val="0B625B"/>
-          </a:solidFill>
-          <a:ln w="12700">
-            <a:solidFill>
-              <a:srgbClr val="0B625B"/>
-            </a:solidFill>
-          </a:ln>
-        </p:spPr>
-        <p:style>
-          <a:lnRef idx="1">
-            <a:schemeClr val="accent1"/>
-          </a:lnRef>
-          <a:fillRef idx="3">
-            <a:schemeClr val="accent1"/>
-          </a:fillRef>
-          <a:effectRef idx="0">
-            <a:schemeClr val="accent1"/>
-          </a:effectRef>
-          <a:fontRef idx="minor">
-            <a:schemeClr val="lt1"/>
-          </a:fontRef>
-        </p:style>
-        <p:txBody>
-          <a:bodyPr rtlCol="0" anchor="ctr" wrap="square" lIns="109728" rIns="109728" tIns="36576" bIns="36576"/>
-          <a:lstStyle/>
-          <a:p>
-            <a:pPr algn="ctr"/>
-            <a:r>
-              <a:rPr sz="2400" b="1" i="0">
-                <a:solidFill>
-                  <a:srgbClr val="FFFFFF"/>
-                </a:solidFill>
-                <a:latin typeface="Segoe UI"/>
-              </a:rPr>
-              <a:t>100%</a:t>
-            </a:r>
-          </a:p>
-        </p:txBody>
-      </p:sp>
-      <p:sp>
-        <p:nvSpPr>
-          <p:cNvPr id="18" name="Coverage label"/>
-          <p:cNvSpPr txBox="1"/>
-          <p:nvPr/>
-        </p:nvSpPr>
-        <p:spPr>
-          <a:xfrm>
-            <a:off x="4069080" y="4754880"/>
-            <a:ext cx="2011680" cy="731520"/>
-          </a:xfrm>
-          <a:prstGeom prst="rect">
-            <a:avLst/>
-          </a:prstGeom>
-          <a:noFill/>
-        </p:spPr>
-        <p:txBody>
-          <a:bodyPr wrap="square" anchor="ctr">
-            <a:spAutoFit/>
-          </a:bodyPr>
-          <a:lstStyle/>
-          <a:p>
-            <a:r>
-              <a:rPr sz="1300" b="1" i="0">
-                <a:solidFill>
-                  <a:srgbClr val="243B53"/>
-                </a:solidFill>
-                <a:latin typeface="Segoe UI"/>
-              </a:rPr>
-              <a:t>ID traceability: FR-to-AC and FR-to-BG</a:t>
-            </a:r>
-          </a:p>
-        </p:txBody>
-      </p:sp>
-      <p:sp>
-        <p:nvSpPr>
-          <p:cNvPr id="19" name="Still fail"/>
-          <p:cNvSpPr/>
-          <p:nvPr/>
-        </p:nvSpPr>
-        <p:spPr>
-          <a:xfrm>
-            <a:off x="6400800" y="1508760"/>
-            <a:ext cx="5242255" cy="3977639"/>
-          </a:xfrm>
-          <a:prstGeom prst="roundRect">
-            <a:avLst>
-              <a:gd name="adj" fmla="val 6000"/>
-            </a:avLst>
-          </a:prstGeom>
-          <a:solidFill>
-            <a:srgbClr val="FDF4DC"/>
-          </a:solidFill>
-          <a:ln w="12700">
-            <a:solidFill>
-              <a:srgbClr val="F0DCA5"/>
-            </a:solidFill>
-          </a:ln>
-        </p:spPr>
-        <p:style>
-          <a:lnRef idx="1">
-            <a:schemeClr val="accent1"/>
-          </a:lnRef>
-          <a:fillRef idx="3">
-            <a:schemeClr val="accent1"/>
-          </a:fillRef>
-          <a:effectRef idx="0">
-            <a:schemeClr val="accent1"/>
-          </a:effectRef>
-          <a:fontRef idx="minor">
-            <a:schemeClr val="lt1"/>
-          </a:fontRef>
-        </p:style>
-        <p:txBody>
-          <a:bodyPr rtlCol="0" anchor="t" wrap="square" lIns="164592" rIns="164592" tIns="128016" bIns="91440"/>
-          <a:lstStyle/>
-          <a:p>
-            <a:pPr algn="l">
-              <a:spcAft>
-                <a:spcPts val="800"/>
-              </a:spcAft>
-            </a:pPr>
-            <a:r>
-              <a:rPr sz="1300" b="1" i="0">
-                <a:solidFill>
-                  <a:srgbClr val="B83A2E"/>
-                </a:solidFill>
-                <a:latin typeface="Segoe UI"/>
-              </a:rPr>
-              <a:t>STILL FAIL, ON PURPOSE</a:t>
-            </a:r>
-          </a:p>
-          <a:p>
-            <a:pPr algn="l" marL="228600" indent="-228600">
-              <a:spcAft>
-                <a:spcPts val="800"/>
-              </a:spcAft>
-              <a:buChar char="•"/>
-            </a:pPr>
-            <a:r>
-              <a:rPr sz="1400" b="0" i="0">
-                <a:solidFill>
-                  <a:srgbClr val="243B53"/>
-                </a:solidFill>
-                <a:latin typeface="Segoe UI"/>
-              </a:rPr>
-              <a:t>Relabel: 68 BR and 12 OBJ rows mapped, four compound rows split, no meaning changed</a:t>
-            </a:r>
-          </a:p>
-          <a:p>
-            <a:pPr algn="l" marL="228600" indent="-228600">
-              <a:spcAft>
-                <a:spcPts val="800"/>
-              </a:spcAft>
-              <a:buChar char="•"/>
-            </a:pPr>
-            <a:r>
-              <a:rPr sz="1400" b="0" i="0">
-                <a:solidFill>
-                  <a:srgbClr val="243B53"/>
-                </a:solidFill>
-                <a:latin typeface="Segoe UI"/>
-              </a:rPr>
-              <a:t>Extracted: FR-022 split into FR-022 and RULE-023; CON-004 sent to Legal to validate its source</a:t>
-            </a:r>
-          </a:p>
-          <a:p>
-            <a:pPr algn="l" marL="228600" indent="-228600">
-              <a:spcAft>
-                <a:spcPts val="800"/>
-              </a:spcAft>
-              <a:buChar char="•"/>
-            </a:pPr>
-            <a:r>
-              <a:rPr sz="1400" b="0" i="0">
-                <a:solidFill>
-                  <a:srgbClr val="243B53"/>
-                </a:solidFill>
-                <a:latin typeface="Segoe UI"/>
-              </a:rPr>
-              <a:t>Seven business goals still lack a numeric target; NFR-009 thresholds need owner decisions</a:t>
-            </a:r>
-          </a:p>
-          <a:p>
-            <a:pPr algn="l" marL="228600" indent="-228600">
-              <a:spcAft>
-                <a:spcPts val="800"/>
-              </a:spcAft>
-              <a:buChar char="•"/>
-            </a:pPr>
-            <a:r>
-              <a:rPr sz="1400" b="0" i="0">
-                <a:solidFill>
-                  <a:srgbClr val="243B53"/>
-                </a:solidFill>
-                <a:latin typeface="Segoe UI"/>
-              </a:rPr>
-              <a:t>Six runs to v0.5.0: four new findings on v0.3.0, all fixed; none since</a:t>
-            </a:r>
-          </a:p>
-          <a:p>
-            <a:pPr algn="l" marL="228600" indent="-228600">
-              <a:spcAft>
-                <a:spcPts val="800"/>
-              </a:spcAft>
-              <a:buChar char="•"/>
-            </a:pPr>
-            <a:r>
-              <a:rPr sz="1400" b="0" i="0">
-                <a:solidFill>
-                  <a:srgbClr val="243B53"/>
-                </a:solidFill>
-                <a:latin typeface="Segoe UI"/>
-              </a:rPr>
-              <a:t>Advisory: rewrite AC as Given/When/Then before PRD handoff</a:t>
-            </a:r>
-          </a:p>
-          <a:p>
-            <a:pPr algn="l" marL="228600" indent="-228600">
-              <a:spcAft>
-                <a:spcPts val="0"/>
-              </a:spcAft>
-              <a:buChar char="•"/>
-            </a:pPr>
-            <a:r>
-              <a:rPr sz="1400" b="1" i="0">
-                <a:solidFill>
-                  <a:srgbClr val="102A43"/>
-                </a:solidFill>
-                <a:latin typeface="Segoe UI"/>
-              </a:rPr>
-              <a:t>I did not invent targets to pass the gate</a:t>
-            </a:r>
-          </a:p>
-        </p:txBody>
-      </p:sp>
-      <p:sp>
-        <p:nvSpPr>
-          <p:cNvPr id="20" name="Source"/>
+              <a:t>Foundation first, then lifecycle events, then evidence packs for assessment, quality and damp</a:t>
+            </a:r>
+          </a:p>
+        </p:txBody>
+      </p:sp>
+      <p:sp>
+        <p:nvSpPr>
+          <p:cNvPr id="7" name="Source"/>
           <p:cNvSpPr txBox="1"/>
           <p:nvPr/>
         </p:nvSpPr>
@@ -5927,7 +5702,7 @@
                 </a:solidFill>
                 <a:latin typeface="Segoe UI"/>
               </a:rPr>
-              <a:t>Sources: BRD v0.5.0 frontmatter and Requirements Traceability; .copilot-tracking/brd-sessions/agentic-retrofit-programme.quality-report.yml (Runs 1 to 6); log.md (26 Sep 2026).</a:t>
+              <a:t>Sources: agent-what-if-study.md (Reconciliation With the Current Proposal; Value vs Complexity Quadrant) and its post-merge review, 27 Sep 2026. Scores are coarse judgements; role answers are hypotheses.</a:t>
             </a:r>
           </a:p>
         </p:txBody>
@@ -5987,101 +5762,33 @@
                 </a:solidFill>
                 <a:latin typeface="Segoe UI"/>
               </a:rPr>
-              <a:t>Keeping evidence honest was hard; here is what I would change</a:t>
-            </a:r>
-          </a:p>
-        </p:txBody>
-      </p:sp>
-      <p:sp>
-        <p:nvSpPr>
-          <p:cNvPr id="3" name="Challenges head"/>
-          <p:cNvSpPr txBox="1"/>
-          <p:nvPr/>
-        </p:nvSpPr>
-        <p:spPr>
-          <a:xfrm>
-            <a:off x="548640" y="1417320"/>
-            <a:ext cx="11094415" cy="274320"/>
-          </a:xfrm>
-          <a:prstGeom prst="rect">
-            <a:avLst/>
-          </a:prstGeom>
-          <a:noFill/>
-        </p:spPr>
-        <p:txBody>
-          <a:bodyPr wrap="square" tIns="0" bIns="0">
-            <a:spAutoFit/>
-          </a:bodyPr>
-          <a:lstStyle/>
-          <a:p>
-            <a:r>
-              <a:rPr sz="1200" b="1" i="0">
-                <a:solidFill>
-                  <a:srgbClr val="0B625B"/>
-                </a:solidFill>
-                <a:latin typeface="Segoe UI"/>
-              </a:rPr>
-              <a:t>CHALLENGES</a:t>
-            </a:r>
-          </a:p>
-        </p:txBody>
-      </p:sp>
-      <p:sp>
-        <p:nvSpPr>
-          <p:cNvPr id="4" name="Lessons head"/>
-          <p:cNvSpPr txBox="1"/>
-          <p:nvPr/>
-        </p:nvSpPr>
-        <p:spPr>
-          <a:xfrm>
-            <a:off x="548640" y="3840480"/>
-            <a:ext cx="11094415" cy="274320"/>
-          </a:xfrm>
-          <a:prstGeom prst="rect">
-            <a:avLst/>
-          </a:prstGeom>
-          <a:noFill/>
-        </p:spPr>
-        <p:txBody>
-          <a:bodyPr wrap="square" tIns="0" bIns="0">
-            <a:spAutoFit/>
-          </a:bodyPr>
-          <a:lstStyle/>
-          <a:p>
-            <a:r>
-              <a:rPr sz="1200" b="1" i="0">
-                <a:solidFill>
-                  <a:srgbClr val="1D5FB8"/>
-                </a:solidFill>
-                <a:latin typeface="Segoe UI"/>
-              </a:rPr>
-              <a:t>WHAT I WOULD DO DIFFERENTLY</a:t>
-            </a:r>
-          </a:p>
-        </p:txBody>
-      </p:sp>
-      <p:sp>
-        <p:nvSpPr>
-          <p:cNvPr id="5" name="Challenge 1"/>
+              <a:t>Relabelling fixed traceability; the gate still fails on targets</a:t>
+            </a:r>
+          </a:p>
+        </p:txBody>
+      </p:sp>
+      <p:sp>
+        <p:nvSpPr>
+          <p:cNvPr id="3" name="Stat 1"/>
           <p:cNvSpPr/>
           <p:nvPr/>
         </p:nvSpPr>
         <p:spPr>
           <a:xfrm>
-            <a:off x="548640" y="1965960"/>
-            <a:ext cx="3515258" cy="1600200"/>
+            <a:off x="548640" y="1554480"/>
+            <a:ext cx="1005840" cy="731520"/>
           </a:xfrm>
           <a:prstGeom prst="roundRect">
             <a:avLst>
-              <a:gd name="adj" fmla="val 6000"/>
+              <a:gd name="adj" fmla="val 12000"/>
             </a:avLst>
           </a:prstGeom>
           <a:solidFill>
-            <a:srgbClr val="F0F4F8"/>
+            <a:srgbClr val="0B625B"/>
           </a:solidFill>
           <a:ln w="12700">
             <a:solidFill>
-              <a:srgbClr val="D9E2EC"/>
+              <a:srgbClr val="0B625B"/>
             </a:solidFill>
           </a:ln>
         </p:spPr>
@@ -6100,30 +5807,44 @@
           </a:fontRef>
         </p:style>
         <p:txBody>
-          <a:bodyPr rtlCol="0" anchor="t" wrap="square" lIns="164592" rIns="164592" tIns="128016" bIns="91440"/>
-          <a:lstStyle/>
-          <a:p>
-            <a:pPr algn="l">
-              <a:spcAft>
-                <a:spcPts val="600"/>
-              </a:spcAft>
-            </a:pPr>
-            <a:r>
-              <a:rPr sz="1600" b="1" i="0">
-                <a:solidFill>
-                  <a:srgbClr val="0B625B"/>
-                </a:solidFill>
-                <a:latin typeface="Segoe UI"/>
-              </a:rPr>
-              <a:t>No company data</a:t>
-            </a:r>
-          </a:p>
-          <a:p>
-            <a:pPr algn="l">
-              <a:spcAft>
-                <a:spcPts val="0"/>
-              </a:spcAft>
-            </a:pPr>
+          <a:bodyPr rtlCol="0" anchor="ctr" wrap="square" lIns="109728" rIns="109728" tIns="36576" bIns="36576"/>
+          <a:lstStyle/>
+          <a:p>
+            <a:pPr algn="ctr"/>
+            <a:r>
+              <a:rPr sz="2600" b="1" i="0">
+                <a:solidFill>
+                  <a:srgbClr val="FFFFFF"/>
+                </a:solidFill>
+                <a:latin typeface="Segoe UI"/>
+              </a:rPr>
+              <a:t>12</a:t>
+            </a:r>
+          </a:p>
+        </p:txBody>
+      </p:sp>
+      <p:sp>
+        <p:nvSpPr>
+          <p:cNvPr id="4" name="Stat 1 label"/>
+          <p:cNvSpPr txBox="1"/>
+          <p:nvPr/>
+        </p:nvSpPr>
+        <p:spPr>
+          <a:xfrm>
+            <a:off x="1645919" y="1554480"/>
+            <a:ext cx="1645920" cy="731520"/>
+          </a:xfrm>
+          <a:prstGeom prst="rect">
+            <a:avLst/>
+          </a:prstGeom>
+          <a:noFill/>
+        </p:spPr>
+        <p:txBody>
+          <a:bodyPr wrap="square" anchor="ctr">
+            <a:spAutoFit/>
+          </a:bodyPr>
+          <a:lstStyle/>
+          <a:p>
             <a:r>
               <a:rPr sz="1300" b="0" i="0">
                 <a:solidFill>
@@ -6131,33 +5852,33 @@
                 </a:solidFill>
                 <a:latin typeface="Segoe UI"/>
               </a:rPr>
-              <a:t>The company is fictional. I modelled tenure, residents and finances from sector medians and labelled every value as an estimate.</a:t>
-            </a:r>
-          </a:p>
-        </p:txBody>
-      </p:sp>
-      <p:sp>
-        <p:nvSpPr>
-          <p:cNvPr id="6" name="Challenge 2"/>
+              <a:t>Business goals (BG)</a:t>
+            </a:r>
+          </a:p>
+        </p:txBody>
+      </p:sp>
+      <p:sp>
+        <p:nvSpPr>
+          <p:cNvPr id="5" name="Stat 2"/>
           <p:cNvSpPr/>
           <p:nvPr/>
         </p:nvSpPr>
         <p:spPr>
           <a:xfrm>
-            <a:off x="4338218" y="1965960"/>
-            <a:ext cx="3515258" cy="1600200"/>
+            <a:off x="3429000" y="1554480"/>
+            <a:ext cx="1005840" cy="731520"/>
           </a:xfrm>
           <a:prstGeom prst="roundRect">
             <a:avLst>
-              <a:gd name="adj" fmla="val 6000"/>
+              <a:gd name="adj" fmla="val 12000"/>
             </a:avLst>
           </a:prstGeom>
           <a:solidFill>
-            <a:srgbClr val="F0F4F8"/>
+            <a:srgbClr val="1D5FB8"/>
           </a:solidFill>
           <a:ln w="12700">
             <a:solidFill>
-              <a:srgbClr val="D9E2EC"/>
+              <a:srgbClr val="1D5FB8"/>
             </a:solidFill>
           </a:ln>
         </p:spPr>
@@ -6176,30 +5897,44 @@
           </a:fontRef>
         </p:style>
         <p:txBody>
-          <a:bodyPr rtlCol="0" anchor="t" wrap="square" lIns="164592" rIns="164592" tIns="128016" bIns="91440"/>
-          <a:lstStyle/>
-          <a:p>
-            <a:pPr algn="l">
-              <a:spcAft>
-                <a:spcPts val="600"/>
-              </a:spcAft>
-            </a:pPr>
-            <a:r>
-              <a:rPr sz="1600" b="1" i="0">
-                <a:solidFill>
-                  <a:srgbClr val="0B625B"/>
-                </a:solidFill>
-                <a:latin typeface="Segoe UI"/>
-              </a:rPr>
-              <a:t>Agents that sound certain</a:t>
-            </a:r>
-          </a:p>
-          <a:p>
-            <a:pPr algn="l">
-              <a:spcAft>
-                <a:spcPts val="0"/>
-              </a:spcAft>
-            </a:pPr>
+          <a:bodyPr rtlCol="0" anchor="ctr" wrap="square" lIns="109728" rIns="109728" tIns="36576" bIns="36576"/>
+          <a:lstStyle/>
+          <a:p>
+            <a:pPr algn="ctr"/>
+            <a:r>
+              <a:rPr sz="2600" b="1" i="0">
+                <a:solidFill>
+                  <a:srgbClr val="FFFFFF"/>
+                </a:solidFill>
+                <a:latin typeface="Segoe UI"/>
+              </a:rPr>
+              <a:t>44</a:t>
+            </a:r>
+          </a:p>
+        </p:txBody>
+      </p:sp>
+      <p:sp>
+        <p:nvSpPr>
+          <p:cNvPr id="6" name="Stat 2 label"/>
+          <p:cNvSpPr txBox="1"/>
+          <p:nvPr/>
+        </p:nvSpPr>
+        <p:spPr>
+          <a:xfrm>
+            <a:off x="4526280" y="1554480"/>
+            <a:ext cx="1645920" cy="731520"/>
+          </a:xfrm>
+          <a:prstGeom prst="rect">
+            <a:avLst/>
+          </a:prstGeom>
+          <a:noFill/>
+        </p:spPr>
+        <p:txBody>
+          <a:bodyPr wrap="square" anchor="ctr">
+            <a:spAutoFit/>
+          </a:bodyPr>
+          <a:lstStyle/>
+          <a:p>
             <a:r>
               <a:rPr sz="1300" b="0" i="0">
                 <a:solidFill>
@@ -6207,33 +5942,33 @@
                 </a:solidFill>
                 <a:latin typeface="Segoe UI"/>
               </a:rPr>
-              <a:t>Role answers are hypotheses, and the roles share my framing. Divergences stay open: L4 quality flags, L3 digital booking.</a:t>
-            </a:r>
-          </a:p>
-        </p:txBody>
-      </p:sp>
-      <p:sp>
-        <p:nvSpPr>
-          <p:cNvPr id="7" name="Challenge 3"/>
+              <a:t>Functional requirements (FR)</a:t>
+            </a:r>
+          </a:p>
+        </p:txBody>
+      </p:sp>
+      <p:sp>
+        <p:nvSpPr>
+          <p:cNvPr id="7" name="Stat 3"/>
           <p:cNvSpPr/>
           <p:nvPr/>
         </p:nvSpPr>
         <p:spPr>
           <a:xfrm>
-            <a:off x="8127796" y="1965960"/>
-            <a:ext cx="3515258" cy="1600200"/>
+            <a:off x="548640" y="2560320"/>
+            <a:ext cx="1005840" cy="731520"/>
           </a:xfrm>
           <a:prstGeom prst="roundRect">
             <a:avLst>
-              <a:gd name="adj" fmla="val 6000"/>
+              <a:gd name="adj" fmla="val 12000"/>
             </a:avLst>
           </a:prstGeom>
           <a:solidFill>
-            <a:srgbClr val="F0F4F8"/>
+            <a:srgbClr val="0B625B"/>
           </a:solidFill>
           <a:ln w="12700">
             <a:solidFill>
-              <a:srgbClr val="D9E2EC"/>
+              <a:srgbClr val="0B625B"/>
             </a:solidFill>
           </a:ln>
         </p:spPr>
@@ -6252,30 +5987,44 @@
           </a:fontRef>
         </p:style>
         <p:txBody>
-          <a:bodyPr rtlCol="0" anchor="t" wrap="square" lIns="164592" rIns="164592" tIns="128016" bIns="91440"/>
-          <a:lstStyle/>
-          <a:p>
-            <a:pPr algn="l">
-              <a:spcAft>
-                <a:spcPts val="600"/>
-              </a:spcAft>
-            </a:pPr>
-            <a:r>
-              <a:rPr sz="1600" b="1" i="0">
-                <a:solidFill>
-                  <a:srgbClr val="0B625B"/>
-                </a:solidFill>
-                <a:latin typeface="Segoe UI"/>
-              </a:rPr>
-              <a:t>Sources that disagree</a:t>
-            </a:r>
-          </a:p>
-          <a:p>
-            <a:pPr algn="l">
-              <a:spcAft>
-                <a:spcPts val="0"/>
-              </a:spcAft>
-            </a:pPr>
+          <a:bodyPr rtlCol="0" anchor="ctr" wrap="square" lIns="109728" rIns="109728" tIns="36576" bIns="36576"/>
+          <a:lstStyle/>
+          <a:p>
+            <a:pPr algn="ctr"/>
+            <a:r>
+              <a:rPr sz="2600" b="1" i="0">
+                <a:solidFill>
+                  <a:srgbClr val="FFFFFF"/>
+                </a:solidFill>
+                <a:latin typeface="Segoe UI"/>
+              </a:rPr>
+              <a:t>85</a:t>
+            </a:r>
+          </a:p>
+        </p:txBody>
+      </p:sp>
+      <p:sp>
+        <p:nvSpPr>
+          <p:cNvPr id="8" name="Stat 3 label"/>
+          <p:cNvSpPr txBox="1"/>
+          <p:nvPr/>
+        </p:nvSpPr>
+        <p:spPr>
+          <a:xfrm>
+            <a:off x="1645919" y="2560320"/>
+            <a:ext cx="1645920" cy="731520"/>
+          </a:xfrm>
+          <a:prstGeom prst="rect">
+            <a:avLst/>
+          </a:prstGeom>
+          <a:noFill/>
+        </p:spPr>
+        <p:txBody>
+          <a:bodyPr wrap="square" anchor="ctr">
+            <a:spAutoFit/>
+          </a:bodyPr>
+          <a:lstStyle/>
+          <a:p>
             <a:r>
               <a:rPr sz="1300" b="0" i="0">
                 <a:solidFill>
@@ -6283,33 +6032,33 @@
                 </a:solidFill>
                 <a:latin typeface="Segoe UI"/>
               </a:rPr>
-              <a:t>Interest cover 91% or 87%; fuel poverty corrected from 10.0% to 11.6%; EPC C final policy, not commenced law. Flagged, not resolved.</a:t>
-            </a:r>
-          </a:p>
-        </p:txBody>
-      </p:sp>
-      <p:sp>
-        <p:nvSpPr>
-          <p:cNvPr id="8" name="Challenge 4"/>
+              <a:t>Acceptance criteria (AC)</a:t>
+            </a:r>
+          </a:p>
+        </p:txBody>
+      </p:sp>
+      <p:sp>
+        <p:nvSpPr>
+          <p:cNvPr id="9" name="Stat 4"/>
           <p:cNvSpPr/>
           <p:nvPr/>
         </p:nvSpPr>
         <p:spPr>
           <a:xfrm>
-            <a:off x="548640" y="4389120"/>
-            <a:ext cx="3515258" cy="1463040"/>
+            <a:off x="3429000" y="2560320"/>
+            <a:ext cx="1005840" cy="731520"/>
           </a:xfrm>
           <a:prstGeom prst="roundRect">
             <a:avLst>
-              <a:gd name="adj" fmla="val 6000"/>
+              <a:gd name="adj" fmla="val 12000"/>
             </a:avLst>
           </a:prstGeom>
           <a:solidFill>
-            <a:srgbClr val="E6EFFB"/>
+            <a:srgbClr val="1D5FB8"/>
           </a:solidFill>
           <a:ln w="12700">
             <a:solidFill>
-              <a:srgbClr val="C7D9F3"/>
+              <a:srgbClr val="1D5FB8"/>
             </a:solidFill>
           </a:ln>
         </p:spPr>
@@ -6328,30 +6077,44 @@
           </a:fontRef>
         </p:style>
         <p:txBody>
-          <a:bodyPr rtlCol="0" anchor="t" wrap="square" lIns="164592" rIns="164592" tIns="128016" bIns="91440"/>
-          <a:lstStyle/>
-          <a:p>
-            <a:pPr algn="l">
-              <a:spcAft>
-                <a:spcPts val="600"/>
-              </a:spcAft>
-            </a:pPr>
-            <a:r>
-              <a:rPr sz="1600" b="1" i="0">
-                <a:solidFill>
-                  <a:srgbClr val="1D5FB8"/>
-                </a:solidFill>
-                <a:latin typeface="Segoe UI"/>
-              </a:rPr>
-              <a:t>Start the log on day one</a:t>
-            </a:r>
-          </a:p>
-          <a:p>
-            <a:pPr algn="l">
-              <a:spcAft>
-                <a:spcPts val="0"/>
-              </a:spcAft>
-            </a:pPr>
+          <a:bodyPr rtlCol="0" anchor="ctr" wrap="square" lIns="109728" rIns="109728" tIns="36576" bIns="36576"/>
+          <a:lstStyle/>
+          <a:p>
+            <a:pPr algn="ctr"/>
+            <a:r>
+              <a:rPr sz="2600" b="1" i="0">
+                <a:solidFill>
+                  <a:srgbClr val="FFFFFF"/>
+                </a:solidFill>
+                <a:latin typeface="Segoe UI"/>
+              </a:rPr>
+              <a:t>9</a:t>
+            </a:r>
+          </a:p>
+        </p:txBody>
+      </p:sp>
+      <p:sp>
+        <p:nvSpPr>
+          <p:cNvPr id="10" name="Stat 4 label"/>
+          <p:cNvSpPr txBox="1"/>
+          <p:nvPr/>
+        </p:nvSpPr>
+        <p:spPr>
+          <a:xfrm>
+            <a:off x="4526280" y="2560320"/>
+            <a:ext cx="1645920" cy="731520"/>
+          </a:xfrm>
+          <a:prstGeom prst="rect">
+            <a:avLst/>
+          </a:prstGeom>
+          <a:noFill/>
+        </p:spPr>
+        <p:txBody>
+          <a:bodyPr wrap="square" anchor="ctr">
+            <a:spAutoFit/>
+          </a:bodyPr>
+          <a:lstStyle/>
+          <a:p>
             <a:r>
               <a:rPr sz="1300" b="0" i="0">
                 <a:solidFill>
@@ -6359,33 +6122,33 @@
                 </a:solidFill>
                 <a:latin typeface="Segoe UI"/>
               </a:rPr>
-              <a:t>Log entries before 25 Sep had to be reconstructed from Git history.</a:t>
-            </a:r>
-          </a:p>
-        </p:txBody>
-      </p:sp>
-      <p:sp>
-        <p:nvSpPr>
-          <p:cNvPr id="9" name="Challenge 5"/>
+              <a:t>Non-functional (NFR, ISO/IEC 25010)</a:t>
+            </a:r>
+          </a:p>
+        </p:txBody>
+      </p:sp>
+      <p:sp>
+        <p:nvSpPr>
+          <p:cNvPr id="11" name="Stat 5"/>
           <p:cNvSpPr/>
           <p:nvPr/>
         </p:nvSpPr>
         <p:spPr>
           <a:xfrm>
-            <a:off x="4338218" y="4389120"/>
-            <a:ext cx="3515258" cy="1463040"/>
+            <a:off x="548640" y="3566160"/>
+            <a:ext cx="1005840" cy="731520"/>
           </a:xfrm>
           <a:prstGeom prst="roundRect">
             <a:avLst>
-              <a:gd name="adj" fmla="val 6000"/>
+              <a:gd name="adj" fmla="val 12000"/>
             </a:avLst>
           </a:prstGeom>
           <a:solidFill>
-            <a:srgbClr val="E6EFFB"/>
+            <a:srgbClr val="0B625B"/>
           </a:solidFill>
           <a:ln w="12700">
             <a:solidFill>
-              <a:srgbClr val="C7D9F3"/>
+              <a:srgbClr val="0B625B"/>
             </a:solidFill>
           </a:ln>
         </p:spPr>
@@ -6404,30 +6167,44 @@
           </a:fontRef>
         </p:style>
         <p:txBody>
-          <a:bodyPr rtlCol="0" anchor="t" wrap="square" lIns="164592" rIns="164592" tIns="128016" bIns="91440"/>
-          <a:lstStyle/>
-          <a:p>
-            <a:pPr algn="l">
-              <a:spcAft>
-                <a:spcPts val="600"/>
-              </a:spcAft>
-            </a:pPr>
-            <a:r>
-              <a:rPr sz="1600" b="1" i="0">
-                <a:solidFill>
-                  <a:srgbClr val="1D5FB8"/>
-                </a:solidFill>
-                <a:latin typeface="Segoe UI"/>
-              </a:rPr>
-              <a:t>Canonical IDs from the first draft</a:t>
-            </a:r>
-          </a:p>
-          <a:p>
-            <a:pPr algn="l">
-              <a:spcAft>
-                <a:spcPts val="0"/>
-              </a:spcAft>
-            </a:pPr>
+          <a:bodyPr rtlCol="0" anchor="ctr" wrap="square" lIns="109728" rIns="109728" tIns="36576" bIns="36576"/>
+          <a:lstStyle/>
+          <a:p>
+            <a:pPr algn="ctr"/>
+            <a:r>
+              <a:rPr sz="2600" b="1" i="0">
+                <a:solidFill>
+                  <a:srgbClr val="FFFFFF"/>
+                </a:solidFill>
+                <a:latin typeface="Segoe UI"/>
+              </a:rPr>
+              <a:t>6</a:t>
+            </a:r>
+          </a:p>
+        </p:txBody>
+      </p:sp>
+      <p:sp>
+        <p:nvSpPr>
+          <p:cNvPr id="12" name="Stat 5 label"/>
+          <p:cNvSpPr txBox="1"/>
+          <p:nvPr/>
+        </p:nvSpPr>
+        <p:spPr>
+          <a:xfrm>
+            <a:off x="1645919" y="3566160"/>
+            <a:ext cx="1645920" cy="731520"/>
+          </a:xfrm>
+          <a:prstGeom prst="rect">
+            <a:avLst/>
+          </a:prstGeom>
+          <a:noFill/>
+        </p:spPr>
+        <p:txBody>
+          <a:bodyPr wrap="square" anchor="ctr">
+            <a:spAutoFit/>
+          </a:bodyPr>
+          <a:lstStyle/>
+          <a:p>
             <a:r>
               <a:rPr sz="1300" b="0" i="0">
                 <a:solidFill>
@@ -6435,33 +6212,33 @@
                 </a:solidFill>
                 <a:latin typeface="Segoe UI"/>
               </a:rPr>
-              <a:t>The first quality run scored 0% only because of legacy IDs; relabelling cost a full pass.</a:t>
-            </a:r>
-          </a:p>
-        </p:txBody>
-      </p:sp>
-      <p:sp>
-        <p:nvSpPr>
-          <p:cNvPr id="10" name="Challenge 6"/>
+              <a:t>Imposed constraints (CON)</a:t>
+            </a:r>
+          </a:p>
+        </p:txBody>
+      </p:sp>
+      <p:sp>
+        <p:nvSpPr>
+          <p:cNvPr id="13" name="Stat 6"/>
           <p:cNvSpPr/>
           <p:nvPr/>
         </p:nvSpPr>
         <p:spPr>
           <a:xfrm>
-            <a:off x="8127796" y="4389120"/>
-            <a:ext cx="3515258" cy="1463040"/>
+            <a:off x="3429000" y="3566160"/>
+            <a:ext cx="1005840" cy="731520"/>
           </a:xfrm>
           <a:prstGeom prst="roundRect">
             <a:avLst>
-              <a:gd name="adj" fmla="val 6000"/>
+              <a:gd name="adj" fmla="val 12000"/>
             </a:avLst>
           </a:prstGeom>
           <a:solidFill>
-            <a:srgbClr val="E6EFFB"/>
+            <a:srgbClr val="1D5FB8"/>
           </a:solidFill>
           <a:ln w="12700">
             <a:solidFill>
-              <a:srgbClr val="C7D9F3"/>
+              <a:srgbClr val="1D5FB8"/>
             </a:solidFill>
           </a:ln>
         </p:spPr>
@@ -6480,45 +6257,412 @@
           </a:fontRef>
         </p:style>
         <p:txBody>
+          <a:bodyPr rtlCol="0" anchor="ctr" wrap="square" lIns="109728" rIns="109728" tIns="36576" bIns="36576"/>
+          <a:lstStyle/>
+          <a:p>
+            <a:pPr algn="ctr"/>
+            <a:r>
+              <a:rPr sz="2600" b="1" i="0">
+                <a:solidFill>
+                  <a:srgbClr val="FFFFFF"/>
+                </a:solidFill>
+                <a:latin typeface="Segoe UI"/>
+              </a:rPr>
+              <a:t>24</a:t>
+            </a:r>
+          </a:p>
+        </p:txBody>
+      </p:sp>
+      <p:sp>
+        <p:nvSpPr>
+          <p:cNvPr id="14" name="Stat 6 label"/>
+          <p:cNvSpPr txBox="1"/>
+          <p:nvPr/>
+        </p:nvSpPr>
+        <p:spPr>
+          <a:xfrm>
+            <a:off x="4526280" y="3566160"/>
+            <a:ext cx="1645920" cy="731520"/>
+          </a:xfrm>
+          <a:prstGeom prst="rect">
+            <a:avLst/>
+          </a:prstGeom>
+          <a:noFill/>
+        </p:spPr>
+        <p:txBody>
+          <a:bodyPr wrap="square" anchor="ctr">
+            <a:spAutoFit/>
+          </a:bodyPr>
+          <a:lstStyle/>
+          <a:p>
+            <a:r>
+              <a:rPr sz="1300" b="0" i="0">
+                <a:solidFill>
+                  <a:srgbClr val="243B53"/>
+                </a:solidFill>
+                <a:latin typeface="Segoe UI"/>
+              </a:rPr>
+              <a:t>Business rules (RULE)</a:t>
+            </a:r>
+          </a:p>
+        </p:txBody>
+      </p:sp>
+      <p:sp>
+        <p:nvSpPr>
+          <p:cNvPr id="15" name="Before"/>
+          <p:cNvSpPr/>
+          <p:nvPr/>
+        </p:nvSpPr>
+        <p:spPr>
+          <a:xfrm>
+            <a:off x="548640" y="4754880"/>
+            <a:ext cx="1188720" cy="731520"/>
+          </a:xfrm>
+          <a:prstGeom prst="roundRect">
+            <a:avLst>
+              <a:gd name="adj" fmla="val 12000"/>
+            </a:avLst>
+          </a:prstGeom>
+          <a:solidFill>
+            <a:srgbClr val="B83A2E"/>
+          </a:solidFill>
+          <a:ln w="12700">
+            <a:solidFill>
+              <a:srgbClr val="B83A2E"/>
+            </a:solidFill>
+          </a:ln>
+        </p:spPr>
+        <p:style>
+          <a:lnRef idx="1">
+            <a:schemeClr val="accent1"/>
+          </a:lnRef>
+          <a:fillRef idx="3">
+            <a:schemeClr val="accent1"/>
+          </a:fillRef>
+          <a:effectRef idx="0">
+            <a:schemeClr val="accent1"/>
+          </a:effectRef>
+          <a:fontRef idx="minor">
+            <a:schemeClr val="lt1"/>
+          </a:fontRef>
+        </p:style>
+        <p:txBody>
+          <a:bodyPr rtlCol="0" anchor="ctr" wrap="square" lIns="109728" rIns="109728" tIns="36576" bIns="36576"/>
+          <a:lstStyle/>
+          <a:p>
+            <a:pPr algn="ctr"/>
+            <a:r>
+              <a:rPr sz="2400" b="1" i="0">
+                <a:solidFill>
+                  <a:srgbClr val="FFFFFF"/>
+                </a:solidFill>
+                <a:latin typeface="Segoe UI"/>
+              </a:rPr>
+              <a:t>0%</a:t>
+            </a:r>
+          </a:p>
+        </p:txBody>
+      </p:sp>
+      <p:sp>
+        <p:nvSpPr>
+          <p:cNvPr id="16" name="Arrow"/>
+          <p:cNvSpPr/>
+          <p:nvPr/>
+        </p:nvSpPr>
+        <p:spPr>
+          <a:xfrm>
+            <a:off x="1920240" y="4937760"/>
+            <a:ext cx="640080" cy="365760"/>
+          </a:xfrm>
+          <a:prstGeom prst="rightArrow">
+            <a:avLst/>
+          </a:prstGeom>
+          <a:solidFill>
+            <a:srgbClr val="9FB3C8"/>
+          </a:solidFill>
+          <a:ln w="12700">
+            <a:solidFill>
+              <a:srgbClr val="9FB3C8"/>
+            </a:solidFill>
+          </a:ln>
+        </p:spPr>
+        <p:style>
+          <a:lnRef idx="1">
+            <a:schemeClr val="accent1"/>
+          </a:lnRef>
+          <a:fillRef idx="3">
+            <a:schemeClr val="accent1"/>
+          </a:fillRef>
+          <a:effectRef idx="0">
+            <a:schemeClr val="accent1"/>
+          </a:effectRef>
+          <a:fontRef idx="minor">
+            <a:schemeClr val="lt1"/>
+          </a:fontRef>
+        </p:style>
+        <p:txBody>
+          <a:bodyPr rtlCol="0" anchor="ctr"/>
+          <a:lstStyle/>
+          <a:p>
+            <a:pPr algn="ctr"/>
+          </a:p>
+        </p:txBody>
+      </p:sp>
+      <p:sp>
+        <p:nvSpPr>
+          <p:cNvPr id="17" name="After"/>
+          <p:cNvSpPr/>
+          <p:nvPr/>
+        </p:nvSpPr>
+        <p:spPr>
+          <a:xfrm>
+            <a:off x="2743200" y="4754880"/>
+            <a:ext cx="1188720" cy="731520"/>
+          </a:xfrm>
+          <a:prstGeom prst="roundRect">
+            <a:avLst>
+              <a:gd name="adj" fmla="val 12000"/>
+            </a:avLst>
+          </a:prstGeom>
+          <a:solidFill>
+            <a:srgbClr val="0B625B"/>
+          </a:solidFill>
+          <a:ln w="12700">
+            <a:solidFill>
+              <a:srgbClr val="0B625B"/>
+            </a:solidFill>
+          </a:ln>
+        </p:spPr>
+        <p:style>
+          <a:lnRef idx="1">
+            <a:schemeClr val="accent1"/>
+          </a:lnRef>
+          <a:fillRef idx="3">
+            <a:schemeClr val="accent1"/>
+          </a:fillRef>
+          <a:effectRef idx="0">
+            <a:schemeClr val="accent1"/>
+          </a:effectRef>
+          <a:fontRef idx="minor">
+            <a:schemeClr val="lt1"/>
+          </a:fontRef>
+        </p:style>
+        <p:txBody>
+          <a:bodyPr rtlCol="0" anchor="ctr" wrap="square" lIns="109728" rIns="109728" tIns="36576" bIns="36576"/>
+          <a:lstStyle/>
+          <a:p>
+            <a:pPr algn="ctr"/>
+            <a:r>
+              <a:rPr sz="2400" b="1" i="0">
+                <a:solidFill>
+                  <a:srgbClr val="FFFFFF"/>
+                </a:solidFill>
+                <a:latin typeface="Segoe UI"/>
+              </a:rPr>
+              <a:t>100%</a:t>
+            </a:r>
+          </a:p>
+        </p:txBody>
+      </p:sp>
+      <p:sp>
+        <p:nvSpPr>
+          <p:cNvPr id="18" name="Coverage label"/>
+          <p:cNvSpPr txBox="1"/>
+          <p:nvPr/>
+        </p:nvSpPr>
+        <p:spPr>
+          <a:xfrm>
+            <a:off x="4069080" y="4754880"/>
+            <a:ext cx="2011680" cy="731520"/>
+          </a:xfrm>
+          <a:prstGeom prst="rect">
+            <a:avLst/>
+          </a:prstGeom>
+          <a:noFill/>
+        </p:spPr>
+        <p:txBody>
+          <a:bodyPr wrap="square" anchor="ctr">
+            <a:spAutoFit/>
+          </a:bodyPr>
+          <a:lstStyle/>
+          <a:p>
+            <a:r>
+              <a:rPr sz="1300" b="1" i="0">
+                <a:solidFill>
+                  <a:srgbClr val="243B53"/>
+                </a:solidFill>
+                <a:latin typeface="Segoe UI"/>
+              </a:rPr>
+              <a:t>ID traceability: FR-to-AC and FR-to-BG</a:t>
+            </a:r>
+          </a:p>
+        </p:txBody>
+      </p:sp>
+      <p:sp>
+        <p:nvSpPr>
+          <p:cNvPr id="19" name="Still fail"/>
+          <p:cNvSpPr/>
+          <p:nvPr/>
+        </p:nvSpPr>
+        <p:spPr>
+          <a:xfrm>
+            <a:off x="6400800" y="1508760"/>
+            <a:ext cx="5242255" cy="3977639"/>
+          </a:xfrm>
+          <a:prstGeom prst="roundRect">
+            <a:avLst>
+              <a:gd name="adj" fmla="val 6000"/>
+            </a:avLst>
+          </a:prstGeom>
+          <a:solidFill>
+            <a:srgbClr val="FDF4DC"/>
+          </a:solidFill>
+          <a:ln w="12700">
+            <a:solidFill>
+              <a:srgbClr val="F0DCA5"/>
+            </a:solidFill>
+          </a:ln>
+        </p:spPr>
+        <p:style>
+          <a:lnRef idx="1">
+            <a:schemeClr val="accent1"/>
+          </a:lnRef>
+          <a:fillRef idx="3">
+            <a:schemeClr val="accent1"/>
+          </a:fillRef>
+          <a:effectRef idx="0">
+            <a:schemeClr val="accent1"/>
+          </a:effectRef>
+          <a:fontRef idx="minor">
+            <a:schemeClr val="lt1"/>
+          </a:fontRef>
+        </p:style>
+        <p:txBody>
           <a:bodyPr rtlCol="0" anchor="t" wrap="square" lIns="164592" rIns="164592" tIns="128016" bIns="91440"/>
           <a:lstStyle/>
           <a:p>
             <a:pPr algn="l">
               <a:spcAft>
-                <a:spcPts val="600"/>
+                <a:spcPts val="800"/>
               </a:spcAft>
             </a:pPr>
             <a:r>
-              <a:rPr sz="1600" b="1" i="0">
-                <a:solidFill>
-                  <a:srgbClr val="1D5FB8"/>
-                </a:solidFill>
-                <a:latin typeface="Segoe UI"/>
-              </a:rPr>
-              <a:t>Run the value challenge earlier, and blind</a:t>
-            </a:r>
-          </a:p>
-          <a:p>
-            <a:pPr algn="l">
+              <a:rPr sz="1300" b="1" i="0">
+                <a:solidFill>
+                  <a:srgbClr val="B83A2E"/>
+                </a:solidFill>
+                <a:latin typeface="Segoe UI"/>
+              </a:rPr>
+              <a:t>STILL FAIL, ON PURPOSE</a:t>
+            </a:r>
+          </a:p>
+          <a:p>
+            <a:pPr algn="l" marL="228600" indent="-228600">
+              <a:spcAft>
+                <a:spcPts val="800"/>
+              </a:spcAft>
+              <a:buChar char="•"/>
+            </a:pPr>
+            <a:r>
+              <a:rPr sz="1400" b="0" i="0">
+                <a:solidFill>
+                  <a:srgbClr val="243B53"/>
+                </a:solidFill>
+                <a:latin typeface="Segoe UI"/>
+              </a:rPr>
+              <a:t>Relabel: 68 BR and 12 OBJ rows mapped, four compound rows split, no meaning changed</a:t>
+            </a:r>
+          </a:p>
+          <a:p>
+            <a:pPr algn="l" marL="228600" indent="-228600">
+              <a:spcAft>
+                <a:spcPts val="800"/>
+              </a:spcAft>
+              <a:buChar char="•"/>
+            </a:pPr>
+            <a:r>
+              <a:rPr sz="1400" b="0" i="0">
+                <a:solidFill>
+                  <a:srgbClr val="243B53"/>
+                </a:solidFill>
+                <a:latin typeface="Segoe UI"/>
+              </a:rPr>
+              <a:t>Extracted: FR-022 split into FR-022 and RULE-023; CON-004 sent to Legal to validate its source</a:t>
+            </a:r>
+          </a:p>
+          <a:p>
+            <a:pPr algn="l" marL="228600" indent="-228600">
+              <a:spcAft>
+                <a:spcPts val="800"/>
+              </a:spcAft>
+              <a:buChar char="•"/>
+            </a:pPr>
+            <a:r>
+              <a:rPr sz="1400" b="0" i="0">
+                <a:solidFill>
+                  <a:srgbClr val="243B53"/>
+                </a:solidFill>
+                <a:latin typeface="Segoe UI"/>
+              </a:rPr>
+              <a:t>Seven business goals still lack a numeric target; NFR-009 thresholds need owner decisions</a:t>
+            </a:r>
+          </a:p>
+          <a:p>
+            <a:pPr algn="l" marL="228600" indent="-228600">
+              <a:spcAft>
+                <a:spcPts val="800"/>
+              </a:spcAft>
+              <a:buChar char="•"/>
+            </a:pPr>
+            <a:r>
+              <a:rPr sz="1400" b="0" i="0">
+                <a:solidFill>
+                  <a:srgbClr val="243B53"/>
+                </a:solidFill>
+                <a:latin typeface="Segoe UI"/>
+              </a:rPr>
+              <a:t>Six runs to v0.5.0: four new findings on v0.3.0, all fixed; none since</a:t>
+            </a:r>
+          </a:p>
+          <a:p>
+            <a:pPr algn="l" marL="228600" indent="-228600">
+              <a:spcAft>
+                <a:spcPts val="800"/>
+              </a:spcAft>
+              <a:buChar char="•"/>
+            </a:pPr>
+            <a:r>
+              <a:rPr sz="1400" b="0" i="0">
+                <a:solidFill>
+                  <a:srgbClr val="243B53"/>
+                </a:solidFill>
+                <a:latin typeface="Segoe UI"/>
+              </a:rPr>
+              <a:t>Advisory: rewrite AC as Given/When/Then before PRD handoff</a:t>
+            </a:r>
+          </a:p>
+          <a:p>
+            <a:pPr algn="l" marL="228600" indent="-228600">
               <a:spcAft>
                 <a:spcPts val="0"/>
               </a:spcAft>
+              <a:buChar char="•"/>
             </a:pPr>
             <a:r>
-              <a:rPr sz="1300" b="0" i="0">
-                <a:solidFill>
-                  <a:srgbClr val="243B53"/>
-                </a:solidFill>
-                <a:latin typeface="Segoe UI"/>
-              </a:rPr>
-              <a:t>It came after eight BRD revisions, and the roles could read my addendum. One pass without it would test for priming.</a:t>
-            </a:r>
-          </a:p>
-        </p:txBody>
-      </p:sp>
-      <p:sp>
-        <p:nvSpPr>
-          <p:cNvPr id="11" name="Source"/>
+              <a:rPr sz="1400" b="1" i="0">
+                <a:solidFill>
+                  <a:srgbClr val="102A43"/>
+                </a:solidFill>
+                <a:latin typeface="Segoe UI"/>
+              </a:rPr>
+              <a:t>I did not invent targets to pass the gate</a:t>
+            </a:r>
+          </a:p>
+        </p:txBody>
+      </p:sp>
+      <p:sp>
+        <p:nvSpPr>
+          <p:cNvPr id="20" name="Source"/>
           <p:cNvSpPr txBox="1"/>
           <p:nvPr/>
         </p:nvSpPr>
@@ -6545,7 +6689,7 @@
                 </a:solidFill>
                 <a:latin typeface="Segoe UI"/>
               </a:rPr>
-              <a:t>Sources: docs/reference/log.md (Conventions; corrections, 25 to 26 Sep 2026); agent-request-challenge.md (Divergences, Limitations); git log.</a:t>
+              <a:t>Sources: BRD v0.5.0 frontmatter and Requirements Traceability; .copilot-tracking/brd-sessions/agentic-retrofit-programme.quality-report.yml (Runs 1 to 6); log.md (26 Sep 2026).</a:t>
             </a:r>
           </a:p>
         </p:txBody>
@@ -6605,77 +6749,89 @@
                 </a:solidFill>
                 <a:latin typeface="Segoe UI"/>
               </a:rPr>
-              <a:t>One real chain, from a decision down to its dated source</a:t>
-            </a:r>
-          </a:p>
-        </p:txBody>
-      </p:sp>
-      <p:sp>
-        <p:nvSpPr>
-          <p:cNvPr id="3" name="Chain 1 head"/>
+              <a:t>Keeping evidence honest was hard; here is what I would change</a:t>
+            </a:r>
+          </a:p>
+        </p:txBody>
+      </p:sp>
+      <p:sp>
+        <p:nvSpPr>
+          <p:cNvPr id="3" name="Challenges head"/>
+          <p:cNvSpPr txBox="1"/>
+          <p:nvPr/>
+        </p:nvSpPr>
+        <p:spPr>
+          <a:xfrm>
+            <a:off x="548640" y="1417320"/>
+            <a:ext cx="11094415" cy="274320"/>
+          </a:xfrm>
+          <a:prstGeom prst="rect">
+            <a:avLst/>
+          </a:prstGeom>
+          <a:noFill/>
+        </p:spPr>
+        <p:txBody>
+          <a:bodyPr wrap="square" tIns="0" bIns="0">
+            <a:spAutoFit/>
+          </a:bodyPr>
+          <a:lstStyle/>
+          <a:p>
+            <a:r>
+              <a:rPr sz="1200" b="1" i="0">
+                <a:solidFill>
+                  <a:srgbClr val="0B625B"/>
+                </a:solidFill>
+                <a:latin typeface="Segoe UI"/>
+              </a:rPr>
+              <a:t>CHALLENGES</a:t>
+            </a:r>
+          </a:p>
+        </p:txBody>
+      </p:sp>
+      <p:sp>
+        <p:nvSpPr>
+          <p:cNvPr id="4" name="Lessons head"/>
+          <p:cNvSpPr txBox="1"/>
+          <p:nvPr/>
+        </p:nvSpPr>
+        <p:spPr>
+          <a:xfrm>
+            <a:off x="548640" y="3840480"/>
+            <a:ext cx="11094415" cy="274320"/>
+          </a:xfrm>
+          <a:prstGeom prst="rect">
+            <a:avLst/>
+          </a:prstGeom>
+          <a:noFill/>
+        </p:spPr>
+        <p:txBody>
+          <a:bodyPr wrap="square" tIns="0" bIns="0">
+            <a:spAutoFit/>
+          </a:bodyPr>
+          <a:lstStyle/>
+          <a:p>
+            <a:r>
+              <a:rPr sz="1200" b="1" i="0">
+                <a:solidFill>
+                  <a:srgbClr val="1D5FB8"/>
+                </a:solidFill>
+                <a:latin typeface="Segoe UI"/>
+              </a:rPr>
+              <a:t>WHAT I WOULD DO DIFFERENTLY</a:t>
+            </a:r>
+          </a:p>
+        </p:txBody>
+      </p:sp>
+      <p:sp>
+        <p:nvSpPr>
+          <p:cNvPr id="5" name="Challenge 1"/>
           <p:cNvSpPr/>
           <p:nvPr/>
         </p:nvSpPr>
         <p:spPr>
           <a:xfrm>
-            <a:off x="548640" y="1554480"/>
-            <a:ext cx="1889699" cy="502920"/>
-          </a:xfrm>
-          <a:prstGeom prst="roundRect">
-            <a:avLst>
-              <a:gd name="adj" fmla="val 12000"/>
-            </a:avLst>
-          </a:prstGeom>
-          <a:solidFill>
-            <a:srgbClr val="B83A2E"/>
-          </a:solidFill>
-          <a:ln w="12700">
-            <a:solidFill>
-              <a:srgbClr val="B83A2E"/>
-            </a:solidFill>
-          </a:ln>
-        </p:spPr>
-        <p:style>
-          <a:lnRef idx="1">
-            <a:schemeClr val="accent1"/>
-          </a:lnRef>
-          <a:fillRef idx="3">
-            <a:schemeClr val="accent1"/>
-          </a:fillRef>
-          <a:effectRef idx="0">
-            <a:schemeClr val="accent1"/>
-          </a:effectRef>
-          <a:fontRef idx="minor">
-            <a:schemeClr val="lt1"/>
-          </a:fontRef>
-        </p:style>
-        <p:txBody>
-          <a:bodyPr rtlCol="0" anchor="ctr" wrap="square" lIns="109728" rIns="109728" tIns="36576" bIns="36576"/>
-          <a:lstStyle/>
-          <a:p>
-            <a:pPr algn="ctr"/>
-            <a:r>
-              <a:rPr sz="1500" b="1" i="0">
-                <a:solidFill>
-                  <a:srgbClr val="FFFFFF"/>
-                </a:solidFill>
-                <a:latin typeface="Segoe UI"/>
-              </a:rPr>
-              <a:t>Decision</a:t>
-            </a:r>
-          </a:p>
-        </p:txBody>
-      </p:sp>
-      <p:sp>
-        <p:nvSpPr>
-          <p:cNvPr id="4" name="Chain 1 body"/>
-          <p:cNvSpPr/>
-          <p:nvPr/>
-        </p:nvSpPr>
-        <p:spPr>
-          <a:xfrm>
-            <a:off x="548640" y="2331720"/>
-            <a:ext cx="1889699" cy="1600200"/>
+            <a:off x="548640" y="1965960"/>
+            <a:ext cx="3515258" cy="1600200"/>
           </a:xfrm>
           <a:prstGeom prst="roundRect">
             <a:avLst>
@@ -6711,6 +6867,22 @@
           <a:p>
             <a:pPr algn="l">
               <a:spcAft>
+                <a:spcPts val="600"/>
+              </a:spcAft>
+            </a:pPr>
+            <a:r>
+              <a:rPr sz="1600" b="1" i="0">
+                <a:solidFill>
+                  <a:srgbClr val="0B625B"/>
+                </a:solidFill>
+                <a:latin typeface="Segoe UI"/>
+              </a:rPr>
+              <a:t>No company data</a:t>
+            </a:r>
+          </a:p>
+          <a:p>
+            <a:pPr algn="l">
+              <a:spcAft>
                 <a:spcPts val="0"/>
               </a:spcAft>
             </a:pPr>
@@ -6721,122 +6893,21 @@
                 </a:solidFill>
                 <a:latin typeface="Segoe UI"/>
               </a:rPr>
-              <a:t>Addendum: approve a capped pilot, not a five-agent rollout; no end-to-end Stock Prioritisation agent</a:t>
-            </a:r>
-          </a:p>
-        </p:txBody>
-      </p:sp>
-      <p:sp>
-        <p:nvSpPr>
-          <p:cNvPr id="5" name="Chain arrow 1"/>
+              <a:t>The company is fictional. I modelled tenure, residents and finances from sector medians and labelled every value as an estimate.</a:t>
+            </a:r>
+          </a:p>
+        </p:txBody>
+      </p:sp>
+      <p:sp>
+        <p:nvSpPr>
+          <p:cNvPr id="6" name="Challenge 2"/>
           <p:cNvSpPr/>
           <p:nvPr/>
         </p:nvSpPr>
         <p:spPr>
           <a:xfrm>
-            <a:off x="2502347" y="1673352"/>
-            <a:ext cx="283464" cy="274320"/>
-          </a:xfrm>
-          <a:prstGeom prst="rightArrow">
-            <a:avLst/>
-          </a:prstGeom>
-          <a:solidFill>
-            <a:srgbClr val="9FB3C8"/>
-          </a:solidFill>
-          <a:ln w="12700">
-            <a:solidFill>
-              <a:srgbClr val="9FB3C8"/>
-            </a:solidFill>
-          </a:ln>
-        </p:spPr>
-        <p:style>
-          <a:lnRef idx="1">
-            <a:schemeClr val="accent1"/>
-          </a:lnRef>
-          <a:fillRef idx="3">
-            <a:schemeClr val="accent1"/>
-          </a:fillRef>
-          <a:effectRef idx="0">
-            <a:schemeClr val="accent1"/>
-          </a:effectRef>
-          <a:fontRef idx="minor">
-            <a:schemeClr val="lt1"/>
-          </a:fontRef>
-        </p:style>
-        <p:txBody>
-          <a:bodyPr rtlCol="0" anchor="ctr"/>
-          <a:lstStyle/>
-          <a:p>
-            <a:pPr algn="ctr"/>
-          </a:p>
-        </p:txBody>
-      </p:sp>
-      <p:sp>
-        <p:nvSpPr>
-          <p:cNvPr id="6" name="Chain 2 head"/>
-          <p:cNvSpPr/>
-          <p:nvPr/>
-        </p:nvSpPr>
-        <p:spPr>
-          <a:xfrm>
-            <a:off x="2849819" y="1554480"/>
-            <a:ext cx="1889699" cy="502920"/>
-          </a:xfrm>
-          <a:prstGeom prst="roundRect">
-            <a:avLst>
-              <a:gd name="adj" fmla="val 12000"/>
-            </a:avLst>
-          </a:prstGeom>
-          <a:solidFill>
-            <a:srgbClr val="0B625B"/>
-          </a:solidFill>
-          <a:ln w="12700">
-            <a:solidFill>
-              <a:srgbClr val="0B625B"/>
-            </a:solidFill>
-          </a:ln>
-        </p:spPr>
-        <p:style>
-          <a:lnRef idx="1">
-            <a:schemeClr val="accent1"/>
-          </a:lnRef>
-          <a:fillRef idx="3">
-            <a:schemeClr val="accent1"/>
-          </a:fillRef>
-          <a:effectRef idx="0">
-            <a:schemeClr val="accent1"/>
-          </a:effectRef>
-          <a:fontRef idx="minor">
-            <a:schemeClr val="lt1"/>
-          </a:fontRef>
-        </p:style>
-        <p:txBody>
-          <a:bodyPr rtlCol="0" anchor="ctr" wrap="square" lIns="109728" rIns="109728" tIns="36576" bIns="36576"/>
-          <a:lstStyle/>
-          <a:p>
-            <a:pPr algn="ctr"/>
-            <a:r>
-              <a:rPr sz="1500" b="1" i="0">
-                <a:solidFill>
-                  <a:srgbClr val="FFFFFF"/>
-                </a:solidFill>
-                <a:latin typeface="Segoe UI"/>
-              </a:rPr>
-              <a:t>Evidence</a:t>
-            </a:r>
-          </a:p>
-        </p:txBody>
-      </p:sp>
-      <p:sp>
-        <p:nvSpPr>
-          <p:cNvPr id="7" name="Chain 2 body"/>
-          <p:cNvSpPr/>
-          <p:nvPr/>
-        </p:nvSpPr>
-        <p:spPr>
-          <a:xfrm>
-            <a:off x="2849819" y="2331720"/>
-            <a:ext cx="1889699" cy="1600200"/>
+            <a:off x="4338218" y="1965960"/>
+            <a:ext cx="3515258" cy="1600200"/>
           </a:xfrm>
           <a:prstGeom prst="roundRect">
             <a:avLst>
@@ -6872,6 +6943,22 @@
           <a:p>
             <a:pPr algn="l">
               <a:spcAft>
+                <a:spcPts val="600"/>
+              </a:spcAft>
+            </a:pPr>
+            <a:r>
+              <a:rPr sz="1600" b="1" i="0">
+                <a:solidFill>
+                  <a:srgbClr val="0B625B"/>
+                </a:solidFill>
+                <a:latin typeface="Segoe UI"/>
+              </a:rPr>
+              <a:t>Agents that sound certain</a:t>
+            </a:r>
+          </a:p>
+          <a:p>
+            <a:pPr algn="l">
+              <a:spcAft>
                 <a:spcPts val="0"/>
               </a:spcAft>
             </a:pPr>
@@ -6882,122 +6969,21 @@
                 </a:solidFill>
                 <a:latin typeface="Segoe UI"/>
               </a:rPr>
-              <a:t>Agent Request Challenge, Stock Prioritisation: "eligibility is a rules question"</a:t>
-            </a:r>
-          </a:p>
-        </p:txBody>
-      </p:sp>
-      <p:sp>
-        <p:nvSpPr>
-          <p:cNvPr id="8" name="Chain arrow 2"/>
+              <a:t>Role answers are hypotheses, and the roles share my framing. Divergences stay open: L4 quality flags, L3 digital booking.</a:t>
+            </a:r>
+          </a:p>
+        </p:txBody>
+      </p:sp>
+      <p:sp>
+        <p:nvSpPr>
+          <p:cNvPr id="7" name="Challenge 3"/>
           <p:cNvSpPr/>
           <p:nvPr/>
         </p:nvSpPr>
         <p:spPr>
           <a:xfrm>
-            <a:off x="4803526" y="1673352"/>
-            <a:ext cx="283464" cy="274320"/>
-          </a:xfrm>
-          <a:prstGeom prst="rightArrow">
-            <a:avLst/>
-          </a:prstGeom>
-          <a:solidFill>
-            <a:srgbClr val="9FB3C8"/>
-          </a:solidFill>
-          <a:ln w="12700">
-            <a:solidFill>
-              <a:srgbClr val="9FB3C8"/>
-            </a:solidFill>
-          </a:ln>
-        </p:spPr>
-        <p:style>
-          <a:lnRef idx="1">
-            <a:schemeClr val="accent1"/>
-          </a:lnRef>
-          <a:fillRef idx="3">
-            <a:schemeClr val="accent1"/>
-          </a:fillRef>
-          <a:effectRef idx="0">
-            <a:schemeClr val="accent1"/>
-          </a:effectRef>
-          <a:fontRef idx="minor">
-            <a:schemeClr val="lt1"/>
-          </a:fontRef>
-        </p:style>
-        <p:txBody>
-          <a:bodyPr rtlCol="0" anchor="ctr"/>
-          <a:lstStyle/>
-          <a:p>
-            <a:pPr algn="ctr"/>
-          </a:p>
-        </p:txBody>
-      </p:sp>
-      <p:sp>
-        <p:nvSpPr>
-          <p:cNvPr id="9" name="Chain 3 head"/>
-          <p:cNvSpPr/>
-          <p:nvPr/>
-        </p:nvSpPr>
-        <p:spPr>
-          <a:xfrm>
-            <a:off x="5150998" y="1554480"/>
-            <a:ext cx="1889699" cy="502920"/>
-          </a:xfrm>
-          <a:prstGeom prst="roundRect">
-            <a:avLst>
-              <a:gd name="adj" fmla="val 12000"/>
-            </a:avLst>
-          </a:prstGeom>
-          <a:solidFill>
-            <a:srgbClr val="1D5FB8"/>
-          </a:solidFill>
-          <a:ln w="12700">
-            <a:solidFill>
-              <a:srgbClr val="1D5FB8"/>
-            </a:solidFill>
-          </a:ln>
-        </p:spPr>
-        <p:style>
-          <a:lnRef idx="1">
-            <a:schemeClr val="accent1"/>
-          </a:lnRef>
-          <a:fillRef idx="3">
-            <a:schemeClr val="accent1"/>
-          </a:fillRef>
-          <a:effectRef idx="0">
-            <a:schemeClr val="accent1"/>
-          </a:effectRef>
-          <a:fontRef idx="minor">
-            <a:schemeClr val="lt1"/>
-          </a:fontRef>
-        </p:style>
-        <p:txBody>
-          <a:bodyPr rtlCol="0" anchor="ctr" wrap="square" lIns="109728" rIns="109728" tIns="36576" bIns="36576"/>
-          <a:lstStyle/>
-          <a:p>
-            <a:pPr algn="ctr"/>
-            <a:r>
-              <a:rPr sz="1500" b="1" i="0">
-                <a:solidFill>
-                  <a:srgbClr val="FFFFFF"/>
-                </a:solidFill>
-                <a:latin typeface="Segoe UI"/>
-              </a:rPr>
-              <a:t>Requirement</a:t>
-            </a:r>
-          </a:p>
-        </p:txBody>
-      </p:sp>
-      <p:sp>
-        <p:nvSpPr>
-          <p:cNvPr id="10" name="Chain 3 body"/>
-          <p:cNvSpPr/>
-          <p:nvPr/>
-        </p:nvSpPr>
-        <p:spPr>
-          <a:xfrm>
-            <a:off x="5150998" y="2331720"/>
-            <a:ext cx="1889699" cy="1600200"/>
+            <a:off x="8127796" y="1965960"/>
+            <a:ext cx="3515258" cy="1600200"/>
           </a:xfrm>
           <a:prstGeom prst="roundRect">
             <a:avLst>
@@ -7033,6 +7019,22 @@
           <a:p>
             <a:pPr algn="l">
               <a:spcAft>
+                <a:spcPts val="600"/>
+              </a:spcAft>
+            </a:pPr>
+            <a:r>
+              <a:rPr sz="1600" b="1" i="0">
+                <a:solidFill>
+                  <a:srgbClr val="0B625B"/>
+                </a:solidFill>
+                <a:latin typeface="Segoe UI"/>
+              </a:rPr>
+              <a:t>Sources that disagree</a:t>
+            </a:r>
+          </a:p>
+          <a:p>
+            <a:pPr algn="l">
+              <a:spcAft>
                 <a:spcPts val="0"/>
               </a:spcAft>
             </a:pPr>
@@ -7043,31 +7045,33 @@
                 </a:solidFill>
                 <a:latin typeface="Segoe UI"/>
               </a:rPr>
-              <a:t>FR-026, AC-039 and CON-005: deterministic pass, fail or unknown eligibility</a:t>
-            </a:r>
-          </a:p>
-        </p:txBody>
-      </p:sp>
-      <p:sp>
-        <p:nvSpPr>
-          <p:cNvPr id="11" name="Chain arrow 3"/>
+              <a:t>Interest cover 91% or 87%; fuel poverty corrected from 10.0% to 11.6%; EPC C final policy, not commenced law. Flagged, not resolved.</a:t>
+            </a:r>
+          </a:p>
+        </p:txBody>
+      </p:sp>
+      <p:sp>
+        <p:nvSpPr>
+          <p:cNvPr id="8" name="Challenge 4"/>
           <p:cNvSpPr/>
           <p:nvPr/>
         </p:nvSpPr>
         <p:spPr>
           <a:xfrm>
-            <a:off x="7104705" y="1673352"/>
-            <a:ext cx="283464" cy="274320"/>
-          </a:xfrm>
-          <a:prstGeom prst="rightArrow">
-            <a:avLst/>
+            <a:off x="548640" y="4389120"/>
+            <a:ext cx="3515258" cy="1463040"/>
+          </a:xfrm>
+          <a:prstGeom prst="roundRect">
+            <a:avLst>
+              <a:gd name="adj" fmla="val 6000"/>
+            </a:avLst>
           </a:prstGeom>
           <a:solidFill>
-            <a:srgbClr val="9FB3C8"/>
+            <a:srgbClr val="E6EFFB"/>
           </a:solidFill>
           <a:ln w="12700">
             <a:solidFill>
-              <a:srgbClr val="9FB3C8"/>
+              <a:srgbClr val="C7D9F3"/>
             </a:solidFill>
           </a:ln>
         </p:spPr>
@@ -7086,35 +7090,64 @@
           </a:fontRef>
         </p:style>
         <p:txBody>
-          <a:bodyPr rtlCol="0" anchor="ctr"/>
-          <a:lstStyle/>
-          <a:p>
-            <a:pPr algn="ctr"/>
-          </a:p>
-        </p:txBody>
-      </p:sp>
-      <p:sp>
-        <p:nvSpPr>
-          <p:cNvPr id="12" name="Chain 4 head"/>
+          <a:bodyPr rtlCol="0" anchor="t" wrap="square" lIns="164592" rIns="164592" tIns="128016" bIns="91440"/>
+          <a:lstStyle/>
+          <a:p>
+            <a:pPr algn="l">
+              <a:spcAft>
+                <a:spcPts val="600"/>
+              </a:spcAft>
+            </a:pPr>
+            <a:r>
+              <a:rPr sz="1600" b="1" i="0">
+                <a:solidFill>
+                  <a:srgbClr val="1D5FB8"/>
+                </a:solidFill>
+                <a:latin typeface="Segoe UI"/>
+              </a:rPr>
+              <a:t>Start the log on day one</a:t>
+            </a:r>
+          </a:p>
+          <a:p>
+            <a:pPr algn="l">
+              <a:spcAft>
+                <a:spcPts val="0"/>
+              </a:spcAft>
+            </a:pPr>
+            <a:r>
+              <a:rPr sz="1300" b="0" i="0">
+                <a:solidFill>
+                  <a:srgbClr val="243B53"/>
+                </a:solidFill>
+                <a:latin typeface="Segoe UI"/>
+              </a:rPr>
+              <a:t>Log entries before 25 Sep had to be reconstructed from Git history.</a:t>
+            </a:r>
+          </a:p>
+        </p:txBody>
+      </p:sp>
+      <p:sp>
+        <p:nvSpPr>
+          <p:cNvPr id="9" name="Challenge 5"/>
           <p:cNvSpPr/>
           <p:nvPr/>
         </p:nvSpPr>
         <p:spPr>
           <a:xfrm>
-            <a:off x="7452177" y="1554480"/>
-            <a:ext cx="1889699" cy="502920"/>
+            <a:off x="4338218" y="4389120"/>
+            <a:ext cx="3515258" cy="1463040"/>
           </a:xfrm>
           <a:prstGeom prst="roundRect">
             <a:avLst>
-              <a:gd name="adj" fmla="val 12000"/>
+              <a:gd name="adj" fmla="val 6000"/>
             </a:avLst>
           </a:prstGeom>
           <a:solidFill>
-            <a:srgbClr val="102A43"/>
+            <a:srgbClr val="E6EFFB"/>
           </a:solidFill>
           <a:ln w="12700">
             <a:solidFill>
-              <a:srgbClr val="102A43"/>
+              <a:srgbClr val="C7D9F3"/>
             </a:solidFill>
           </a:ln>
         </p:spPr>
@@ -7133,32 +7166,52 @@
           </a:fontRef>
         </p:style>
         <p:txBody>
-          <a:bodyPr rtlCol="0" anchor="ctr" wrap="square" lIns="109728" rIns="109728" tIns="36576" bIns="36576"/>
-          <a:lstStyle/>
-          <a:p>
-            <a:pPr algn="ctr"/>
-            <a:r>
-              <a:rPr sz="1500" b="1" i="0">
-                <a:solidFill>
-                  <a:srgbClr val="FFFFFF"/>
-                </a:solidFill>
-                <a:latin typeface="Segoe UI"/>
-              </a:rPr>
-              <a:t>Source</a:t>
-            </a:r>
-          </a:p>
-        </p:txBody>
-      </p:sp>
-      <p:sp>
-        <p:nvSpPr>
-          <p:cNvPr id="13" name="Chain 4 body"/>
+          <a:bodyPr rtlCol="0" anchor="t" wrap="square" lIns="164592" rIns="164592" tIns="128016" bIns="91440"/>
+          <a:lstStyle/>
+          <a:p>
+            <a:pPr algn="l">
+              <a:spcAft>
+                <a:spcPts val="600"/>
+              </a:spcAft>
+            </a:pPr>
+            <a:r>
+              <a:rPr sz="1600" b="1" i="0">
+                <a:solidFill>
+                  <a:srgbClr val="1D5FB8"/>
+                </a:solidFill>
+                <a:latin typeface="Segoe UI"/>
+              </a:rPr>
+              <a:t>Canonical IDs from the first draft</a:t>
+            </a:r>
+          </a:p>
+          <a:p>
+            <a:pPr algn="l">
+              <a:spcAft>
+                <a:spcPts val="0"/>
+              </a:spcAft>
+            </a:pPr>
+            <a:r>
+              <a:rPr sz="1300" b="0" i="0">
+                <a:solidFill>
+                  <a:srgbClr val="243B53"/>
+                </a:solidFill>
+                <a:latin typeface="Segoe UI"/>
+              </a:rPr>
+              <a:t>The first quality run scored 0% only because of legacy IDs; relabelling cost a full pass.</a:t>
+            </a:r>
+          </a:p>
+        </p:txBody>
+      </p:sp>
+      <p:sp>
+        <p:nvSpPr>
+          <p:cNvPr id="10" name="Challenge 6"/>
           <p:cNvSpPr/>
           <p:nvPr/>
         </p:nvSpPr>
         <p:spPr>
           <a:xfrm>
-            <a:off x="7452177" y="2331720"/>
-            <a:ext cx="1889699" cy="1600200"/>
+            <a:off x="8127796" y="4389120"/>
+            <a:ext cx="3515258" cy="1463040"/>
           </a:xfrm>
           <a:prstGeom prst="roundRect">
             <a:avLst>
@@ -7166,11 +7219,11 @@
             </a:avLst>
           </a:prstGeom>
           <a:solidFill>
-            <a:srgbClr val="F0F4F8"/>
+            <a:srgbClr val="E6EFFB"/>
           </a:solidFill>
           <a:ln w="12700">
             <a:solidFill>
-              <a:srgbClr val="D9E2EC"/>
+              <a:srgbClr val="C7D9F3"/>
             </a:solidFill>
           </a:ln>
         </p:spPr>
@@ -7194,164 +7247,19 @@
           <a:p>
             <a:pPr algn="l">
               <a:spcAft>
-                <a:spcPts val="0"/>
+                <a:spcPts val="600"/>
               </a:spcAft>
             </a:pPr>
             <a:r>
-              <a:rPr sz="1300" b="0" i="0">
-                <a:solidFill>
-                  <a:srgbClr val="243B53"/>
-                </a:solidFill>
-                <a:latin typeface="Segoe UI"/>
-              </a:rPr>
-              <a:t>WH:SHF Wave 3 technical annex, Page 3 footnote 1; retrieved 19 Sep 2026</a:t>
-            </a:r>
-          </a:p>
-        </p:txBody>
-      </p:sp>
-      <p:sp>
-        <p:nvSpPr>
-          <p:cNvPr id="14" name="Chain arrow 4"/>
-          <p:cNvSpPr/>
-          <p:nvPr/>
-        </p:nvSpPr>
-        <p:spPr>
-          <a:xfrm>
-            <a:off x="9405884" y="1673352"/>
-            <a:ext cx="283464" cy="274320"/>
-          </a:xfrm>
-          <a:prstGeom prst="rightArrow">
-            <a:avLst/>
-          </a:prstGeom>
-          <a:solidFill>
-            <a:srgbClr val="9FB3C8"/>
-          </a:solidFill>
-          <a:ln w="12700">
-            <a:solidFill>
-              <a:srgbClr val="9FB3C8"/>
-            </a:solidFill>
-          </a:ln>
-        </p:spPr>
-        <p:style>
-          <a:lnRef idx="1">
-            <a:schemeClr val="accent1"/>
-          </a:lnRef>
-          <a:fillRef idx="3">
-            <a:schemeClr val="accent1"/>
-          </a:fillRef>
-          <a:effectRef idx="0">
-            <a:schemeClr val="accent1"/>
-          </a:effectRef>
-          <a:fontRef idx="minor">
-            <a:schemeClr val="lt1"/>
-          </a:fontRef>
-        </p:style>
-        <p:txBody>
-          <a:bodyPr rtlCol="0" anchor="ctr"/>
-          <a:lstStyle/>
-          <a:p>
-            <a:pPr algn="ctr"/>
-          </a:p>
-        </p:txBody>
-      </p:sp>
-      <p:sp>
-        <p:nvSpPr>
-          <p:cNvPr id="15" name="Chain 5 head"/>
-          <p:cNvSpPr/>
-          <p:nvPr/>
-        </p:nvSpPr>
-        <p:spPr>
-          <a:xfrm>
-            <a:off x="9753356" y="1554480"/>
-            <a:ext cx="1889699" cy="502920"/>
-          </a:xfrm>
-          <a:prstGeom prst="roundRect">
-            <a:avLst>
-              <a:gd name="adj" fmla="val 12000"/>
-            </a:avLst>
-          </a:prstGeom>
-          <a:solidFill>
-            <a:srgbClr val="486581"/>
-          </a:solidFill>
-          <a:ln w="12700">
-            <a:solidFill>
-              <a:srgbClr val="486581"/>
-            </a:solidFill>
-          </a:ln>
-        </p:spPr>
-        <p:style>
-          <a:lnRef idx="1">
-            <a:schemeClr val="accent1"/>
-          </a:lnRef>
-          <a:fillRef idx="3">
-            <a:schemeClr val="accent1"/>
-          </a:fillRef>
-          <a:effectRef idx="0">
-            <a:schemeClr val="accent1"/>
-          </a:effectRef>
-          <a:fontRef idx="minor">
-            <a:schemeClr val="lt1"/>
-          </a:fontRef>
-        </p:style>
-        <p:txBody>
-          <a:bodyPr rtlCol="0" anchor="ctr" wrap="square" lIns="109728" rIns="109728" tIns="36576" bIns="36576"/>
-          <a:lstStyle/>
-          <a:p>
-            <a:pPr algn="ctr"/>
-            <a:r>
-              <a:rPr sz="1500" b="1" i="0">
-                <a:solidFill>
-                  <a:srgbClr val="FFFFFF"/>
-                </a:solidFill>
-                <a:latin typeface="Segoe UI"/>
-              </a:rPr>
-              <a:t>Change record</a:t>
-            </a:r>
-          </a:p>
-        </p:txBody>
-      </p:sp>
-      <p:sp>
-        <p:nvSpPr>
-          <p:cNvPr id="16" name="Chain 5 body"/>
-          <p:cNvSpPr/>
-          <p:nvPr/>
-        </p:nvSpPr>
-        <p:spPr>
-          <a:xfrm>
-            <a:off x="9753356" y="2331720"/>
-            <a:ext cx="1889699" cy="1600200"/>
-          </a:xfrm>
-          <a:prstGeom prst="roundRect">
-            <a:avLst>
-              <a:gd name="adj" fmla="val 6000"/>
-            </a:avLst>
-          </a:prstGeom>
-          <a:solidFill>
-            <a:srgbClr val="F0F4F8"/>
-          </a:solidFill>
-          <a:ln w="12700">
-            <a:solidFill>
-              <a:srgbClr val="D9E2EC"/>
-            </a:solidFill>
-          </a:ln>
-        </p:spPr>
-        <p:style>
-          <a:lnRef idx="1">
-            <a:schemeClr val="accent1"/>
-          </a:lnRef>
-          <a:fillRef idx="3">
-            <a:schemeClr val="accent1"/>
-          </a:fillRef>
-          <a:effectRef idx="0">
-            <a:schemeClr val="accent1"/>
-          </a:effectRef>
-          <a:fontRef idx="minor">
-            <a:schemeClr val="lt1"/>
-          </a:fontRef>
-        </p:style>
-        <p:txBody>
-          <a:bodyPr rtlCol="0" anchor="t" wrap="square" lIns="164592" rIns="164592" tIns="128016" bIns="91440"/>
-          <a:lstStyle/>
+              <a:rPr sz="1600" b="1" i="0">
+                <a:solidFill>
+                  <a:srgbClr val="1D5FB8"/>
+                </a:solidFill>
+                <a:latin typeface="Segoe UI"/>
+              </a:rPr>
+              <a:t>Run the value challenge earlier, and blind</a:t>
+            </a:r>
+          </a:p>
           <a:p>
             <a:pPr algn="l">
               <a:spcAft>
@@ -7365,424 +7273,14 @@
                 </a:solidFill>
                 <a:latin typeface="Segoe UI"/>
               </a:rPr>
-              <a:t>log.md, 26 Sep entries; commits a72f231, 3db359c and c3e423a</a:t>
-            </a:r>
-          </a:p>
-        </p:txBody>
-      </p:sp>
-      <p:sp>
-        <p:nvSpPr>
-          <p:cNvPr id="17" name="Justify"/>
-          <p:cNvSpPr/>
-          <p:nvPr/>
-        </p:nvSpPr>
-        <p:spPr>
-          <a:xfrm>
-            <a:off x="548640" y="4206240"/>
-            <a:ext cx="5396331" cy="868680"/>
-          </a:xfrm>
-          <a:prstGeom prst="roundRect">
-            <a:avLst>
-              <a:gd name="adj" fmla="val 6000"/>
-            </a:avLst>
-          </a:prstGeom>
-          <a:solidFill>
-            <a:srgbClr val="E3F4F1"/>
-          </a:solidFill>
-          <a:ln w="12700">
-            <a:solidFill>
-              <a:srgbClr val="B7E2DA"/>
-            </a:solidFill>
-          </a:ln>
-        </p:spPr>
-        <p:style>
-          <a:lnRef idx="1">
-            <a:schemeClr val="accent1"/>
-          </a:lnRef>
-          <a:fillRef idx="3">
-            <a:schemeClr val="accent1"/>
-          </a:fillRef>
-          <a:effectRef idx="0">
-            <a:schemeClr val="accent1"/>
-          </a:effectRef>
-          <a:fontRef idx="minor">
-            <a:schemeClr val="lt1"/>
-          </a:fontRef>
-        </p:style>
-        <p:txBody>
-          <a:bodyPr rtlCol="0" anchor="ctr" wrap="square" lIns="164592" rIns="164592" tIns="128016" bIns="91440"/>
-          <a:lstStyle/>
-          <a:p>
-            <a:pPr algn="l">
-              <a:spcAft>
-                <a:spcPts val="200"/>
-              </a:spcAft>
-            </a:pPr>
-            <a:r>
-              <a:rPr sz="1400" b="1" i="0">
-                <a:solidFill>
-                  <a:srgbClr val="0B625B"/>
-                </a:solidFill>
-                <a:latin typeface="Segoe UI"/>
-              </a:rPr>
-              <a:t>To justify</a:t>
-            </a:r>
-          </a:p>
-          <a:p>
-            <a:pPr algn="l">
-              <a:spcAft>
-                <a:spcPts val="0"/>
-              </a:spcAft>
-            </a:pPr>
-            <a:r>
-              <a:rPr sz="1300" b="0" i="0">
-                <a:solidFill>
-                  <a:srgbClr val="243B53"/>
-                </a:solidFill>
-                <a:latin typeface="Segoe UI"/>
-              </a:rPr>
-              <a:t>Follow the chain from the decision down to the dated source.</a:t>
-            </a:r>
-          </a:p>
-        </p:txBody>
-      </p:sp>
-      <p:sp>
-        <p:nvSpPr>
-          <p:cNvPr id="18" name="Challenge"/>
-          <p:cNvSpPr/>
-          <p:nvPr/>
-        </p:nvSpPr>
-        <p:spPr>
-          <a:xfrm>
-            <a:off x="6246723" y="4206240"/>
-            <a:ext cx="5396331" cy="868680"/>
-          </a:xfrm>
-          <a:prstGeom prst="roundRect">
-            <a:avLst>
-              <a:gd name="adj" fmla="val 6000"/>
-            </a:avLst>
-          </a:prstGeom>
-          <a:solidFill>
-            <a:srgbClr val="FBEAE8"/>
-          </a:solidFill>
-          <a:ln w="12700">
-            <a:solidFill>
-              <a:srgbClr val="F3C7C1"/>
-            </a:solidFill>
-          </a:ln>
-        </p:spPr>
-        <p:style>
-          <a:lnRef idx="1">
-            <a:schemeClr val="accent1"/>
-          </a:lnRef>
-          <a:fillRef idx="3">
-            <a:schemeClr val="accent1"/>
-          </a:fillRef>
-          <a:effectRef idx="0">
-            <a:schemeClr val="accent1"/>
-          </a:effectRef>
-          <a:fontRef idx="minor">
-            <a:schemeClr val="lt1"/>
-          </a:fontRef>
-        </p:style>
-        <p:txBody>
-          <a:bodyPr rtlCol="0" anchor="ctr" wrap="square" lIns="164592" rIns="164592" tIns="128016" bIns="91440"/>
-          <a:lstStyle/>
-          <a:p>
-            <a:pPr algn="l">
-              <a:spcAft>
-                <a:spcPts val="200"/>
-              </a:spcAft>
-            </a:pPr>
-            <a:r>
-              <a:rPr sz="1400" b="1" i="0">
-                <a:solidFill>
-                  <a:srgbClr val="B83A2E"/>
-                </a:solidFill>
-                <a:latin typeface="Segoe UI"/>
-              </a:rPr>
-              <a:t>To challenge</a:t>
-            </a:r>
-          </a:p>
-          <a:p>
-            <a:pPr algn="l">
-              <a:spcAft>
-                <a:spcPts val="0"/>
-              </a:spcAft>
-            </a:pPr>
-            <a:r>
-              <a:rPr sz="1300" b="0" i="0">
-                <a:solidFill>
-                  <a:srgbClr val="243B53"/>
-                </a:solidFill>
-                <a:latin typeface="Segoe UI"/>
-              </a:rPr>
-              <a:t>Change one piece of evidence and see which rules and decisions move.</a:t>
-            </a:r>
-          </a:p>
-        </p:txBody>
-      </p:sp>
-      <p:sp>
-        <p:nvSpPr>
-          <p:cNvPr id="19" name="Classes label"/>
-          <p:cNvSpPr txBox="1"/>
-          <p:nvPr/>
-        </p:nvSpPr>
-        <p:spPr>
-          <a:xfrm>
-            <a:off x="548640" y="5349240"/>
-            <a:ext cx="1737360" cy="457200"/>
-          </a:xfrm>
-          <a:prstGeom prst="rect">
-            <a:avLst/>
-          </a:prstGeom>
-          <a:noFill/>
-        </p:spPr>
-        <p:txBody>
-          <a:bodyPr wrap="square" anchor="ctr">
-            <a:spAutoFit/>
-          </a:bodyPr>
-          <a:lstStyle/>
-          <a:p>
-            <a:r>
-              <a:rPr sz="1200" b="1" i="0">
-                <a:solidFill>
-                  <a:srgbClr val="486581"/>
-                </a:solidFill>
-                <a:latin typeface="Segoe UI"/>
-              </a:rPr>
-              <a:t>Every claim is labelled:</a:t>
-            </a:r>
-          </a:p>
-        </p:txBody>
-      </p:sp>
-      <p:sp>
-        <p:nvSpPr>
-          <p:cNvPr id="20" name="Class 1"/>
-          <p:cNvSpPr/>
-          <p:nvPr/>
-        </p:nvSpPr>
-        <p:spPr>
-          <a:xfrm>
-            <a:off x="2423160" y="5349240"/>
-            <a:ext cx="2167813" cy="457200"/>
-          </a:xfrm>
-          <a:prstGeom prst="roundRect">
-            <a:avLst>
-              <a:gd name="adj" fmla="val 12000"/>
-            </a:avLst>
-          </a:prstGeom>
-          <a:solidFill>
-            <a:srgbClr val="102A43"/>
-          </a:solidFill>
-          <a:ln w="12700">
-            <a:solidFill>
-              <a:srgbClr val="102A43"/>
-            </a:solidFill>
-          </a:ln>
-        </p:spPr>
-        <p:style>
-          <a:lnRef idx="1">
-            <a:schemeClr val="accent1"/>
-          </a:lnRef>
-          <a:fillRef idx="3">
-            <a:schemeClr val="accent1"/>
-          </a:fillRef>
-          <a:effectRef idx="0">
-            <a:schemeClr val="accent1"/>
-          </a:effectRef>
-          <a:fontRef idx="minor">
-            <a:schemeClr val="lt1"/>
-          </a:fontRef>
-        </p:style>
-        <p:txBody>
-          <a:bodyPr rtlCol="0" anchor="ctr" wrap="square" lIns="109728" rIns="109728" tIns="36576" bIns="36576"/>
-          <a:lstStyle/>
-          <a:p>
-            <a:pPr algn="ctr"/>
-            <a:r>
-              <a:rPr sz="1300" b="1" i="0">
-                <a:solidFill>
-                  <a:srgbClr val="FFFFFF"/>
-                </a:solidFill>
-                <a:latin typeface="Segoe UI"/>
-              </a:rPr>
-              <a:t>Case-study fact</a:t>
-            </a:r>
-          </a:p>
-        </p:txBody>
-      </p:sp>
-      <p:sp>
-        <p:nvSpPr>
-          <p:cNvPr id="21" name="Class 2"/>
-          <p:cNvSpPr/>
-          <p:nvPr/>
-        </p:nvSpPr>
-        <p:spPr>
-          <a:xfrm>
-            <a:off x="4773853" y="5349240"/>
-            <a:ext cx="2167813" cy="457200"/>
-          </a:xfrm>
-          <a:prstGeom prst="roundRect">
-            <a:avLst>
-              <a:gd name="adj" fmla="val 12000"/>
-            </a:avLst>
-          </a:prstGeom>
-          <a:solidFill>
-            <a:srgbClr val="0B625B"/>
-          </a:solidFill>
-          <a:ln w="12700">
-            <a:solidFill>
-              <a:srgbClr val="0B625B"/>
-            </a:solidFill>
-          </a:ln>
-        </p:spPr>
-        <p:style>
-          <a:lnRef idx="1">
-            <a:schemeClr val="accent1"/>
-          </a:lnRef>
-          <a:fillRef idx="3">
-            <a:schemeClr val="accent1"/>
-          </a:fillRef>
-          <a:effectRef idx="0">
-            <a:schemeClr val="accent1"/>
-          </a:effectRef>
-          <a:fontRef idx="minor">
-            <a:schemeClr val="lt1"/>
-          </a:fontRef>
-        </p:style>
-        <p:txBody>
-          <a:bodyPr rtlCol="0" anchor="ctr" wrap="square" lIns="109728" rIns="109728" tIns="36576" bIns="36576"/>
-          <a:lstStyle/>
-          <a:p>
-            <a:pPr algn="ctr"/>
-            <a:r>
-              <a:rPr sz="1300" b="1" i="0">
-                <a:solidFill>
-                  <a:srgbClr val="FFFFFF"/>
-                </a:solidFill>
-                <a:latin typeface="Segoe UI"/>
-              </a:rPr>
-              <a:t>Sector hypothesis</a:t>
-            </a:r>
-          </a:p>
-        </p:txBody>
-      </p:sp>
-      <p:sp>
-        <p:nvSpPr>
-          <p:cNvPr id="22" name="Class 3"/>
-          <p:cNvSpPr/>
-          <p:nvPr/>
-        </p:nvSpPr>
-        <p:spPr>
-          <a:xfrm>
-            <a:off x="7124547" y="5349240"/>
-            <a:ext cx="2167813" cy="457200"/>
-          </a:xfrm>
-          <a:prstGeom prst="roundRect">
-            <a:avLst>
-              <a:gd name="adj" fmla="val 12000"/>
-            </a:avLst>
-          </a:prstGeom>
-          <a:solidFill>
-            <a:srgbClr val="1D5FB8"/>
-          </a:solidFill>
-          <a:ln w="12700">
-            <a:solidFill>
-              <a:srgbClr val="1D5FB8"/>
-            </a:solidFill>
-          </a:ln>
-        </p:spPr>
-        <p:style>
-          <a:lnRef idx="1">
-            <a:schemeClr val="accent1"/>
-          </a:lnRef>
-          <a:fillRef idx="3">
-            <a:schemeClr val="accent1"/>
-          </a:fillRef>
-          <a:effectRef idx="0">
-            <a:schemeClr val="accent1"/>
-          </a:effectRef>
-          <a:fontRef idx="minor">
-            <a:schemeClr val="lt1"/>
-          </a:fontRef>
-        </p:style>
-        <p:txBody>
-          <a:bodyPr rtlCol="0" anchor="ctr" wrap="square" lIns="109728" rIns="109728" tIns="36576" bIns="36576"/>
-          <a:lstStyle/>
-          <a:p>
-            <a:pPr algn="ctr"/>
-            <a:r>
-              <a:rPr sz="1300" b="1" i="0">
-                <a:solidFill>
-                  <a:srgbClr val="FFFFFF"/>
-                </a:solidFill>
-                <a:latin typeface="Segoe UI"/>
-              </a:rPr>
-              <a:t>Planning assumption</a:t>
-            </a:r>
-          </a:p>
-        </p:txBody>
-      </p:sp>
-      <p:sp>
-        <p:nvSpPr>
-          <p:cNvPr id="23" name="Class 4"/>
-          <p:cNvSpPr/>
-          <p:nvPr/>
-        </p:nvSpPr>
-        <p:spPr>
-          <a:xfrm>
-            <a:off x="9475241" y="5349240"/>
-            <a:ext cx="2167813" cy="457200"/>
-          </a:xfrm>
-          <a:prstGeom prst="roundRect">
-            <a:avLst>
-              <a:gd name="adj" fmla="val 12000"/>
-            </a:avLst>
-          </a:prstGeom>
-          <a:solidFill>
-            <a:srgbClr val="486581"/>
-          </a:solidFill>
-          <a:ln w="12700">
-            <a:solidFill>
-              <a:srgbClr val="486581"/>
-            </a:solidFill>
-          </a:ln>
-        </p:spPr>
-        <p:style>
-          <a:lnRef idx="1">
-            <a:schemeClr val="accent1"/>
-          </a:lnRef>
-          <a:fillRef idx="3">
-            <a:schemeClr val="accent1"/>
-          </a:fillRef>
-          <a:effectRef idx="0">
-            <a:schemeClr val="accent1"/>
-          </a:effectRef>
-          <a:fontRef idx="minor">
-            <a:schemeClr val="lt1"/>
-          </a:fontRef>
-        </p:style>
-        <p:txBody>
-          <a:bodyPr rtlCol="0" anchor="ctr" wrap="square" lIns="109728" rIns="109728" tIns="36576" bIns="36576"/>
-          <a:lstStyle/>
-          <a:p>
-            <a:pPr algn="ctr"/>
-            <a:r>
-              <a:rPr sz="1300" b="1" i="0">
-                <a:solidFill>
-                  <a:srgbClr val="FFFFFF"/>
-                </a:solidFill>
-                <a:latin typeface="Segoe UI"/>
-              </a:rPr>
-              <a:t>Unknown detail</a:t>
-            </a:r>
-          </a:p>
-        </p:txBody>
-      </p:sp>
-      <p:sp>
-        <p:nvSpPr>
-          <p:cNvPr id="24" name="Source"/>
+              <a:t>It came after eight BRD revisions, and the roles could read my addendum. One pass without it would test for priming.</a:t>
+            </a:r>
+          </a:p>
+        </p:txBody>
+      </p:sp>
+      <p:sp>
+        <p:nvSpPr>
+          <p:cNvPr id="11" name="Source"/>
           <p:cNvSpPr txBox="1"/>
           <p:nvPr/>
         </p:nvSpPr>
@@ -7809,7 +7307,7 @@
                 </a:solidFill>
                 <a:latin typeface="Segoe UI"/>
               </a:rPr>
-              <a:t>Sources: case_study_48_addendum.md (Recommended Executive Decision); agent-request-challenge.md; BRD FR-026, CON-005; WH:SHF annex snapshot; log.md.</a:t>
+              <a:t>Sources: docs/reference/log.md (Conventions; corrections, 25 to 26 Sep 2026); agent-request-challenge.md (Divergences, Limitations); git log.</a:t>
             </a:r>
           </a:p>
         </p:txBody>
@@ -7869,29 +7367,29 @@
                 </a:solidFill>
                 <a:latin typeface="Segoe UI"/>
               </a:rPr>
-              <a:t>Four decisions where I would value your challenge today</a:t>
-            </a:r>
-          </a:p>
-        </p:txBody>
-      </p:sp>
-      <p:sp>
-        <p:nvSpPr>
-          <p:cNvPr id="3" name="Questions"/>
+              <a:t>One real chain, from a decision down to its dated source</a:t>
+            </a:r>
+          </a:p>
+        </p:txBody>
+      </p:sp>
+      <p:sp>
+        <p:nvSpPr>
+          <p:cNvPr id="3" name="Chain 1 head"/>
           <p:cNvSpPr/>
           <p:nvPr/>
         </p:nvSpPr>
         <p:spPr>
           <a:xfrm>
-            <a:off x="548640" y="1508760"/>
-            <a:ext cx="6309360" cy="3520440"/>
+            <a:off x="548640" y="1554480"/>
+            <a:ext cx="1889699" cy="502920"/>
           </a:xfrm>
           <a:prstGeom prst="roundRect">
             <a:avLst>
-              <a:gd name="adj" fmla="val 6000"/>
+              <a:gd name="adj" fmla="val 12000"/>
             </a:avLst>
           </a:prstGeom>
           <a:solidFill>
-            <a:srgbClr val="FFFFFF"/>
+            <a:srgbClr val="B83A2E"/>
           </a:solidFill>
           <a:ln w="12700">
             <a:solidFill>
@@ -7914,120 +7412,32 @@
           </a:fontRef>
         </p:style>
         <p:txBody>
-          <a:bodyPr rtlCol="0" anchor="t" wrap="square" lIns="164592" rIns="164592" tIns="128016" bIns="91440"/>
-          <a:lstStyle/>
-          <a:p>
-            <a:pPr algn="l">
-              <a:spcAft>
-                <a:spcPts val="1200"/>
-              </a:spcAft>
-            </a:pPr>
-            <a:r>
-              <a:rPr sz="1300" b="1" i="0">
-                <a:solidFill>
-                  <a:srgbClr val="B83A2E"/>
-                </a:solidFill>
-                <a:latin typeface="Segoe UI"/>
-              </a:rPr>
-              <a:t>QUESTIONS FOR YOU</a:t>
-            </a:r>
-          </a:p>
-          <a:p>
-            <a:pPr algn="l" marL="342900" indent="-342900">
-              <a:spcAft>
-                <a:spcPts val="1200"/>
-              </a:spcAft>
-              <a:buAutoNum type="arabicPeriod" startAt="1"/>
-            </a:pPr>
+          <a:bodyPr rtlCol="0" anchor="ctr" wrap="square" lIns="109728" rIns="109728" tIns="36576" bIns="36576"/>
+          <a:lstStyle/>
+          <a:p>
+            <a:pPr algn="ctr"/>
             <a:r>
               <a:rPr sz="1500" b="1" i="0">
                 <a:solidFill>
-                  <a:srgbClr val="102A43"/>
-                </a:solidFill>
-                <a:latin typeface="Segoe UI"/>
-              </a:rPr>
-              <a:t>Will the panel read agent-led modernisation, not five end-to-end agents, as answering the brief?</a:t>
-            </a:r>
-          </a:p>
-          <a:p>
-            <a:pPr algn="l" marL="342900" indent="-342900">
-              <a:spcAft>
-                <a:spcPts val="1200"/>
-              </a:spcAft>
-              <a:buAutoNum type="arabicPeriod" startAt="2"/>
-            </a:pPr>
-            <a:r>
-              <a:rPr sz="1500" b="1" i="0">
-                <a:solidFill>
-                  <a:srgbClr val="102A43"/>
-                </a:solidFill>
-                <a:latin typeface="Segoe UI"/>
-              </a:rPr>
-              <a:t>How should I balance business depth against architecture depth?</a:t>
-            </a:r>
-          </a:p>
-          <a:p>
-            <a:pPr algn="l" marL="342900" indent="-342900">
-              <a:spcAft>
-                <a:spcPts val="1200"/>
-              </a:spcAft>
-              <a:buAutoNum type="arabicPeriod" startAt="3"/>
-            </a:pPr>
-            <a:r>
-              <a:rPr sz="1500" b="1" i="0">
-                <a:solidFill>
-                  <a:srgbClr val="102A43"/>
-                </a:solidFill>
-                <a:latin typeface="Segoe UI"/>
-              </a:rPr>
-              <a:t>Keep the BRD failing on unset targets, or propose illustrative targets?</a:t>
-            </a:r>
-          </a:p>
-          <a:p>
-            <a:pPr algn="l" marL="342900" indent="-342900">
-              <a:spcAft>
-                <a:spcPts val="1200"/>
-              </a:spcAft>
-              <a:buAutoNum type="arabicPeriod" startAt="4"/>
-            </a:pPr>
-            <a:r>
-              <a:rPr sz="1500" b="1" i="0">
-                <a:solidFill>
-                  <a:srgbClr val="102A43"/>
-                </a:solidFill>
-                <a:latin typeface="Segoe UI"/>
-              </a:rPr>
-              <a:t>Which open divergence first: L4 quality flags or L3 digital booking?</a:t>
-            </a:r>
-          </a:p>
-          <a:p>
-            <a:pPr algn="l">
-              <a:spcAft>
-                <a:spcPts val="0"/>
-              </a:spcAft>
-            </a:pPr>
-            <a:r>
-              <a:rPr sz="1400" b="0" i="1">
-                <a:solidFill>
-                  <a:srgbClr val="486581"/>
-                </a:solidFill>
-                <a:latin typeface="Segoe UI"/>
-              </a:rPr>
-              <a:t>And on the story itself: where did it lose you?</a:t>
-            </a:r>
-          </a:p>
-        </p:txBody>
-      </p:sp>
-      <p:sp>
-        <p:nvSpPr>
-          <p:cNvPr id="4" name="Next"/>
+                  <a:srgbClr val="FFFFFF"/>
+                </a:solidFill>
+                <a:latin typeface="Segoe UI"/>
+              </a:rPr>
+              <a:t>Decision</a:t>
+            </a:r>
+          </a:p>
+        </p:txBody>
+      </p:sp>
+      <p:sp>
+        <p:nvSpPr>
+          <p:cNvPr id="4" name="Chain 1 body"/>
           <p:cNvSpPr/>
           <p:nvPr/>
         </p:nvSpPr>
         <p:spPr>
           <a:xfrm>
-            <a:off x="7132320" y="1508760"/>
-            <a:ext cx="4510735" cy="3520440"/>
+            <a:off x="548640" y="2331720"/>
+            <a:ext cx="1889699" cy="1600200"/>
           </a:xfrm>
           <a:prstGeom prst="roundRect">
             <a:avLst>
@@ -8063,116 +7473,398 @@
           <a:p>
             <a:pPr algn="l">
               <a:spcAft>
-                <a:spcPts val="1200"/>
+                <a:spcPts val="0"/>
               </a:spcAft>
             </a:pPr>
             <a:r>
-              <a:rPr sz="1300" b="1" i="0">
-                <a:solidFill>
-                  <a:srgbClr val="0B625B"/>
-                </a:solidFill>
-                <a:latin typeface="Segoe UI"/>
-              </a:rPr>
-              <a:t>NEXT, ON THE 85-DAY PLAN (TO 5 DEC)</a:t>
-            </a:r>
-          </a:p>
-          <a:p>
-            <a:pPr algn="l" marL="228600" indent="-228600">
-              <a:spcAft>
-                <a:spcPts val="1000"/>
-              </a:spcAft>
-              <a:buChar char="•"/>
-            </a:pPr>
-            <a:r>
-              <a:rPr sz="1400" b="0" i="0">
+              <a:rPr sz="1300" b="0" i="0">
                 <a:solidFill>
                   <a:srgbClr val="243B53"/>
                 </a:solidFill>
                 <a:latin typeface="Segoe UI"/>
               </a:rPr>
-              <a:t>High- and medium-level architecture with justified trade-offs</a:t>
-            </a:r>
-          </a:p>
-          <a:p>
-            <a:pPr algn="l" marL="228600" indent="-228600">
-              <a:spcAft>
-                <a:spcPts val="1000"/>
-              </a:spcAft>
-              <a:buChar char="•"/>
-            </a:pPr>
-            <a:r>
-              <a:rPr sz="1400" b="0" i="0">
-                <a:solidFill>
-                  <a:srgbClr val="243B53"/>
-                </a:solidFill>
-                <a:latin typeface="Segoe UI"/>
-              </a:rPr>
-              <a:t>Shadow-mode comparison of typed decision models (IDEA-001)</a:t>
-            </a:r>
-          </a:p>
-          <a:p>
-            <a:pPr algn="l" marL="228600" indent="-228600">
-              <a:spcAft>
-                <a:spcPts val="1000"/>
-              </a:spcAft>
-              <a:buChar char="•"/>
-            </a:pPr>
-            <a:r>
-              <a:rPr sz="1400" b="0" i="0">
-                <a:solidFill>
-                  <a:srgbClr val="243B53"/>
-                </a:solidFill>
-                <a:latin typeface="Segoe UI"/>
-              </a:rPr>
-              <a:t>Optional bounded demo, with a static fallback</a:t>
-            </a:r>
-          </a:p>
-          <a:p>
-            <a:pPr algn="l" marL="228600" indent="-228600">
-              <a:spcAft>
-                <a:spcPts val="1000"/>
-              </a:spcAft>
-              <a:buChar char="•"/>
-            </a:pPr>
-            <a:r>
-              <a:rPr sz="1400" b="0" i="0">
-                <a:solidFill>
-                  <a:srgbClr val="243B53"/>
-                </a:solidFill>
-                <a:latin typeface="Segoe UI"/>
-              </a:rPr>
-              <a:t>CEO, CIO and CFO versions of the 15-minute pitch</a:t>
-            </a:r>
-          </a:p>
-          <a:p>
-            <a:pPr algn="l" marL="228600" indent="-228600">
+              <a:t>Addendum: approve a capped pilot, not a five-agent rollout; no end-to-end Stock Prioritisation agent</a:t>
+            </a:r>
+          </a:p>
+        </p:txBody>
+      </p:sp>
+      <p:sp>
+        <p:nvSpPr>
+          <p:cNvPr id="5" name="Chain arrow 1"/>
+          <p:cNvSpPr/>
+          <p:nvPr/>
+        </p:nvSpPr>
+        <p:spPr>
+          <a:xfrm>
+            <a:off x="2502347" y="1673352"/>
+            <a:ext cx="283464" cy="274320"/>
+          </a:xfrm>
+          <a:prstGeom prst="rightArrow">
+            <a:avLst/>
+          </a:prstGeom>
+          <a:solidFill>
+            <a:srgbClr val="9FB3C8"/>
+          </a:solidFill>
+          <a:ln w="12700">
+            <a:solidFill>
+              <a:srgbClr val="9FB3C8"/>
+            </a:solidFill>
+          </a:ln>
+        </p:spPr>
+        <p:style>
+          <a:lnRef idx="1">
+            <a:schemeClr val="accent1"/>
+          </a:lnRef>
+          <a:fillRef idx="3">
+            <a:schemeClr val="accent1"/>
+          </a:fillRef>
+          <a:effectRef idx="0">
+            <a:schemeClr val="accent1"/>
+          </a:effectRef>
+          <a:fontRef idx="minor">
+            <a:schemeClr val="lt1"/>
+          </a:fontRef>
+        </p:style>
+        <p:txBody>
+          <a:bodyPr rtlCol="0" anchor="ctr"/>
+          <a:lstStyle/>
+          <a:p>
+            <a:pPr algn="ctr"/>
+          </a:p>
+        </p:txBody>
+      </p:sp>
+      <p:sp>
+        <p:nvSpPr>
+          <p:cNvPr id="6" name="Chain 2 head"/>
+          <p:cNvSpPr/>
+          <p:nvPr/>
+        </p:nvSpPr>
+        <p:spPr>
+          <a:xfrm>
+            <a:off x="2849819" y="1554480"/>
+            <a:ext cx="1889699" cy="502920"/>
+          </a:xfrm>
+          <a:prstGeom prst="roundRect">
+            <a:avLst>
+              <a:gd name="adj" fmla="val 12000"/>
+            </a:avLst>
+          </a:prstGeom>
+          <a:solidFill>
+            <a:srgbClr val="0B625B"/>
+          </a:solidFill>
+          <a:ln w="12700">
+            <a:solidFill>
+              <a:srgbClr val="0B625B"/>
+            </a:solidFill>
+          </a:ln>
+        </p:spPr>
+        <p:style>
+          <a:lnRef idx="1">
+            <a:schemeClr val="accent1"/>
+          </a:lnRef>
+          <a:fillRef idx="3">
+            <a:schemeClr val="accent1"/>
+          </a:fillRef>
+          <a:effectRef idx="0">
+            <a:schemeClr val="accent1"/>
+          </a:effectRef>
+          <a:fontRef idx="minor">
+            <a:schemeClr val="lt1"/>
+          </a:fontRef>
+        </p:style>
+        <p:txBody>
+          <a:bodyPr rtlCol="0" anchor="ctr" wrap="square" lIns="109728" rIns="109728" tIns="36576" bIns="36576"/>
+          <a:lstStyle/>
+          <a:p>
+            <a:pPr algn="ctr"/>
+            <a:r>
+              <a:rPr sz="1500" b="1" i="0">
+                <a:solidFill>
+                  <a:srgbClr val="FFFFFF"/>
+                </a:solidFill>
+                <a:latin typeface="Segoe UI"/>
+              </a:rPr>
+              <a:t>Evidence</a:t>
+            </a:r>
+          </a:p>
+        </p:txBody>
+      </p:sp>
+      <p:sp>
+        <p:nvSpPr>
+          <p:cNvPr id="7" name="Chain 2 body"/>
+          <p:cNvSpPr/>
+          <p:nvPr/>
+        </p:nvSpPr>
+        <p:spPr>
+          <a:xfrm>
+            <a:off x="2849819" y="2331720"/>
+            <a:ext cx="1889699" cy="1600200"/>
+          </a:xfrm>
+          <a:prstGeom prst="roundRect">
+            <a:avLst>
+              <a:gd name="adj" fmla="val 6000"/>
+            </a:avLst>
+          </a:prstGeom>
+          <a:solidFill>
+            <a:srgbClr val="F0F4F8"/>
+          </a:solidFill>
+          <a:ln w="12700">
+            <a:solidFill>
+              <a:srgbClr val="D9E2EC"/>
+            </a:solidFill>
+          </a:ln>
+        </p:spPr>
+        <p:style>
+          <a:lnRef idx="1">
+            <a:schemeClr val="accent1"/>
+          </a:lnRef>
+          <a:fillRef idx="3">
+            <a:schemeClr val="accent1"/>
+          </a:fillRef>
+          <a:effectRef idx="0">
+            <a:schemeClr val="accent1"/>
+          </a:effectRef>
+          <a:fontRef idx="minor">
+            <a:schemeClr val="lt1"/>
+          </a:fontRef>
+        </p:style>
+        <p:txBody>
+          <a:bodyPr rtlCol="0" anchor="t" wrap="square" lIns="164592" rIns="164592" tIns="128016" bIns="91440"/>
+          <a:lstStyle/>
+          <a:p>
+            <a:pPr algn="l">
               <a:spcAft>
                 <a:spcPts val="0"/>
               </a:spcAft>
-              <a:buChar char="•"/>
             </a:pPr>
             <a:r>
-              <a:rPr sz="1400" b="0" i="0">
+              <a:rPr sz="1300" b="0" i="0">
                 <a:solidFill>
                   <a:srgbClr val="243B53"/>
                 </a:solidFill>
                 <a:latin typeface="Segoe UI"/>
               </a:rPr>
-              <a:t>No real resident or staff evidence yet; the role agents' discovery questions are ready</a:t>
-            </a:r>
-          </a:p>
-        </p:txBody>
-      </p:sp>
-      <p:sp>
-        <p:nvSpPr>
-          <p:cNvPr id="5" name="Takeaway"/>
+              <a:t>Agent Request Challenge, Stock Prioritisation: "eligibility is a rules question"</a:t>
+            </a:r>
+          </a:p>
+        </p:txBody>
+      </p:sp>
+      <p:sp>
+        <p:nvSpPr>
+          <p:cNvPr id="8" name="Chain arrow 2"/>
           <p:cNvSpPr/>
           <p:nvPr/>
         </p:nvSpPr>
         <p:spPr>
           <a:xfrm>
-            <a:off x="548640" y="5303520"/>
-            <a:ext cx="11094415" cy="548640"/>
+            <a:off x="4803526" y="1673352"/>
+            <a:ext cx="283464" cy="274320"/>
+          </a:xfrm>
+          <a:prstGeom prst="rightArrow">
+            <a:avLst/>
+          </a:prstGeom>
+          <a:solidFill>
+            <a:srgbClr val="9FB3C8"/>
+          </a:solidFill>
+          <a:ln w="12700">
+            <a:solidFill>
+              <a:srgbClr val="9FB3C8"/>
+            </a:solidFill>
+          </a:ln>
+        </p:spPr>
+        <p:style>
+          <a:lnRef idx="1">
+            <a:schemeClr val="accent1"/>
+          </a:lnRef>
+          <a:fillRef idx="3">
+            <a:schemeClr val="accent1"/>
+          </a:fillRef>
+          <a:effectRef idx="0">
+            <a:schemeClr val="accent1"/>
+          </a:effectRef>
+          <a:fontRef idx="minor">
+            <a:schemeClr val="lt1"/>
+          </a:fontRef>
+        </p:style>
+        <p:txBody>
+          <a:bodyPr rtlCol="0" anchor="ctr"/>
+          <a:lstStyle/>
+          <a:p>
+            <a:pPr algn="ctr"/>
+          </a:p>
+        </p:txBody>
+      </p:sp>
+      <p:sp>
+        <p:nvSpPr>
+          <p:cNvPr id="9" name="Chain 3 head"/>
+          <p:cNvSpPr/>
+          <p:nvPr/>
+        </p:nvSpPr>
+        <p:spPr>
+          <a:xfrm>
+            <a:off x="5150998" y="1554480"/>
+            <a:ext cx="1889699" cy="502920"/>
+          </a:xfrm>
+          <a:prstGeom prst="roundRect">
+            <a:avLst>
+              <a:gd name="adj" fmla="val 12000"/>
+            </a:avLst>
+          </a:prstGeom>
+          <a:solidFill>
+            <a:srgbClr val="1D5FB8"/>
+          </a:solidFill>
+          <a:ln w="12700">
+            <a:solidFill>
+              <a:srgbClr val="1D5FB8"/>
+            </a:solidFill>
+          </a:ln>
+        </p:spPr>
+        <p:style>
+          <a:lnRef idx="1">
+            <a:schemeClr val="accent1"/>
+          </a:lnRef>
+          <a:fillRef idx="3">
+            <a:schemeClr val="accent1"/>
+          </a:fillRef>
+          <a:effectRef idx="0">
+            <a:schemeClr val="accent1"/>
+          </a:effectRef>
+          <a:fontRef idx="minor">
+            <a:schemeClr val="lt1"/>
+          </a:fontRef>
+        </p:style>
+        <p:txBody>
+          <a:bodyPr rtlCol="0" anchor="ctr" wrap="square" lIns="109728" rIns="109728" tIns="36576" bIns="36576"/>
+          <a:lstStyle/>
+          <a:p>
+            <a:pPr algn="ctr"/>
+            <a:r>
+              <a:rPr sz="1500" b="1" i="0">
+                <a:solidFill>
+                  <a:srgbClr val="FFFFFF"/>
+                </a:solidFill>
+                <a:latin typeface="Segoe UI"/>
+              </a:rPr>
+              <a:t>Requirement</a:t>
+            </a:r>
+          </a:p>
+        </p:txBody>
+      </p:sp>
+      <p:sp>
+        <p:nvSpPr>
+          <p:cNvPr id="10" name="Chain 3 body"/>
+          <p:cNvSpPr/>
+          <p:nvPr/>
+        </p:nvSpPr>
+        <p:spPr>
+          <a:xfrm>
+            <a:off x="5150998" y="2331720"/>
+            <a:ext cx="1889699" cy="1600200"/>
+          </a:xfrm>
+          <a:prstGeom prst="roundRect">
+            <a:avLst>
+              <a:gd name="adj" fmla="val 6000"/>
+            </a:avLst>
+          </a:prstGeom>
+          <a:solidFill>
+            <a:srgbClr val="F0F4F8"/>
+          </a:solidFill>
+          <a:ln w="12700">
+            <a:solidFill>
+              <a:srgbClr val="D9E2EC"/>
+            </a:solidFill>
+          </a:ln>
+        </p:spPr>
+        <p:style>
+          <a:lnRef idx="1">
+            <a:schemeClr val="accent1"/>
+          </a:lnRef>
+          <a:fillRef idx="3">
+            <a:schemeClr val="accent1"/>
+          </a:fillRef>
+          <a:effectRef idx="0">
+            <a:schemeClr val="accent1"/>
+          </a:effectRef>
+          <a:fontRef idx="minor">
+            <a:schemeClr val="lt1"/>
+          </a:fontRef>
+        </p:style>
+        <p:txBody>
+          <a:bodyPr rtlCol="0" anchor="t" wrap="square" lIns="164592" rIns="164592" tIns="128016" bIns="91440"/>
+          <a:lstStyle/>
+          <a:p>
+            <a:pPr algn="l">
+              <a:spcAft>
+                <a:spcPts val="0"/>
+              </a:spcAft>
+            </a:pPr>
+            <a:r>
+              <a:rPr sz="1300" b="0" i="0">
+                <a:solidFill>
+                  <a:srgbClr val="243B53"/>
+                </a:solidFill>
+                <a:latin typeface="Segoe UI"/>
+              </a:rPr>
+              <a:t>FR-026, AC-039 and CON-005: deterministic pass, fail or unknown eligibility</a:t>
+            </a:r>
+          </a:p>
+        </p:txBody>
+      </p:sp>
+      <p:sp>
+        <p:nvSpPr>
+          <p:cNvPr id="11" name="Chain arrow 3"/>
+          <p:cNvSpPr/>
+          <p:nvPr/>
+        </p:nvSpPr>
+        <p:spPr>
+          <a:xfrm>
+            <a:off x="7104705" y="1673352"/>
+            <a:ext cx="283464" cy="274320"/>
+          </a:xfrm>
+          <a:prstGeom prst="rightArrow">
+            <a:avLst/>
+          </a:prstGeom>
+          <a:solidFill>
+            <a:srgbClr val="9FB3C8"/>
+          </a:solidFill>
+          <a:ln w="12700">
+            <a:solidFill>
+              <a:srgbClr val="9FB3C8"/>
+            </a:solidFill>
+          </a:ln>
+        </p:spPr>
+        <p:style>
+          <a:lnRef idx="1">
+            <a:schemeClr val="accent1"/>
+          </a:lnRef>
+          <a:fillRef idx="3">
+            <a:schemeClr val="accent1"/>
+          </a:fillRef>
+          <a:effectRef idx="0">
+            <a:schemeClr val="accent1"/>
+          </a:effectRef>
+          <a:fontRef idx="minor">
+            <a:schemeClr val="lt1"/>
+          </a:fontRef>
+        </p:style>
+        <p:txBody>
+          <a:bodyPr rtlCol="0" anchor="ctr"/>
+          <a:lstStyle/>
+          <a:p>
+            <a:pPr algn="ctr"/>
+          </a:p>
+        </p:txBody>
+      </p:sp>
+      <p:sp>
+        <p:nvSpPr>
+          <p:cNvPr id="12" name="Chain 4 head"/>
+          <p:cNvSpPr/>
+          <p:nvPr/>
+        </p:nvSpPr>
+        <p:spPr>
+          <a:xfrm>
+            <a:off x="7452177" y="1554480"/>
+            <a:ext cx="1889699" cy="502920"/>
           </a:xfrm>
           <a:prstGeom prst="roundRect">
             <a:avLst>
@@ -8208,20 +7900,651 @@
           <a:p>
             <a:pPr algn="ctr"/>
             <a:r>
-              <a:rPr sz="1600" b="1" i="0">
+              <a:rPr sz="1500" b="1" i="0">
                 <a:solidFill>
                   <a:srgbClr val="FFFFFF"/>
                 </a:solidFill>
                 <a:latin typeface="Segoe UI"/>
               </a:rPr>
-              <a:t>Those are my questions. Which one would you take first?</a:t>
-            </a:r>
-          </a:p>
-        </p:txBody>
-      </p:sp>
-      <p:sp>
-        <p:nvSpPr>
-          <p:cNvPr id="6" name="Source"/>
+              <a:t>Source</a:t>
+            </a:r>
+          </a:p>
+        </p:txBody>
+      </p:sp>
+      <p:sp>
+        <p:nvSpPr>
+          <p:cNvPr id="13" name="Chain 4 body"/>
+          <p:cNvSpPr/>
+          <p:nvPr/>
+        </p:nvSpPr>
+        <p:spPr>
+          <a:xfrm>
+            <a:off x="7452177" y="2331720"/>
+            <a:ext cx="1889699" cy="1600200"/>
+          </a:xfrm>
+          <a:prstGeom prst="roundRect">
+            <a:avLst>
+              <a:gd name="adj" fmla="val 6000"/>
+            </a:avLst>
+          </a:prstGeom>
+          <a:solidFill>
+            <a:srgbClr val="F0F4F8"/>
+          </a:solidFill>
+          <a:ln w="12700">
+            <a:solidFill>
+              <a:srgbClr val="D9E2EC"/>
+            </a:solidFill>
+          </a:ln>
+        </p:spPr>
+        <p:style>
+          <a:lnRef idx="1">
+            <a:schemeClr val="accent1"/>
+          </a:lnRef>
+          <a:fillRef idx="3">
+            <a:schemeClr val="accent1"/>
+          </a:fillRef>
+          <a:effectRef idx="0">
+            <a:schemeClr val="accent1"/>
+          </a:effectRef>
+          <a:fontRef idx="minor">
+            <a:schemeClr val="lt1"/>
+          </a:fontRef>
+        </p:style>
+        <p:txBody>
+          <a:bodyPr rtlCol="0" anchor="t" wrap="square" lIns="164592" rIns="164592" tIns="128016" bIns="91440"/>
+          <a:lstStyle/>
+          <a:p>
+            <a:pPr algn="l">
+              <a:spcAft>
+                <a:spcPts val="0"/>
+              </a:spcAft>
+            </a:pPr>
+            <a:r>
+              <a:rPr sz="1300" b="0" i="0">
+                <a:solidFill>
+                  <a:srgbClr val="243B53"/>
+                </a:solidFill>
+                <a:latin typeface="Segoe UI"/>
+              </a:rPr>
+              <a:t>WH:SHF Wave 3 technical annex, Page 3 footnote 1; retrieved 19 Sep 2026</a:t>
+            </a:r>
+          </a:p>
+        </p:txBody>
+      </p:sp>
+      <p:sp>
+        <p:nvSpPr>
+          <p:cNvPr id="14" name="Chain arrow 4"/>
+          <p:cNvSpPr/>
+          <p:nvPr/>
+        </p:nvSpPr>
+        <p:spPr>
+          <a:xfrm>
+            <a:off x="9405884" y="1673352"/>
+            <a:ext cx="283464" cy="274320"/>
+          </a:xfrm>
+          <a:prstGeom prst="rightArrow">
+            <a:avLst/>
+          </a:prstGeom>
+          <a:solidFill>
+            <a:srgbClr val="9FB3C8"/>
+          </a:solidFill>
+          <a:ln w="12700">
+            <a:solidFill>
+              <a:srgbClr val="9FB3C8"/>
+            </a:solidFill>
+          </a:ln>
+        </p:spPr>
+        <p:style>
+          <a:lnRef idx="1">
+            <a:schemeClr val="accent1"/>
+          </a:lnRef>
+          <a:fillRef idx="3">
+            <a:schemeClr val="accent1"/>
+          </a:fillRef>
+          <a:effectRef idx="0">
+            <a:schemeClr val="accent1"/>
+          </a:effectRef>
+          <a:fontRef idx="minor">
+            <a:schemeClr val="lt1"/>
+          </a:fontRef>
+        </p:style>
+        <p:txBody>
+          <a:bodyPr rtlCol="0" anchor="ctr"/>
+          <a:lstStyle/>
+          <a:p>
+            <a:pPr algn="ctr"/>
+          </a:p>
+        </p:txBody>
+      </p:sp>
+      <p:sp>
+        <p:nvSpPr>
+          <p:cNvPr id="15" name="Chain 5 head"/>
+          <p:cNvSpPr/>
+          <p:nvPr/>
+        </p:nvSpPr>
+        <p:spPr>
+          <a:xfrm>
+            <a:off x="9753356" y="1554480"/>
+            <a:ext cx="1889699" cy="502920"/>
+          </a:xfrm>
+          <a:prstGeom prst="roundRect">
+            <a:avLst>
+              <a:gd name="adj" fmla="val 12000"/>
+            </a:avLst>
+          </a:prstGeom>
+          <a:solidFill>
+            <a:srgbClr val="486581"/>
+          </a:solidFill>
+          <a:ln w="12700">
+            <a:solidFill>
+              <a:srgbClr val="486581"/>
+            </a:solidFill>
+          </a:ln>
+        </p:spPr>
+        <p:style>
+          <a:lnRef idx="1">
+            <a:schemeClr val="accent1"/>
+          </a:lnRef>
+          <a:fillRef idx="3">
+            <a:schemeClr val="accent1"/>
+          </a:fillRef>
+          <a:effectRef idx="0">
+            <a:schemeClr val="accent1"/>
+          </a:effectRef>
+          <a:fontRef idx="minor">
+            <a:schemeClr val="lt1"/>
+          </a:fontRef>
+        </p:style>
+        <p:txBody>
+          <a:bodyPr rtlCol="0" anchor="ctr" wrap="square" lIns="109728" rIns="109728" tIns="36576" bIns="36576"/>
+          <a:lstStyle/>
+          <a:p>
+            <a:pPr algn="ctr"/>
+            <a:r>
+              <a:rPr sz="1500" b="1" i="0">
+                <a:solidFill>
+                  <a:srgbClr val="FFFFFF"/>
+                </a:solidFill>
+                <a:latin typeface="Segoe UI"/>
+              </a:rPr>
+              <a:t>Change record</a:t>
+            </a:r>
+          </a:p>
+        </p:txBody>
+      </p:sp>
+      <p:sp>
+        <p:nvSpPr>
+          <p:cNvPr id="16" name="Chain 5 body"/>
+          <p:cNvSpPr/>
+          <p:nvPr/>
+        </p:nvSpPr>
+        <p:spPr>
+          <a:xfrm>
+            <a:off x="9753356" y="2331720"/>
+            <a:ext cx="1889699" cy="1600200"/>
+          </a:xfrm>
+          <a:prstGeom prst="roundRect">
+            <a:avLst>
+              <a:gd name="adj" fmla="val 6000"/>
+            </a:avLst>
+          </a:prstGeom>
+          <a:solidFill>
+            <a:srgbClr val="F0F4F8"/>
+          </a:solidFill>
+          <a:ln w="12700">
+            <a:solidFill>
+              <a:srgbClr val="D9E2EC"/>
+            </a:solidFill>
+          </a:ln>
+        </p:spPr>
+        <p:style>
+          <a:lnRef idx="1">
+            <a:schemeClr val="accent1"/>
+          </a:lnRef>
+          <a:fillRef idx="3">
+            <a:schemeClr val="accent1"/>
+          </a:fillRef>
+          <a:effectRef idx="0">
+            <a:schemeClr val="accent1"/>
+          </a:effectRef>
+          <a:fontRef idx="minor">
+            <a:schemeClr val="lt1"/>
+          </a:fontRef>
+        </p:style>
+        <p:txBody>
+          <a:bodyPr rtlCol="0" anchor="t" wrap="square" lIns="164592" rIns="164592" tIns="128016" bIns="91440"/>
+          <a:lstStyle/>
+          <a:p>
+            <a:pPr algn="l">
+              <a:spcAft>
+                <a:spcPts val="0"/>
+              </a:spcAft>
+            </a:pPr>
+            <a:r>
+              <a:rPr sz="1300" b="0" i="0">
+                <a:solidFill>
+                  <a:srgbClr val="243B53"/>
+                </a:solidFill>
+                <a:latin typeface="Segoe UI"/>
+              </a:rPr>
+              <a:t>log.md, 26 Sep entries; commits a72f231, 3db359c and c3e423a</a:t>
+            </a:r>
+          </a:p>
+        </p:txBody>
+      </p:sp>
+      <p:sp>
+        <p:nvSpPr>
+          <p:cNvPr id="17" name="Justify"/>
+          <p:cNvSpPr/>
+          <p:nvPr/>
+        </p:nvSpPr>
+        <p:spPr>
+          <a:xfrm>
+            <a:off x="548640" y="4206240"/>
+            <a:ext cx="5396331" cy="868680"/>
+          </a:xfrm>
+          <a:prstGeom prst="roundRect">
+            <a:avLst>
+              <a:gd name="adj" fmla="val 6000"/>
+            </a:avLst>
+          </a:prstGeom>
+          <a:solidFill>
+            <a:srgbClr val="E3F4F1"/>
+          </a:solidFill>
+          <a:ln w="12700">
+            <a:solidFill>
+              <a:srgbClr val="B7E2DA"/>
+            </a:solidFill>
+          </a:ln>
+        </p:spPr>
+        <p:style>
+          <a:lnRef idx="1">
+            <a:schemeClr val="accent1"/>
+          </a:lnRef>
+          <a:fillRef idx="3">
+            <a:schemeClr val="accent1"/>
+          </a:fillRef>
+          <a:effectRef idx="0">
+            <a:schemeClr val="accent1"/>
+          </a:effectRef>
+          <a:fontRef idx="minor">
+            <a:schemeClr val="lt1"/>
+          </a:fontRef>
+        </p:style>
+        <p:txBody>
+          <a:bodyPr rtlCol="0" anchor="ctr" wrap="square" lIns="164592" rIns="164592" tIns="128016" bIns="91440"/>
+          <a:lstStyle/>
+          <a:p>
+            <a:pPr algn="l">
+              <a:spcAft>
+                <a:spcPts val="200"/>
+              </a:spcAft>
+            </a:pPr>
+            <a:r>
+              <a:rPr sz="1400" b="1" i="0">
+                <a:solidFill>
+                  <a:srgbClr val="0B625B"/>
+                </a:solidFill>
+                <a:latin typeface="Segoe UI"/>
+              </a:rPr>
+              <a:t>To justify</a:t>
+            </a:r>
+          </a:p>
+          <a:p>
+            <a:pPr algn="l">
+              <a:spcAft>
+                <a:spcPts val="0"/>
+              </a:spcAft>
+            </a:pPr>
+            <a:r>
+              <a:rPr sz="1300" b="0" i="0">
+                <a:solidFill>
+                  <a:srgbClr val="243B53"/>
+                </a:solidFill>
+                <a:latin typeface="Segoe UI"/>
+              </a:rPr>
+              <a:t>Follow the chain from the decision down to the dated source.</a:t>
+            </a:r>
+          </a:p>
+        </p:txBody>
+      </p:sp>
+      <p:sp>
+        <p:nvSpPr>
+          <p:cNvPr id="18" name="Challenge"/>
+          <p:cNvSpPr/>
+          <p:nvPr/>
+        </p:nvSpPr>
+        <p:spPr>
+          <a:xfrm>
+            <a:off x="6246723" y="4206240"/>
+            <a:ext cx="5396331" cy="868680"/>
+          </a:xfrm>
+          <a:prstGeom prst="roundRect">
+            <a:avLst>
+              <a:gd name="adj" fmla="val 6000"/>
+            </a:avLst>
+          </a:prstGeom>
+          <a:solidFill>
+            <a:srgbClr val="FBEAE8"/>
+          </a:solidFill>
+          <a:ln w="12700">
+            <a:solidFill>
+              <a:srgbClr val="F3C7C1"/>
+            </a:solidFill>
+          </a:ln>
+        </p:spPr>
+        <p:style>
+          <a:lnRef idx="1">
+            <a:schemeClr val="accent1"/>
+          </a:lnRef>
+          <a:fillRef idx="3">
+            <a:schemeClr val="accent1"/>
+          </a:fillRef>
+          <a:effectRef idx="0">
+            <a:schemeClr val="accent1"/>
+          </a:effectRef>
+          <a:fontRef idx="minor">
+            <a:schemeClr val="lt1"/>
+          </a:fontRef>
+        </p:style>
+        <p:txBody>
+          <a:bodyPr rtlCol="0" anchor="ctr" wrap="square" lIns="164592" rIns="164592" tIns="128016" bIns="91440"/>
+          <a:lstStyle/>
+          <a:p>
+            <a:pPr algn="l">
+              <a:spcAft>
+                <a:spcPts val="200"/>
+              </a:spcAft>
+            </a:pPr>
+            <a:r>
+              <a:rPr sz="1400" b="1" i="0">
+                <a:solidFill>
+                  <a:srgbClr val="B83A2E"/>
+                </a:solidFill>
+                <a:latin typeface="Segoe UI"/>
+              </a:rPr>
+              <a:t>To challenge</a:t>
+            </a:r>
+          </a:p>
+          <a:p>
+            <a:pPr algn="l">
+              <a:spcAft>
+                <a:spcPts val="0"/>
+              </a:spcAft>
+            </a:pPr>
+            <a:r>
+              <a:rPr sz="1300" b="0" i="0">
+                <a:solidFill>
+                  <a:srgbClr val="243B53"/>
+                </a:solidFill>
+                <a:latin typeface="Segoe UI"/>
+              </a:rPr>
+              <a:t>Change one piece of evidence and see which rules and decisions move.</a:t>
+            </a:r>
+          </a:p>
+        </p:txBody>
+      </p:sp>
+      <p:sp>
+        <p:nvSpPr>
+          <p:cNvPr id="19" name="Classes label"/>
+          <p:cNvSpPr txBox="1"/>
+          <p:nvPr/>
+        </p:nvSpPr>
+        <p:spPr>
+          <a:xfrm>
+            <a:off x="548640" y="5349240"/>
+            <a:ext cx="1737360" cy="457200"/>
+          </a:xfrm>
+          <a:prstGeom prst="rect">
+            <a:avLst/>
+          </a:prstGeom>
+          <a:noFill/>
+        </p:spPr>
+        <p:txBody>
+          <a:bodyPr wrap="square" anchor="ctr">
+            <a:spAutoFit/>
+          </a:bodyPr>
+          <a:lstStyle/>
+          <a:p>
+            <a:r>
+              <a:rPr sz="1200" b="1" i="0">
+                <a:solidFill>
+                  <a:srgbClr val="486581"/>
+                </a:solidFill>
+                <a:latin typeface="Segoe UI"/>
+              </a:rPr>
+              <a:t>Every claim is labelled:</a:t>
+            </a:r>
+          </a:p>
+        </p:txBody>
+      </p:sp>
+      <p:sp>
+        <p:nvSpPr>
+          <p:cNvPr id="20" name="Class 1"/>
+          <p:cNvSpPr/>
+          <p:nvPr/>
+        </p:nvSpPr>
+        <p:spPr>
+          <a:xfrm>
+            <a:off x="2423160" y="5349240"/>
+            <a:ext cx="2167813" cy="457200"/>
+          </a:xfrm>
+          <a:prstGeom prst="roundRect">
+            <a:avLst>
+              <a:gd name="adj" fmla="val 12000"/>
+            </a:avLst>
+          </a:prstGeom>
+          <a:solidFill>
+            <a:srgbClr val="102A43"/>
+          </a:solidFill>
+          <a:ln w="12700">
+            <a:solidFill>
+              <a:srgbClr val="102A43"/>
+            </a:solidFill>
+          </a:ln>
+        </p:spPr>
+        <p:style>
+          <a:lnRef idx="1">
+            <a:schemeClr val="accent1"/>
+          </a:lnRef>
+          <a:fillRef idx="3">
+            <a:schemeClr val="accent1"/>
+          </a:fillRef>
+          <a:effectRef idx="0">
+            <a:schemeClr val="accent1"/>
+          </a:effectRef>
+          <a:fontRef idx="minor">
+            <a:schemeClr val="lt1"/>
+          </a:fontRef>
+        </p:style>
+        <p:txBody>
+          <a:bodyPr rtlCol="0" anchor="ctr" wrap="square" lIns="109728" rIns="109728" tIns="36576" bIns="36576"/>
+          <a:lstStyle/>
+          <a:p>
+            <a:pPr algn="ctr"/>
+            <a:r>
+              <a:rPr sz="1300" b="1" i="0">
+                <a:solidFill>
+                  <a:srgbClr val="FFFFFF"/>
+                </a:solidFill>
+                <a:latin typeface="Segoe UI"/>
+              </a:rPr>
+              <a:t>Case-study fact</a:t>
+            </a:r>
+          </a:p>
+        </p:txBody>
+      </p:sp>
+      <p:sp>
+        <p:nvSpPr>
+          <p:cNvPr id="21" name="Class 2"/>
+          <p:cNvSpPr/>
+          <p:nvPr/>
+        </p:nvSpPr>
+        <p:spPr>
+          <a:xfrm>
+            <a:off x="4773853" y="5349240"/>
+            <a:ext cx="2167813" cy="457200"/>
+          </a:xfrm>
+          <a:prstGeom prst="roundRect">
+            <a:avLst>
+              <a:gd name="adj" fmla="val 12000"/>
+            </a:avLst>
+          </a:prstGeom>
+          <a:solidFill>
+            <a:srgbClr val="0B625B"/>
+          </a:solidFill>
+          <a:ln w="12700">
+            <a:solidFill>
+              <a:srgbClr val="0B625B"/>
+            </a:solidFill>
+          </a:ln>
+        </p:spPr>
+        <p:style>
+          <a:lnRef idx="1">
+            <a:schemeClr val="accent1"/>
+          </a:lnRef>
+          <a:fillRef idx="3">
+            <a:schemeClr val="accent1"/>
+          </a:fillRef>
+          <a:effectRef idx="0">
+            <a:schemeClr val="accent1"/>
+          </a:effectRef>
+          <a:fontRef idx="minor">
+            <a:schemeClr val="lt1"/>
+          </a:fontRef>
+        </p:style>
+        <p:txBody>
+          <a:bodyPr rtlCol="0" anchor="ctr" wrap="square" lIns="109728" rIns="109728" tIns="36576" bIns="36576"/>
+          <a:lstStyle/>
+          <a:p>
+            <a:pPr algn="ctr"/>
+            <a:r>
+              <a:rPr sz="1300" b="1" i="0">
+                <a:solidFill>
+                  <a:srgbClr val="FFFFFF"/>
+                </a:solidFill>
+                <a:latin typeface="Segoe UI"/>
+              </a:rPr>
+              <a:t>Sector hypothesis</a:t>
+            </a:r>
+          </a:p>
+        </p:txBody>
+      </p:sp>
+      <p:sp>
+        <p:nvSpPr>
+          <p:cNvPr id="22" name="Class 3"/>
+          <p:cNvSpPr/>
+          <p:nvPr/>
+        </p:nvSpPr>
+        <p:spPr>
+          <a:xfrm>
+            <a:off x="7124547" y="5349240"/>
+            <a:ext cx="2167813" cy="457200"/>
+          </a:xfrm>
+          <a:prstGeom prst="roundRect">
+            <a:avLst>
+              <a:gd name="adj" fmla="val 12000"/>
+            </a:avLst>
+          </a:prstGeom>
+          <a:solidFill>
+            <a:srgbClr val="1D5FB8"/>
+          </a:solidFill>
+          <a:ln w="12700">
+            <a:solidFill>
+              <a:srgbClr val="1D5FB8"/>
+            </a:solidFill>
+          </a:ln>
+        </p:spPr>
+        <p:style>
+          <a:lnRef idx="1">
+            <a:schemeClr val="accent1"/>
+          </a:lnRef>
+          <a:fillRef idx="3">
+            <a:schemeClr val="accent1"/>
+          </a:fillRef>
+          <a:effectRef idx="0">
+            <a:schemeClr val="accent1"/>
+          </a:effectRef>
+          <a:fontRef idx="minor">
+            <a:schemeClr val="lt1"/>
+          </a:fontRef>
+        </p:style>
+        <p:txBody>
+          <a:bodyPr rtlCol="0" anchor="ctr" wrap="square" lIns="109728" rIns="109728" tIns="36576" bIns="36576"/>
+          <a:lstStyle/>
+          <a:p>
+            <a:pPr algn="ctr"/>
+            <a:r>
+              <a:rPr sz="1300" b="1" i="0">
+                <a:solidFill>
+                  <a:srgbClr val="FFFFFF"/>
+                </a:solidFill>
+                <a:latin typeface="Segoe UI"/>
+              </a:rPr>
+              <a:t>Planning assumption</a:t>
+            </a:r>
+          </a:p>
+        </p:txBody>
+      </p:sp>
+      <p:sp>
+        <p:nvSpPr>
+          <p:cNvPr id="23" name="Class 4"/>
+          <p:cNvSpPr/>
+          <p:nvPr/>
+        </p:nvSpPr>
+        <p:spPr>
+          <a:xfrm>
+            <a:off x="9475241" y="5349240"/>
+            <a:ext cx="2167813" cy="457200"/>
+          </a:xfrm>
+          <a:prstGeom prst="roundRect">
+            <a:avLst>
+              <a:gd name="adj" fmla="val 12000"/>
+            </a:avLst>
+          </a:prstGeom>
+          <a:solidFill>
+            <a:srgbClr val="486581"/>
+          </a:solidFill>
+          <a:ln w="12700">
+            <a:solidFill>
+              <a:srgbClr val="486581"/>
+            </a:solidFill>
+          </a:ln>
+        </p:spPr>
+        <p:style>
+          <a:lnRef idx="1">
+            <a:schemeClr val="accent1"/>
+          </a:lnRef>
+          <a:fillRef idx="3">
+            <a:schemeClr val="accent1"/>
+          </a:fillRef>
+          <a:effectRef idx="0">
+            <a:schemeClr val="accent1"/>
+          </a:effectRef>
+          <a:fontRef idx="minor">
+            <a:schemeClr val="lt1"/>
+          </a:fontRef>
+        </p:style>
+        <p:txBody>
+          <a:bodyPr rtlCol="0" anchor="ctr" wrap="square" lIns="109728" rIns="109728" tIns="36576" bIns="36576"/>
+          <a:lstStyle/>
+          <a:p>
+            <a:pPr algn="ctr"/>
+            <a:r>
+              <a:rPr sz="1300" b="1" i="0">
+                <a:solidFill>
+                  <a:srgbClr val="FFFFFF"/>
+                </a:solidFill>
+                <a:latin typeface="Segoe UI"/>
+              </a:rPr>
+              <a:t>Unknown detail</a:t>
+            </a:r>
+          </a:p>
+        </p:txBody>
+      </p:sp>
+      <p:sp>
+        <p:nvSpPr>
+          <p:cNvPr id="24" name="Source"/>
           <p:cNvSpPr txBox="1"/>
           <p:nvPr/>
         </p:nvSpPr>
@@ -8248,7 +8571,7 @@
                 </a:solidFill>
                 <a:latin typeface="Segoe UI"/>
               </a:rPr>
-              <a:t>Sources: .copilot-tracking/plans/2026-09-19/case-study-85-day-delivery-plan.instructions.md; docs/reference/memory.md; docs/ideas/idea-register.md.</a:t>
+              <a:t>Sources: case_study_48_addendum.md (Recommended Executive Decision); agent-request-challenge.md; BRD FR-026, CON-005; WH:SHF annex snapshot; log.md.</a:t>
             </a:r>
           </a:p>
         </p:txBody>
@@ -8308,6 +8631,445 @@
                 </a:solidFill>
                 <a:latin typeface="Segoe UI"/>
               </a:rPr>
+              <a:t>Four decisions where I would value your challenge today</a:t>
+            </a:r>
+          </a:p>
+        </p:txBody>
+      </p:sp>
+      <p:sp>
+        <p:nvSpPr>
+          <p:cNvPr id="3" name="Questions"/>
+          <p:cNvSpPr/>
+          <p:nvPr/>
+        </p:nvSpPr>
+        <p:spPr>
+          <a:xfrm>
+            <a:off x="548640" y="1508760"/>
+            <a:ext cx="6309360" cy="3520440"/>
+          </a:xfrm>
+          <a:prstGeom prst="roundRect">
+            <a:avLst>
+              <a:gd name="adj" fmla="val 6000"/>
+            </a:avLst>
+          </a:prstGeom>
+          <a:solidFill>
+            <a:srgbClr val="FFFFFF"/>
+          </a:solidFill>
+          <a:ln w="12700">
+            <a:solidFill>
+              <a:srgbClr val="B83A2E"/>
+            </a:solidFill>
+          </a:ln>
+        </p:spPr>
+        <p:style>
+          <a:lnRef idx="1">
+            <a:schemeClr val="accent1"/>
+          </a:lnRef>
+          <a:fillRef idx="3">
+            <a:schemeClr val="accent1"/>
+          </a:fillRef>
+          <a:effectRef idx="0">
+            <a:schemeClr val="accent1"/>
+          </a:effectRef>
+          <a:fontRef idx="minor">
+            <a:schemeClr val="lt1"/>
+          </a:fontRef>
+        </p:style>
+        <p:txBody>
+          <a:bodyPr rtlCol="0" anchor="t" wrap="square" lIns="164592" rIns="164592" tIns="128016" bIns="91440"/>
+          <a:lstStyle/>
+          <a:p>
+            <a:pPr algn="l">
+              <a:spcAft>
+                <a:spcPts val="1200"/>
+              </a:spcAft>
+            </a:pPr>
+            <a:r>
+              <a:rPr sz="1300" b="1" i="0">
+                <a:solidFill>
+                  <a:srgbClr val="B83A2E"/>
+                </a:solidFill>
+                <a:latin typeface="Segoe UI"/>
+              </a:rPr>
+              <a:t>QUESTIONS FOR YOU</a:t>
+            </a:r>
+          </a:p>
+          <a:p>
+            <a:pPr algn="l" marL="342900" indent="-342900">
+              <a:spcAft>
+                <a:spcPts val="1200"/>
+              </a:spcAft>
+              <a:buAutoNum type="arabicPeriod" startAt="1"/>
+            </a:pPr>
+            <a:r>
+              <a:rPr sz="1500" b="1" i="0">
+                <a:solidFill>
+                  <a:srgbClr val="102A43"/>
+                </a:solidFill>
+                <a:latin typeface="Segoe UI"/>
+              </a:rPr>
+              <a:t>Will the panel read agent-led modernisation, not five end-to-end agents, as answering the brief?</a:t>
+            </a:r>
+          </a:p>
+          <a:p>
+            <a:pPr algn="l" marL="342900" indent="-342900">
+              <a:spcAft>
+                <a:spcPts val="1200"/>
+              </a:spcAft>
+              <a:buAutoNum type="arabicPeriod" startAt="2"/>
+            </a:pPr>
+            <a:r>
+              <a:rPr sz="1500" b="1" i="0">
+                <a:solidFill>
+                  <a:srgbClr val="102A43"/>
+                </a:solidFill>
+                <a:latin typeface="Segoe UI"/>
+              </a:rPr>
+              <a:t>How should I balance business depth against architecture depth?</a:t>
+            </a:r>
+          </a:p>
+          <a:p>
+            <a:pPr algn="l" marL="342900" indent="-342900">
+              <a:spcAft>
+                <a:spcPts val="1200"/>
+              </a:spcAft>
+              <a:buAutoNum type="arabicPeriod" startAt="3"/>
+            </a:pPr>
+            <a:r>
+              <a:rPr sz="1500" b="1" i="0">
+                <a:solidFill>
+                  <a:srgbClr val="102A43"/>
+                </a:solidFill>
+                <a:latin typeface="Segoe UI"/>
+              </a:rPr>
+              <a:t>Keep the BRD failing on unset targets, or propose illustrative targets?</a:t>
+            </a:r>
+          </a:p>
+          <a:p>
+            <a:pPr algn="l" marL="342900" indent="-342900">
+              <a:spcAft>
+                <a:spcPts val="1200"/>
+              </a:spcAft>
+              <a:buAutoNum type="arabicPeriod" startAt="4"/>
+            </a:pPr>
+            <a:r>
+              <a:rPr sz="1500" b="1" i="0">
+                <a:solidFill>
+                  <a:srgbClr val="102A43"/>
+                </a:solidFill>
+                <a:latin typeface="Segoe UI"/>
+              </a:rPr>
+              <a:t>Which open divergence first: L4 quality flags or L3 digital booking?</a:t>
+            </a:r>
+          </a:p>
+          <a:p>
+            <a:pPr algn="l">
+              <a:spcAft>
+                <a:spcPts val="0"/>
+              </a:spcAft>
+            </a:pPr>
+            <a:r>
+              <a:rPr sz="1400" b="0" i="1">
+                <a:solidFill>
+                  <a:srgbClr val="486581"/>
+                </a:solidFill>
+                <a:latin typeface="Segoe UI"/>
+              </a:rPr>
+              <a:t>And on the story itself: where did it lose you?</a:t>
+            </a:r>
+          </a:p>
+        </p:txBody>
+      </p:sp>
+      <p:sp>
+        <p:nvSpPr>
+          <p:cNvPr id="4" name="Next"/>
+          <p:cNvSpPr/>
+          <p:nvPr/>
+        </p:nvSpPr>
+        <p:spPr>
+          <a:xfrm>
+            <a:off x="7132320" y="1508760"/>
+            <a:ext cx="4510735" cy="3520440"/>
+          </a:xfrm>
+          <a:prstGeom prst="roundRect">
+            <a:avLst>
+              <a:gd name="adj" fmla="val 6000"/>
+            </a:avLst>
+          </a:prstGeom>
+          <a:solidFill>
+            <a:srgbClr val="F0F4F8"/>
+          </a:solidFill>
+          <a:ln w="12700">
+            <a:solidFill>
+              <a:srgbClr val="D9E2EC"/>
+            </a:solidFill>
+          </a:ln>
+        </p:spPr>
+        <p:style>
+          <a:lnRef idx="1">
+            <a:schemeClr val="accent1"/>
+          </a:lnRef>
+          <a:fillRef idx="3">
+            <a:schemeClr val="accent1"/>
+          </a:fillRef>
+          <a:effectRef idx="0">
+            <a:schemeClr val="accent1"/>
+          </a:effectRef>
+          <a:fontRef idx="minor">
+            <a:schemeClr val="lt1"/>
+          </a:fontRef>
+        </p:style>
+        <p:txBody>
+          <a:bodyPr rtlCol="0" anchor="t" wrap="square" lIns="164592" rIns="164592" tIns="128016" bIns="91440"/>
+          <a:lstStyle/>
+          <a:p>
+            <a:pPr algn="l">
+              <a:spcAft>
+                <a:spcPts val="1200"/>
+              </a:spcAft>
+            </a:pPr>
+            <a:r>
+              <a:rPr sz="1300" b="1" i="0">
+                <a:solidFill>
+                  <a:srgbClr val="0B625B"/>
+                </a:solidFill>
+                <a:latin typeface="Segoe UI"/>
+              </a:rPr>
+              <a:t>NEXT, ON THE 85-DAY PLAN (TO 5 DEC)</a:t>
+            </a:r>
+          </a:p>
+          <a:p>
+            <a:pPr algn="l" marL="228600" indent="-228600">
+              <a:spcAft>
+                <a:spcPts val="1000"/>
+              </a:spcAft>
+              <a:buChar char="•"/>
+            </a:pPr>
+            <a:r>
+              <a:rPr sz="1400" b="0" i="0">
+                <a:solidFill>
+                  <a:srgbClr val="243B53"/>
+                </a:solidFill>
+                <a:latin typeface="Segoe UI"/>
+              </a:rPr>
+              <a:t>High- and medium-level architecture with justified trade-offs</a:t>
+            </a:r>
+          </a:p>
+          <a:p>
+            <a:pPr algn="l" marL="228600" indent="-228600">
+              <a:spcAft>
+                <a:spcPts val="1000"/>
+              </a:spcAft>
+              <a:buChar char="•"/>
+            </a:pPr>
+            <a:r>
+              <a:rPr sz="1400" b="0" i="0">
+                <a:solidFill>
+                  <a:srgbClr val="243B53"/>
+                </a:solidFill>
+                <a:latin typeface="Segoe UI"/>
+              </a:rPr>
+              <a:t>Shadow-mode comparison of typed decision models (IDEA-001)</a:t>
+            </a:r>
+          </a:p>
+          <a:p>
+            <a:pPr algn="l" marL="228600" indent="-228600">
+              <a:spcAft>
+                <a:spcPts val="1000"/>
+              </a:spcAft>
+              <a:buChar char="•"/>
+            </a:pPr>
+            <a:r>
+              <a:rPr sz="1400" b="0" i="0">
+                <a:solidFill>
+                  <a:srgbClr val="243B53"/>
+                </a:solidFill>
+                <a:latin typeface="Segoe UI"/>
+              </a:rPr>
+              <a:t>Optional bounded demo, with a static fallback</a:t>
+            </a:r>
+          </a:p>
+          <a:p>
+            <a:pPr algn="l" marL="228600" indent="-228600">
+              <a:spcAft>
+                <a:spcPts val="1000"/>
+              </a:spcAft>
+              <a:buChar char="•"/>
+            </a:pPr>
+            <a:r>
+              <a:rPr sz="1400" b="0" i="0">
+                <a:solidFill>
+                  <a:srgbClr val="243B53"/>
+                </a:solidFill>
+                <a:latin typeface="Segoe UI"/>
+              </a:rPr>
+              <a:t>CEO, CIO and CFO versions of the 15-minute pitch</a:t>
+            </a:r>
+          </a:p>
+          <a:p>
+            <a:pPr algn="l" marL="228600" indent="-228600">
+              <a:spcAft>
+                <a:spcPts val="0"/>
+              </a:spcAft>
+              <a:buChar char="•"/>
+            </a:pPr>
+            <a:r>
+              <a:rPr sz="1400" b="0" i="0">
+                <a:solidFill>
+                  <a:srgbClr val="243B53"/>
+                </a:solidFill>
+                <a:latin typeface="Segoe UI"/>
+              </a:rPr>
+              <a:t>No real resident or staff evidence yet; the role agents' discovery questions are ready</a:t>
+            </a:r>
+          </a:p>
+        </p:txBody>
+      </p:sp>
+      <p:sp>
+        <p:nvSpPr>
+          <p:cNvPr id="5" name="Takeaway"/>
+          <p:cNvSpPr/>
+          <p:nvPr/>
+        </p:nvSpPr>
+        <p:spPr>
+          <a:xfrm>
+            <a:off x="548640" y="5303520"/>
+            <a:ext cx="11094415" cy="548640"/>
+          </a:xfrm>
+          <a:prstGeom prst="roundRect">
+            <a:avLst>
+              <a:gd name="adj" fmla="val 12000"/>
+            </a:avLst>
+          </a:prstGeom>
+          <a:solidFill>
+            <a:srgbClr val="102A43"/>
+          </a:solidFill>
+          <a:ln w="12700">
+            <a:solidFill>
+              <a:srgbClr val="102A43"/>
+            </a:solidFill>
+          </a:ln>
+        </p:spPr>
+        <p:style>
+          <a:lnRef idx="1">
+            <a:schemeClr val="accent1"/>
+          </a:lnRef>
+          <a:fillRef idx="3">
+            <a:schemeClr val="accent1"/>
+          </a:fillRef>
+          <a:effectRef idx="0">
+            <a:schemeClr val="accent1"/>
+          </a:effectRef>
+          <a:fontRef idx="minor">
+            <a:schemeClr val="lt1"/>
+          </a:fontRef>
+        </p:style>
+        <p:txBody>
+          <a:bodyPr rtlCol="0" anchor="ctr" wrap="square" lIns="109728" rIns="109728" tIns="36576" bIns="36576"/>
+          <a:lstStyle/>
+          <a:p>
+            <a:pPr algn="ctr"/>
+            <a:r>
+              <a:rPr sz="1600" b="1" i="0">
+                <a:solidFill>
+                  <a:srgbClr val="FFFFFF"/>
+                </a:solidFill>
+                <a:latin typeface="Segoe UI"/>
+              </a:rPr>
+              <a:t>Those are my questions. Which one would you take first?</a:t>
+            </a:r>
+          </a:p>
+        </p:txBody>
+      </p:sp>
+      <p:sp>
+        <p:nvSpPr>
+          <p:cNvPr id="6" name="Source"/>
+          <p:cNvSpPr txBox="1"/>
+          <p:nvPr/>
+        </p:nvSpPr>
+        <p:spPr>
+          <a:xfrm>
+            <a:off x="548640" y="6126480"/>
+            <a:ext cx="11094415" cy="256032"/>
+          </a:xfrm>
+          <a:prstGeom prst="rect">
+            <a:avLst/>
+          </a:prstGeom>
+          <a:noFill/>
+        </p:spPr>
+        <p:txBody>
+          <a:bodyPr wrap="square" tIns="0" bIns="0">
+            <a:spAutoFit/>
+          </a:bodyPr>
+          <a:lstStyle/>
+          <a:p>
+            <a:r>
+              <a:rPr sz="900" b="0" i="0">
+                <a:solidFill>
+                  <a:srgbClr val="627D98"/>
+                </a:solidFill>
+                <a:latin typeface="Segoe UI"/>
+              </a:rPr>
+              <a:t>Sources: .copilot-tracking/plans/2026-09-19/case-study-85-day-delivery-plan.instructions.md; docs/reference/memory.md; docs/ideas/idea-register.md.</a:t>
+            </a:r>
+          </a:p>
+        </p:txBody>
+      </p:sp>
+    </p:spTree>
+  </p:cSld>
+  <p:clrMapOvr>
+    <a:masterClrMapping/>
+  </p:clrMapOvr>
+</p:sld>
+</file>
+
+<file path=ppt/slides/slide15.xml><?xml version="1.0" encoding="utf-8"?>
+<p:sld xmlns:a="http://schemas.openxmlformats.org/drawingml/2006/main" xmlns:p="http://schemas.openxmlformats.org/presentationml/2006/main" xmlns:r="http://schemas.openxmlformats.org/officeDocument/2006/relationships">
+  <p:cSld>
+    <p:bg>
+      <p:bgPr>
+        <a:solidFill>
+          <a:srgbClr val="FFFFFF"/>
+        </a:solidFill>
+        <a:effectLst/>
+      </p:bgPr>
+    </p:bg>
+    <p:spTree>
+      <p:nvGrpSpPr>
+        <p:cNvPr id="1" name=""/>
+        <p:cNvGrpSpPr/>
+        <p:nvPr/>
+      </p:nvGrpSpPr>
+      <p:grpSpPr/>
+      <p:sp>
+        <p:nvSpPr>
+          <p:cNvPr id="2" name="Title"/>
+          <p:cNvSpPr txBox="1"/>
+          <p:nvPr/>
+        </p:nvSpPr>
+        <p:spPr>
+          <a:xfrm>
+            <a:off x="548640" y="457200"/>
+            <a:ext cx="11094415" cy="685800"/>
+          </a:xfrm>
+          <a:prstGeom prst="rect">
+            <a:avLst/>
+          </a:prstGeom>
+          <a:noFill/>
+        </p:spPr>
+        <p:txBody>
+          <a:bodyPr wrap="square" anchor="ctr">
+            <a:spAutoFit/>
+          </a:bodyPr>
+          <a:lstStyle/>
+          <a:p>
+            <a:r>
+              <a:rPr sz="2600" b="1" i="0">
+                <a:solidFill>
+                  <a:srgbClr val="102A43"/>
+                </a:solidFill>
+                <a:latin typeface="Segoe UI"/>
+              </a:rPr>
               <a:t>Appendix: the repo works as a second brain</a:t>
             </a:r>
           </a:p>
@@ -9398,7 +10160,7 @@
                 </a:solidFill>
                 <a:latin typeface="Segoe UI"/>
               </a:rPr>
-              <a:t>35 commits to 26 Sep and PR #1; most messages say what changed and why</a:t>
+              <a:t>39 commits, 10 to 27 Sep, and PR #1; most messages say what changed and why</a:t>
             </a:r>
           </a:p>
         </p:txBody>
@@ -10442,7 +11204,7 @@
                 </a:solidFill>
                 <a:latin typeface="Segoe UI"/>
               </a:rPr>
-              <a:t>Twelve revisions, with new research and role answers between each</a:t>
+              <a:t>Thirteen revisions, with new research and role answers between each</a:t>
             </a:r>
           </a:p>
           <a:p>
@@ -10888,7 +11650,7 @@
                 </a:solidFill>
                 <a:latin typeface="Segoe UI"/>
               </a:rPr>
-              <a:t>Sources: git log (35 commits, 10 to 26 Sep 2026); docs/reference/log.md; docs/brds/agentic-retrofit-programme-brd.md history.</a:t>
+              <a:t>Sources: git log (39 commits, 10 to 27 Sep 2026); docs/reference/log.md; docs/brds/agentic-retrofit-programme-brd.md history.</a:t>
             </a:r>
           </a:p>
         </p:txBody>
@@ -13420,7 +14182,7 @@
                 </a:solidFill>
                 <a:latin typeface="Segoe UI"/>
               </a:rPr>
-              <a:t>Twelve BRD revisions, each the same pass: research, ask the role agents, rewrite, log what and why</a:t>
+              <a:t>Thirteen BRD revisions, each the same pass: research, ask the role agents, rewrite, log what and why</a:t>
             </a:r>
           </a:p>
         </p:txBody>

--- a/.copilot-tracking/ppt/2026-09-26/ama-mentor-progress-review/slide-deck/ama-mentor-progress-review.pptx
+++ b/.copilot-tracking/ppt/2026-09-26/ama-mentor-progress-review/slide-deck/ama-mentor-progress-review.pptx
@@ -598,7 +598,7 @@
           <a:p/>
           <a:p>
             <a:r>
-              <a:t>None moved a request to an end-to-end agent. Richer inputs enrich the digital foundation and widen what bounded agents can check, but they add duties before autonomy: special category data, Awaab's Law awareness from the moment a photo arrives, and payment and procurement rules.</a:t>
+              <a:t>None moved a request to an end-to-end agent. Richer inputs enrich the digital foundation and widen what bounded agents can check, but they add duties before autonomy: special category data, Awaab's Law awareness, which a hazard photo can establish no later than its arrival, and payment and procurement rules.</a:t>
             </a:r>
           </a:p>
           <a:p/>
@@ -610,7 +610,7 @@
           <a:p/>
           <a:p>
             <a:r>
-              <a:t>A post-merge review caught two errors: the same Article 22 citation I had fixed in CON-003, and eleven answers from roles that have no agent. I re-ran nine with the nearest roles and labelled two as my own hypotheses.</a:t>
+              <a:t>A post-merge review caught two errors: the same Article 22 citation I had fixed in CON-003, and eleven answers from roles that have no agent. I re-ran nine with the nearest roles and labelled two as my own hypotheses. Then I re-ran every other role answer against the reframed proposal. Every verdict held; six answers tightened controls to match the BRD. For example, AI risk paths stay in shadow mode, and a person approves every AI-drafted message to a resident.</a:t>
             </a:r>
           </a:p>
         </p:txBody>
@@ -5498,7 +5498,7 @@
         <p:spPr>
           <a:xfrm>
             <a:off x="7406640" y="1508760"/>
-            <a:ext cx="4236415" cy="3383280"/>
+            <a:ext cx="4236415" cy="3611880"/>
           </a:xfrm>
           <a:prstGeom prst="roundRect">
             <a:avLst>
@@ -5534,7 +5534,7 @@
           <a:p>
             <a:pPr algn="l">
               <a:spcAft>
-                <a:spcPts val="1200"/>
+                <a:spcPts val="800"/>
               </a:spcAft>
             </a:pPr>
             <a:r>
@@ -5550,7 +5550,7 @@
           <a:p>
             <a:pPr algn="l" marL="228600" indent="-228600">
               <a:spcAft>
-                <a:spcPts val="1200"/>
+                <a:spcPts val="800"/>
               </a:spcAft>
               <a:buChar char="•"/>
             </a:pPr>
@@ -5567,7 +5567,7 @@
           <a:p>
             <a:pPr algn="l" marL="228600" indent="-228600">
               <a:spcAft>
-                <a:spcPts val="1200"/>
+                <a:spcPts val="800"/>
               </a:spcAft>
               <a:buChar char="•"/>
             </a:pPr>
@@ -5584,7 +5584,7 @@
           <a:p>
             <a:pPr algn="l" marL="228600" indent="-228600">
               <a:spcAft>
-                <a:spcPts val="1200"/>
+                <a:spcPts val="800"/>
               </a:spcAft>
               <a:buChar char="•"/>
             </a:pPr>
@@ -5595,13 +5595,13 @@
                 </a:solidFill>
                 <a:latin typeface="Segoe UI"/>
               </a:rPr>
-              <a:t>Duties grow before autonomy: special category data, Awaab's Law awareness, payment and procurement rules</a:t>
+              <a:t>Duties grow before autonomy: special category data, Awaab's Law, payment and procurement rules</a:t>
             </a:r>
           </a:p>
           <a:p>
             <a:pPr algn="l" marL="228600" indent="-228600">
               <a:spcAft>
-                <a:spcPts val="1200"/>
+                <a:spcPts val="800"/>
               </a:spcAft>
               <a:buChar char="•"/>
             </a:pPr>
@@ -5612,7 +5612,24 @@
                 </a:solidFill>
                 <a:latin typeface="Segoe UI"/>
               </a:rPr>
-              <a:t>The grid orders what Comparison 2 tests first; under proposed OD-34, the pilot decides what scales</a:t>
+              <a:t>All 48 role answers re-run on the reframe: six tightened controls, every verdict held</a:t>
+            </a:r>
+          </a:p>
+          <a:p>
+            <a:pPr algn="l" marL="228600" indent="-228600">
+              <a:spcAft>
+                <a:spcPts val="800"/>
+              </a:spcAft>
+              <a:buChar char="•"/>
+            </a:pPr>
+            <a:r>
+              <a:rPr sz="1400" b="0" i="0">
+                <a:solidFill>
+                  <a:srgbClr val="243B53"/>
+                </a:solidFill>
+                <a:latin typeface="Segoe UI"/>
+              </a:rPr>
+              <a:t>The grid orders Comparison 2 tests; under proposed OD-34, the pilot decides what scales</a:t>
             </a:r>
           </a:p>
         </p:txBody>
@@ -5702,7 +5719,7 @@
                 </a:solidFill>
                 <a:latin typeface="Segoe UI"/>
               </a:rPr>
-              <a:t>Sources: agent-what-if-study.md (Reconciliation With the Current Proposal; Value vs Complexity Quadrant) and its post-merge review, 27 Sep 2026. Scores are coarse judgements; role answers are hypotheses.</a:t>
+              <a:t>Sources: agent-what-if-study.md (Reconciliation; Value vs Complexity Quadrant), post-merge review and role-answer re-run, 27 Sep 2026. Scores are coarse judgements; role answers are hypotheses.</a:t>
             </a:r>
           </a:p>
         </p:txBody>
@@ -10160,7 +10177,7 @@
                 </a:solidFill>
                 <a:latin typeface="Segoe UI"/>
               </a:rPr>
-              <a:t>39 commits, 10 to 27 Sep, and PR #1; most messages say what changed and why</a:t>
+              <a:t>41 commits, 10 to 27 Sep, and three merged PRs; the log records what changed and why</a:t>
             </a:r>
           </a:p>
         </p:txBody>
@@ -11650,7 +11667,7 @@
                 </a:solidFill>
                 <a:latin typeface="Segoe UI"/>
               </a:rPr>
-              <a:t>Sources: git log (39 commits, 10 to 27 Sep 2026); docs/reference/log.md; docs/brds/agentic-retrofit-programme-brd.md history.</a:t>
+              <a:t>Sources: git log (41 commits, 10 to 27 Sep 2026); docs/reference/log.md; docs/brds/agentic-retrofit-programme-brd.md history.</a:t>
             </a:r>
           </a:p>
         </p:txBody>

--- a/.copilot-tracking/ppt/2026-09-26/ama-mentor-progress-review/slide-deck/ama-mentor-progress-review.pptx
+++ b/.copilot-tracking/ppt/2026-09-26/ama-mentor-progress-review/slide-deck/ama-mentor-progress-review.pptx
@@ -5698,8 +5698,8 @@
         </p:nvSpPr>
         <p:spPr>
           <a:xfrm>
-            <a:off x="548640" y="6126480"/>
-            <a:ext cx="11094415" cy="256032"/>
+            <a:off x="548640" y="6035040"/>
+            <a:ext cx="10972800" cy="347472"/>
           </a:xfrm>
           <a:prstGeom prst="rect">
             <a:avLst/>
@@ -5707,11 +5707,12 @@
           <a:noFill/>
         </p:spPr>
         <p:txBody>
-          <a:bodyPr wrap="square" tIns="0" bIns="0">
+          <a:bodyPr wrap="square" lIns="0" rIns="0" tIns="0" bIns="0" anchor="t">
             <a:spAutoFit/>
           </a:bodyPr>
           <a:lstStyle/>
           <a:p>
+            <a:pPr algn="l"/>
             <a:r>
               <a:rPr sz="900" b="0" i="0">
                 <a:solidFill>
@@ -5719,7 +5720,19 @@
                 </a:solidFill>
                 <a:latin typeface="Segoe UI"/>
               </a:rPr>
-              <a:t>Sources: agent-what-if-study.md (Reconciliation; Value vs Complexity Quadrant), post-merge review and role-answer re-run, 27 Sep 2026. Scores are coarse judgements; role answers are hypotheses.</a:t>
+              <a:t>Sources: Agent What-If Study (Reconciliation; Value vs Complexity), post-merge review and role-answer re-run, 27 Sep 2026.</a:t>
+            </a:r>
+          </a:p>
+          <a:p>
+            <a:pPr algn="l"/>
+            <a:r>
+              <a:rPr sz="900" b="0" i="0">
+                <a:solidFill>
+                  <a:srgbClr val="627D98"/>
+                </a:solidFill>
+                <a:latin typeface="Segoe UI"/>
+              </a:rPr>
+              <a:t>Scores are coarse judgements; role answers are hypotheses.</a:t>
             </a:r>
           </a:p>
         </p:txBody>
@@ -6685,8 +6698,8 @@
         </p:nvSpPr>
         <p:spPr>
           <a:xfrm>
-            <a:off x="548640" y="6126480"/>
-            <a:ext cx="11094415" cy="256032"/>
+            <a:off x="548640" y="6035040"/>
+            <a:ext cx="10972800" cy="347472"/>
           </a:xfrm>
           <a:prstGeom prst="rect">
             <a:avLst/>
@@ -6694,11 +6707,12 @@
           <a:noFill/>
         </p:spPr>
         <p:txBody>
-          <a:bodyPr wrap="square" tIns="0" bIns="0">
+          <a:bodyPr wrap="square" lIns="0" rIns="0" tIns="0" bIns="0" anchor="t">
             <a:spAutoFit/>
           </a:bodyPr>
           <a:lstStyle/>
           <a:p>
+            <a:pPr algn="l"/>
             <a:r>
               <a:rPr sz="900" b="0" i="0">
                 <a:solidFill>
@@ -6706,7 +6720,19 @@
                 </a:solidFill>
                 <a:latin typeface="Segoe UI"/>
               </a:rPr>
-              <a:t>Sources: BRD v0.5.0 frontmatter and Requirements Traceability; .copilot-tracking/brd-sessions/agentic-retrofit-programme.quality-report.yml (Runs 1 to 6); log.md (26 Sep 2026).</a:t>
+              <a:t>Sources: BRD v0.5.0 frontmatter and Requirements Traceability; BRD quality report, runs 1 to 6;</a:t>
+            </a:r>
+          </a:p>
+          <a:p>
+            <a:pPr algn="l"/>
+            <a:r>
+              <a:rPr sz="900" b="0" i="0">
+                <a:solidFill>
+                  <a:srgbClr val="627D98"/>
+                </a:solidFill>
+                <a:latin typeface="Segoe UI"/>
+              </a:rPr>
+              <a:t>log, 26 Sep 2026.</a:t>
             </a:r>
           </a:p>
         </p:txBody>
@@ -7303,8 +7329,8 @@
         </p:nvSpPr>
         <p:spPr>
           <a:xfrm>
-            <a:off x="548640" y="6126480"/>
-            <a:ext cx="11094415" cy="256032"/>
+            <a:off x="548640" y="6035040"/>
+            <a:ext cx="10972800" cy="347472"/>
           </a:xfrm>
           <a:prstGeom prst="rect">
             <a:avLst/>
@@ -7312,11 +7338,12 @@
           <a:noFill/>
         </p:spPr>
         <p:txBody>
-          <a:bodyPr wrap="square" tIns="0" bIns="0">
+          <a:bodyPr wrap="square" lIns="0" rIns="0" tIns="0" bIns="0" anchor="t">
             <a:spAutoFit/>
           </a:bodyPr>
           <a:lstStyle/>
           <a:p>
+            <a:pPr algn="l"/>
             <a:r>
               <a:rPr sz="900" b="0" i="0">
                 <a:solidFill>
@@ -7324,7 +7351,7 @@
                 </a:solidFill>
                 <a:latin typeface="Segoe UI"/>
               </a:rPr>
-              <a:t>Sources: docs/reference/log.md (Conventions; corrections, 25 to 26 Sep 2026); agent-request-challenge.md (Divergences, Limitations); git log.</a:t>
+              <a:t>Sources: knowledge-base log (conventions and corrections, 25 to 26 Sep 2026); Agent Request Challenge (Divergences; Limitations); git log.</a:t>
             </a:r>
           </a:p>
         </p:txBody>
@@ -8567,8 +8594,8 @@
         </p:nvSpPr>
         <p:spPr>
           <a:xfrm>
-            <a:off x="548640" y="6126480"/>
-            <a:ext cx="11094415" cy="256032"/>
+            <a:off x="548640" y="6035040"/>
+            <a:ext cx="10972800" cy="347472"/>
           </a:xfrm>
           <a:prstGeom prst="rect">
             <a:avLst/>
@@ -8576,11 +8603,12 @@
           <a:noFill/>
         </p:spPr>
         <p:txBody>
-          <a:bodyPr wrap="square" tIns="0" bIns="0">
+          <a:bodyPr wrap="square" lIns="0" rIns="0" tIns="0" bIns="0" anchor="t">
             <a:spAutoFit/>
           </a:bodyPr>
           <a:lstStyle/>
           <a:p>
+            <a:pPr algn="l"/>
             <a:r>
               <a:rPr sz="900" b="0" i="0">
                 <a:solidFill>
@@ -8588,7 +8616,19 @@
                 </a:solidFill>
                 <a:latin typeface="Segoe UI"/>
               </a:rPr>
-              <a:t>Sources: case_study_48_addendum.md (Recommended Executive Decision); agent-request-challenge.md; BRD FR-026, CON-005; WH:SHF annex snapshot; log.md.</a:t>
+              <a:t>Sources: addendum (Recommended Executive Decision); Agent Request Challenge; BRD FR-026 and CON-005;</a:t>
+            </a:r>
+          </a:p>
+          <a:p>
+            <a:pPr algn="l"/>
+            <a:r>
+              <a:rPr sz="900" b="0" i="0">
+                <a:solidFill>
+                  <a:srgbClr val="627D98"/>
+                </a:solidFill>
+                <a:latin typeface="Segoe UI"/>
+              </a:rPr>
+              <a:t>WH:SHF annex snapshot; knowledge-base log.</a:t>
             </a:r>
           </a:p>
         </p:txBody>
@@ -10177,7 +10217,7 @@
                 </a:solidFill>
                 <a:latin typeface="Segoe UI"/>
               </a:rPr>
-              <a:t>41 commits, 10 to 27 Sep, and three merged PRs; the log records what changed and why</a:t>
+              <a:t>42 non-merge commits, 10 to 27 Sep, and five merged PRs by 28 Sep; the log records what changed and why</a:t>
             </a:r>
           </a:p>
         </p:txBody>
@@ -11646,8 +11686,8 @@
         </p:nvSpPr>
         <p:spPr>
           <a:xfrm>
-            <a:off x="548640" y="6126480"/>
-            <a:ext cx="11094415" cy="256032"/>
+            <a:off x="548640" y="6035040"/>
+            <a:ext cx="10972800" cy="347472"/>
           </a:xfrm>
           <a:prstGeom prst="rect">
             <a:avLst/>
@@ -11655,11 +11695,12 @@
           <a:noFill/>
         </p:spPr>
         <p:txBody>
-          <a:bodyPr wrap="square" tIns="0" bIns="0">
+          <a:bodyPr wrap="square" lIns="0" rIns="0" tIns="0" bIns="0" anchor="t">
             <a:spAutoFit/>
           </a:bodyPr>
           <a:lstStyle/>
           <a:p>
+            <a:pPr algn="l"/>
             <a:r>
               <a:rPr sz="900" b="0" i="0">
                 <a:solidFill>
@@ -11667,7 +11708,7 @@
                 </a:solidFill>
                 <a:latin typeface="Segoe UI"/>
               </a:rPr>
-              <a:t>Sources: git log (41 commits, 10 to 27 Sep 2026); docs/reference/log.md; docs/brds/agentic-retrofit-programme-brd.md history.</a:t>
+              <a:t>Sources: git log (42 non-merge commits, 10 to 27 Sep 2026); docs/reference/log.md; BRD history.</a:t>
             </a:r>
           </a:p>
         </p:txBody>
@@ -12249,8 +12290,8 @@
         </p:nvSpPr>
         <p:spPr>
           <a:xfrm>
-            <a:off x="548640" y="6126480"/>
-            <a:ext cx="11094415" cy="256032"/>
+            <a:off x="548640" y="6035040"/>
+            <a:ext cx="10972800" cy="347472"/>
           </a:xfrm>
           <a:prstGeom prst="rect">
             <a:avLst/>
@@ -12258,11 +12299,12 @@
           <a:noFill/>
         </p:spPr>
         <p:txBody>
-          <a:bodyPr wrap="square" tIns="0" bIns="0">
+          <a:bodyPr wrap="square" lIns="0" rIns="0" tIns="0" bIns="0" anchor="t">
             <a:spAutoFit/>
           </a:bodyPr>
           <a:lstStyle/>
           <a:p>
+            <a:pPr algn="l"/>
             <a:r>
               <a:rPr sz="900" b="0" i="0">
                 <a:solidFill>
@@ -12270,7 +12312,19 @@
                 </a:solidFill>
                 <a:latin typeface="Segoe UI"/>
               </a:rPr>
-              <a:t>Sources: company-profile-research.md; housing-association-primer.md; uk-social-housing-baseline-research.md; regulatory/README.md. Benchmarks are not company facts.</a:t>
+              <a:t>Sources: company profile; housing association primer; UK social housing baseline; regulatory register.</a:t>
+            </a:r>
+          </a:p>
+          <a:p>
+            <a:pPr algn="l"/>
+            <a:r>
+              <a:rPr sz="900" b="0" i="0">
+                <a:solidFill>
+                  <a:srgbClr val="627D98"/>
+                </a:solidFill>
+                <a:latin typeface="Segoe UI"/>
+              </a:rPr>
+              <a:t>Benchmarks are not company facts.</a:t>
             </a:r>
           </a:p>
         </p:txBody>
@@ -13392,8 +13446,8 @@
         </p:nvSpPr>
         <p:spPr>
           <a:xfrm>
-            <a:off x="548640" y="6126480"/>
-            <a:ext cx="11094415" cy="256032"/>
+            <a:off x="548640" y="6035040"/>
+            <a:ext cx="10972800" cy="347472"/>
           </a:xfrm>
           <a:prstGeom prst="rect">
             <a:avLst/>
@@ -13401,11 +13455,12 @@
           <a:noFill/>
         </p:spPr>
         <p:txBody>
-          <a:bodyPr wrap="square" tIns="0" bIns="0">
+          <a:bodyPr wrap="square" lIns="0" rIns="0" tIns="0" bIns="0" anchor="t">
             <a:spAutoFit/>
           </a:bodyPr>
           <a:lstStyle/>
           <a:p>
+            <a:pPr algn="l"/>
             <a:r>
               <a:rPr sz="900" b="0" i="0">
                 <a:solidFill>
@@ -13413,7 +13468,19 @@
                 </a:solidFill>
                 <a:latin typeface="Segoe UI"/>
               </a:rPr>
-              <a:t>Sources: .github/agents/company-*.agent.md; agent-request-challenge.md (Grant and Funding); WH:SHF technical annex (Page 3, Page 5 Table 3), retrieved 19 Sep 2026. Question paraphrased.</a:t>
+              <a:t>Sources: company role agents; Agent Request Challenge (Grant and Funding); WH:SHF technical annex, pp. 3 and 5 (retrieved 19 Sep 2026).</a:t>
+            </a:r>
+          </a:p>
+          <a:p>
+            <a:pPr algn="l"/>
+            <a:r>
+              <a:rPr sz="900" b="0" i="0">
+                <a:solidFill>
+                  <a:srgbClr val="627D98"/>
+                </a:solidFill>
+                <a:latin typeface="Segoe UI"/>
+              </a:rPr>
+              <a:t>Question paraphrased.</a:t>
             </a:r>
           </a:p>
         </p:txBody>
@@ -14212,8 +14279,8 @@
         </p:nvSpPr>
         <p:spPr>
           <a:xfrm>
-            <a:off x="548640" y="6126480"/>
-            <a:ext cx="11094415" cy="256032"/>
+            <a:off x="548640" y="6035040"/>
+            <a:ext cx="10972800" cy="347472"/>
           </a:xfrm>
           <a:prstGeom prst="rect">
             <a:avLst/>
@@ -14221,11 +14288,12 @@
           <a:noFill/>
         </p:spPr>
         <p:txBody>
-          <a:bodyPr wrap="square" tIns="0" bIns="0">
+          <a:bodyPr wrap="square" lIns="0" rIns="0" tIns="0" bIns="0" anchor="t">
             <a:spAutoFit/>
           </a:bodyPr>
           <a:lstStyle/>
           <a:p>
+            <a:pPr algn="l"/>
             <a:r>
               <a:rPr sz="900" b="0" i="0">
                 <a:solidFill>
@@ -15082,8 +15150,8 @@
         </p:nvSpPr>
         <p:spPr>
           <a:xfrm>
-            <a:off x="548640" y="6126480"/>
-            <a:ext cx="11094415" cy="256032"/>
+            <a:off x="548640" y="6035040"/>
+            <a:ext cx="10972800" cy="347472"/>
           </a:xfrm>
           <a:prstGeom prst="rect">
             <a:avLst/>
@@ -15091,11 +15159,12 @@
           <a:noFill/>
         </p:spPr>
         <p:txBody>
-          <a:bodyPr wrap="square" tIns="0" bIns="0">
+          <a:bodyPr wrap="square" lIns="0" rIns="0" tIns="0" bIns="0" anchor="t">
             <a:spAutoFit/>
           </a:bodyPr>
           <a:lstStyle/>
           <a:p>
+            <a:pPr algn="l"/>
             <a:r>
               <a:rPr sz="900" b="0" i="0">
                 <a:solidFill>
@@ -15103,7 +15172,19 @@
                 </a:solidFill>
                 <a:latin typeface="Segoe UI"/>
               </a:rPr>
-              <a:t>Source: agent-request-challenge.md (26 Sep 2026). Roles read the case, addendum and BRD: verdicts are sector-informed hypotheses, not validation.</a:t>
+              <a:t>Source: Agent Request Challenge (26 Sep 2026). Roles read the case, addendum and BRD.</a:t>
+            </a:r>
+          </a:p>
+          <a:p>
+            <a:pPr algn="l"/>
+            <a:r>
+              <a:rPr sz="900" b="0" i="0">
+                <a:solidFill>
+                  <a:srgbClr val="627D98"/>
+                </a:solidFill>
+                <a:latin typeface="Segoe UI"/>
+              </a:rPr>
+              <a:t>Verdicts are sector-informed hypotheses, not validation.</a:t>
             </a:r>
           </a:p>
         </p:txBody>
@@ -15738,8 +15819,8 @@
         </p:nvSpPr>
         <p:spPr>
           <a:xfrm>
-            <a:off x="548640" y="6126480"/>
-            <a:ext cx="11094415" cy="256032"/>
+            <a:off x="548640" y="6035040"/>
+            <a:ext cx="10972800" cy="347472"/>
           </a:xfrm>
           <a:prstGeom prst="rect">
             <a:avLst/>
@@ -15747,11 +15828,12 @@
           <a:noFill/>
         </p:spPr>
         <p:txBody>
-          <a:bodyPr wrap="square" tIns="0" bIns="0">
+          <a:bodyPr wrap="square" lIns="0" rIns="0" tIns="0" bIns="0" anchor="t">
             <a:spAutoFit/>
           </a:bodyPr>
           <a:lstStyle/>
           <a:p>
+            <a:pPr algn="l"/>
             <a:r>
               <a:rPr sz="900" b="0" i="0">
                 <a:solidFill>
@@ -15759,7 +15841,19 @@
                 </a:solidFill>
                 <a:latin typeface="Segoe UI"/>
               </a:rPr>
-              <a:t>Sources: case_study_48_addendum.md (Where Agents Fit; Agentic Architecture Brief); agent-request-challenge.md; BRD v0.5.0 Document Status (owner decision, 26 Sep 2026).</a:t>
+              <a:t>Sources: addendum (Where Agents Fit; Agentic Architecture Brief); Agent Request Challenge;</a:t>
+            </a:r>
+          </a:p>
+          <a:p>
+            <a:pPr algn="l"/>
+            <a:r>
+              <a:rPr sz="900" b="0" i="0">
+                <a:solidFill>
+                  <a:srgbClr val="627D98"/>
+                </a:solidFill>
+                <a:latin typeface="Segoe UI"/>
+              </a:rPr>
+              <a:t>BRD v0.5.0 Document Status (owner decision, 26 Sep 2026).</a:t>
             </a:r>
           </a:p>
         </p:txBody>
@@ -16144,8 +16238,8 @@
         </p:nvSpPr>
         <p:spPr>
           <a:xfrm>
-            <a:off x="548640" y="6126480"/>
-            <a:ext cx="11094415" cy="256032"/>
+            <a:off x="548640" y="6035040"/>
+            <a:ext cx="10972800" cy="347472"/>
           </a:xfrm>
           <a:prstGeom prst="rect">
             <a:avLst/>
@@ -16153,11 +16247,12 @@
           <a:noFill/>
         </p:spPr>
         <p:txBody>
-          <a:bodyPr wrap="square" tIns="0" bIns="0">
+          <a:bodyPr wrap="square" lIns="0" rIns="0" tIns="0" bIns="0" anchor="t">
             <a:spAutoFit/>
           </a:bodyPr>
           <a:lstStyle/>
           <a:p>
+            <a:pPr algn="l"/>
             <a:r>
               <a:rPr sz="900" b="0" i="0">
                 <a:solidFill>
@@ -16165,7 +16260,19 @@
                 </a:solidFill>
                 <a:latin typeface="Segoe UI"/>
               </a:rPr>
-              <a:t>Sources: pilot-measurement-challenge.md (Summary; Owner Decision); BRD v0.5.0 CON-003, RULE-019, RULE-024, AC-079, FR-042 to FR-044, OD-34, OD-39; log.md (26 Sep 2026). Role answers are hypotheses.</a:t>
+              <a:t>Sources: Pilot Measurement Challenge; BRD v0.5.0 CON-003, RULE-019, RULE-024, AC-079, FR-042 to FR-044, OD-34 and OD-39;</a:t>
+            </a:r>
+          </a:p>
+          <a:p>
+            <a:pPr algn="l"/>
+            <a:r>
+              <a:rPr sz="900" b="0" i="0">
+                <a:solidFill>
+                  <a:srgbClr val="627D98"/>
+                </a:solidFill>
+                <a:latin typeface="Segoe UI"/>
+              </a:rPr>
+              <a:t>log, 26 Sep 2026. Role answers are hypotheses.</a:t>
             </a:r>
           </a:p>
         </p:txBody>

--- a/.copilot-tracking/ppt/2026-09-26/ama-mentor-progress-review/slide-deck/ama-mentor-progress-review.pptx
+++ b/.copilot-tracking/ppt/2026-09-26/ama-mentor-progress-review/slide-deck/ama-mentor-progress-review.pptx
@@ -499,6 +499,10 @@
           </p:nvPr>
         </p:nvSpPr>
         <p:spPr/>
+        <p:txBody>
+          <a:bodyPr/>
+          <a:p/>
+        </p:txBody>
       </p:sp>
       <p:sp>
         <p:nvSpPr>
@@ -538,6 +542,10 @@
           </p:nvPr>
         </p:nvSpPr>
         <p:spPr/>
+        <p:txBody>
+          <a:bodyPr/>
+          <a:p/>
+        </p:txBody>
       </p:sp>
     </p:spTree>
   </p:cSld>
@@ -575,6 +583,10 @@
           </p:nvPr>
         </p:nvSpPr>
         <p:spPr/>
+        <p:txBody>
+          <a:bodyPr/>
+          <a:p/>
+        </p:txBody>
       </p:sp>
       <p:sp>
         <p:nvSpPr>
@@ -626,6 +638,10 @@
           </p:nvPr>
         </p:nvSpPr>
         <p:spPr/>
+        <p:txBody>
+          <a:bodyPr/>
+          <a:p/>
+        </p:txBody>
       </p:sp>
     </p:spTree>
   </p:cSld>
@@ -663,6 +679,10 @@
           </p:nvPr>
         </p:nvSpPr>
         <p:spPr/>
+        <p:txBody>
+          <a:bodyPr/>
+          <a:p/>
+        </p:txBody>
       </p:sp>
       <p:sp>
         <p:nvSpPr>
@@ -708,6 +728,10 @@
           </p:nvPr>
         </p:nvSpPr>
         <p:spPr/>
+        <p:txBody>
+          <a:bodyPr/>
+          <a:p/>
+        </p:txBody>
       </p:sp>
     </p:spTree>
   </p:cSld>
@@ -745,6 +769,10 @@
           </p:nvPr>
         </p:nvSpPr>
         <p:spPr/>
+        <p:txBody>
+          <a:bodyPr/>
+          <a:p/>
+        </p:txBody>
       </p:sp>
       <p:sp>
         <p:nvSpPr>
@@ -790,6 +818,10 @@
           </p:nvPr>
         </p:nvSpPr>
         <p:spPr/>
+        <p:txBody>
+          <a:bodyPr/>
+          <a:p/>
+        </p:txBody>
       </p:sp>
     </p:spTree>
   </p:cSld>
@@ -827,6 +859,10 @@
           </p:nvPr>
         </p:nvSpPr>
         <p:spPr/>
+        <p:txBody>
+          <a:bodyPr/>
+          <a:p/>
+        </p:txBody>
       </p:sp>
       <p:sp>
         <p:nvSpPr>
@@ -872,6 +908,10 @@
           </p:nvPr>
         </p:nvSpPr>
         <p:spPr/>
+        <p:txBody>
+          <a:bodyPr/>
+          <a:p/>
+        </p:txBody>
       </p:sp>
     </p:spTree>
   </p:cSld>
@@ -909,6 +949,10 @@
           </p:nvPr>
         </p:nvSpPr>
         <p:spPr/>
+        <p:txBody>
+          <a:bodyPr/>
+          <a:p/>
+        </p:txBody>
       </p:sp>
       <p:sp>
         <p:nvSpPr>
@@ -978,6 +1022,10 @@
           </p:nvPr>
         </p:nvSpPr>
         <p:spPr/>
+        <p:txBody>
+          <a:bodyPr/>
+          <a:p/>
+        </p:txBody>
       </p:sp>
     </p:spTree>
   </p:cSld>
@@ -1015,6 +1063,10 @@
           </p:nvPr>
         </p:nvSpPr>
         <p:spPr/>
+        <p:txBody>
+          <a:bodyPr/>
+          <a:p/>
+        </p:txBody>
       </p:sp>
       <p:sp>
         <p:nvSpPr>
@@ -1117,6 +1169,10 @@
           </p:nvPr>
         </p:nvSpPr>
         <p:spPr/>
+        <p:txBody>
+          <a:bodyPr/>
+          <a:p/>
+        </p:txBody>
       </p:sp>
     </p:spTree>
   </p:cSld>
@@ -1154,6 +1210,10 @@
           </p:nvPr>
         </p:nvSpPr>
         <p:spPr/>
+        <p:txBody>
+          <a:bodyPr/>
+          <a:p/>
+        </p:txBody>
       </p:sp>
       <p:sp>
         <p:nvSpPr>
@@ -1229,6 +1289,10 @@
           </p:nvPr>
         </p:nvSpPr>
         <p:spPr/>
+        <p:txBody>
+          <a:bodyPr/>
+          <a:p/>
+        </p:txBody>
       </p:sp>
     </p:spTree>
   </p:cSld>
@@ -1266,6 +1330,10 @@
           </p:nvPr>
         </p:nvSpPr>
         <p:spPr/>
+        <p:txBody>
+          <a:bodyPr/>
+          <a:p/>
+        </p:txBody>
       </p:sp>
       <p:sp>
         <p:nvSpPr>
@@ -1311,6 +1379,10 @@
           </p:nvPr>
         </p:nvSpPr>
         <p:spPr/>
+        <p:txBody>
+          <a:bodyPr/>
+          <a:p/>
+        </p:txBody>
       </p:sp>
     </p:spTree>
   </p:cSld>
@@ -1348,6 +1420,10 @@
           </p:nvPr>
         </p:nvSpPr>
         <p:spPr/>
+        <p:txBody>
+          <a:bodyPr/>
+          <a:p/>
+        </p:txBody>
       </p:sp>
       <p:sp>
         <p:nvSpPr>
@@ -1405,6 +1481,10 @@
           </p:nvPr>
         </p:nvSpPr>
         <p:spPr/>
+        <p:txBody>
+          <a:bodyPr/>
+          <a:p/>
+        </p:txBody>
       </p:sp>
     </p:spTree>
   </p:cSld>
@@ -1442,6 +1522,10 @@
           </p:nvPr>
         </p:nvSpPr>
         <p:spPr/>
+        <p:txBody>
+          <a:bodyPr/>
+          <a:p/>
+        </p:txBody>
       </p:sp>
       <p:sp>
         <p:nvSpPr>
@@ -1471,7 +1555,7 @@
           <a:p/>
           <a:p>
             <a:r>
-              <a:t>One exchange: would a grant-drafting agent add value? The finance role answered with a fact from the local snapshot: in Greater Manchester and the West Midlands, Wave 3 money is allocated by formula, not by bid. Whether Proper North Homes operates there is unknown. So the BRD now requires an evidenced funding route before any bid work starts.</a:t>
+              <a:t>One exchange: would a grant-drafting agent add value? The finance role answered with a fact from the local snapshot: in Greater Manchester and the West Midlands, Wave 3 money is allocated by formula, not by bid. Whether Zava North Homes operates there is unknown. So the BRD now requires an evidenced funding route before any bid work starts.</a:t>
             </a:r>
           </a:p>
         </p:txBody>
@@ -1487,6 +1571,10 @@
           </p:nvPr>
         </p:nvSpPr>
         <p:spPr/>
+        <p:txBody>
+          <a:bodyPr/>
+          <a:p/>
+        </p:txBody>
       </p:sp>
     </p:spTree>
   </p:cSld>
@@ -1524,6 +1612,10 @@
           </p:nvPr>
         </p:nvSpPr>
         <p:spPr/>
+        <p:txBody>
+          <a:bodyPr/>
+          <a:p/>
+        </p:txBody>
       </p:sp>
       <p:sp>
         <p:nvSpPr>
@@ -1569,6 +1661,10 @@
           </p:nvPr>
         </p:nvSpPr>
         <p:spPr/>
+        <p:txBody>
+          <a:bodyPr/>
+          <a:p/>
+        </p:txBody>
       </p:sp>
     </p:spTree>
   </p:cSld>
@@ -1606,6 +1702,10 @@
           </p:nvPr>
         </p:nvSpPr>
         <p:spPr/>
+        <p:txBody>
+          <a:bodyPr/>
+          <a:p/>
+        </p:txBody>
       </p:sp>
       <p:sp>
         <p:nvSpPr>
@@ -1657,6 +1757,10 @@
           </p:nvPr>
         </p:nvSpPr>
         <p:spPr/>
+        <p:txBody>
+          <a:bodyPr/>
+          <a:p/>
+        </p:txBody>
       </p:sp>
     </p:spTree>
   </p:cSld>
@@ -1694,6 +1798,10 @@
           </p:nvPr>
         </p:nvSpPr>
         <p:spPr/>
+        <p:txBody>
+          <a:bodyPr/>
+          <a:p/>
+        </p:txBody>
       </p:sp>
       <p:sp>
         <p:nvSpPr>
@@ -1739,6 +1847,10 @@
           </p:nvPr>
         </p:nvSpPr>
         <p:spPr/>
+        <p:txBody>
+          <a:bodyPr/>
+          <a:p/>
+        </p:txBody>
       </p:sp>
     </p:spTree>
   </p:cSld>
@@ -1776,6 +1888,10 @@
           </p:nvPr>
         </p:nvSpPr>
         <p:spPr/>
+        <p:txBody>
+          <a:bodyPr/>
+          <a:p/>
+        </p:txBody>
       </p:sp>
       <p:sp>
         <p:nvSpPr>
@@ -1827,6 +1943,10 @@
           </p:nvPr>
         </p:nvSpPr>
         <p:spPr/>
+        <p:txBody>
+          <a:bodyPr/>
+          <a:p/>
+        </p:txBody>
       </p:sp>
     </p:spTree>
   </p:cSld>
@@ -4933,7 +5053,7 @@
                 </a:solidFill>
                 <a:latin typeface="Segoe UI"/>
               </a:rPr>
-              <a:t>How I filled the gaps in the Proper Warm case, 10 to 27 September 2026</a:t>
+              <a:t>How I filled the gaps in the Zava Forward case, 10 to 27 September 2026</a:t>
             </a:r>
           </a:p>
         </p:txBody>
@@ -5017,6 +5137,73 @@
           </a:p>
         </p:txBody>
       </p:sp>
+      <p:sp>
+        <p:nvSpPr>
+          <p:cNvPr id="7" name="Zava logo contrast backing"/>
+          <p:cNvSpPr/>
+          <p:nvPr/>
+        </p:nvSpPr>
+        <p:spPr>
+          <a:xfrm>
+            <a:off x="11048695" y="109728"/>
+            <a:ext cx="960120" cy="335445"/>
+          </a:xfrm>
+          <a:prstGeom prst="rect">
+            <a:avLst/>
+          </a:prstGeom>
+          <a:solidFill>
+            <a:srgbClr val="FFFFFF"/>
+          </a:solidFill>
+          <a:ln>
+            <a:noFill/>
+          </a:ln>
+        </p:spPr>
+        <p:style>
+          <a:lnRef idx="1">
+            <a:schemeClr val="accent1"/>
+          </a:lnRef>
+          <a:fillRef idx="3">
+            <a:schemeClr val="accent1"/>
+          </a:fillRef>
+          <a:effectRef idx="2">
+            <a:schemeClr val="accent1"/>
+          </a:effectRef>
+          <a:fontRef idx="minor">
+            <a:schemeClr val="lt1"/>
+          </a:fontRef>
+        </p:style>
+        <p:txBody>
+          <a:bodyPr rtlCol="0" anchor="ctr"/>
+          <a:lstStyle/>
+          <a:p>
+            <a:pPr algn="ctr"/>
+          </a:p>
+        </p:txBody>
+      </p:sp>
+      <p:pic>
+        <p:nvPicPr>
+          <p:cNvPr id="8" name="Zava branding logo" descr="image.png"/>
+          <p:cNvPicPr>
+            <a:picLocks noChangeAspect="1"/>
+          </p:cNvPicPr>
+          <p:nvPr/>
+        </p:nvPicPr>
+        <p:blipFill>
+          <a:blip r:embed="rId3"/>
+          <a:stretch>
+            <a:fillRect/>
+          </a:stretch>
+        </p:blipFill>
+        <p:spPr>
+          <a:xfrm>
+            <a:off x="11048695" y="109728"/>
+            <a:ext cx="960120" cy="335446"/>
+          </a:xfrm>
+          <a:prstGeom prst="rect">
+            <a:avLst/>
+          </a:prstGeom>
+        </p:spPr>
+      </p:pic>
     </p:spTree>
   </p:cSld>
   <p:clrMapOvr>
@@ -5737,6 +5924,73 @@
           </a:p>
         </p:txBody>
       </p:sp>
+      <p:sp>
+        <p:nvSpPr>
+          <p:cNvPr id="8" name="Zava logo contrast backing"/>
+          <p:cNvSpPr/>
+          <p:nvPr/>
+        </p:nvSpPr>
+        <p:spPr>
+          <a:xfrm>
+            <a:off x="11048695" y="109728"/>
+            <a:ext cx="960120" cy="335445"/>
+          </a:xfrm>
+          <a:prstGeom prst="rect">
+            <a:avLst/>
+          </a:prstGeom>
+          <a:solidFill>
+            <a:srgbClr val="FFFFFF"/>
+          </a:solidFill>
+          <a:ln>
+            <a:noFill/>
+          </a:ln>
+        </p:spPr>
+        <p:style>
+          <a:lnRef idx="1">
+            <a:schemeClr val="accent1"/>
+          </a:lnRef>
+          <a:fillRef idx="3">
+            <a:schemeClr val="accent1"/>
+          </a:fillRef>
+          <a:effectRef idx="2">
+            <a:schemeClr val="accent1"/>
+          </a:effectRef>
+          <a:fontRef idx="minor">
+            <a:schemeClr val="lt1"/>
+          </a:fontRef>
+        </p:style>
+        <p:txBody>
+          <a:bodyPr rtlCol="0" anchor="ctr"/>
+          <a:lstStyle/>
+          <a:p>
+            <a:pPr algn="ctr"/>
+          </a:p>
+        </p:txBody>
+      </p:sp>
+      <p:pic>
+        <p:nvPicPr>
+          <p:cNvPr id="9" name="Zava branding logo" descr="image.png"/>
+          <p:cNvPicPr>
+            <a:picLocks noChangeAspect="1"/>
+          </p:cNvPicPr>
+          <p:nvPr/>
+        </p:nvPicPr>
+        <p:blipFill>
+          <a:blip r:embed="rId3"/>
+          <a:stretch>
+            <a:fillRect/>
+          </a:stretch>
+        </p:blipFill>
+        <p:spPr>
+          <a:xfrm>
+            <a:off x="11048695" y="109728"/>
+            <a:ext cx="960120" cy="335446"/>
+          </a:xfrm>
+          <a:prstGeom prst="rect">
+            <a:avLst/>
+          </a:prstGeom>
+        </p:spPr>
+      </p:pic>
     </p:spTree>
   </p:cSld>
   <p:clrMapOvr>
@@ -6737,6 +6991,73 @@
           </a:p>
         </p:txBody>
       </p:sp>
+      <p:sp>
+        <p:nvSpPr>
+          <p:cNvPr id="21" name="Zava logo contrast backing"/>
+          <p:cNvSpPr/>
+          <p:nvPr/>
+        </p:nvSpPr>
+        <p:spPr>
+          <a:xfrm>
+            <a:off x="11048695" y="109728"/>
+            <a:ext cx="960120" cy="335445"/>
+          </a:xfrm>
+          <a:prstGeom prst="rect">
+            <a:avLst/>
+          </a:prstGeom>
+          <a:solidFill>
+            <a:srgbClr val="FFFFFF"/>
+          </a:solidFill>
+          <a:ln>
+            <a:noFill/>
+          </a:ln>
+        </p:spPr>
+        <p:style>
+          <a:lnRef idx="1">
+            <a:schemeClr val="accent1"/>
+          </a:lnRef>
+          <a:fillRef idx="3">
+            <a:schemeClr val="accent1"/>
+          </a:fillRef>
+          <a:effectRef idx="2">
+            <a:schemeClr val="accent1"/>
+          </a:effectRef>
+          <a:fontRef idx="minor">
+            <a:schemeClr val="lt1"/>
+          </a:fontRef>
+        </p:style>
+        <p:txBody>
+          <a:bodyPr rtlCol="0" anchor="ctr"/>
+          <a:lstStyle/>
+          <a:p>
+            <a:pPr algn="ctr"/>
+          </a:p>
+        </p:txBody>
+      </p:sp>
+      <p:pic>
+        <p:nvPicPr>
+          <p:cNvPr id="22" name="Zava branding logo" descr="image.png"/>
+          <p:cNvPicPr>
+            <a:picLocks noChangeAspect="1"/>
+          </p:cNvPicPr>
+          <p:nvPr/>
+        </p:nvPicPr>
+        <p:blipFill>
+          <a:blip r:embed="rId3"/>
+          <a:stretch>
+            <a:fillRect/>
+          </a:stretch>
+        </p:blipFill>
+        <p:spPr>
+          <a:xfrm>
+            <a:off x="11048695" y="109728"/>
+            <a:ext cx="960120" cy="335446"/>
+          </a:xfrm>
+          <a:prstGeom prst="rect">
+            <a:avLst/>
+          </a:prstGeom>
+        </p:spPr>
+      </p:pic>
     </p:spTree>
   </p:cSld>
   <p:clrMapOvr>
@@ -7356,6 +7677,73 @@
           </a:p>
         </p:txBody>
       </p:sp>
+      <p:sp>
+        <p:nvSpPr>
+          <p:cNvPr id="12" name="Zava logo contrast backing"/>
+          <p:cNvSpPr/>
+          <p:nvPr/>
+        </p:nvSpPr>
+        <p:spPr>
+          <a:xfrm>
+            <a:off x="11048695" y="109728"/>
+            <a:ext cx="960120" cy="335445"/>
+          </a:xfrm>
+          <a:prstGeom prst="rect">
+            <a:avLst/>
+          </a:prstGeom>
+          <a:solidFill>
+            <a:srgbClr val="FFFFFF"/>
+          </a:solidFill>
+          <a:ln>
+            <a:noFill/>
+          </a:ln>
+        </p:spPr>
+        <p:style>
+          <a:lnRef idx="1">
+            <a:schemeClr val="accent1"/>
+          </a:lnRef>
+          <a:fillRef idx="3">
+            <a:schemeClr val="accent1"/>
+          </a:fillRef>
+          <a:effectRef idx="2">
+            <a:schemeClr val="accent1"/>
+          </a:effectRef>
+          <a:fontRef idx="minor">
+            <a:schemeClr val="lt1"/>
+          </a:fontRef>
+        </p:style>
+        <p:txBody>
+          <a:bodyPr rtlCol="0" anchor="ctr"/>
+          <a:lstStyle/>
+          <a:p>
+            <a:pPr algn="ctr"/>
+          </a:p>
+        </p:txBody>
+      </p:sp>
+      <p:pic>
+        <p:nvPicPr>
+          <p:cNvPr id="13" name="Zava branding logo" descr="image.png"/>
+          <p:cNvPicPr>
+            <a:picLocks noChangeAspect="1"/>
+          </p:cNvPicPr>
+          <p:nvPr/>
+        </p:nvPicPr>
+        <p:blipFill>
+          <a:blip r:embed="rId3"/>
+          <a:stretch>
+            <a:fillRect/>
+          </a:stretch>
+        </p:blipFill>
+        <p:spPr>
+          <a:xfrm>
+            <a:off x="11048695" y="109728"/>
+            <a:ext cx="960120" cy="335446"/>
+          </a:xfrm>
+          <a:prstGeom prst="rect">
+            <a:avLst/>
+          </a:prstGeom>
+        </p:spPr>
+      </p:pic>
     </p:spTree>
   </p:cSld>
   <p:clrMapOvr>
@@ -8633,6 +9021,73 @@
           </a:p>
         </p:txBody>
       </p:sp>
+      <p:sp>
+        <p:nvSpPr>
+          <p:cNvPr id="25" name="Zava logo contrast backing"/>
+          <p:cNvSpPr/>
+          <p:nvPr/>
+        </p:nvSpPr>
+        <p:spPr>
+          <a:xfrm>
+            <a:off x="11048695" y="109728"/>
+            <a:ext cx="960120" cy="335445"/>
+          </a:xfrm>
+          <a:prstGeom prst="rect">
+            <a:avLst/>
+          </a:prstGeom>
+          <a:solidFill>
+            <a:srgbClr val="FFFFFF"/>
+          </a:solidFill>
+          <a:ln>
+            <a:noFill/>
+          </a:ln>
+        </p:spPr>
+        <p:style>
+          <a:lnRef idx="1">
+            <a:schemeClr val="accent1"/>
+          </a:lnRef>
+          <a:fillRef idx="3">
+            <a:schemeClr val="accent1"/>
+          </a:fillRef>
+          <a:effectRef idx="2">
+            <a:schemeClr val="accent1"/>
+          </a:effectRef>
+          <a:fontRef idx="minor">
+            <a:schemeClr val="lt1"/>
+          </a:fontRef>
+        </p:style>
+        <p:txBody>
+          <a:bodyPr rtlCol="0" anchor="ctr"/>
+          <a:lstStyle/>
+          <a:p>
+            <a:pPr algn="ctr"/>
+          </a:p>
+        </p:txBody>
+      </p:sp>
+      <p:pic>
+        <p:nvPicPr>
+          <p:cNvPr id="26" name="Zava branding logo" descr="image.png"/>
+          <p:cNvPicPr>
+            <a:picLocks noChangeAspect="1"/>
+          </p:cNvPicPr>
+          <p:nvPr/>
+        </p:nvPicPr>
+        <p:blipFill>
+          <a:blip r:embed="rId3"/>
+          <a:stretch>
+            <a:fillRect/>
+          </a:stretch>
+        </p:blipFill>
+        <p:spPr>
+          <a:xfrm>
+            <a:off x="11048695" y="109728"/>
+            <a:ext cx="960120" cy="335446"/>
+          </a:xfrm>
+          <a:prstGeom prst="rect">
+            <a:avLst/>
+          </a:prstGeom>
+        </p:spPr>
+      </p:pic>
     </p:spTree>
   </p:cSld>
   <p:clrMapOvr>
@@ -9072,6 +9527,73 @@
           </a:p>
         </p:txBody>
       </p:sp>
+      <p:sp>
+        <p:nvSpPr>
+          <p:cNvPr id="7" name="Zava logo contrast backing"/>
+          <p:cNvSpPr/>
+          <p:nvPr/>
+        </p:nvSpPr>
+        <p:spPr>
+          <a:xfrm>
+            <a:off x="11048695" y="109728"/>
+            <a:ext cx="960120" cy="335445"/>
+          </a:xfrm>
+          <a:prstGeom prst="rect">
+            <a:avLst/>
+          </a:prstGeom>
+          <a:solidFill>
+            <a:srgbClr val="FFFFFF"/>
+          </a:solidFill>
+          <a:ln>
+            <a:noFill/>
+          </a:ln>
+        </p:spPr>
+        <p:style>
+          <a:lnRef idx="1">
+            <a:schemeClr val="accent1"/>
+          </a:lnRef>
+          <a:fillRef idx="3">
+            <a:schemeClr val="accent1"/>
+          </a:fillRef>
+          <a:effectRef idx="2">
+            <a:schemeClr val="accent1"/>
+          </a:effectRef>
+          <a:fontRef idx="minor">
+            <a:schemeClr val="lt1"/>
+          </a:fontRef>
+        </p:style>
+        <p:txBody>
+          <a:bodyPr rtlCol="0" anchor="ctr"/>
+          <a:lstStyle/>
+          <a:p>
+            <a:pPr algn="ctr"/>
+          </a:p>
+        </p:txBody>
+      </p:sp>
+      <p:pic>
+        <p:nvPicPr>
+          <p:cNvPr id="8" name="Zava branding logo" descr="image.png"/>
+          <p:cNvPicPr>
+            <a:picLocks noChangeAspect="1"/>
+          </p:cNvPicPr>
+          <p:nvPr/>
+        </p:nvPicPr>
+        <p:blipFill>
+          <a:blip r:embed="rId3"/>
+          <a:stretch>
+            <a:fillRect/>
+          </a:stretch>
+        </p:blipFill>
+        <p:spPr>
+          <a:xfrm>
+            <a:off x="11048695" y="109728"/>
+            <a:ext cx="960120" cy="335446"/>
+          </a:xfrm>
+          <a:prstGeom prst="rect">
+            <a:avLst/>
+          </a:prstGeom>
+        </p:spPr>
+      </p:pic>
     </p:spTree>
   </p:cSld>
   <p:clrMapOvr>
@@ -10312,6 +10834,73 @@
           </a:p>
         </p:txBody>
       </p:sp>
+      <p:sp>
+        <p:nvSpPr>
+          <p:cNvPr id="21" name="Zava logo contrast backing"/>
+          <p:cNvSpPr/>
+          <p:nvPr/>
+        </p:nvSpPr>
+        <p:spPr>
+          <a:xfrm>
+            <a:off x="11048695" y="109728"/>
+            <a:ext cx="960120" cy="335445"/>
+          </a:xfrm>
+          <a:prstGeom prst="rect">
+            <a:avLst/>
+          </a:prstGeom>
+          <a:solidFill>
+            <a:srgbClr val="FFFFFF"/>
+          </a:solidFill>
+          <a:ln>
+            <a:noFill/>
+          </a:ln>
+        </p:spPr>
+        <p:style>
+          <a:lnRef idx="1">
+            <a:schemeClr val="accent1"/>
+          </a:lnRef>
+          <a:fillRef idx="3">
+            <a:schemeClr val="accent1"/>
+          </a:fillRef>
+          <a:effectRef idx="2">
+            <a:schemeClr val="accent1"/>
+          </a:effectRef>
+          <a:fontRef idx="minor">
+            <a:schemeClr val="lt1"/>
+          </a:fontRef>
+        </p:style>
+        <p:txBody>
+          <a:bodyPr rtlCol="0" anchor="ctr"/>
+          <a:lstStyle/>
+          <a:p>
+            <a:pPr algn="ctr"/>
+          </a:p>
+        </p:txBody>
+      </p:sp>
+      <p:pic>
+        <p:nvPicPr>
+          <p:cNvPr id="22" name="Zava branding logo" descr="image.png"/>
+          <p:cNvPicPr>
+            <a:picLocks noChangeAspect="1"/>
+          </p:cNvPicPr>
+          <p:nvPr/>
+        </p:nvPicPr>
+        <p:blipFill>
+          <a:blip r:embed="rId3"/>
+          <a:stretch>
+            <a:fillRect/>
+          </a:stretch>
+        </p:blipFill>
+        <p:spPr>
+          <a:xfrm>
+            <a:off x="11048695" y="109728"/>
+            <a:ext cx="960120" cy="335446"/>
+          </a:xfrm>
+          <a:prstGeom prst="rect">
+            <a:avLst/>
+          </a:prstGeom>
+        </p:spPr>
+      </p:pic>
     </p:spTree>
   </p:cSld>
   <p:clrMapOvr>
@@ -10752,6 +11341,73 @@
           </a:p>
         </p:txBody>
       </p:sp>
+      <p:sp>
+        <p:nvSpPr>
+          <p:cNvPr id="7" name="Zava logo contrast backing"/>
+          <p:cNvSpPr/>
+          <p:nvPr/>
+        </p:nvSpPr>
+        <p:spPr>
+          <a:xfrm>
+            <a:off x="11048695" y="109728"/>
+            <a:ext cx="960120" cy="335445"/>
+          </a:xfrm>
+          <a:prstGeom prst="rect">
+            <a:avLst/>
+          </a:prstGeom>
+          <a:solidFill>
+            <a:srgbClr val="FFFFFF"/>
+          </a:solidFill>
+          <a:ln>
+            <a:noFill/>
+          </a:ln>
+        </p:spPr>
+        <p:style>
+          <a:lnRef idx="1">
+            <a:schemeClr val="accent1"/>
+          </a:lnRef>
+          <a:fillRef idx="3">
+            <a:schemeClr val="accent1"/>
+          </a:fillRef>
+          <a:effectRef idx="2">
+            <a:schemeClr val="accent1"/>
+          </a:effectRef>
+          <a:fontRef idx="minor">
+            <a:schemeClr val="lt1"/>
+          </a:fontRef>
+        </p:style>
+        <p:txBody>
+          <a:bodyPr rtlCol="0" anchor="ctr"/>
+          <a:lstStyle/>
+          <a:p>
+            <a:pPr algn="ctr"/>
+          </a:p>
+        </p:txBody>
+      </p:sp>
+      <p:pic>
+        <p:nvPicPr>
+          <p:cNvPr id="8" name="Zava branding logo" descr="image.png"/>
+          <p:cNvPicPr>
+            <a:picLocks noChangeAspect="1"/>
+          </p:cNvPicPr>
+          <p:nvPr/>
+        </p:nvPicPr>
+        <p:blipFill>
+          <a:blip r:embed="rId3"/>
+          <a:stretch>
+            <a:fillRect/>
+          </a:stretch>
+        </p:blipFill>
+        <p:spPr>
+          <a:xfrm>
+            <a:off x="11048695" y="109728"/>
+            <a:ext cx="960120" cy="335446"/>
+          </a:xfrm>
+          <a:prstGeom prst="rect">
+            <a:avLst/>
+          </a:prstGeom>
+        </p:spPr>
+      </p:pic>
     </p:spTree>
   </p:cSld>
   <p:clrMapOvr>
@@ -11099,7 +11755,7 @@
                 </a:solidFill>
                 <a:latin typeface="Segoe UI"/>
               </a:rPr>
-              <a:t>Eight Proper North Homes perspectives to ask what the case never says</a:t>
+              <a:t>Eight Zava North Homes perspectives to ask what the case never says</a:t>
             </a:r>
           </a:p>
           <a:p>
@@ -11713,6 +12369,73 @@
           </a:p>
         </p:txBody>
       </p:sp>
+      <p:sp>
+        <p:nvSpPr>
+          <p:cNvPr id="15" name="Zava logo contrast backing"/>
+          <p:cNvSpPr/>
+          <p:nvPr/>
+        </p:nvSpPr>
+        <p:spPr>
+          <a:xfrm>
+            <a:off x="11048695" y="109728"/>
+            <a:ext cx="960120" cy="335445"/>
+          </a:xfrm>
+          <a:prstGeom prst="rect">
+            <a:avLst/>
+          </a:prstGeom>
+          <a:solidFill>
+            <a:srgbClr val="FFFFFF"/>
+          </a:solidFill>
+          <a:ln>
+            <a:noFill/>
+          </a:ln>
+        </p:spPr>
+        <p:style>
+          <a:lnRef idx="1">
+            <a:schemeClr val="accent1"/>
+          </a:lnRef>
+          <a:fillRef idx="3">
+            <a:schemeClr val="accent1"/>
+          </a:fillRef>
+          <a:effectRef idx="2">
+            <a:schemeClr val="accent1"/>
+          </a:effectRef>
+          <a:fontRef idx="minor">
+            <a:schemeClr val="lt1"/>
+          </a:fontRef>
+        </p:style>
+        <p:txBody>
+          <a:bodyPr rtlCol="0" anchor="ctr"/>
+          <a:lstStyle/>
+          <a:p>
+            <a:pPr algn="ctr"/>
+          </a:p>
+        </p:txBody>
+      </p:sp>
+      <p:pic>
+        <p:nvPicPr>
+          <p:cNvPr id="16" name="Zava branding logo" descr="image.png"/>
+          <p:cNvPicPr>
+            <a:picLocks noChangeAspect="1"/>
+          </p:cNvPicPr>
+          <p:nvPr/>
+        </p:nvPicPr>
+        <p:blipFill>
+          <a:blip r:embed="rId3"/>
+          <a:stretch>
+            <a:fillRect/>
+          </a:stretch>
+        </p:blipFill>
+        <p:spPr>
+          <a:xfrm>
+            <a:off x="11048695" y="109728"/>
+            <a:ext cx="960120" cy="335446"/>
+          </a:xfrm>
+          <a:prstGeom prst="rect">
+            <a:avLst/>
+          </a:prstGeom>
+        </p:spPr>
+      </p:pic>
     </p:spTree>
   </p:cSld>
   <p:clrMapOvr>
@@ -11861,7 +12584,7 @@
                 </a:solidFill>
                 <a:latin typeface="Segoe UI"/>
               </a:rPr>
-              <a:t>Proper North Homes: owner-confirmed not-for-profit, 26 Sep</a:t>
+              <a:t>Zava North Homes: owner-confirmed not-for-profit, 26 Sep</a:t>
             </a:r>
           </a:p>
           <a:p>
@@ -12329,6 +13052,73 @@
           </a:p>
         </p:txBody>
       </p:sp>
+      <p:sp>
+        <p:nvSpPr>
+          <p:cNvPr id="8" name="Zava logo contrast backing"/>
+          <p:cNvSpPr/>
+          <p:nvPr/>
+        </p:nvSpPr>
+        <p:spPr>
+          <a:xfrm>
+            <a:off x="11048695" y="109728"/>
+            <a:ext cx="960120" cy="335445"/>
+          </a:xfrm>
+          <a:prstGeom prst="rect">
+            <a:avLst/>
+          </a:prstGeom>
+          <a:solidFill>
+            <a:srgbClr val="FFFFFF"/>
+          </a:solidFill>
+          <a:ln>
+            <a:noFill/>
+          </a:ln>
+        </p:spPr>
+        <p:style>
+          <a:lnRef idx="1">
+            <a:schemeClr val="accent1"/>
+          </a:lnRef>
+          <a:fillRef idx="3">
+            <a:schemeClr val="accent1"/>
+          </a:fillRef>
+          <a:effectRef idx="2">
+            <a:schemeClr val="accent1"/>
+          </a:effectRef>
+          <a:fontRef idx="minor">
+            <a:schemeClr val="lt1"/>
+          </a:fontRef>
+        </p:style>
+        <p:txBody>
+          <a:bodyPr rtlCol="0" anchor="ctr"/>
+          <a:lstStyle/>
+          <a:p>
+            <a:pPr algn="ctr"/>
+          </a:p>
+        </p:txBody>
+      </p:sp>
+      <p:pic>
+        <p:nvPicPr>
+          <p:cNvPr id="9" name="Zava branding logo" descr="image.png"/>
+          <p:cNvPicPr>
+            <a:picLocks noChangeAspect="1"/>
+          </p:cNvPicPr>
+          <p:nvPr/>
+        </p:nvPicPr>
+        <p:blipFill>
+          <a:blip r:embed="rId3"/>
+          <a:stretch>
+            <a:fillRect/>
+          </a:stretch>
+        </p:blipFill>
+        <p:spPr>
+          <a:xfrm>
+            <a:off x="11048695" y="109728"/>
+            <a:ext cx="960120" cy="335446"/>
+          </a:xfrm>
+          <a:prstGeom prst="rect">
+            <a:avLst/>
+          </a:prstGeom>
+        </p:spPr>
+      </p:pic>
     </p:spTree>
   </p:cSld>
   <p:clrMapOvr>
@@ -13312,7 +14102,7 @@
                 </a:solidFill>
                 <a:latin typeface="Segoe UI"/>
               </a:rPr>
-              <a:t>Whether Proper North Homes operates in either area</a:t>
+              <a:t>Whether Zava North Homes operates in either area</a:t>
             </a:r>
           </a:p>
         </p:txBody>
@@ -13485,6 +14275,73 @@
           </a:p>
         </p:txBody>
       </p:sp>
+      <p:sp>
+        <p:nvSpPr>
+          <p:cNvPr id="21" name="Zava logo contrast backing"/>
+          <p:cNvSpPr/>
+          <p:nvPr/>
+        </p:nvSpPr>
+        <p:spPr>
+          <a:xfrm>
+            <a:off x="11048695" y="109728"/>
+            <a:ext cx="960120" cy="335445"/>
+          </a:xfrm>
+          <a:prstGeom prst="rect">
+            <a:avLst/>
+          </a:prstGeom>
+          <a:solidFill>
+            <a:srgbClr val="FFFFFF"/>
+          </a:solidFill>
+          <a:ln>
+            <a:noFill/>
+          </a:ln>
+        </p:spPr>
+        <p:style>
+          <a:lnRef idx="1">
+            <a:schemeClr val="accent1"/>
+          </a:lnRef>
+          <a:fillRef idx="3">
+            <a:schemeClr val="accent1"/>
+          </a:fillRef>
+          <a:effectRef idx="2">
+            <a:schemeClr val="accent1"/>
+          </a:effectRef>
+          <a:fontRef idx="minor">
+            <a:schemeClr val="lt1"/>
+          </a:fontRef>
+        </p:style>
+        <p:txBody>
+          <a:bodyPr rtlCol="0" anchor="ctr"/>
+          <a:lstStyle/>
+          <a:p>
+            <a:pPr algn="ctr"/>
+          </a:p>
+        </p:txBody>
+      </p:sp>
+      <p:pic>
+        <p:nvPicPr>
+          <p:cNvPr id="22" name="Zava branding logo" descr="image.png"/>
+          <p:cNvPicPr>
+            <a:picLocks noChangeAspect="1"/>
+          </p:cNvPicPr>
+          <p:nvPr/>
+        </p:nvPicPr>
+        <p:blipFill>
+          <a:blip r:embed="rId3"/>
+          <a:stretch>
+            <a:fillRect/>
+          </a:stretch>
+        </p:blipFill>
+        <p:spPr>
+          <a:xfrm>
+            <a:off x="11048695" y="109728"/>
+            <a:ext cx="960120" cy="335446"/>
+          </a:xfrm>
+          <a:prstGeom prst="rect">
+            <a:avLst/>
+          </a:prstGeom>
+        </p:spPr>
+      </p:pic>
     </p:spTree>
   </p:cSld>
   <p:clrMapOvr>
@@ -14306,6 +15163,73 @@
           </a:p>
         </p:txBody>
       </p:sp>
+      <p:sp>
+        <p:nvSpPr>
+          <p:cNvPr id="22" name="Zava logo contrast backing"/>
+          <p:cNvSpPr/>
+          <p:nvPr/>
+        </p:nvSpPr>
+        <p:spPr>
+          <a:xfrm>
+            <a:off x="11048695" y="109728"/>
+            <a:ext cx="960120" cy="335445"/>
+          </a:xfrm>
+          <a:prstGeom prst="rect">
+            <a:avLst/>
+          </a:prstGeom>
+          <a:solidFill>
+            <a:srgbClr val="FFFFFF"/>
+          </a:solidFill>
+          <a:ln>
+            <a:noFill/>
+          </a:ln>
+        </p:spPr>
+        <p:style>
+          <a:lnRef idx="1">
+            <a:schemeClr val="accent1"/>
+          </a:lnRef>
+          <a:fillRef idx="3">
+            <a:schemeClr val="accent1"/>
+          </a:fillRef>
+          <a:effectRef idx="2">
+            <a:schemeClr val="accent1"/>
+          </a:effectRef>
+          <a:fontRef idx="minor">
+            <a:schemeClr val="lt1"/>
+          </a:fontRef>
+        </p:style>
+        <p:txBody>
+          <a:bodyPr rtlCol="0" anchor="ctr"/>
+          <a:lstStyle/>
+          <a:p>
+            <a:pPr algn="ctr"/>
+          </a:p>
+        </p:txBody>
+      </p:sp>
+      <p:pic>
+        <p:nvPicPr>
+          <p:cNvPr id="23" name="Zava branding logo" descr="image.png"/>
+          <p:cNvPicPr>
+            <a:picLocks noChangeAspect="1"/>
+          </p:cNvPicPr>
+          <p:nvPr/>
+        </p:nvPicPr>
+        <p:blipFill>
+          <a:blip r:embed="rId3"/>
+          <a:stretch>
+            <a:fillRect/>
+          </a:stretch>
+        </p:blipFill>
+        <p:spPr>
+          <a:xfrm>
+            <a:off x="11048695" y="109728"/>
+            <a:ext cx="960120" cy="335446"/>
+          </a:xfrm>
+          <a:prstGeom prst="rect">
+            <a:avLst/>
+          </a:prstGeom>
+        </p:spPr>
+      </p:pic>
     </p:spTree>
   </p:cSld>
   <p:clrMapOvr>
@@ -15189,6 +16113,73 @@
           </a:p>
         </p:txBody>
       </p:sp>
+      <p:sp>
+        <p:nvSpPr>
+          <p:cNvPr id="8" name="Zava logo contrast backing"/>
+          <p:cNvSpPr/>
+          <p:nvPr/>
+        </p:nvSpPr>
+        <p:spPr>
+          <a:xfrm>
+            <a:off x="11048695" y="109728"/>
+            <a:ext cx="960120" cy="335445"/>
+          </a:xfrm>
+          <a:prstGeom prst="rect">
+            <a:avLst/>
+          </a:prstGeom>
+          <a:solidFill>
+            <a:srgbClr val="FFFFFF"/>
+          </a:solidFill>
+          <a:ln>
+            <a:noFill/>
+          </a:ln>
+        </p:spPr>
+        <p:style>
+          <a:lnRef idx="1">
+            <a:schemeClr val="accent1"/>
+          </a:lnRef>
+          <a:fillRef idx="3">
+            <a:schemeClr val="accent1"/>
+          </a:fillRef>
+          <a:effectRef idx="2">
+            <a:schemeClr val="accent1"/>
+          </a:effectRef>
+          <a:fontRef idx="minor">
+            <a:schemeClr val="lt1"/>
+          </a:fontRef>
+        </p:style>
+        <p:txBody>
+          <a:bodyPr rtlCol="0" anchor="ctr"/>
+          <a:lstStyle/>
+          <a:p>
+            <a:pPr algn="ctr"/>
+          </a:p>
+        </p:txBody>
+      </p:sp>
+      <p:pic>
+        <p:nvPicPr>
+          <p:cNvPr id="9" name="Zava branding logo" descr="image.png"/>
+          <p:cNvPicPr>
+            <a:picLocks noChangeAspect="1"/>
+          </p:cNvPicPr>
+          <p:nvPr/>
+        </p:nvPicPr>
+        <p:blipFill>
+          <a:blip r:embed="rId3"/>
+          <a:stretch>
+            <a:fillRect/>
+          </a:stretch>
+        </p:blipFill>
+        <p:spPr>
+          <a:xfrm>
+            <a:off x="11048695" y="109728"/>
+            <a:ext cx="960120" cy="335446"/>
+          </a:xfrm>
+          <a:prstGeom prst="rect">
+            <a:avLst/>
+          </a:prstGeom>
+        </p:spPr>
+      </p:pic>
     </p:spTree>
   </p:cSld>
   <p:clrMapOvr>
@@ -15858,6 +16849,73 @@
           </a:p>
         </p:txBody>
       </p:sp>
+      <p:sp>
+        <p:nvSpPr>
+          <p:cNvPr id="12" name="Zava logo contrast backing"/>
+          <p:cNvSpPr/>
+          <p:nvPr/>
+        </p:nvSpPr>
+        <p:spPr>
+          <a:xfrm>
+            <a:off x="11048695" y="109728"/>
+            <a:ext cx="960120" cy="335445"/>
+          </a:xfrm>
+          <a:prstGeom prst="rect">
+            <a:avLst/>
+          </a:prstGeom>
+          <a:solidFill>
+            <a:srgbClr val="FFFFFF"/>
+          </a:solidFill>
+          <a:ln>
+            <a:noFill/>
+          </a:ln>
+        </p:spPr>
+        <p:style>
+          <a:lnRef idx="1">
+            <a:schemeClr val="accent1"/>
+          </a:lnRef>
+          <a:fillRef idx="3">
+            <a:schemeClr val="accent1"/>
+          </a:fillRef>
+          <a:effectRef idx="2">
+            <a:schemeClr val="accent1"/>
+          </a:effectRef>
+          <a:fontRef idx="minor">
+            <a:schemeClr val="lt1"/>
+          </a:fontRef>
+        </p:style>
+        <p:txBody>
+          <a:bodyPr rtlCol="0" anchor="ctr"/>
+          <a:lstStyle/>
+          <a:p>
+            <a:pPr algn="ctr"/>
+          </a:p>
+        </p:txBody>
+      </p:sp>
+      <p:pic>
+        <p:nvPicPr>
+          <p:cNvPr id="13" name="Zava branding logo" descr="image.png"/>
+          <p:cNvPicPr>
+            <a:picLocks noChangeAspect="1"/>
+          </p:cNvPicPr>
+          <p:nvPr/>
+        </p:nvPicPr>
+        <p:blipFill>
+          <a:blip r:embed="rId3"/>
+          <a:stretch>
+            <a:fillRect/>
+          </a:stretch>
+        </p:blipFill>
+        <p:spPr>
+          <a:xfrm>
+            <a:off x="11048695" y="109728"/>
+            <a:ext cx="960120" cy="335446"/>
+          </a:xfrm>
+          <a:prstGeom prst="rect">
+            <a:avLst/>
+          </a:prstGeom>
+        </p:spPr>
+      </p:pic>
     </p:spTree>
   </p:cSld>
   <p:clrMapOvr>
@@ -16277,6 +17335,73 @@
           </a:p>
         </p:txBody>
       </p:sp>
+      <p:sp>
+        <p:nvSpPr>
+          <p:cNvPr id="7" name="Zava logo contrast backing"/>
+          <p:cNvSpPr/>
+          <p:nvPr/>
+        </p:nvSpPr>
+        <p:spPr>
+          <a:xfrm>
+            <a:off x="11048695" y="109728"/>
+            <a:ext cx="960120" cy="335445"/>
+          </a:xfrm>
+          <a:prstGeom prst="rect">
+            <a:avLst/>
+          </a:prstGeom>
+          <a:solidFill>
+            <a:srgbClr val="FFFFFF"/>
+          </a:solidFill>
+          <a:ln>
+            <a:noFill/>
+          </a:ln>
+        </p:spPr>
+        <p:style>
+          <a:lnRef idx="1">
+            <a:schemeClr val="accent1"/>
+          </a:lnRef>
+          <a:fillRef idx="3">
+            <a:schemeClr val="accent1"/>
+          </a:fillRef>
+          <a:effectRef idx="2">
+            <a:schemeClr val="accent1"/>
+          </a:effectRef>
+          <a:fontRef idx="minor">
+            <a:schemeClr val="lt1"/>
+          </a:fontRef>
+        </p:style>
+        <p:txBody>
+          <a:bodyPr rtlCol="0" anchor="ctr"/>
+          <a:lstStyle/>
+          <a:p>
+            <a:pPr algn="ctr"/>
+          </a:p>
+        </p:txBody>
+      </p:sp>
+      <p:pic>
+        <p:nvPicPr>
+          <p:cNvPr id="8" name="Zava branding logo" descr="image.png"/>
+          <p:cNvPicPr>
+            <a:picLocks noChangeAspect="1"/>
+          </p:cNvPicPr>
+          <p:nvPr/>
+        </p:nvPicPr>
+        <p:blipFill>
+          <a:blip r:embed="rId3"/>
+          <a:stretch>
+            <a:fillRect/>
+          </a:stretch>
+        </p:blipFill>
+        <p:spPr>
+          <a:xfrm>
+            <a:off x="11048695" y="109728"/>
+            <a:ext cx="960120" cy="335446"/>
+          </a:xfrm>
+          <a:prstGeom prst="rect">
+            <a:avLst/>
+          </a:prstGeom>
+        </p:spPr>
+      </p:pic>
     </p:spTree>
   </p:cSld>
   <p:clrMapOvr>

--- a/.copilot-tracking/ppt/2026-09-26/ama-mentor-progress-review/slide-deck/ama-mentor-progress-review.pptx
+++ b/.copilot-tracking/ppt/2026-09-26/ama-mentor-progress-review/slide-deck/ama-mentor-progress-review.pptx
@@ -5145,8 +5145,8 @@
         </p:nvSpPr>
         <p:spPr>
           <a:xfrm>
-            <a:off x="11048695" y="109728"/>
-            <a:ext cx="960120" cy="335445"/>
+            <a:off x="11231575" y="91440"/>
+            <a:ext cx="777240" cy="271551"/>
           </a:xfrm>
           <a:prstGeom prst="rect">
             <a:avLst/>
@@ -5196,8 +5196,8 @@
         </p:blipFill>
         <p:spPr>
           <a:xfrm>
-            <a:off x="11048695" y="109728"/>
-            <a:ext cx="960120" cy="335446"/>
+            <a:off x="11231575" y="91440"/>
+            <a:ext cx="777240" cy="271551"/>
           </a:xfrm>
           <a:prstGeom prst="rect">
             <a:avLst/>
@@ -5932,8 +5932,8 @@
         </p:nvSpPr>
         <p:spPr>
           <a:xfrm>
-            <a:off x="11048695" y="109728"/>
-            <a:ext cx="960120" cy="335445"/>
+            <a:off x="11231575" y="91440"/>
+            <a:ext cx="777240" cy="271551"/>
           </a:xfrm>
           <a:prstGeom prst="rect">
             <a:avLst/>
@@ -5983,8 +5983,8 @@
         </p:blipFill>
         <p:spPr>
           <a:xfrm>
-            <a:off x="11048695" y="109728"/>
-            <a:ext cx="960120" cy="335446"/>
+            <a:off x="11231575" y="91440"/>
+            <a:ext cx="777240" cy="271551"/>
           </a:xfrm>
           <a:prstGeom prst="rect">
             <a:avLst/>
@@ -6999,8 +6999,8 @@
         </p:nvSpPr>
         <p:spPr>
           <a:xfrm>
-            <a:off x="11048695" y="109728"/>
-            <a:ext cx="960120" cy="335445"/>
+            <a:off x="11231575" y="91440"/>
+            <a:ext cx="777240" cy="271551"/>
           </a:xfrm>
           <a:prstGeom prst="rect">
             <a:avLst/>
@@ -7050,8 +7050,8 @@
         </p:blipFill>
         <p:spPr>
           <a:xfrm>
-            <a:off x="11048695" y="109728"/>
-            <a:ext cx="960120" cy="335446"/>
+            <a:off x="11231575" y="91440"/>
+            <a:ext cx="777240" cy="271551"/>
           </a:xfrm>
           <a:prstGeom prst="rect">
             <a:avLst/>
@@ -7685,8 +7685,8 @@
         </p:nvSpPr>
         <p:spPr>
           <a:xfrm>
-            <a:off x="11048695" y="109728"/>
-            <a:ext cx="960120" cy="335445"/>
+            <a:off x="11231575" y="91440"/>
+            <a:ext cx="777240" cy="271551"/>
           </a:xfrm>
           <a:prstGeom prst="rect">
             <a:avLst/>
@@ -7736,8 +7736,8 @@
         </p:blipFill>
         <p:spPr>
           <a:xfrm>
-            <a:off x="11048695" y="109728"/>
-            <a:ext cx="960120" cy="335446"/>
+            <a:off x="11231575" y="91440"/>
+            <a:ext cx="777240" cy="271551"/>
           </a:xfrm>
           <a:prstGeom prst="rect">
             <a:avLst/>
@@ -9029,8 +9029,8 @@
         </p:nvSpPr>
         <p:spPr>
           <a:xfrm>
-            <a:off x="11048695" y="109728"/>
-            <a:ext cx="960120" cy="335445"/>
+            <a:off x="11231575" y="91440"/>
+            <a:ext cx="777240" cy="271551"/>
           </a:xfrm>
           <a:prstGeom prst="rect">
             <a:avLst/>
@@ -9080,8 +9080,8 @@
         </p:blipFill>
         <p:spPr>
           <a:xfrm>
-            <a:off x="11048695" y="109728"/>
-            <a:ext cx="960120" cy="335446"/>
+            <a:off x="11231575" y="91440"/>
+            <a:ext cx="777240" cy="271551"/>
           </a:xfrm>
           <a:prstGeom prst="rect">
             <a:avLst/>
@@ -9535,8 +9535,8 @@
         </p:nvSpPr>
         <p:spPr>
           <a:xfrm>
-            <a:off x="11048695" y="109728"/>
-            <a:ext cx="960120" cy="335445"/>
+            <a:off x="11231575" y="91440"/>
+            <a:ext cx="777240" cy="271551"/>
           </a:xfrm>
           <a:prstGeom prst="rect">
             <a:avLst/>
@@ -9586,8 +9586,8 @@
         </p:blipFill>
         <p:spPr>
           <a:xfrm>
-            <a:off x="11048695" y="109728"/>
-            <a:ext cx="960120" cy="335446"/>
+            <a:off x="11231575" y="91440"/>
+            <a:ext cx="777240" cy="271551"/>
           </a:xfrm>
           <a:prstGeom prst="rect">
             <a:avLst/>
@@ -10842,8 +10842,8 @@
         </p:nvSpPr>
         <p:spPr>
           <a:xfrm>
-            <a:off x="11048695" y="109728"/>
-            <a:ext cx="960120" cy="335445"/>
+            <a:off x="11231575" y="91440"/>
+            <a:ext cx="777240" cy="271551"/>
           </a:xfrm>
           <a:prstGeom prst="rect">
             <a:avLst/>
@@ -10893,8 +10893,8 @@
         </p:blipFill>
         <p:spPr>
           <a:xfrm>
-            <a:off x="11048695" y="109728"/>
-            <a:ext cx="960120" cy="335446"/>
+            <a:off x="11231575" y="91440"/>
+            <a:ext cx="777240" cy="271551"/>
           </a:xfrm>
           <a:prstGeom prst="rect">
             <a:avLst/>
@@ -11349,8 +11349,8 @@
         </p:nvSpPr>
         <p:spPr>
           <a:xfrm>
-            <a:off x="11048695" y="109728"/>
-            <a:ext cx="960120" cy="335445"/>
+            <a:off x="11231575" y="91440"/>
+            <a:ext cx="777240" cy="271551"/>
           </a:xfrm>
           <a:prstGeom prst="rect">
             <a:avLst/>
@@ -11400,8 +11400,8 @@
         </p:blipFill>
         <p:spPr>
           <a:xfrm>
-            <a:off x="11048695" y="109728"/>
-            <a:ext cx="960120" cy="335446"/>
+            <a:off x="11231575" y="91440"/>
+            <a:ext cx="777240" cy="271551"/>
           </a:xfrm>
           <a:prstGeom prst="rect">
             <a:avLst/>
@@ -12377,8 +12377,8 @@
         </p:nvSpPr>
         <p:spPr>
           <a:xfrm>
-            <a:off x="11048695" y="109728"/>
-            <a:ext cx="960120" cy="335445"/>
+            <a:off x="11231575" y="91440"/>
+            <a:ext cx="777240" cy="271551"/>
           </a:xfrm>
           <a:prstGeom prst="rect">
             <a:avLst/>
@@ -12428,8 +12428,8 @@
         </p:blipFill>
         <p:spPr>
           <a:xfrm>
-            <a:off x="11048695" y="109728"/>
-            <a:ext cx="960120" cy="335446"/>
+            <a:off x="11231575" y="91440"/>
+            <a:ext cx="777240" cy="271551"/>
           </a:xfrm>
           <a:prstGeom prst="rect">
             <a:avLst/>
@@ -13060,8 +13060,8 @@
         </p:nvSpPr>
         <p:spPr>
           <a:xfrm>
-            <a:off x="11048695" y="109728"/>
-            <a:ext cx="960120" cy="335445"/>
+            <a:off x="11231575" y="91440"/>
+            <a:ext cx="777240" cy="271551"/>
           </a:xfrm>
           <a:prstGeom prst="rect">
             <a:avLst/>
@@ -13111,8 +13111,8 @@
         </p:blipFill>
         <p:spPr>
           <a:xfrm>
-            <a:off x="11048695" y="109728"/>
-            <a:ext cx="960120" cy="335446"/>
+            <a:off x="11231575" y="91440"/>
+            <a:ext cx="777240" cy="271551"/>
           </a:xfrm>
           <a:prstGeom prst="rect">
             <a:avLst/>
@@ -14283,8 +14283,8 @@
         </p:nvSpPr>
         <p:spPr>
           <a:xfrm>
-            <a:off x="11048695" y="109728"/>
-            <a:ext cx="960120" cy="335445"/>
+            <a:off x="11231575" y="91440"/>
+            <a:ext cx="777240" cy="271551"/>
           </a:xfrm>
           <a:prstGeom prst="rect">
             <a:avLst/>
@@ -14334,8 +14334,8 @@
         </p:blipFill>
         <p:spPr>
           <a:xfrm>
-            <a:off x="11048695" y="109728"/>
-            <a:ext cx="960120" cy="335446"/>
+            <a:off x="11231575" y="91440"/>
+            <a:ext cx="777240" cy="271551"/>
           </a:xfrm>
           <a:prstGeom prst="rect">
             <a:avLst/>
@@ -15171,8 +15171,8 @@
         </p:nvSpPr>
         <p:spPr>
           <a:xfrm>
-            <a:off x="11048695" y="109728"/>
-            <a:ext cx="960120" cy="335445"/>
+            <a:off x="11231575" y="91440"/>
+            <a:ext cx="777240" cy="271551"/>
           </a:xfrm>
           <a:prstGeom prst="rect">
             <a:avLst/>
@@ -15222,8 +15222,8 @@
         </p:blipFill>
         <p:spPr>
           <a:xfrm>
-            <a:off x="11048695" y="109728"/>
-            <a:ext cx="960120" cy="335446"/>
+            <a:off x="11231575" y="91440"/>
+            <a:ext cx="777240" cy="271551"/>
           </a:xfrm>
           <a:prstGeom prst="rect">
             <a:avLst/>
@@ -16121,8 +16121,8 @@
         </p:nvSpPr>
         <p:spPr>
           <a:xfrm>
-            <a:off x="11048695" y="109728"/>
-            <a:ext cx="960120" cy="335445"/>
+            <a:off x="11231575" y="91440"/>
+            <a:ext cx="777240" cy="271551"/>
           </a:xfrm>
           <a:prstGeom prst="rect">
             <a:avLst/>
@@ -16172,8 +16172,8 @@
         </p:blipFill>
         <p:spPr>
           <a:xfrm>
-            <a:off x="11048695" y="109728"/>
-            <a:ext cx="960120" cy="335446"/>
+            <a:off x="11231575" y="91440"/>
+            <a:ext cx="777240" cy="271551"/>
           </a:xfrm>
           <a:prstGeom prst="rect">
             <a:avLst/>
@@ -16857,8 +16857,8 @@
         </p:nvSpPr>
         <p:spPr>
           <a:xfrm>
-            <a:off x="11048695" y="109728"/>
-            <a:ext cx="960120" cy="335445"/>
+            <a:off x="11231575" y="91440"/>
+            <a:ext cx="777240" cy="271551"/>
           </a:xfrm>
           <a:prstGeom prst="rect">
             <a:avLst/>
@@ -16908,8 +16908,8 @@
         </p:blipFill>
         <p:spPr>
           <a:xfrm>
-            <a:off x="11048695" y="109728"/>
-            <a:ext cx="960120" cy="335446"/>
+            <a:off x="11231575" y="91440"/>
+            <a:ext cx="777240" cy="271551"/>
           </a:xfrm>
           <a:prstGeom prst="rect">
             <a:avLst/>
@@ -17343,8 +17343,8 @@
         </p:nvSpPr>
         <p:spPr>
           <a:xfrm>
-            <a:off x="11048695" y="109728"/>
-            <a:ext cx="960120" cy="335445"/>
+            <a:off x="11231575" y="91440"/>
+            <a:ext cx="777240" cy="271551"/>
           </a:xfrm>
           <a:prstGeom prst="rect">
             <a:avLst/>
@@ -17394,8 +17394,8 @@
         </p:blipFill>
         <p:spPr>
           <a:xfrm>
-            <a:off x="11048695" y="109728"/>
-            <a:ext cx="960120" cy="335446"/>
+            <a:off x="11231575" y="91440"/>
+            <a:ext cx="777240" cy="271551"/>
           </a:xfrm>
           <a:prstGeom prst="rect">
             <a:avLst/>
